--- a/docs/report/NakhonSawanFlood_ผู้บริหารและทีมเทคนิค.pptx
+++ b/docs/report/NakhonSawanFlood_ผู้บริหารและทีมเทคนิค.pptx
@@ -19,6 +19,9 @@
     <p:sldId id="267" r:id="rId13"/>
     <p:sldId id="268" r:id="rId14"/>
     <p:sldId id="269" r:id="rId15"/>
+    <p:sldId id="273" r:id="rId24"/>
+    <p:sldId id="274" r:id="rId25"/>
+    <p:sldId id="275" r:id="rId26"/>
     <p:sldId id="270" r:id="rId16"/>
     <p:sldId id="271" r:id="rId17"/>
     <p:sldId id="272" r:id="rId18"/>
@@ -3814,6 +3817,1036 @@
     </a:ln>
     <a:effectLst/>
   </c:spPr>
+  <c:externalData r:id="rId1">
+    <c:autoUpdate val="0"/>
+  </c:externalData>
+</c:chartSpace>
+</file>
+
+<file path=ppt/charts/chart6.xml><?xml version="1.0" encoding="utf-8"?>
+<c:chartSpace xmlns:c="http://schemas.openxmlformats.org/drawingml/2006/chart" xmlns:a="http://schemas.openxmlformats.org/drawingml/2006/main" xmlns:r="http://schemas.openxmlformats.org/officeDocument/2006/relationships">
+  <c:date1904 val="0"/>
+  <c:chart>
+    <c:title>
+      <c:tx>
+        <c:rich>
+          <a:bodyPr/>
+          <a:lstStyle/>
+          <a:p>
+            <a:r>
+              <a:rPr sz="1200" b="1">
+                <a:solidFill>
+                  <a:srgbClr val="0B3C5D"/>
+                </a:solidFill>
+                <a:latin typeface="Prompt"/>
+              </a:rPr>
+              <a:t>พื้นที่ท่วม 60 วันขึ้นไปในตำบลที่ศึกษา (ตร.กม.)</a:t>
+            </a:r>
+          </a:p>
+        </c:rich>
+      </c:tx>
+      <c:layout/>
+      <c:overlay val="0"/>
+    </c:title>
+    <c:autoTitleDeleted val="0"/>
+    <c:plotArea>
+      <c:barChart>
+        <c:barDir val="col"/>
+        <c:grouping val="clustered"/>
+        <c:ser>
+          <c:idx val="0"/>
+          <c:order val="0"/>
+          <c:tx>
+            <c:strRef>
+              <c:f>Sheet1!$B$1</c:f>
+              <c:strCache>
+                <c:ptCount val="1"/>
+                <c:pt idx="0">
+                  <c:v>ท่วม 60 วันขึ้นไป (ตร.กม.)</c:v>
+                </c:pt>
+              </c:strCache>
+            </c:strRef>
+          </c:tx>
+          <c:spPr>
+            <a:solidFill>
+              <a:srgbClr val="0B3C5D"/>
+            </a:solidFill>
+          </c:spPr>
+          <c:dPt>
+            <c:idx val="1"/>
+            <c:spPr>
+              <a:solidFill>
+                <a:srgbClr val="A3B3C2"/>
+              </a:solidFill>
+            </c:spPr>
+          </c:dPt>
+          <c:dPt>
+            <c:idx val="2"/>
+            <c:spPr>
+              <a:solidFill>
+                <a:srgbClr val="A3B3C2"/>
+              </a:solidFill>
+            </c:spPr>
+          </c:dPt>
+          <c:dPt>
+            <c:idx val="3"/>
+            <c:spPr>
+              <a:solidFill>
+                <a:srgbClr val="A3B3C2"/>
+              </a:solidFill>
+            </c:spPr>
+          </c:dPt>
+          <c:dPt>
+            <c:idx val="6"/>
+            <c:spPr>
+              <a:solidFill>
+                <a:srgbClr val="A3B3C2"/>
+              </a:solidFill>
+            </c:spPr>
+          </c:dPt>
+          <c:cat>
+            <c:strRef>
+              <c:f>Sheet1!$A$2:$A$10</c:f>
+              <c:strCache>
+                <c:ptCount val="9"/>
+                <c:pt idx="0">
+                  <c:v>2560</c:v>
+                </c:pt>
+                <c:pt idx="1">
+                  <c:v>2561</c:v>
+                </c:pt>
+                <c:pt idx="2">
+                  <c:v>2562</c:v>
+                </c:pt>
+                <c:pt idx="3">
+                  <c:v>2563</c:v>
+                </c:pt>
+                <c:pt idx="4">
+                  <c:v>2564</c:v>
+                </c:pt>
+                <c:pt idx="5">
+                  <c:v>2565</c:v>
+                </c:pt>
+                <c:pt idx="6">
+                  <c:v>2566</c:v>
+                </c:pt>
+                <c:pt idx="7">
+                  <c:v>2567</c:v>
+                </c:pt>
+                <c:pt idx="8">
+                  <c:v>2568</c:v>
+                </c:pt>
+              </c:strCache>
+            </c:strRef>
+          </c:cat>
+          <c:val>
+            <c:numRef>
+              <c:f>Sheet1!$B$2:$B$10</c:f>
+              <c:numCache>
+                <c:formatCode>General</c:formatCode>
+                <c:ptCount val="9"/>
+                <c:pt idx="0">
+                  <c:v>98.0</c:v>
+                </c:pt>
+                <c:pt idx="1">
+                  <c:v>12.2</c:v>
+                </c:pt>
+                <c:pt idx="2">
+                  <c:v>8.2</c:v>
+                </c:pt>
+                <c:pt idx="3">
+                  <c:v>0.2</c:v>
+                </c:pt>
+                <c:pt idx="4">
+                  <c:v>123.1</c:v>
+                </c:pt>
+                <c:pt idx="5">
+                  <c:v>116.9</c:v>
+                </c:pt>
+                <c:pt idx="6">
+                  <c:v>34.7</c:v>
+                </c:pt>
+                <c:pt idx="7">
+                  <c:v>69.4</c:v>
+                </c:pt>
+                <c:pt idx="8">
+                  <c:v>166.9</c:v>
+                </c:pt>
+              </c:numCache>
+            </c:numRef>
+          </c:val>
+        </c:ser>
+        <c:dLbls>
+          <c:numFmt formatCode="0" sourceLinked="0"/>
+          <c:txPr>
+            <a:bodyPr/>
+            <a:lstStyle/>
+            <a:p>
+              <a:pPr>
+                <a:defRPr sz="900">
+                  <a:solidFill>
+                    <a:srgbClr val="1E293B"/>
+                  </a:solidFill>
+                  <a:latin typeface="Prompt"/>
+                </a:defRPr>
+              </a:pPr>
+            </a:p>
+          </c:txPr>
+          <c:dLblPos val="outEnd"/>
+          <c:showLegendKey val="0"/>
+          <c:showVal val="1"/>
+          <c:showCatName val="0"/>
+          <c:showSerName val="0"/>
+          <c:showPercent val="0"/>
+          <c:showBubbleSize val="0"/>
+          <c:showLeaderLines val="1"/>
+        </c:dLbls>
+        <c:gapWidth val="45"/>
+        <c:axId val="-2068027336"/>
+        <c:axId val="-2113994440"/>
+      </c:barChart>
+      <c:catAx>
+        <c:axId val="-2068027336"/>
+        <c:scaling>
+          <c:orientation val="minMax"/>
+        </c:scaling>
+        <c:delete val="0"/>
+        <c:axPos val="b"/>
+        <c:majorTickMark val="out"/>
+        <c:minorTickMark val="none"/>
+        <c:tickLblPos val="nextTo"/>
+        <c:spPr>
+          <a:ln>
+            <a:solidFill>
+              <a:srgbClr val="CBD5E1"/>
+            </a:solidFill>
+          </a:ln>
+        </c:spPr>
+        <c:txPr>
+          <a:bodyPr/>
+          <a:lstStyle/>
+          <a:p>
+            <a:pPr>
+              <a:defRPr sz="900">
+                <a:latin typeface="Prompt"/>
+              </a:defRPr>
+            </a:pPr>
+          </a:p>
+        </c:txPr>
+        <c:crossAx val="-2113994440"/>
+        <c:crosses val="autoZero"/>
+        <c:auto val="1"/>
+        <c:lblAlgn val="ctr"/>
+        <c:lblOffset val="100"/>
+        <c:noMultiLvlLbl val="0"/>
+      </c:catAx>
+      <c:valAx>
+        <c:axId val="-2113994440"/>
+        <c:scaling/>
+        <c:delete val="0"/>
+        <c:axPos val="l"/>
+        <c:majorGridlines>
+          <c:spPr>
+            <a:ln>
+              <a:solidFill>
+                <a:srgbClr val="E2E8F0"/>
+              </a:solidFill>
+            </a:ln>
+          </c:spPr>
+        </c:majorGridlines>
+        <c:majorTickMark val="out"/>
+        <c:minorTickMark val="none"/>
+        <c:tickLblPos val="nextTo"/>
+        <c:spPr>
+          <a:ln>
+            <a:noFill/>
+          </a:ln>
+        </c:spPr>
+        <c:txPr>
+          <a:bodyPr/>
+          <a:lstStyle/>
+          <a:p>
+            <a:pPr>
+              <a:defRPr sz="900">
+                <a:latin typeface="Prompt"/>
+              </a:defRPr>
+            </a:pPr>
+          </a:p>
+        </c:txPr>
+        <c:crossAx val="-2068027336"/>
+        <c:crosses val="autoZero"/>
+      </c:valAx>
+    </c:plotArea>
+    <c:dispBlanksAs val="gap"/>
+  </c:chart>
+  <c:txPr>
+    <a:bodyPr/>
+    <a:lstStyle/>
+    <a:p>
+      <a:pPr>
+        <a:defRPr sz="1000">
+          <a:solidFill>
+            <a:srgbClr val="64748B"/>
+          </a:solidFill>
+          <a:latin typeface="Prompt"/>
+        </a:defRPr>
+      </a:pPr>
+      <a:endParaRPr lang="en-US"/>
+    </a:p>
+  </c:txPr>
+  <c:externalData r:id="rId1">
+    <c:autoUpdate val="0"/>
+  </c:externalData>
+</c:chartSpace>
+</file>
+
+<file path=ppt/charts/chart7.xml><?xml version="1.0" encoding="utf-8"?>
+<c:chartSpace xmlns:c="http://schemas.openxmlformats.org/drawingml/2006/chart" xmlns:a="http://schemas.openxmlformats.org/drawingml/2006/main" xmlns:r="http://schemas.openxmlformats.org/officeDocument/2006/relationships">
+  <c:date1904 val="0"/>
+  <c:chart>
+    <c:title>
+      <c:tx>
+        <c:rich>
+          <a:bodyPr/>
+          <a:lstStyle/>
+          <a:p>
+            <a:r>
+              <a:rPr sz="1100" b="1">
+                <a:solidFill>
+                  <a:srgbClr val="0B3C5D"/>
+                </a:solidFill>
+                <a:latin typeface="Prompt"/>
+              </a:rPr>
+              <a:t>สถานการณ์สมมติ 21 วัน · 12 ตำบล (ตร.กม.)</a:t>
+            </a:r>
+          </a:p>
+        </c:rich>
+      </c:tx>
+      <c:layout/>
+      <c:overlay val="0"/>
+    </c:title>
+    <c:autoTitleDeleted val="0"/>
+    <c:plotArea>
+      <c:barChart>
+        <c:barDir val="col"/>
+        <c:grouping val="clustered"/>
+        <c:ser>
+          <c:idx val="0"/>
+          <c:order val="0"/>
+          <c:tx>
+            <c:strRef>
+              <c:f>Sheet1!$B$1</c:f>
+              <c:strCache>
+                <c:ptCount val="1"/>
+                <c:pt idx="0">
+                  <c:v>พื้นที่ท่วมสูงสุด</c:v>
+                </c:pt>
+              </c:strCache>
+            </c:strRef>
+          </c:tx>
+          <c:spPr>
+            <a:solidFill>
+              <a:srgbClr val="A3B3C2"/>
+            </a:solidFill>
+          </c:spPr>
+          <c:cat>
+            <c:strRef>
+              <c:f>Sheet1!$A$2:$A$6</c:f>
+              <c:strCache>
+                <c:ptCount val="5"/>
+                <c:pt idx="0">
+                  <c:v>A ฝน 150 · น้ำต่ำ</c:v>
+                </c:pt>
+                <c:pt idx="1">
+                  <c:v>B ฝน 150 · เต็มตลิ่ง</c:v>
+                </c:pt>
+                <c:pt idx="2">
+                  <c:v>C ฝน 250 · น้ำต่ำ</c:v>
+                </c:pt>
+                <c:pt idx="3">
+                  <c:v>D ฝน 250 · เต็มตลิ่ง</c:v>
+                </c:pt>
+                <c:pt idx="4">
+                  <c:v>E ฝน 250 · ล้นตลิ่ง</c:v>
+                </c:pt>
+              </c:strCache>
+            </c:strRef>
+          </c:cat>
+          <c:val>
+            <c:numRef>
+              <c:f>Sheet1!$B$2:$B$6</c:f>
+              <c:numCache>
+                <c:formatCode>General</c:formatCode>
+                <c:ptCount val="5"/>
+                <c:pt idx="0">
+                  <c:v>5.74</c:v>
+                </c:pt>
+                <c:pt idx="1">
+                  <c:v>5.74</c:v>
+                </c:pt>
+                <c:pt idx="2">
+                  <c:v>326.78</c:v>
+                </c:pt>
+                <c:pt idx="3">
+                  <c:v>367.67</c:v>
+                </c:pt>
+                <c:pt idx="4">
+                  <c:v>448.44</c:v>
+                </c:pt>
+              </c:numCache>
+            </c:numRef>
+          </c:val>
+        </c:ser>
+        <c:ser>
+          <c:idx val="1"/>
+          <c:order val="1"/>
+          <c:tx>
+            <c:strRef>
+              <c:f>Sheet1!$C$1</c:f>
+              <c:strCache>
+                <c:ptCount val="1"/>
+                <c:pt idx="0">
+                  <c:v>ขัง 7 วันขึ้นไป</c:v>
+                </c:pt>
+              </c:strCache>
+            </c:strRef>
+          </c:tx>
+          <c:spPr>
+            <a:solidFill>
+              <a:srgbClr val="0B3C5D"/>
+            </a:solidFill>
+          </c:spPr>
+          <c:cat>
+            <c:strRef>
+              <c:f>Sheet1!$A$2:$A$6</c:f>
+              <c:strCache>
+                <c:ptCount val="5"/>
+                <c:pt idx="0">
+                  <c:v>A ฝน 150 · น้ำต่ำ</c:v>
+                </c:pt>
+                <c:pt idx="1">
+                  <c:v>B ฝน 150 · เต็มตลิ่ง</c:v>
+                </c:pt>
+                <c:pt idx="2">
+                  <c:v>C ฝน 250 · น้ำต่ำ</c:v>
+                </c:pt>
+                <c:pt idx="3">
+                  <c:v>D ฝน 250 · เต็มตลิ่ง</c:v>
+                </c:pt>
+                <c:pt idx="4">
+                  <c:v>E ฝน 250 · ล้นตลิ่ง</c:v>
+                </c:pt>
+              </c:strCache>
+            </c:strRef>
+          </c:cat>
+          <c:val>
+            <c:numRef>
+              <c:f>Sheet1!$C$2:$C$6</c:f>
+              <c:numCache>
+                <c:formatCode>General</c:formatCode>
+                <c:ptCount val="5"/>
+                <c:pt idx="0">
+                  <c:v>1.94</c:v>
+                </c:pt>
+                <c:pt idx="1">
+                  <c:v>1.94</c:v>
+                </c:pt>
+                <c:pt idx="2">
+                  <c:v>118.15</c:v>
+                </c:pt>
+                <c:pt idx="3">
+                  <c:v>159.74</c:v>
+                </c:pt>
+                <c:pt idx="4">
+                  <c:v>278.2</c:v>
+                </c:pt>
+              </c:numCache>
+            </c:numRef>
+          </c:val>
+        </c:ser>
+        <c:dLbls>
+          <c:numFmt formatCode="0" sourceLinked="0"/>
+          <c:txPr>
+            <a:bodyPr/>
+            <a:lstStyle/>
+            <a:p>
+              <a:pPr>
+                <a:defRPr sz="800">
+                  <a:solidFill>
+                    <a:srgbClr val="1E293B"/>
+                  </a:solidFill>
+                  <a:latin typeface="Prompt"/>
+                </a:defRPr>
+              </a:pPr>
+            </a:p>
+          </c:txPr>
+          <c:dLblPos val="outEnd"/>
+          <c:showLegendKey val="0"/>
+          <c:showVal val="1"/>
+          <c:showCatName val="0"/>
+          <c:showSerName val="0"/>
+          <c:showPercent val="0"/>
+          <c:showBubbleSize val="0"/>
+          <c:showLeaderLines val="1"/>
+        </c:dLbls>
+        <c:gapWidth val="60"/>
+        <c:overlap val="-10"/>
+        <c:axId val="-2068027336"/>
+        <c:axId val="-2113994440"/>
+      </c:barChart>
+      <c:catAx>
+        <c:axId val="-2068027336"/>
+        <c:scaling>
+          <c:orientation val="minMax"/>
+        </c:scaling>
+        <c:delete val="0"/>
+        <c:axPos val="b"/>
+        <c:majorTickMark val="out"/>
+        <c:minorTickMark val="none"/>
+        <c:tickLblPos val="nextTo"/>
+        <c:spPr>
+          <a:ln>
+            <a:solidFill>
+              <a:srgbClr val="CBD5E1"/>
+            </a:solidFill>
+          </a:ln>
+        </c:spPr>
+        <c:txPr>
+          <a:bodyPr/>
+          <a:lstStyle/>
+          <a:p>
+            <a:pPr>
+              <a:defRPr sz="800">
+                <a:latin typeface="Prompt"/>
+              </a:defRPr>
+            </a:pPr>
+          </a:p>
+        </c:txPr>
+        <c:crossAx val="-2113994440"/>
+        <c:crosses val="autoZero"/>
+        <c:auto val="1"/>
+        <c:lblAlgn val="ctr"/>
+        <c:lblOffset val="100"/>
+        <c:noMultiLvlLbl val="0"/>
+      </c:catAx>
+      <c:valAx>
+        <c:axId val="-2113994440"/>
+        <c:scaling/>
+        <c:delete val="0"/>
+        <c:axPos val="l"/>
+        <c:majorGridlines>
+          <c:spPr>
+            <a:ln>
+              <a:solidFill>
+                <a:srgbClr val="E2E8F0"/>
+              </a:solidFill>
+            </a:ln>
+          </c:spPr>
+        </c:majorGridlines>
+        <c:majorTickMark val="out"/>
+        <c:minorTickMark val="none"/>
+        <c:tickLblPos val="nextTo"/>
+        <c:spPr>
+          <a:ln>
+            <a:noFill/>
+          </a:ln>
+        </c:spPr>
+        <c:txPr>
+          <a:bodyPr/>
+          <a:lstStyle/>
+          <a:p>
+            <a:pPr>
+              <a:defRPr sz="800">
+                <a:latin typeface="Prompt"/>
+              </a:defRPr>
+            </a:pPr>
+          </a:p>
+        </c:txPr>
+        <c:crossAx val="-2068027336"/>
+        <c:crosses val="autoZero"/>
+      </c:valAx>
+    </c:plotArea>
+    <c:legend>
+      <c:legendPos val="b"/>
+      <c:overlay val="0"/>
+      <c:txPr>
+        <a:bodyPr/>
+        <a:lstStyle/>
+        <a:p>
+          <a:pPr>
+            <a:defRPr sz="900">
+              <a:latin typeface="Prompt"/>
+            </a:defRPr>
+          </a:pPr>
+        </a:p>
+      </c:txPr>
+    </c:legend>
+    <c:dispBlanksAs val="gap"/>
+  </c:chart>
+  <c:txPr>
+    <a:bodyPr/>
+    <a:lstStyle/>
+    <a:p>
+      <a:pPr>
+        <a:defRPr sz="900">
+          <a:solidFill>
+            <a:srgbClr val="64748B"/>
+          </a:solidFill>
+          <a:latin typeface="Prompt"/>
+        </a:defRPr>
+      </a:pPr>
+      <a:endParaRPr lang="en-US"/>
+    </a:p>
+  </c:txPr>
+  <c:externalData r:id="rId1">
+    <c:autoUpdate val="0"/>
+  </c:externalData>
+</c:chartSpace>
+</file>
+
+<file path=ppt/charts/chart8.xml><?xml version="1.0" encoding="utf-8"?>
+<c:chartSpace xmlns:c="http://schemas.openxmlformats.org/drawingml/2006/chart" xmlns:a="http://schemas.openxmlformats.org/drawingml/2006/main" xmlns:r="http://schemas.openxmlformats.org/officeDocument/2006/relationships">
+  <c:date1904 val="0"/>
+  <c:chart>
+    <c:title>
+      <c:tx>
+        <c:rich>
+          <a:bodyPr/>
+          <a:lstStyle/>
+          <a:p>
+            <a:r>
+              <a:rPr sz="1100" b="1">
+                <a:solidFill>
+                  <a:srgbClr val="0B3C5D"/>
+                </a:solidFill>
+                <a:latin typeface="Prompt"/>
+              </a:rPr>
+              <a:t>ปี 2568: พื้นที่ท่วมรายวันในตำบลที่ศึกษา (ตร.กม.)</a:t>
+            </a:r>
+          </a:p>
+        </c:rich>
+      </c:tx>
+      <c:layout/>
+      <c:overlay val="0"/>
+    </c:title>
+    <c:autoTitleDeleted val="0"/>
+    <c:plotArea>
+      <c:lineChart>
+        <c:grouping val="standard"/>
+        <c:varyColors val="0"/>
+        <c:ser>
+          <c:idx val="0"/>
+          <c:order val="0"/>
+          <c:tx>
+            <c:strRef>
+              <c:f>Sheet1!$B$1</c:f>
+              <c:strCache>
+                <c:ptCount val="1"/>
+                <c:pt idx="0">
+                  <c:v>ดาวเทียม</c:v>
+                </c:pt>
+              </c:strCache>
+            </c:strRef>
+          </c:tx>
+          <c:spPr>
+            <a:ln w="25400">
+              <a:solidFill>
+                <a:srgbClr val="2563EB"/>
+              </a:solidFill>
+            </a:ln>
+          </c:spPr>
+          <c:marker>
+            <c:symbol val="circle"/>
+            <c:size val="5"/>
+            <c:spPr>
+              <a:solidFill>
+                <a:srgbClr val="2563EB"/>
+              </a:solidFill>
+              <a:ln>
+                <a:solidFill>
+                  <a:srgbClr val="2563EB"/>
+                </a:solidFill>
+              </a:ln>
+            </c:spPr>
+          </c:marker>
+          <c:cat>
+            <c:strRef>
+              <c:f>Sheet1!$A$2:$A$17</c:f>
+              <c:strCache>
+                <c:ptCount val="16"/>
+                <c:pt idx="0">
+                  <c:v>24/08</c:v>
+                </c:pt>
+                <c:pt idx="1">
+                  <c:v>30/08</c:v>
+                </c:pt>
+                <c:pt idx="2">
+                  <c:v>05/09</c:v>
+                </c:pt>
+                <c:pt idx="3">
+                  <c:v>11/09</c:v>
+                </c:pt>
+                <c:pt idx="4">
+                  <c:v>17/09</c:v>
+                </c:pt>
+                <c:pt idx="5">
+                  <c:v>23/09</c:v>
+                </c:pt>
+                <c:pt idx="6">
+                  <c:v>29/09</c:v>
+                </c:pt>
+                <c:pt idx="7">
+                  <c:v>05/10</c:v>
+                </c:pt>
+                <c:pt idx="8">
+                  <c:v>11/10</c:v>
+                </c:pt>
+                <c:pt idx="9">
+                  <c:v>23/10</c:v>
+                </c:pt>
+                <c:pt idx="10">
+                  <c:v>04/11</c:v>
+                </c:pt>
+                <c:pt idx="11">
+                  <c:v>10/11</c:v>
+                </c:pt>
+                <c:pt idx="12">
+                  <c:v>22/11</c:v>
+                </c:pt>
+                <c:pt idx="13">
+                  <c:v>28/11</c:v>
+                </c:pt>
+                <c:pt idx="14">
+                  <c:v>04/12</c:v>
+                </c:pt>
+                <c:pt idx="15">
+                  <c:v>10/12</c:v>
+                </c:pt>
+              </c:strCache>
+            </c:strRef>
+          </c:cat>
+          <c:val>
+            <c:numRef>
+              <c:f>Sheet1!$B$2:$B$17</c:f>
+              <c:numCache>
+                <c:formatCode>General</c:formatCode>
+                <c:ptCount val="16"/>
+                <c:pt idx="0">
+                  <c:v>0.6</c:v>
+                </c:pt>
+                <c:pt idx="1">
+                  <c:v>0.9</c:v>
+                </c:pt>
+                <c:pt idx="2">
+                  <c:v>1.7</c:v>
+                </c:pt>
+                <c:pt idx="3">
+                  <c:v>15.3</c:v>
+                </c:pt>
+                <c:pt idx="4">
+                  <c:v>98.2</c:v>
+                </c:pt>
+                <c:pt idx="5">
+                  <c:v>156.6</c:v>
+                </c:pt>
+                <c:pt idx="6">
+                  <c:v>252.3</c:v>
+                </c:pt>
+                <c:pt idx="7">
+                  <c:v>239.5</c:v>
+                </c:pt>
+                <c:pt idx="8">
+                  <c:v>216.2</c:v>
+                </c:pt>
+                <c:pt idx="9">
+                  <c:v>210.1</c:v>
+                </c:pt>
+                <c:pt idx="10">
+                  <c:v>200.6</c:v>
+                </c:pt>
+                <c:pt idx="11">
+                  <c:v>229.7</c:v>
+                </c:pt>
+                <c:pt idx="12">
+                  <c:v>187.4</c:v>
+                </c:pt>
+                <c:pt idx="13">
+                  <c:v>184.8</c:v>
+                </c:pt>
+                <c:pt idx="14">
+                  <c:v>122.7</c:v>
+                </c:pt>
+                <c:pt idx="15">
+                  <c:v>128.2</c:v>
+                </c:pt>
+              </c:numCache>
+            </c:numRef>
+          </c:val>
+          <c:smooth val="0"/>
+        </c:ser>
+        <c:ser>
+          <c:idx val="1"/>
+          <c:order val="1"/>
+          <c:tx>
+            <c:strRef>
+              <c:f>Sheet1!$C$1</c:f>
+              <c:strCache>
+                <c:ptCount val="1"/>
+                <c:pt idx="0">
+                  <c:v>แบบจำลอง</c:v>
+                </c:pt>
+              </c:strCache>
+            </c:strRef>
+          </c:tx>
+          <c:spPr>
+            <a:ln w="25400">
+              <a:solidFill>
+                <a:srgbClr val="D64545"/>
+              </a:solidFill>
+              <a:prstDash val="dash"/>
+            </a:ln>
+          </c:spPr>
+          <c:marker>
+            <c:symbol val="circle"/>
+            <c:size val="5"/>
+            <c:spPr>
+              <a:solidFill>
+                <a:srgbClr val="D64545"/>
+              </a:solidFill>
+              <a:ln>
+                <a:solidFill>
+                  <a:srgbClr val="D64545"/>
+                </a:solidFill>
+              </a:ln>
+            </c:spPr>
+          </c:marker>
+          <c:cat>
+            <c:strRef>
+              <c:f>Sheet1!$A$2:$A$17</c:f>
+              <c:strCache>
+                <c:ptCount val="16"/>
+                <c:pt idx="0">
+                  <c:v>24/08</c:v>
+                </c:pt>
+                <c:pt idx="1">
+                  <c:v>30/08</c:v>
+                </c:pt>
+                <c:pt idx="2">
+                  <c:v>05/09</c:v>
+                </c:pt>
+                <c:pt idx="3">
+                  <c:v>11/09</c:v>
+                </c:pt>
+                <c:pt idx="4">
+                  <c:v>17/09</c:v>
+                </c:pt>
+                <c:pt idx="5">
+                  <c:v>23/09</c:v>
+                </c:pt>
+                <c:pt idx="6">
+                  <c:v>29/09</c:v>
+                </c:pt>
+                <c:pt idx="7">
+                  <c:v>05/10</c:v>
+                </c:pt>
+                <c:pt idx="8">
+                  <c:v>11/10</c:v>
+                </c:pt>
+                <c:pt idx="9">
+                  <c:v>23/10</c:v>
+                </c:pt>
+                <c:pt idx="10">
+                  <c:v>04/11</c:v>
+                </c:pt>
+                <c:pt idx="11">
+                  <c:v>10/11</c:v>
+                </c:pt>
+                <c:pt idx="12">
+                  <c:v>22/11</c:v>
+                </c:pt>
+                <c:pt idx="13">
+                  <c:v>28/11</c:v>
+                </c:pt>
+                <c:pt idx="14">
+                  <c:v>04/12</c:v>
+                </c:pt>
+                <c:pt idx="15">
+                  <c:v>10/12</c:v>
+                </c:pt>
+              </c:strCache>
+            </c:strRef>
+          </c:cat>
+          <c:val>
+            <c:numRef>
+              <c:f>Sheet1!$C$2:$C$17</c:f>
+              <c:numCache>
+                <c:formatCode>General</c:formatCode>
+                <c:ptCount val="16"/>
+                <c:pt idx="0">
+                  <c:v>14.1</c:v>
+                </c:pt>
+                <c:pt idx="1">
+                  <c:v>14.3</c:v>
+                </c:pt>
+                <c:pt idx="2">
+                  <c:v>14.4</c:v>
+                </c:pt>
+                <c:pt idx="3">
+                  <c:v>14.6</c:v>
+                </c:pt>
+                <c:pt idx="4">
+                  <c:v>14.7</c:v>
+                </c:pt>
+                <c:pt idx="5">
+                  <c:v>14.7</c:v>
+                </c:pt>
+                <c:pt idx="6">
+                  <c:v>19.8</c:v>
+                </c:pt>
+                <c:pt idx="7">
+                  <c:v>178.7</c:v>
+                </c:pt>
+                <c:pt idx="8">
+                  <c:v>251.6</c:v>
+                </c:pt>
+                <c:pt idx="9">
+                  <c:v>297.0</c:v>
+                </c:pt>
+                <c:pt idx="10">
+                  <c:v>241.2</c:v>
+                </c:pt>
+                <c:pt idx="11">
+                  <c:v>282.8</c:v>
+                </c:pt>
+                <c:pt idx="12">
+                  <c:v>255.4</c:v>
+                </c:pt>
+                <c:pt idx="13">
+                  <c:v>227.4</c:v>
+                </c:pt>
+                <c:pt idx="14">
+                  <c:v>202.8</c:v>
+                </c:pt>
+                <c:pt idx="15">
+                  <c:v>162.0</c:v>
+                </c:pt>
+              </c:numCache>
+            </c:numRef>
+          </c:val>
+          <c:smooth val="0"/>
+        </c:ser>
+        <c:marker val="1"/>
+        <c:smooth val="0"/>
+        <c:axId val="2118791784"/>
+        <c:axId val="2140495176"/>
+      </c:lineChart>
+      <c:catAx>
+        <c:axId val="2118791784"/>
+        <c:scaling>
+          <c:orientation val="minMax"/>
+        </c:scaling>
+        <c:delete val="0"/>
+        <c:axPos val="b"/>
+        <c:majorTickMark val="out"/>
+        <c:minorTickMark val="none"/>
+        <c:tickLblPos val="nextTo"/>
+        <c:spPr>
+          <a:ln>
+            <a:solidFill>
+              <a:srgbClr val="CBD5E1"/>
+            </a:solidFill>
+          </a:ln>
+        </c:spPr>
+        <c:txPr>
+          <a:bodyPr/>
+          <a:lstStyle/>
+          <a:p>
+            <a:pPr>
+              <a:defRPr sz="800">
+                <a:latin typeface="Prompt"/>
+              </a:defRPr>
+            </a:pPr>
+          </a:p>
+        </c:txPr>
+        <c:crossAx val="2140495176"/>
+        <c:crosses val="autoZero"/>
+        <c:auto val="1"/>
+        <c:lblAlgn val="ctr"/>
+        <c:lblOffset val="100"/>
+        <c:noMultiLvlLbl val="0"/>
+      </c:catAx>
+      <c:valAx>
+        <c:axId val="2140495176"/>
+        <c:scaling/>
+        <c:delete val="0"/>
+        <c:axPos val="l"/>
+        <c:majorGridlines>
+          <c:spPr>
+            <a:ln>
+              <a:solidFill>
+                <a:srgbClr val="E2E8F0"/>
+              </a:solidFill>
+            </a:ln>
+          </c:spPr>
+        </c:majorGridlines>
+        <c:majorTickMark val="out"/>
+        <c:minorTickMark val="none"/>
+        <c:tickLblPos val="nextTo"/>
+        <c:spPr>
+          <a:ln>
+            <a:noFill/>
+          </a:ln>
+        </c:spPr>
+        <c:txPr>
+          <a:bodyPr/>
+          <a:lstStyle/>
+          <a:p>
+            <a:pPr>
+              <a:defRPr sz="800">
+                <a:latin typeface="Prompt"/>
+              </a:defRPr>
+            </a:pPr>
+          </a:p>
+        </c:txPr>
+        <c:crossAx val="2118791784"/>
+        <c:crosses val="autoZero"/>
+      </c:valAx>
+    </c:plotArea>
+    <c:legend>
+      <c:legendPos val="b"/>
+      <c:layout/>
+      <c:overlay val="0"/>
+      <c:txPr>
+        <a:bodyPr/>
+        <a:lstStyle/>
+        <a:p>
+          <a:pPr>
+            <a:defRPr sz="900">
+              <a:latin typeface="Prompt"/>
+            </a:defRPr>
+          </a:pPr>
+        </a:p>
+      </c:txPr>
+    </c:legend>
+    <c:plotVisOnly val="1"/>
+    <c:dispBlanksAs val="gap"/>
+    <c:showDLblsOverMax val="0"/>
+  </c:chart>
+  <c:txPr>
+    <a:bodyPr/>
+    <a:lstStyle/>
+    <a:p>
+      <a:pPr>
+        <a:defRPr sz="900">
+          <a:solidFill>
+            <a:srgbClr val="64748B"/>
+          </a:solidFill>
+          <a:latin typeface="Prompt"/>
+        </a:defRPr>
+      </a:pPr>
+      <a:endParaRPr lang="en-US"/>
+    </a:p>
+  </c:txPr>
   <c:externalData r:id="rId1">
     <c:autoUpdate val="0"/>
   </c:externalData>
@@ -4961,6 +5994,146 @@
 </p:notes>
 </file>
 
+<file path=ppt/notesSlides/notesSlide18.xml><?xml version="1.0" encoding="utf-8"?>
+<p:notes xmlns:a="http://schemas.openxmlformats.org/drawingml/2006/main" xmlns:p="http://schemas.openxmlformats.org/presentationml/2006/main" xmlns:r="http://schemas.openxmlformats.org/officeDocument/2006/relationships">
+  <p:cSld>
+    <p:spTree>
+      <p:nvGrpSpPr>
+        <p:cNvPr id="1" name=""/>
+        <p:cNvGrpSpPr/>
+        <p:nvPr/>
+      </p:nvGrpSpPr>
+      <p:grpSpPr>
+        <a:xfrm>
+          <a:off x="0" y="0"/>
+          <a:ext cx="0" cy="0"/>
+          <a:chOff x="0" y="0"/>
+          <a:chExt cx="0" cy="0"/>
+        </a:xfrm>
+      </p:grpSpPr>
+      <p:sp>
+        <p:nvSpPr>
+          <p:cNvPr id="2" name="Slide Image Placeholder 1"/>
+          <p:cNvSpPr>
+            <a:spLocks noGrp="1"/>
+          </p:cNvSpPr>
+          <p:nvPr>
+            <p:ph type="sldImg" idx="2"/>
+          </p:nvPr>
+        </p:nvSpPr>
+        <p:spPr/>
+      </p:sp>
+      <p:sp>
+        <p:nvSpPr>
+          <p:cNvPr id="3" name="Notes Placeholder 2"/>
+          <p:cNvSpPr>
+            <a:spLocks noGrp="1"/>
+          </p:cNvSpPr>
+          <p:nvPr>
+            <p:ph type="body" idx="3" sz="quarter"/>
+          </p:nvPr>
+        </p:nvSpPr>
+        <p:spPr/>
+        <p:txBody>
+          <a:bodyPr/>
+          <a:lstStyle/>
+          <a:p>
+            <a:r>
+              <a:t>ภาพเรดาร์ไม่ถูกเมฆบัง จึงเห็นน้ำท่วมย้อนหลังได้ทุก 6–12 วัน ปีน้ำมาก (2560, 2564, 2565, 2568) ท่วมนาน 60 วันขึ้นไปราว 100–170 ตร.กม. จุดที่ท่วมซ้ำและนานที่สุดคือตำบลรอบบึงบอระเพ็ด โดยเฉพาะทับกฤช ซึ่งตรงกับที่คนในพื้นที่บอกว่าน้ำขัง 2–3 เดือน ปี 2564 ทับกฤชท่วม 0 → 71 ตร.กม. ใน 6 วัน และยังท่วม ~40 ตร.กม. ถึง 13 ธ.ค. ลักษณะท่วมเร็ว–ลดช้าแบบนี้เป็นน้ำจากแม่น้ำ ไม่ใช่ฝนในพื้นที่</a:t>
+            </a:r>
+          </a:p>
+        </p:txBody>
+      </p:sp>
+      <p:sp>
+        <p:nvSpPr>
+          <p:cNvPr id="4" name="Slide Number Placeholder 3"/>
+          <p:cNvSpPr>
+            <a:spLocks noGrp="1"/>
+          </p:cNvSpPr>
+          <p:nvPr>
+            <p:ph type="sldNum" idx="5" sz="quarter"/>
+          </p:nvPr>
+        </p:nvSpPr>
+        <p:spPr/>
+      </p:sp>
+    </p:spTree>
+  </p:cSld>
+  <p:clrMapOvr>
+    <a:masterClrMapping/>
+  </p:clrMapOvr>
+</p:notes>
+</file>
+
+<file path=ppt/notesSlides/notesSlide19.xml><?xml version="1.0" encoding="utf-8"?>
+<p:notes xmlns:a="http://schemas.openxmlformats.org/drawingml/2006/main" xmlns:p="http://schemas.openxmlformats.org/presentationml/2006/main" xmlns:r="http://schemas.openxmlformats.org/officeDocument/2006/relationships">
+  <p:cSld>
+    <p:spTree>
+      <p:nvGrpSpPr>
+        <p:cNvPr id="1" name=""/>
+        <p:cNvGrpSpPr/>
+        <p:nvPr/>
+      </p:nvGrpSpPr>
+      <p:grpSpPr>
+        <a:xfrm>
+          <a:off x="0" y="0"/>
+          <a:ext cx="0" cy="0"/>
+          <a:chOff x="0" y="0"/>
+          <a:chExt cx="0" cy="0"/>
+        </a:xfrm>
+      </p:grpSpPr>
+      <p:sp>
+        <p:nvSpPr>
+          <p:cNvPr id="2" name="Slide Image Placeholder 1"/>
+          <p:cNvSpPr>
+            <a:spLocks noGrp="1"/>
+          </p:cNvSpPr>
+          <p:nvPr>
+            <p:ph type="sldImg" idx="2"/>
+          </p:nvPr>
+        </p:nvSpPr>
+        <p:spPr/>
+      </p:sp>
+      <p:sp>
+        <p:nvSpPr>
+          <p:cNvPr id="3" name="Notes Placeholder 2"/>
+          <p:cNvSpPr>
+            <a:spLocks noGrp="1"/>
+          </p:cNvSpPr>
+          <p:nvPr>
+            <p:ph type="body" idx="3" sz="quarter"/>
+          </p:nvPr>
+        </p:nvSpPr>
+        <p:spPr/>
+        <p:txBody>
+          <a:bodyPr/>
+          <a:lstStyle/>
+          <a:p>
+            <a:r>
+              <a:t>ฝน 150 มม. น้ำเกือบทั้งหมดถูกเก็บในคันนา ; ฝน 250 มม. เริ่มท่วมกว้าง แต่ถ้าไม่มีน้ำจากแม่น้ำ แบบจำลองจับพื้นที่ท่วมนานจริงได้แค่ 29% เพิ่มน้ำเท้อเต็มตลิ่งได้ 42% และเมื่อมีน้ำล้นตลิ่งเข้าบึงบอระเพ็ดได้ 81% → กลไกหลักของการท่วมนานคือน้ำจากน่าน/เจ้าพระยาย้อนเข้าบึง ฝนอย่างเดียวทำให้แบบจำลองท่วมนานเกินจริงในตำบลตอนใน (ท่าตะโก พนมรอก หัวถนน)</a:t>
+            </a:r>
+          </a:p>
+        </p:txBody>
+      </p:sp>
+      <p:sp>
+        <p:nvSpPr>
+          <p:cNvPr id="4" name="Slide Number Placeholder 3"/>
+          <p:cNvSpPr>
+            <a:spLocks noGrp="1"/>
+          </p:cNvSpPr>
+          <p:nvPr>
+            <p:ph type="sldNum" idx="5" sz="quarter"/>
+          </p:nvPr>
+        </p:nvSpPr>
+        <p:spPr/>
+      </p:sp>
+    </p:spTree>
+  </p:cSld>
+  <p:clrMapOvr>
+    <a:masterClrMapping/>
+  </p:clrMapOvr>
+</p:notes>
+</file>
+
 <file path=ppt/notesSlides/notesSlide2.xml><?xml version="1.0" encoding="utf-8"?>
 <p:notes xmlns:a="http://schemas.openxmlformats.org/drawingml/2006/main" xmlns:r="http://schemas.openxmlformats.org/officeDocument/2006/relationships" xmlns:p="http://schemas.openxmlformats.org/presentationml/2006/main">
   <p:cSld>
@@ -5042,6 +6215,76 @@
         <p14:creationId xmlns:p14="http://schemas.microsoft.com/office/powerpoint/2010/main" val="1024086991"/>
       </p:ext>
     </p:extLst>
+  </p:cSld>
+  <p:clrMapOvr>
+    <a:masterClrMapping/>
+  </p:clrMapOvr>
+</p:notes>
+</file>
+
+<file path=ppt/notesSlides/notesSlide20.xml><?xml version="1.0" encoding="utf-8"?>
+<p:notes xmlns:a="http://schemas.openxmlformats.org/drawingml/2006/main" xmlns:p="http://schemas.openxmlformats.org/presentationml/2006/main" xmlns:r="http://schemas.openxmlformats.org/officeDocument/2006/relationships">
+  <p:cSld>
+    <p:spTree>
+      <p:nvGrpSpPr>
+        <p:cNvPr id="1" name=""/>
+        <p:cNvGrpSpPr/>
+        <p:nvPr/>
+      </p:nvGrpSpPr>
+      <p:grpSpPr>
+        <a:xfrm>
+          <a:off x="0" y="0"/>
+          <a:ext cx="0" cy="0"/>
+          <a:chOff x="0" y="0"/>
+          <a:chExt cx="0" cy="0"/>
+        </a:xfrm>
+      </p:grpSpPr>
+      <p:sp>
+        <p:nvSpPr>
+          <p:cNvPr id="2" name="Slide Image Placeholder 1"/>
+          <p:cNvSpPr>
+            <a:spLocks noGrp="1"/>
+          </p:cNvSpPr>
+          <p:nvPr>
+            <p:ph type="sldImg" idx="2"/>
+          </p:nvPr>
+        </p:nvSpPr>
+        <p:spPr/>
+      </p:sp>
+      <p:sp>
+        <p:nvSpPr>
+          <p:cNvPr id="3" name="Notes Placeholder 2"/>
+          <p:cNvSpPr>
+            <a:spLocks noGrp="1"/>
+          </p:cNvSpPr>
+          <p:nvPr>
+            <p:ph type="body" idx="3" sz="quarter"/>
+          </p:nvPr>
+        </p:nvSpPr>
+        <p:spPr/>
+        <p:txBody>
+          <a:bodyPr/>
+          <a:lstStyle/>
+          <a:p>
+            <a:r>
+              <a:t>ใช้พารามิเตอร์ชุดเดียวกันทุกปี: ตลิ่งใช้งานต่ำกว่าตลิ่งสถานี 1 ม., น้ำเข้าทุ่งรวมไม่เกิน 400 ลบ.ม./วิ, บึงบอระเพ็ดเก็บน้ำที่ +24.5 ม. พื้นที่ท่วม 30 วันขึ้นไปจำลองได้ใกล้ของจริง (ต่างกันไม่เกิน ~20%) ที่ยังไม่ตรง: ปี 65 และ 68 น้ำมาช้ากว่าจริง 1–2 สัปดาห์ และไผ่สิงห์ท่วมจริงนานกว่าแบบจำลองมาก ขั้นต่อไปคือใส่ปริมาณน้ำไหลเข้าจากเหนือ (Y.17/N.7A) และระดับน้ำบึงบอระเพ็ด/การเปิดประตูจากกรมชลประทาน</a:t>
+            </a:r>
+          </a:p>
+        </p:txBody>
+      </p:sp>
+      <p:sp>
+        <p:nvSpPr>
+          <p:cNvPr id="4" name="Slide Number Placeholder 3"/>
+          <p:cNvSpPr>
+            <a:spLocks noGrp="1"/>
+          </p:cNvSpPr>
+          <p:nvPr>
+            <p:ph type="sldNum" idx="5" sz="quarter"/>
+          </p:nvPr>
+        </p:nvSpPr>
+        <p:spPr/>
+      </p:sp>
+    </p:spTree>
   </p:cSld>
   <p:clrMapOvr>
     <a:masterClrMapping/>
@@ -6276,7 +7519,7 @@
                 <a:ea typeface="Prompt" pitchFamily="34" charset="-122"/>
                 <a:cs typeface="Prompt" pitchFamily="34" charset="-120"/>
               </a:rPr>
-              <a:t>สำหรับผู้บริหารและทีมเทคนิค · ข้อมูล ณ 28 ก.ย. 2569 เวลา 20:57 น.</a:t>
+              <a:t>สำหรับผู้บริหารและทีมเทคนิค · ข้อมูล ณ 28 ก.ย. 2569 · ปรับปรุงผลแอ่งท่าตะโก 30 ก.ย. 2569</a:t>
             </a:r>
             <a:endParaRPr lang="en-US" sz="1200" dirty="0"/>
           </a:p>
@@ -10027,6 +11270,10 @@
             <a:prstDash val="solid"/>
           </a:ln>
         </p:spPr>
+        <p:txBody>
+          <a:bodyPr/>
+          <a:p/>
+        </p:txBody>
       </p:sp>
       <p:sp>
         <p:nvSpPr>
@@ -10211,6 +11458,10 @@
             <a:prstDash val="solid"/>
           </a:ln>
         </p:spPr>
+        <p:txBody>
+          <a:bodyPr/>
+          <a:p/>
+        </p:txBody>
       </p:sp>
       <p:sp>
         <p:nvSpPr>
@@ -10290,7 +11541,7 @@
                 <a:ea typeface="Prompt" pitchFamily="34" charset="-122"/>
                 <a:cs typeface="Prompt" pitchFamily="34" charset="-120"/>
               </a:rPr>
-              <a:t>เทียบกับแบบจำลอง 2D จากเหตุการณ์เดียว ยังไม่ได้เทียบกับพื้นที่ท่วมจริงจากดาวเทียม GISTDA</a:t>
+              <a:t>ค่านี้เทียบกับ 2D · แอ่งท่าตะโกเทียบดาวเทียมแล้ว (สไลด์ถัดไป) · ระบบสะสม Sentinel-1 วันละ 2 รอบไว้สอบเทียบ hex</a:t>
             </a:r>
             <a:endParaRPr lang="en-US" sz="1350" dirty="0"/>
           </a:p>
@@ -10482,7 +11733,7 @@
                 <a:gridCol w="1280160"/>
                 <a:gridCol w="3685032"/>
               </a:tblGrid>
-              <a:tr h="402336">
+              <a:tr h="329184">
                 <a:tc>
                   <a:txBody>
                     <a:bodyPr/>
@@ -10492,7 +11743,7 @@
                         <a:buNone/>
                       </a:pPr>
                       <a:r>
-                        <a:rPr lang="en-US" sz="1200" b="1" dirty="0">
+                        <a:rPr lang="en-US" sz="1100" b="1" dirty="0">
                           <a:solidFill>
                             <a:srgbClr val="FFFFFF"/>
                           </a:solidFill>
@@ -10560,7 +11811,7 @@
                         <a:buNone/>
                       </a:pPr>
                       <a:r>
-                        <a:rPr lang="en-US" sz="1200" b="1" dirty="0">
+                        <a:rPr lang="en-US" sz="1100" b="1" dirty="0">
                           <a:solidFill>
                             <a:srgbClr val="FFFFFF"/>
                           </a:solidFill>
@@ -10628,7 +11879,7 @@
                         <a:buNone/>
                       </a:pPr>
                       <a:r>
-                        <a:rPr lang="en-US" sz="1200" b="1" dirty="0">
+                        <a:rPr lang="en-US" sz="1100" b="1" dirty="0">
                           <a:solidFill>
                             <a:srgbClr val="FFFFFF"/>
                           </a:solidFill>
@@ -10696,7 +11947,7 @@
                         <a:buNone/>
                       </a:pPr>
                       <a:r>
-                        <a:rPr lang="en-US" sz="1200" b="1" dirty="0">
+                        <a:rPr lang="en-US" sz="1100" b="1" dirty="0">
                           <a:solidFill>
                             <a:srgbClr val="FFFFFF"/>
                           </a:solidFill>
@@ -10756,7 +12007,7 @@
                   </a:tcPr>
                 </a:tc>
               </a:tr>
-              <a:tr h="402336">
+              <a:tr h="329184">
                 <a:tc>
                   <a:txBody>
                     <a:bodyPr/>
@@ -10766,7 +12017,7 @@
                         <a:buNone/>
                       </a:pPr>
                       <a:r>
-                        <a:rPr lang="en-US" sz="1150" dirty="0">
+                        <a:rPr lang="en-US" sz="1100" dirty="0">
                           <a:solidFill>
                             <a:srgbClr val="1E293B"/>
                           </a:solidFill>
@@ -10834,7 +12085,7 @@
                         <a:buNone/>
                       </a:pPr>
                       <a:r>
-                        <a:rPr lang="en-US" sz="1150" dirty="0">
+                        <a:rPr lang="en-US" sz="1100" dirty="0">
                           <a:solidFill>
                             <a:srgbClr val="1E293B"/>
                           </a:solidFill>
@@ -10902,7 +12153,7 @@
                         <a:buNone/>
                       </a:pPr>
                       <a:r>
-                        <a:rPr lang="en-US" sz="1150" dirty="0">
+                        <a:rPr lang="en-US" sz="1100" dirty="0">
                           <a:solidFill>
                             <a:srgbClr val="1E293B"/>
                           </a:solidFill>
@@ -10970,7 +12221,7 @@
                         <a:buNone/>
                       </a:pPr>
                       <a:r>
-                        <a:rPr lang="en-US" sz="1150" dirty="0">
+                        <a:rPr lang="en-US" sz="1100" dirty="0">
                           <a:solidFill>
                             <a:srgbClr val="1E293B"/>
                           </a:solidFill>
@@ -11030,7 +12281,7 @@
                   </a:tcPr>
                 </a:tc>
               </a:tr>
-              <a:tr h="402336">
+              <a:tr h="329184">
                 <a:tc>
                   <a:txBody>
                     <a:bodyPr/>
@@ -11040,7 +12291,7 @@
                         <a:buNone/>
                       </a:pPr>
                       <a:r>
-                        <a:rPr lang="en-US" sz="1150" dirty="0">
+                        <a:rPr lang="en-US" sz="1100" dirty="0">
                           <a:solidFill>
                             <a:srgbClr val="1E293B"/>
                           </a:solidFill>
@@ -11108,7 +12359,7 @@
                         <a:buNone/>
                       </a:pPr>
                       <a:r>
-                        <a:rPr lang="en-US" sz="1150" dirty="0">
+                        <a:rPr lang="en-US" sz="1100" dirty="0">
                           <a:solidFill>
                             <a:srgbClr val="1E293B"/>
                           </a:solidFill>
@@ -11176,7 +12427,7 @@
                         <a:buNone/>
                       </a:pPr>
                       <a:r>
-                        <a:rPr lang="en-US" sz="1150" dirty="0">
+                        <a:rPr lang="en-US" sz="1100" dirty="0">
                           <a:solidFill>
                             <a:srgbClr val="1E293B"/>
                           </a:solidFill>
@@ -11244,7 +12495,7 @@
                         <a:buNone/>
                       </a:pPr>
                       <a:r>
-                        <a:rPr lang="en-US" sz="1150" dirty="0">
+                        <a:rPr lang="en-US" sz="1100" dirty="0">
                           <a:solidFill>
                             <a:srgbClr val="1E293B"/>
                           </a:solidFill>
@@ -11304,7 +12555,7 @@
                   </a:tcPr>
                 </a:tc>
               </a:tr>
-              <a:tr h="402336">
+              <a:tr h="329184">
                 <a:tc>
                   <a:txBody>
                     <a:bodyPr/>
@@ -11314,7 +12565,7 @@
                         <a:buNone/>
                       </a:pPr>
                       <a:r>
-                        <a:rPr lang="en-US" sz="1150" dirty="0">
+                        <a:rPr lang="en-US" sz="1100" dirty="0">
                           <a:solidFill>
                             <a:srgbClr val="1E293B"/>
                           </a:solidFill>
@@ -11382,7 +12633,7 @@
                         <a:buNone/>
                       </a:pPr>
                       <a:r>
-                        <a:rPr lang="en-US" sz="1150" dirty="0">
+                        <a:rPr lang="en-US" sz="1100" dirty="0">
                           <a:solidFill>
                             <a:srgbClr val="1E293B"/>
                           </a:solidFill>
@@ -11450,7 +12701,7 @@
                         <a:buNone/>
                       </a:pPr>
                       <a:r>
-                        <a:rPr lang="en-US" sz="1150" dirty="0">
+                        <a:rPr lang="en-US" sz="1100" dirty="0">
                           <a:solidFill>
                             <a:srgbClr val="1E293B"/>
                           </a:solidFill>
@@ -11518,7 +12769,7 @@
                         <a:buNone/>
                       </a:pPr>
                       <a:r>
-                        <a:rPr lang="en-US" sz="1150" dirty="0">
+                        <a:rPr lang="en-US" sz="1100" dirty="0">
                           <a:solidFill>
                             <a:srgbClr val="1E293B"/>
                           </a:solidFill>
@@ -11578,7 +12829,7 @@
                   </a:tcPr>
                 </a:tc>
               </a:tr>
-              <a:tr h="402336">
+              <a:tr h="329184">
                 <a:tc>
                   <a:txBody>
                     <a:bodyPr/>
@@ -11588,7 +12839,7 @@
                         <a:buNone/>
                       </a:pPr>
                       <a:r>
-                        <a:rPr lang="en-US" sz="1150" dirty="0">
+                        <a:rPr lang="en-US" sz="1100" dirty="0">
                           <a:solidFill>
                             <a:srgbClr val="1E293B"/>
                           </a:solidFill>
@@ -11656,7 +12907,7 @@
                         <a:buNone/>
                       </a:pPr>
                       <a:r>
-                        <a:rPr lang="en-US" sz="1150" dirty="0">
+                        <a:rPr lang="en-US" sz="1100" dirty="0">
                           <a:solidFill>
                             <a:srgbClr val="1E293B"/>
                           </a:solidFill>
@@ -11724,7 +12975,7 @@
                         <a:buNone/>
                       </a:pPr>
                       <a:r>
-                        <a:rPr lang="en-US" sz="1150" dirty="0">
+                        <a:rPr lang="en-US" sz="1100" dirty="0">
                           <a:solidFill>
                             <a:srgbClr val="1E293B"/>
                           </a:solidFill>
@@ -11792,7 +13043,7 @@
                         <a:buNone/>
                       </a:pPr>
                       <a:r>
-                        <a:rPr lang="en-US" sz="1150" dirty="0">
+                        <a:rPr lang="en-US" sz="1100" dirty="0">
                           <a:solidFill>
                             <a:srgbClr val="1E293B"/>
                           </a:solidFill>
@@ -11852,7 +13103,7 @@
                   </a:tcPr>
                 </a:tc>
               </a:tr>
-              <a:tr h="402336">
+              <a:tr h="329184">
                 <a:tc>
                   <a:txBody>
                     <a:bodyPr/>
@@ -11862,7 +13113,7 @@
                         <a:buNone/>
                       </a:pPr>
                       <a:r>
-                        <a:rPr lang="en-US" sz="1150" dirty="0">
+                        <a:rPr lang="en-US" sz="1100" dirty="0">
                           <a:solidFill>
                             <a:srgbClr val="1E293B"/>
                           </a:solidFill>
@@ -11930,7 +13181,7 @@
                         <a:buNone/>
                       </a:pPr>
                       <a:r>
-                        <a:rPr lang="en-US" sz="1150" dirty="0">
+                        <a:rPr lang="en-US" sz="1100" dirty="0">
                           <a:solidFill>
                             <a:srgbClr val="1E293B"/>
                           </a:solidFill>
@@ -11998,7 +13249,7 @@
                         <a:buNone/>
                       </a:pPr>
                       <a:r>
-                        <a:rPr lang="en-US" sz="1150" dirty="0">
+                        <a:rPr lang="en-US" sz="1100" dirty="0">
                           <a:solidFill>
                             <a:srgbClr val="1E293B"/>
                           </a:solidFill>
@@ -12066,7 +13317,7 @@
                         <a:buNone/>
                       </a:pPr>
                       <a:r>
-                        <a:rPr lang="en-US" sz="1150" dirty="0">
+                        <a:rPr lang="en-US" sz="1100" dirty="0">
                           <a:solidFill>
                             <a:srgbClr val="1E293B"/>
                           </a:solidFill>
@@ -12126,7 +13377,7 @@
                   </a:tcPr>
                 </a:tc>
               </a:tr>
-              <a:tr h="402336">
+              <a:tr h="329184">
                 <a:tc>
                   <a:txBody>
                     <a:bodyPr/>
@@ -12136,7 +13387,7 @@
                         <a:buNone/>
                       </a:pPr>
                       <a:r>
-                        <a:rPr lang="en-US" sz="1150" dirty="0">
+                        <a:rPr lang="en-US" sz="1100" dirty="0">
                           <a:solidFill>
                             <a:srgbClr val="1E293B"/>
                           </a:solidFill>
@@ -12204,7 +13455,7 @@
                         <a:buNone/>
                       </a:pPr>
                       <a:r>
-                        <a:rPr lang="en-US" sz="1150" dirty="0">
+                        <a:rPr lang="en-US" sz="1100" dirty="0">
                           <a:solidFill>
                             <a:srgbClr val="1E293B"/>
                           </a:solidFill>
@@ -12272,7 +13523,7 @@
                         <a:buNone/>
                       </a:pPr>
                       <a:r>
-                        <a:rPr lang="en-US" sz="1150" dirty="0">
+                        <a:rPr lang="en-US" sz="1100" dirty="0">
                           <a:solidFill>
                             <a:srgbClr val="1E293B"/>
                           </a:solidFill>
@@ -12340,7 +13591,7 @@
                         <a:buNone/>
                       </a:pPr>
                       <a:r>
-                        <a:rPr lang="en-US" sz="1150" dirty="0">
+                        <a:rPr lang="en-US" sz="1100" dirty="0">
                           <a:solidFill>
                             <a:srgbClr val="1E293B"/>
                           </a:solidFill>
@@ -12400,7 +13651,7 @@
                   </a:tcPr>
                 </a:tc>
               </a:tr>
-              <a:tr h="402336">
+              <a:tr h="329184">
                 <a:tc>
                   <a:txBody>
                     <a:bodyPr/>
@@ -12410,7 +13661,7 @@
                         <a:buNone/>
                       </a:pPr>
                       <a:r>
-                        <a:rPr lang="en-US" sz="1150" dirty="0">
+                        <a:rPr lang="en-US" sz="1100" dirty="0">
                           <a:solidFill>
                             <a:srgbClr val="1E293B"/>
                           </a:solidFill>
@@ -12478,7 +13729,7 @@
                         <a:buNone/>
                       </a:pPr>
                       <a:r>
-                        <a:rPr lang="en-US" sz="1150" dirty="0">
+                        <a:rPr lang="en-US" sz="1100" dirty="0">
                           <a:solidFill>
                             <a:srgbClr val="1E293B"/>
                           </a:solidFill>
@@ -12546,7 +13797,7 @@
                         <a:buNone/>
                       </a:pPr>
                       <a:r>
-                        <a:rPr lang="en-US" sz="1150" dirty="0">
+                        <a:rPr lang="en-US" sz="1100" dirty="0">
                           <a:solidFill>
                             <a:srgbClr val="1E293B"/>
                           </a:solidFill>
@@ -12614,7 +13865,7 @@
                         <a:buNone/>
                       </a:pPr>
                       <a:r>
-                        <a:rPr lang="en-US" sz="1150" dirty="0">
+                        <a:rPr lang="en-US" sz="1100" dirty="0">
                           <a:solidFill>
                             <a:srgbClr val="1E293B"/>
                           </a:solidFill>
@@ -12674,7 +13925,7 @@
                   </a:tcPr>
                 </a:tc>
               </a:tr>
-              <a:tr h="402336">
+              <a:tr h="329184">
                 <a:tc>
                   <a:txBody>
                     <a:bodyPr/>
@@ -12684,7 +13935,7 @@
                         <a:buNone/>
                       </a:pPr>
                       <a:r>
-                        <a:rPr lang="en-US" sz="1150" dirty="0">
+                        <a:rPr lang="en-US" sz="1100" dirty="0">
                           <a:solidFill>
                             <a:srgbClr val="1E293B"/>
                           </a:solidFill>
@@ -12752,7 +14003,7 @@
                         <a:buNone/>
                       </a:pPr>
                       <a:r>
-                        <a:rPr lang="en-US" sz="1150" dirty="0">
+                        <a:rPr lang="en-US" sz="1100" dirty="0">
                           <a:solidFill>
                             <a:srgbClr val="1E293B"/>
                           </a:solidFill>
@@ -12820,7 +14071,7 @@
                         <a:buNone/>
                       </a:pPr>
                       <a:r>
-                        <a:rPr lang="en-US" sz="1150" dirty="0">
+                        <a:rPr lang="en-US" sz="1100" dirty="0">
                           <a:solidFill>
                             <a:srgbClr val="1E293B"/>
                           </a:solidFill>
@@ -12888,7 +14139,7 @@
                         <a:buNone/>
                       </a:pPr>
                       <a:r>
-                        <a:rPr lang="en-US" sz="1150" dirty="0">
+                        <a:rPr lang="en-US" sz="1100" dirty="0">
                           <a:solidFill>
                             <a:srgbClr val="1E293B"/>
                           </a:solidFill>
@@ -12948,7 +14199,7 @@
                   </a:tcPr>
                 </a:tc>
               </a:tr>
-              <a:tr h="402336">
+              <a:tr h="329184">
                 <a:tc>
                   <a:txBody>
                     <a:bodyPr/>
@@ -12958,7 +14209,7 @@
                         <a:buNone/>
                       </a:pPr>
                       <a:r>
-                        <a:rPr lang="en-US" sz="1150" dirty="0">
+                        <a:rPr lang="en-US" sz="1100" dirty="0">
                           <a:solidFill>
                             <a:srgbClr val="1E293B"/>
                           </a:solidFill>
@@ -13026,7 +14277,7 @@
                         <a:buNone/>
                       </a:pPr>
                       <a:r>
-                        <a:rPr lang="en-US" sz="1150" dirty="0">
+                        <a:rPr lang="en-US" sz="1100" dirty="0">
                           <a:solidFill>
                             <a:srgbClr val="1E293B"/>
                           </a:solidFill>
@@ -13094,7 +14345,7 @@
                         <a:buNone/>
                       </a:pPr>
                       <a:r>
-                        <a:rPr lang="en-US" sz="1150" dirty="0">
+                        <a:rPr lang="en-US" sz="1100" dirty="0">
                           <a:solidFill>
                             <a:srgbClr val="1E293B"/>
                           </a:solidFill>
@@ -13162,7 +14413,7 @@
                         <a:buNone/>
                       </a:pPr>
                       <a:r>
-                        <a:rPr lang="en-US" sz="1150" dirty="0">
+                        <a:rPr lang="en-US" sz="1100" dirty="0">
                           <a:solidFill>
                             <a:srgbClr val="1E293B"/>
                           </a:solidFill>
@@ -13222,7 +14473,7 @@
                   </a:tcPr>
                 </a:tc>
               </a:tr>
-              <a:tr h="402336">
+              <a:tr h="329184">
                 <a:tc>
                   <a:txBody>
                     <a:bodyPr/>
@@ -13232,7 +14483,7 @@
                         <a:buNone/>
                       </a:pPr>
                       <a:r>
-                        <a:rPr lang="en-US" sz="1150" dirty="0">
+                        <a:rPr lang="en-US" sz="1100" dirty="0">
                           <a:solidFill>
                             <a:srgbClr val="1E293B"/>
                           </a:solidFill>
@@ -13300,7 +14551,7 @@
                         <a:buNone/>
                       </a:pPr>
                       <a:r>
-                        <a:rPr lang="en-US" sz="1150" dirty="0">
+                        <a:rPr lang="en-US" sz="1100" dirty="0">
                           <a:solidFill>
                             <a:srgbClr val="1E293B"/>
                           </a:solidFill>
@@ -13368,7 +14619,7 @@
                         <a:buNone/>
                       </a:pPr>
                       <a:r>
-                        <a:rPr lang="en-US" sz="1150" dirty="0">
+                        <a:rPr lang="en-US" sz="1100" dirty="0">
                           <a:solidFill>
                             <a:srgbClr val="1E293B"/>
                           </a:solidFill>
@@ -13436,7 +14687,7 @@
                         <a:buNone/>
                       </a:pPr>
                       <a:r>
-                        <a:rPr lang="en-US" sz="1150" dirty="0">
+                        <a:rPr lang="en-US" sz="1100" dirty="0">
                           <a:solidFill>
                             <a:srgbClr val="1E293B"/>
                           </a:solidFill>
@@ -13445,6 +14696,554 @@
                           <a:cs typeface="Prompt" pitchFamily="34" charset="-120"/>
                         </a:rPr>
                         <a:t>แสดงผลเท่านั้น</a:t>
+                      </a:r>
+                      <a:endParaRPr lang="en-US" sz="1150" dirty="0">
+                        <a:latin typeface="Prompt" charset="0"/>
+                        <a:ea typeface="Prompt" charset="0"/>
+                        <a:cs typeface="Prompt" charset="0"/>
+                      </a:endParaRPr>
+                    </a:p>
+                  </a:txBody>
+                  <a:tcPr marL="76200" marR="76200" marT="38100" marB="38100" anchor="ctr">
+                    <a:lnL w="6350" cap="flat" cmpd="sng" algn="ctr">
+                      <a:solidFill>
+                        <a:srgbClr val="D5DEE6"/>
+                      </a:solidFill>
+                      <a:prstDash val="solid"/>
+                      <a:round/>
+                      <a:headEnd type="none" w="med" len="med"/>
+                      <a:tailEnd type="none" w="med" len="med"/>
+                    </a:lnL>
+                    <a:lnR w="6350" cap="flat" cmpd="sng" algn="ctr">
+                      <a:solidFill>
+                        <a:srgbClr val="D5DEE6"/>
+                      </a:solidFill>
+                      <a:prstDash val="solid"/>
+                      <a:round/>
+                      <a:headEnd type="none" w="med" len="med"/>
+                      <a:tailEnd type="none" w="med" len="med"/>
+                    </a:lnR>
+                    <a:lnT w="6350" cap="flat" cmpd="sng" algn="ctr">
+                      <a:solidFill>
+                        <a:srgbClr val="D5DEE6"/>
+                      </a:solidFill>
+                      <a:prstDash val="solid"/>
+                      <a:round/>
+                      <a:headEnd type="none" w="med" len="med"/>
+                      <a:tailEnd type="none" w="med" len="med"/>
+                    </a:lnT>
+                    <a:lnB w="6350" cap="flat" cmpd="sng" algn="ctr">
+                      <a:solidFill>
+                        <a:srgbClr val="D5DEE6"/>
+                      </a:solidFill>
+                      <a:prstDash val="solid"/>
+                      <a:round/>
+                      <a:headEnd type="none" w="med" len="med"/>
+                      <a:tailEnd type="none" w="med" len="med"/>
+                    </a:lnB>
+                    <a:solidFill>
+                      <a:srgbClr val="F7FAFC"/>
+                    </a:solidFill>
+                  </a:tcPr>
+                </a:tc>
+              </a:tr>
+              <a:tr h="329184">
+                <a:tc>
+                  <a:txBody>
+                    <a:bodyPr/>
+                    <a:lstStyle/>
+                    <a:p>
+                      <a:pPr indent="0" marL="0">
+                        <a:buNone/>
+                      </a:pPr>
+                      <a:r>
+                        <a:rPr lang="en-US" sz="1100" dirty="0">
+                          <a:solidFill>
+                            <a:srgbClr val="1E293B"/>
+                          </a:solidFill>
+                          <a:latin typeface="Prompt" pitchFamily="34" charset="0"/>
+                          <a:ea typeface="Prompt" pitchFamily="34" charset="-122"/>
+                          <a:cs typeface="Prompt" pitchFamily="34" charset="-120"/>
+                        </a:rPr>
+                        <a:t>ภาพเรดาร์ Sentinel-1</a:t>
+                      </a:r>
+                      <a:endParaRPr lang="en-US" sz="1150" dirty="0">
+                        <a:latin typeface="Prompt" charset="0"/>
+                        <a:ea typeface="Prompt" charset="0"/>
+                        <a:cs typeface="Prompt" charset="0"/>
+                      </a:endParaRPr>
+                    </a:p>
+                  </a:txBody>
+                  <a:tcPr marL="76200" marR="76200" marT="38100" marB="38100" anchor="ctr">
+                    <a:lnL w="6350" cap="flat" cmpd="sng" algn="ctr">
+                      <a:solidFill>
+                        <a:srgbClr val="D5DEE6"/>
+                      </a:solidFill>
+                      <a:prstDash val="solid"/>
+                      <a:round/>
+                      <a:headEnd type="none" w="med" len="med"/>
+                      <a:tailEnd type="none" w="med" len="med"/>
+                    </a:lnL>
+                    <a:lnR w="6350" cap="flat" cmpd="sng" algn="ctr">
+                      <a:solidFill>
+                        <a:srgbClr val="D5DEE6"/>
+                      </a:solidFill>
+                      <a:prstDash val="solid"/>
+                      <a:round/>
+                      <a:headEnd type="none" w="med" len="med"/>
+                      <a:tailEnd type="none" w="med" len="med"/>
+                    </a:lnR>
+                    <a:lnT w="6350" cap="flat" cmpd="sng" algn="ctr">
+                      <a:solidFill>
+                        <a:srgbClr val="D5DEE6"/>
+                      </a:solidFill>
+                      <a:prstDash val="solid"/>
+                      <a:round/>
+                      <a:headEnd type="none" w="med" len="med"/>
+                      <a:tailEnd type="none" w="med" len="med"/>
+                    </a:lnT>
+                    <a:lnB w="6350" cap="flat" cmpd="sng" algn="ctr">
+                      <a:solidFill>
+                        <a:srgbClr val="D5DEE6"/>
+                      </a:solidFill>
+                      <a:prstDash val="solid"/>
+                      <a:round/>
+                      <a:headEnd type="none" w="med" len="med"/>
+                      <a:tailEnd type="none" w="med" len="med"/>
+                    </a:lnB>
+                    <a:solidFill>
+                      <a:srgbClr val="F7FAFC"/>
+                    </a:solidFill>
+                  </a:tcPr>
+                </a:tc>
+                <a:tc>
+                  <a:txBody>
+                    <a:bodyPr/>
+                    <a:lstStyle/>
+                    <a:p>
+                      <a:pPr indent="0" marL="0">
+                        <a:buNone/>
+                      </a:pPr>
+                      <a:r>
+                        <a:rPr lang="en-US" sz="1100" dirty="0">
+                          <a:solidFill>
+                            <a:srgbClr val="1E293B"/>
+                          </a:solidFill>
+                          <a:latin typeface="Prompt" pitchFamily="34" charset="0"/>
+                          <a:ea typeface="Prompt" pitchFamily="34" charset="-122"/>
+                          <a:cs typeface="Prompt" pitchFamily="34" charset="-120"/>
+                        </a:rPr>
+                        <a:t>Planetary Computer (RTC)</a:t>
+                      </a:r>
+                      <a:endParaRPr lang="en-US" sz="1150" dirty="0">
+                        <a:latin typeface="Prompt" charset="0"/>
+                        <a:ea typeface="Prompt" charset="0"/>
+                        <a:cs typeface="Prompt" charset="0"/>
+                      </a:endParaRPr>
+                    </a:p>
+                  </a:txBody>
+                  <a:tcPr marL="76200" marR="76200" marT="38100" marB="38100" anchor="ctr">
+                    <a:lnL w="6350" cap="flat" cmpd="sng" algn="ctr">
+                      <a:solidFill>
+                        <a:srgbClr val="D5DEE6"/>
+                      </a:solidFill>
+                      <a:prstDash val="solid"/>
+                      <a:round/>
+                      <a:headEnd type="none" w="med" len="med"/>
+                      <a:tailEnd type="none" w="med" len="med"/>
+                    </a:lnL>
+                    <a:lnR w="6350" cap="flat" cmpd="sng" algn="ctr">
+                      <a:solidFill>
+                        <a:srgbClr val="D5DEE6"/>
+                      </a:solidFill>
+                      <a:prstDash val="solid"/>
+                      <a:round/>
+                      <a:headEnd type="none" w="med" len="med"/>
+                      <a:tailEnd type="none" w="med" len="med"/>
+                    </a:lnR>
+                    <a:lnT w="6350" cap="flat" cmpd="sng" algn="ctr">
+                      <a:solidFill>
+                        <a:srgbClr val="D5DEE6"/>
+                      </a:solidFill>
+                      <a:prstDash val="solid"/>
+                      <a:round/>
+                      <a:headEnd type="none" w="med" len="med"/>
+                      <a:tailEnd type="none" w="med" len="med"/>
+                    </a:lnT>
+                    <a:lnB w="6350" cap="flat" cmpd="sng" algn="ctr">
+                      <a:solidFill>
+                        <a:srgbClr val="D5DEE6"/>
+                      </a:solidFill>
+                      <a:prstDash val="solid"/>
+                      <a:round/>
+                      <a:headEnd type="none" w="med" len="med"/>
+                      <a:tailEnd type="none" w="med" len="med"/>
+                    </a:lnB>
+                    <a:solidFill>
+                      <a:srgbClr val="F7FAFC"/>
+                    </a:solidFill>
+                  </a:tcPr>
+                </a:tc>
+                <a:tc>
+                  <a:txBody>
+                    <a:bodyPr/>
+                    <a:lstStyle/>
+                    <a:p>
+                      <a:pPr indent="0" marL="0">
+                        <a:buNone/>
+                      </a:pPr>
+                      <a:r>
+                        <a:rPr lang="en-US" sz="1100" dirty="0">
+                          <a:solidFill>
+                            <a:srgbClr val="1E293B"/>
+                          </a:solidFill>
+                          <a:latin typeface="Prompt" pitchFamily="34" charset="0"/>
+                          <a:ea typeface="Prompt" pitchFamily="34" charset="-122"/>
+                          <a:cs typeface="Prompt" pitchFamily="34" charset="-120"/>
+                        </a:rPr>
+                        <a:t>6–12 วัน</a:t>
+                      </a:r>
+                      <a:endParaRPr lang="en-US" sz="1150" dirty="0">
+                        <a:latin typeface="Prompt" charset="0"/>
+                        <a:ea typeface="Prompt" charset="0"/>
+                        <a:cs typeface="Prompt" charset="0"/>
+                      </a:endParaRPr>
+                    </a:p>
+                  </a:txBody>
+                  <a:tcPr marL="76200" marR="76200" marT="38100" marB="38100" anchor="ctr">
+                    <a:lnL w="6350" cap="flat" cmpd="sng" algn="ctr">
+                      <a:solidFill>
+                        <a:srgbClr val="D5DEE6"/>
+                      </a:solidFill>
+                      <a:prstDash val="solid"/>
+                      <a:round/>
+                      <a:headEnd type="none" w="med" len="med"/>
+                      <a:tailEnd type="none" w="med" len="med"/>
+                    </a:lnL>
+                    <a:lnR w="6350" cap="flat" cmpd="sng" algn="ctr">
+                      <a:solidFill>
+                        <a:srgbClr val="D5DEE6"/>
+                      </a:solidFill>
+                      <a:prstDash val="solid"/>
+                      <a:round/>
+                      <a:headEnd type="none" w="med" len="med"/>
+                      <a:tailEnd type="none" w="med" len="med"/>
+                    </a:lnR>
+                    <a:lnT w="6350" cap="flat" cmpd="sng" algn="ctr">
+                      <a:solidFill>
+                        <a:srgbClr val="D5DEE6"/>
+                      </a:solidFill>
+                      <a:prstDash val="solid"/>
+                      <a:round/>
+                      <a:headEnd type="none" w="med" len="med"/>
+                      <a:tailEnd type="none" w="med" len="med"/>
+                    </a:lnT>
+                    <a:lnB w="6350" cap="flat" cmpd="sng" algn="ctr">
+                      <a:solidFill>
+                        <a:srgbClr val="D5DEE6"/>
+                      </a:solidFill>
+                      <a:prstDash val="solid"/>
+                      <a:round/>
+                      <a:headEnd type="none" w="med" len="med"/>
+                      <a:tailEnd type="none" w="med" len="med"/>
+                    </a:lnB>
+                    <a:solidFill>
+                      <a:srgbClr val="F7FAFC"/>
+                    </a:solidFill>
+                  </a:tcPr>
+                </a:tc>
+                <a:tc>
+                  <a:txBody>
+                    <a:bodyPr/>
+                    <a:lstStyle/>
+                    <a:p>
+                      <a:pPr indent="0" marL="0">
+                        <a:buNone/>
+                      </a:pPr>
+                      <a:r>
+                        <a:rPr lang="en-US" sz="1100" dirty="0">
+                          <a:solidFill>
+                            <a:srgbClr val="1E293B"/>
+                          </a:solidFill>
+                          <a:latin typeface="Prompt" pitchFamily="34" charset="0"/>
+                          <a:ea typeface="Prompt" pitchFamily="34" charset="-122"/>
+                          <a:cs typeface="Prompt" pitchFamily="34" charset="-120"/>
+                        </a:rPr>
+                        <a:t>พื้นที่ท่วมจริง · สอบเทียบ</a:t>
+                      </a:r>
+                      <a:endParaRPr lang="en-US" sz="1150" dirty="0">
+                        <a:latin typeface="Prompt" charset="0"/>
+                        <a:ea typeface="Prompt" charset="0"/>
+                        <a:cs typeface="Prompt" charset="0"/>
+                      </a:endParaRPr>
+                    </a:p>
+                  </a:txBody>
+                  <a:tcPr marL="76200" marR="76200" marT="38100" marB="38100" anchor="ctr">
+                    <a:lnL w="6350" cap="flat" cmpd="sng" algn="ctr">
+                      <a:solidFill>
+                        <a:srgbClr val="D5DEE6"/>
+                      </a:solidFill>
+                      <a:prstDash val="solid"/>
+                      <a:round/>
+                      <a:headEnd type="none" w="med" len="med"/>
+                      <a:tailEnd type="none" w="med" len="med"/>
+                    </a:lnL>
+                    <a:lnR w="6350" cap="flat" cmpd="sng" algn="ctr">
+                      <a:solidFill>
+                        <a:srgbClr val="D5DEE6"/>
+                      </a:solidFill>
+                      <a:prstDash val="solid"/>
+                      <a:round/>
+                      <a:headEnd type="none" w="med" len="med"/>
+                      <a:tailEnd type="none" w="med" len="med"/>
+                    </a:lnR>
+                    <a:lnT w="6350" cap="flat" cmpd="sng" algn="ctr">
+                      <a:solidFill>
+                        <a:srgbClr val="D5DEE6"/>
+                      </a:solidFill>
+                      <a:prstDash val="solid"/>
+                      <a:round/>
+                      <a:headEnd type="none" w="med" len="med"/>
+                      <a:tailEnd type="none" w="med" len="med"/>
+                    </a:lnT>
+                    <a:lnB w="6350" cap="flat" cmpd="sng" algn="ctr">
+                      <a:solidFill>
+                        <a:srgbClr val="D5DEE6"/>
+                      </a:solidFill>
+                      <a:prstDash val="solid"/>
+                      <a:round/>
+                      <a:headEnd type="none" w="med" len="med"/>
+                      <a:tailEnd type="none" w="med" len="med"/>
+                    </a:lnB>
+                    <a:solidFill>
+                      <a:srgbClr val="F7FAFC"/>
+                    </a:solidFill>
+                  </a:tcPr>
+                </a:tc>
+              </a:tr>
+              <a:tr h="329184">
+                <a:tc>
+                  <a:txBody>
+                    <a:bodyPr/>
+                    <a:lstStyle/>
+                    <a:p>
+                      <a:pPr indent="0" marL="0">
+                        <a:buNone/>
+                      </a:pPr>
+                      <a:r>
+                        <a:rPr lang="en-US" sz="1100" dirty="0">
+                          <a:solidFill>
+                            <a:srgbClr val="1E293B"/>
+                          </a:solidFill>
+                          <a:latin typeface="Prompt" pitchFamily="34" charset="0"/>
+                          <a:ea typeface="Prompt" pitchFamily="34" charset="-122"/>
+                          <a:cs typeface="Prompt" pitchFamily="34" charset="-120"/>
+                        </a:rPr>
+                        <a:t>ฝนย้อนหลัง ERA5 · ขอบเขตตำบล</a:t>
+                      </a:r>
+                      <a:endParaRPr lang="en-US" sz="1150" dirty="0">
+                        <a:latin typeface="Prompt" charset="0"/>
+                        <a:ea typeface="Prompt" charset="0"/>
+                        <a:cs typeface="Prompt" charset="0"/>
+                      </a:endParaRPr>
+                    </a:p>
+                  </a:txBody>
+                  <a:tcPr marL="76200" marR="76200" marT="38100" marB="38100" anchor="ctr">
+                    <a:lnL w="6350" cap="flat" cmpd="sng" algn="ctr">
+                      <a:solidFill>
+                        <a:srgbClr val="D5DEE6"/>
+                      </a:solidFill>
+                      <a:prstDash val="solid"/>
+                      <a:round/>
+                      <a:headEnd type="none" w="med" len="med"/>
+                      <a:tailEnd type="none" w="med" len="med"/>
+                    </a:lnL>
+                    <a:lnR w="6350" cap="flat" cmpd="sng" algn="ctr">
+                      <a:solidFill>
+                        <a:srgbClr val="D5DEE6"/>
+                      </a:solidFill>
+                      <a:prstDash val="solid"/>
+                      <a:round/>
+                      <a:headEnd type="none" w="med" len="med"/>
+                      <a:tailEnd type="none" w="med" len="med"/>
+                    </a:lnR>
+                    <a:lnT w="6350" cap="flat" cmpd="sng" algn="ctr">
+                      <a:solidFill>
+                        <a:srgbClr val="D5DEE6"/>
+                      </a:solidFill>
+                      <a:prstDash val="solid"/>
+                      <a:round/>
+                      <a:headEnd type="none" w="med" len="med"/>
+                      <a:tailEnd type="none" w="med" len="med"/>
+                    </a:lnT>
+                    <a:lnB w="6350" cap="flat" cmpd="sng" algn="ctr">
+                      <a:solidFill>
+                        <a:srgbClr val="D5DEE6"/>
+                      </a:solidFill>
+                      <a:prstDash val="solid"/>
+                      <a:round/>
+                      <a:headEnd type="none" w="med" len="med"/>
+                      <a:tailEnd type="none" w="med" len="med"/>
+                    </a:lnB>
+                    <a:solidFill>
+                      <a:srgbClr val="F7FAFC"/>
+                    </a:solidFill>
+                  </a:tcPr>
+                </a:tc>
+                <a:tc>
+                  <a:txBody>
+                    <a:bodyPr/>
+                    <a:lstStyle/>
+                    <a:p>
+                      <a:pPr indent="0" marL="0">
+                        <a:buNone/>
+                      </a:pPr>
+                      <a:r>
+                        <a:rPr lang="en-US" sz="1100" dirty="0">
+                          <a:solidFill>
+                            <a:srgbClr val="1E293B"/>
+                          </a:solidFill>
+                          <a:latin typeface="Prompt" pitchFamily="34" charset="0"/>
+                          <a:ea typeface="Prompt" pitchFamily="34" charset="-122"/>
+                          <a:cs typeface="Prompt" pitchFamily="34" charset="-120"/>
+                        </a:rPr>
+                        <a:t>Open-Meteo archive · OCHA COD-AB</a:t>
+                      </a:r>
+                      <a:endParaRPr lang="en-US" sz="1150" dirty="0">
+                        <a:latin typeface="Prompt" charset="0"/>
+                        <a:ea typeface="Prompt" charset="0"/>
+                        <a:cs typeface="Prompt" charset="0"/>
+                      </a:endParaRPr>
+                    </a:p>
+                  </a:txBody>
+                  <a:tcPr marL="76200" marR="76200" marT="38100" marB="38100" anchor="ctr">
+                    <a:lnL w="6350" cap="flat" cmpd="sng" algn="ctr">
+                      <a:solidFill>
+                        <a:srgbClr val="D5DEE6"/>
+                      </a:solidFill>
+                      <a:prstDash val="solid"/>
+                      <a:round/>
+                      <a:headEnd type="none" w="med" len="med"/>
+                      <a:tailEnd type="none" w="med" len="med"/>
+                    </a:lnL>
+                    <a:lnR w="6350" cap="flat" cmpd="sng" algn="ctr">
+                      <a:solidFill>
+                        <a:srgbClr val="D5DEE6"/>
+                      </a:solidFill>
+                      <a:prstDash val="solid"/>
+                      <a:round/>
+                      <a:headEnd type="none" w="med" len="med"/>
+                      <a:tailEnd type="none" w="med" len="med"/>
+                    </a:lnR>
+                    <a:lnT w="6350" cap="flat" cmpd="sng" algn="ctr">
+                      <a:solidFill>
+                        <a:srgbClr val="D5DEE6"/>
+                      </a:solidFill>
+                      <a:prstDash val="solid"/>
+                      <a:round/>
+                      <a:headEnd type="none" w="med" len="med"/>
+                      <a:tailEnd type="none" w="med" len="med"/>
+                    </a:lnT>
+                    <a:lnB w="6350" cap="flat" cmpd="sng" algn="ctr">
+                      <a:solidFill>
+                        <a:srgbClr val="D5DEE6"/>
+                      </a:solidFill>
+                      <a:prstDash val="solid"/>
+                      <a:round/>
+                      <a:headEnd type="none" w="med" len="med"/>
+                      <a:tailEnd type="none" w="med" len="med"/>
+                    </a:lnB>
+                    <a:solidFill>
+                      <a:srgbClr val="F7FAFC"/>
+                    </a:solidFill>
+                  </a:tcPr>
+                </a:tc>
+                <a:tc>
+                  <a:txBody>
+                    <a:bodyPr/>
+                    <a:lstStyle/>
+                    <a:p>
+                      <a:pPr indent="0" marL="0">
+                        <a:buNone/>
+                      </a:pPr>
+                      <a:r>
+                        <a:rPr lang="en-US" sz="1100" dirty="0">
+                          <a:solidFill>
+                            <a:srgbClr val="1E293B"/>
+                          </a:solidFill>
+                          <a:latin typeface="Prompt" pitchFamily="34" charset="0"/>
+                          <a:ea typeface="Prompt" pitchFamily="34" charset="-122"/>
+                          <a:cs typeface="Prompt" pitchFamily="34" charset="-120"/>
+                        </a:rPr>
+                        <a:t>รายชั่วโมง / คงที่</a:t>
+                      </a:r>
+                      <a:endParaRPr lang="en-US" sz="1150" dirty="0">
+                        <a:latin typeface="Prompt" charset="0"/>
+                        <a:ea typeface="Prompt" charset="0"/>
+                        <a:cs typeface="Prompt" charset="0"/>
+                      </a:endParaRPr>
+                    </a:p>
+                  </a:txBody>
+                  <a:tcPr marL="76200" marR="76200" marT="38100" marB="38100" anchor="ctr">
+                    <a:lnL w="6350" cap="flat" cmpd="sng" algn="ctr">
+                      <a:solidFill>
+                        <a:srgbClr val="D5DEE6"/>
+                      </a:solidFill>
+                      <a:prstDash val="solid"/>
+                      <a:round/>
+                      <a:headEnd type="none" w="med" len="med"/>
+                      <a:tailEnd type="none" w="med" len="med"/>
+                    </a:lnL>
+                    <a:lnR w="6350" cap="flat" cmpd="sng" algn="ctr">
+                      <a:solidFill>
+                        <a:srgbClr val="D5DEE6"/>
+                      </a:solidFill>
+                      <a:prstDash val="solid"/>
+                      <a:round/>
+                      <a:headEnd type="none" w="med" len="med"/>
+                      <a:tailEnd type="none" w="med" len="med"/>
+                    </a:lnR>
+                    <a:lnT w="6350" cap="flat" cmpd="sng" algn="ctr">
+                      <a:solidFill>
+                        <a:srgbClr val="D5DEE6"/>
+                      </a:solidFill>
+                      <a:prstDash val="solid"/>
+                      <a:round/>
+                      <a:headEnd type="none" w="med" len="med"/>
+                      <a:tailEnd type="none" w="med" len="med"/>
+                    </a:lnT>
+                    <a:lnB w="6350" cap="flat" cmpd="sng" algn="ctr">
+                      <a:solidFill>
+                        <a:srgbClr val="D5DEE6"/>
+                      </a:solidFill>
+                      <a:prstDash val="solid"/>
+                      <a:round/>
+                      <a:headEnd type="none" w="med" len="med"/>
+                      <a:tailEnd type="none" w="med" len="med"/>
+                    </a:lnB>
+                    <a:solidFill>
+                      <a:srgbClr val="F7FAFC"/>
+                    </a:solidFill>
+                  </a:tcPr>
+                </a:tc>
+                <a:tc>
+                  <a:txBody>
+                    <a:bodyPr/>
+                    <a:lstStyle/>
+                    <a:p>
+                      <a:pPr indent="0" marL="0">
+                        <a:buNone/>
+                      </a:pPr>
+                      <a:r>
+                        <a:rPr lang="en-US" sz="1100" dirty="0">
+                          <a:solidFill>
+                            <a:srgbClr val="1E293B"/>
+                          </a:solidFill>
+                          <a:latin typeface="Prompt" pitchFamily="34" charset="0"/>
+                          <a:ea typeface="Prompt" pitchFamily="34" charset="-122"/>
+                          <a:cs typeface="Prompt" pitchFamily="34" charset="-120"/>
+                        </a:rPr>
+                        <a:t>จำลองเหตุการณ์ 2564/65/68</a:t>
                       </a:r>
                       <a:endParaRPr lang="en-US" sz="1150" dirty="0">
                         <a:latin typeface="Prompt" charset="0"/>
@@ -13723,6 +15522,10 @@
             <a:prstDash val="solid"/>
           </a:ln>
         </p:spPr>
+        <p:txBody>
+          <a:bodyPr/>
+          <a:p/>
+        </p:txBody>
       </p:sp>
       <p:sp>
         <p:nvSpPr>
@@ -13748,6 +15551,10 @@
             <a:prstDash val="solid"/>
           </a:ln>
         </p:spPr>
+        <p:txBody>
+          <a:bodyPr/>
+          <a:p/>
+        </p:txBody>
       </p:sp>
       <p:sp>
         <p:nvSpPr>
@@ -13898,6 +15705,10 @@
             <a:prstDash val="solid"/>
           </a:ln>
         </p:spPr>
+        <p:txBody>
+          <a:bodyPr/>
+          <a:p/>
+        </p:txBody>
       </p:sp>
       <p:sp>
         <p:nvSpPr>
@@ -13923,6 +15734,10 @@
             <a:prstDash val="solid"/>
           </a:ln>
         </p:spPr>
+        <p:txBody>
+          <a:bodyPr/>
+          <a:p/>
+        </p:txBody>
       </p:sp>
       <p:sp>
         <p:nvSpPr>
@@ -13996,7 +15811,7 @@
                 <a:ea typeface="Prompt" pitchFamily="34" charset="-122"/>
                 <a:cs typeface="Prompt" pitchFamily="34" charset="-120"/>
               </a:rPr>
-              <a:t>ยังไม่ได้ validate กับน้ำท่วมจริง</a:t>
+              <a:t>เทียบน้ำท่วมจริงแล้วบางส่วน</a:t>
             </a:r>
             <a:endParaRPr lang="en-US" sz="1500" dirty="0"/>
           </a:p>
@@ -14041,7 +15856,7 @@
                 <a:ea typeface="Prompt" pitchFamily="34" charset="-122"/>
                 <a:cs typeface="Prompt" pitchFamily="34" charset="-120"/>
               </a:rPr>
-              <a:t>สอบเทียบกับแบบจำลอง 2D เหตุการณ์เดียว ยังไม่เทียบ GISTDA หรือข้อมูลภาคสนาม</a:t>
+              <a:t>ท่าตะโกเทียบ Sentinel-1 แล้ว (CSI ~0.5) · น้ำมาช้ากว่าจริง 1–2 สัปดาห์ · ทั้งจังหวัดยังรอข้อมูลสะสม</a:t>
             </a:r>
             <a:endParaRPr lang="en-US" sz="1450" dirty="0"/>
           </a:p>
@@ -14890,6 +16705,10 @@
             <a:prstDash val="solid"/>
           </a:ln>
         </p:spPr>
+        <p:txBody>
+          <a:bodyPr/>
+          <a:p/>
+        </p:txBody>
       </p:sp>
       <p:sp>
         <p:nvSpPr>
@@ -14963,7 +16782,7 @@
                 <a:ea typeface="Prompt" pitchFamily="34" charset="-122"/>
                 <a:cs typeface="Prompt" pitchFamily="34" charset="-120"/>
               </a:rPr>
-              <a:t>Validate กับน้ำท่วมจริง</a:t>
+              <a:t>ขยายการเทียบน้ำท่วมจริง</a:t>
             </a:r>
             <a:endParaRPr lang="en-US" sz="1700" dirty="0"/>
           </a:p>
@@ -14980,7 +16799,7 @@
                 <a:ea typeface="Prompt" pitchFamily="34" charset="-122"/>
                 <a:cs typeface="Prompt" pitchFamily="34" charset="-120"/>
               </a:rPr>
-              <a:t>ขอ GISTDA API key แล้วเพิ่มพื้นที่ท่วมจากดาวเทียมเป็นเป้าหมายการสอบเทียบ</a:t>
+              <a:t>ใส่น้ำไหลเข้าจากเหนือ (Y.17/N.7A) + ระดับบึงบอระเพ็ด/ประตูน้ำ ชป. · สะสม Sentinel-1 ทั้งจังหวัด</a:t>
             </a:r>
             <a:endParaRPr lang="en-US" sz="1700" dirty="0"/>
           </a:p>
@@ -15463,6 +17282,1351 @@
               <a:t>GSMaP/IMERG หรือเรดาร์กรมอุตุฯ แทนฝนแบบจำลองช่วงย้อนหลัง</a:t>
             </a:r>
             <a:endParaRPr lang="en-US" sz="1700" dirty="0"/>
+          </a:p>
+        </p:txBody>
+      </p:sp>
+    </p:spTree>
+  </p:cSld>
+  <p:clrMapOvr>
+    <a:masterClrMapping/>
+  </p:clrMapOvr>
+</p:sld>
+</file>
+
+<file path=ppt/slides/slide18.xml><?xml version="1.0" encoding="utf-8"?>
+<p:sld xmlns:a="http://schemas.openxmlformats.org/drawingml/2006/main" xmlns:p="http://schemas.openxmlformats.org/presentationml/2006/main" xmlns:r="http://schemas.openxmlformats.org/officeDocument/2006/relationships">
+  <p:cSld>
+    <p:bg>
+      <p:bgPr>
+        <a:solidFill>
+          <a:srgbClr val="FFFFFF"/>
+        </a:solidFill>
+      </p:bgPr>
+    </p:bg>
+    <p:spTree>
+      <p:nvGrpSpPr>
+        <p:cNvPr id="1" name=""/>
+        <p:cNvGrpSpPr/>
+        <p:nvPr/>
+      </p:nvGrpSpPr>
+      <p:grpSpPr/>
+      <p:sp>
+        <p:nvSpPr>
+          <p:cNvPr id="25" name="Slide Number Placeholder 0"/>
+          <p:cNvSpPr>
+            <a:spLocks noGrp="1"/>
+          </p:cNvSpPr>
+          <p:nvPr>
+            <p:ph type="sldNum" sz="quarter" idx="4294967295"/>
+          </p:nvPr>
+        </p:nvSpPr>
+        <p:spPr>
+          <a:xfrm>
+            <a:off x="11277295" y="6419088"/>
+            <a:ext cx="457200" cy="274320"/>
+          </a:xfrm>
+          <a:prstGeom prst="rect">
+            <a:avLst/>
+          </a:prstGeom>
+          <a:extLst>
+            <a:ext uri="{C572A759-6A51-4108-AA02-DFA0A04FC94B}">
+              <ma14:wrappingTextBoxFlag xmlns:ma14="http://schemas.microsoft.com/office/mac/drawingml/2011/main" val="0"/>
+            </a:ext>
+          </a:extLst>
+        </p:spPr>
+        <p:txBody>
+          <a:bodyPr/>
+          <a:lstStyle>
+            <a:lvl1pPr>
+              <a:defRPr sz="900">
+                <a:solidFill>
+                  <a:srgbClr val="64748B"/>
+                </a:solidFill>
+                <a:latin typeface="Prompt"/>
+                <a:ea typeface="Prompt"/>
+                <a:cs typeface="Prompt"/>
+              </a:defRPr>
+            </a:lvl1pPr>
+          </a:lstStyle>
+          <a:p>
+            <a:pPr algn="r"/>
+            <a:fld id="{F7021451-1387-4CA6-816F-3879F97B5CBC}" type="slidenum">
+              <a:rPr b="0" lang="en-US"/>
+              <a:t>2</a:t>
+            </a:fld>
+            <a:endParaRPr lang="en-US"/>
+          </a:p>
+        </p:txBody>
+      </p:sp>
+      <p:sp>
+        <p:nvSpPr>
+          <p:cNvPr id="26" name="TextBox 25"/>
+          <p:cNvSpPr txBox="1"/>
+          <p:nvPr/>
+        </p:nvSpPr>
+        <p:spPr>
+          <a:xfrm>
+            <a:off x="548640" y="347472"/>
+            <a:ext cx="8229600" cy="274320"/>
+          </a:xfrm>
+          <a:prstGeom prst="rect">
+            <a:avLst/>
+          </a:prstGeom>
+          <a:noFill/>
+        </p:spPr>
+        <p:txBody>
+          <a:bodyPr wrap="square" lIns="0" rIns="0" tIns="0" bIns="0" anchor="t">
+            <a:spAutoFit/>
+          </a:bodyPr>
+          <a:lstStyle/>
+          <a:p>
+            <a:pPr algn="l"/>
+            <a:r>
+              <a:rPr sz="1200" b="1" i="0">
+                <a:solidFill>
+                  <a:srgbClr val="1B998B"/>
+                </a:solidFill>
+                <a:latin typeface="Prompt"/>
+                <a:ea typeface="Prompt"/>
+                <a:cs typeface="Prompt"/>
+              </a:rPr>
+              <a:t>แอ่งท่าตะโก · น้ำท่วมจริง</a:t>
+            </a:r>
+          </a:p>
+        </p:txBody>
+      </p:sp>
+      <p:sp>
+        <p:nvSpPr>
+          <p:cNvPr id="27" name="TextBox 26"/>
+          <p:cNvSpPr txBox="1"/>
+          <p:nvPr/>
+        </p:nvSpPr>
+        <p:spPr>
+          <a:xfrm>
+            <a:off x="548640" y="621792"/>
+            <a:ext cx="11091672" cy="685800"/>
+          </a:xfrm>
+          <a:prstGeom prst="rect">
+            <a:avLst/>
+          </a:prstGeom>
+          <a:noFill/>
+        </p:spPr>
+        <p:txBody>
+          <a:bodyPr wrap="square" lIns="0" rIns="0" tIns="0" bIns="0" anchor="ctr">
+            <a:spAutoFit/>
+          </a:bodyPr>
+          <a:lstStyle/>
+          <a:p>
+            <a:pPr algn="l"/>
+            <a:r>
+              <a:rPr sz="2600" b="1" i="0">
+                <a:solidFill>
+                  <a:srgbClr val="0B3C5D"/>
+                </a:solidFill>
+                <a:latin typeface="Prompt"/>
+                <a:ea typeface="Prompt"/>
+                <a:cs typeface="Prompt"/>
+              </a:rPr>
+              <a:t>แอ่งท่าตะโก: ท่วมซ้ำซากนาน 2–3 เดือน — ภาพเรดาร์ 9 ปียืนยัน</a:t>
+            </a:r>
+          </a:p>
+        </p:txBody>
+      </p:sp>
+      <p:sp>
+        <p:nvSpPr>
+          <p:cNvPr id="28" name="Rounded Rectangle 27"/>
+          <p:cNvSpPr/>
+          <p:nvPr/>
+        </p:nvSpPr>
+        <p:spPr>
+          <a:xfrm>
+            <a:off x="493776" y="1426464"/>
+            <a:ext cx="5093208" cy="4471416"/>
+          </a:xfrm>
+          <a:prstGeom prst="roundRect">
+            <a:avLst>
+              <a:gd name="adj" fmla="val 1600"/>
+            </a:avLst>
+          </a:prstGeom>
+          <a:solidFill>
+            <a:srgbClr val="FFFFFF"/>
+          </a:solidFill>
+          <a:ln w="9525">
+            <a:solidFill>
+              <a:srgbClr val="D5DEE6"/>
+            </a:solidFill>
+          </a:ln>
+          <a:effectLst/>
+        </p:spPr>
+        <p:style>
+          <a:lnRef idx="1">
+            <a:schemeClr val="accent1"/>
+          </a:lnRef>
+          <a:fillRef idx="3">
+            <a:schemeClr val="accent1"/>
+          </a:fillRef>
+          <a:effectRef idx="2">
+            <a:schemeClr val="accent1"/>
+          </a:effectRef>
+          <a:fontRef idx="minor">
+            <a:schemeClr val="lt1"/>
+          </a:fontRef>
+        </p:style>
+        <p:txBody>
+          <a:bodyPr rtlCol="0" anchor="ctr"/>
+          <a:lstStyle/>
+          <a:p/>
+        </p:txBody>
+      </p:sp>
+      <p:pic>
+        <p:nvPicPr>
+          <p:cNvPr id="29" name="Picture 28" descr="map_s1freq.png"/>
+          <p:cNvPicPr>
+            <a:picLocks noChangeAspect="1"/>
+          </p:cNvPicPr>
+          <p:nvPr/>
+        </p:nvPicPr>
+        <p:blipFill>
+          <a:blip r:embed="rId2"/>
+          <a:stretch>
+            <a:fillRect/>
+          </a:stretch>
+        </p:blipFill>
+        <p:spPr>
+          <a:xfrm>
+            <a:off x="548640" y="1481328"/>
+            <a:ext cx="4983480" cy="4361688"/>
+          </a:xfrm>
+          <a:prstGeom prst="rect">
+            <a:avLst/>
+          </a:prstGeom>
+        </p:spPr>
+      </p:pic>
+      <p:sp>
+        <p:nvSpPr>
+          <p:cNvPr id="30" name="TextBox 29"/>
+          <p:cNvSpPr txBox="1"/>
+          <p:nvPr/>
+        </p:nvSpPr>
+        <p:spPr>
+          <a:xfrm>
+            <a:off x="548640" y="5916168"/>
+            <a:ext cx="4983480" cy="274320"/>
+          </a:xfrm>
+          <a:prstGeom prst="rect">
+            <a:avLst/>
+          </a:prstGeom>
+          <a:noFill/>
+        </p:spPr>
+        <p:txBody>
+          <a:bodyPr wrap="square" lIns="0" rIns="0" tIns="0" bIns="0" anchor="t">
+            <a:spAutoFit/>
+          </a:bodyPr>
+          <a:lstStyle/>
+          <a:p>
+            <a:pPr algn="l"/>
+            <a:r>
+              <a:rPr sz="1000" b="0" i="0">
+                <a:solidFill>
+                  <a:srgbClr val="64748B"/>
+                </a:solidFill>
+                <a:latin typeface="Prompt"/>
+                <a:ea typeface="Prompt"/>
+                <a:cs typeface="Prompt"/>
+              </a:rPr>
+              <a:t>จำนวนปีที่ท่วมต่อเนื่อง 30 วันขึ้นไป (Sentinel-1 ปี 2560–2568)</a:t>
+            </a:r>
+          </a:p>
+        </p:txBody>
+      </p:sp>
+      <p:graphicFrame>
+        <p:nvGraphicFramePr>
+          <p:cNvPr id="31" name="Chart 30"/>
+          <p:cNvGraphicFramePr>
+            <a:graphicFrameLocks noGrp="1"/>
+          </p:cNvGraphicFramePr>
+          <p:nvPr/>
+        </p:nvGraphicFramePr>
+        <p:xfrm>
+          <a:off x="5897880" y="1371600"/>
+          <a:ext cx="5760720" cy="2697480"/>
+        </p:xfrm>
+        <a:graphic>
+          <a:graphicData uri="http://schemas.openxmlformats.org/drawingml/2006/chart">
+            <c:chart xmlns:c="http://schemas.openxmlformats.org/drawingml/2006/chart" r:id="rId3"/>
+          </a:graphicData>
+        </a:graphic>
+      </p:graphicFrame>
+      <p:sp>
+        <p:nvSpPr>
+          <p:cNvPr id="32" name="Rounded Rectangle 31"/>
+          <p:cNvSpPr/>
+          <p:nvPr/>
+        </p:nvSpPr>
+        <p:spPr>
+          <a:xfrm>
+            <a:off x="5897880" y="4224528"/>
+            <a:ext cx="1828800" cy="1417320"/>
+          </a:xfrm>
+          <a:prstGeom prst="roundRect">
+            <a:avLst>
+              <a:gd name="adj" fmla="val 6000"/>
+            </a:avLst>
+          </a:prstGeom>
+          <a:solidFill>
+            <a:srgbClr val="EEF5F9"/>
+          </a:solidFill>
+          <a:ln>
+            <a:noFill/>
+          </a:ln>
+          <a:effectLst/>
+        </p:spPr>
+        <p:style>
+          <a:lnRef idx="1">
+            <a:schemeClr val="accent1"/>
+          </a:lnRef>
+          <a:fillRef idx="3">
+            <a:schemeClr val="accent1"/>
+          </a:fillRef>
+          <a:effectRef idx="2">
+            <a:schemeClr val="accent1"/>
+          </a:effectRef>
+          <a:fontRef idx="minor">
+            <a:schemeClr val="lt1"/>
+          </a:fontRef>
+        </p:style>
+        <p:txBody>
+          <a:bodyPr rtlCol="0" anchor="ctr"/>
+          <a:lstStyle/>
+          <a:p/>
+        </p:txBody>
+      </p:sp>
+      <p:sp>
+        <p:nvSpPr>
+          <p:cNvPr id="33" name="TextBox 32"/>
+          <p:cNvSpPr txBox="1"/>
+          <p:nvPr/>
+        </p:nvSpPr>
+        <p:spPr>
+          <a:xfrm>
+            <a:off x="6099048" y="4352544"/>
+            <a:ext cx="1463040" cy="637794"/>
+          </a:xfrm>
+          <a:prstGeom prst="rect">
+            <a:avLst/>
+          </a:prstGeom>
+          <a:noFill/>
+        </p:spPr>
+        <p:txBody>
+          <a:bodyPr wrap="square" lIns="0" rIns="0" tIns="0" bIns="0" anchor="ctr">
+            <a:spAutoFit/>
+          </a:bodyPr>
+          <a:lstStyle/>
+          <a:p>
+            <a:pPr algn="l"/>
+            <a:r>
+              <a:rPr sz="2600" b="1" i="0">
+                <a:solidFill>
+                  <a:srgbClr val="0B3C5D"/>
+                </a:solidFill>
+                <a:latin typeface="Prompt"/>
+                <a:ea typeface="Prompt"/>
+                <a:cs typeface="Prompt"/>
+              </a:rPr>
+              <a:t>173</a:t>
+            </a:r>
+            <a:r>
+              <a:rPr sz="1300" b="0" i="0">
+                <a:solidFill>
+                  <a:srgbClr val="64748B"/>
+                </a:solidFill>
+                <a:latin typeface="Prompt"/>
+                <a:ea typeface="Prompt"/>
+                <a:cs typeface="Prompt"/>
+              </a:rPr>
+              <a:t>  ตร.กม.</a:t>
+            </a:r>
+          </a:p>
+        </p:txBody>
+      </p:sp>
+      <p:sp>
+        <p:nvSpPr>
+          <p:cNvPr id="34" name="TextBox 33"/>
+          <p:cNvSpPr txBox="1"/>
+          <p:nvPr/>
+        </p:nvSpPr>
+        <p:spPr>
+          <a:xfrm>
+            <a:off x="6099048" y="5018684"/>
+            <a:ext cx="1463040" cy="637794"/>
+          </a:xfrm>
+          <a:prstGeom prst="rect">
+            <a:avLst/>
+          </a:prstGeom>
+          <a:noFill/>
+        </p:spPr>
+        <p:txBody>
+          <a:bodyPr wrap="square" lIns="0" rIns="0" tIns="0" bIns="0" anchor="t">
+            <a:spAutoFit/>
+          </a:bodyPr>
+          <a:lstStyle/>
+          <a:p>
+            <a:pPr algn="l"/>
+            <a:r>
+              <a:rPr sz="1150" b="0" i="0">
+                <a:solidFill>
+                  <a:srgbClr val="1E293B"/>
+                </a:solidFill>
+                <a:latin typeface="Prompt"/>
+                <a:ea typeface="Prompt"/>
+                <a:cs typeface="Prompt"/>
+              </a:rPr>
+              <a:t>ท่วม 30 วันขึ้นไป อย่างน้อย 3 ใน 9 ปี</a:t>
+            </a:r>
+          </a:p>
+        </p:txBody>
+      </p:sp>
+      <p:sp>
+        <p:nvSpPr>
+          <p:cNvPr id="35" name="Rounded Rectangle 34"/>
+          <p:cNvSpPr/>
+          <p:nvPr/>
+        </p:nvSpPr>
+        <p:spPr>
+          <a:xfrm>
+            <a:off x="7863840" y="4224528"/>
+            <a:ext cx="1828800" cy="1417320"/>
+          </a:xfrm>
+          <a:prstGeom prst="roundRect">
+            <a:avLst>
+              <a:gd name="adj" fmla="val 6000"/>
+            </a:avLst>
+          </a:prstGeom>
+          <a:solidFill>
+            <a:srgbClr val="EEF5F9"/>
+          </a:solidFill>
+          <a:ln>
+            <a:noFill/>
+          </a:ln>
+          <a:effectLst/>
+        </p:spPr>
+        <p:style>
+          <a:lnRef idx="1">
+            <a:schemeClr val="accent1"/>
+          </a:lnRef>
+          <a:fillRef idx="3">
+            <a:schemeClr val="accent1"/>
+          </a:fillRef>
+          <a:effectRef idx="2">
+            <a:schemeClr val="accent1"/>
+          </a:effectRef>
+          <a:fontRef idx="minor">
+            <a:schemeClr val="lt1"/>
+          </a:fontRef>
+        </p:style>
+        <p:txBody>
+          <a:bodyPr rtlCol="0" anchor="ctr"/>
+          <a:lstStyle/>
+          <a:p/>
+        </p:txBody>
+      </p:sp>
+      <p:sp>
+        <p:nvSpPr>
+          <p:cNvPr id="36" name="TextBox 35"/>
+          <p:cNvSpPr txBox="1"/>
+          <p:nvPr/>
+        </p:nvSpPr>
+        <p:spPr>
+          <a:xfrm>
+            <a:off x="8065008" y="4352544"/>
+            <a:ext cx="1463040" cy="637794"/>
+          </a:xfrm>
+          <a:prstGeom prst="rect">
+            <a:avLst/>
+          </a:prstGeom>
+          <a:noFill/>
+        </p:spPr>
+        <p:txBody>
+          <a:bodyPr wrap="square" lIns="0" rIns="0" tIns="0" bIns="0" anchor="ctr">
+            <a:spAutoFit/>
+          </a:bodyPr>
+          <a:lstStyle/>
+          <a:p>
+            <a:pPr algn="l"/>
+            <a:r>
+              <a:rPr sz="2600" b="1" i="0">
+                <a:solidFill>
+                  <a:srgbClr val="D64545"/>
+                </a:solidFill>
+                <a:latin typeface="Prompt"/>
+                <a:ea typeface="Prompt"/>
+                <a:cs typeface="Prompt"/>
+              </a:rPr>
+              <a:t>70</a:t>
+            </a:r>
+            <a:r>
+              <a:rPr sz="1300" b="0" i="0">
+                <a:solidFill>
+                  <a:srgbClr val="64748B"/>
+                </a:solidFill>
+                <a:latin typeface="Prompt"/>
+                <a:ea typeface="Prompt"/>
+                <a:cs typeface="Prompt"/>
+              </a:rPr>
+              <a:t>  ตร.กม.</a:t>
+            </a:r>
+          </a:p>
+        </p:txBody>
+      </p:sp>
+      <p:sp>
+        <p:nvSpPr>
+          <p:cNvPr id="37" name="TextBox 36"/>
+          <p:cNvSpPr txBox="1"/>
+          <p:nvPr/>
+        </p:nvSpPr>
+        <p:spPr>
+          <a:xfrm>
+            <a:off x="8065008" y="5018684"/>
+            <a:ext cx="1463040" cy="637794"/>
+          </a:xfrm>
+          <a:prstGeom prst="rect">
+            <a:avLst/>
+          </a:prstGeom>
+          <a:noFill/>
+        </p:spPr>
+        <p:txBody>
+          <a:bodyPr wrap="square" lIns="0" rIns="0" tIns="0" bIns="0" anchor="t">
+            <a:spAutoFit/>
+          </a:bodyPr>
+          <a:lstStyle/>
+          <a:p>
+            <a:pPr algn="l"/>
+            <a:r>
+              <a:rPr sz="1150" b="0" i="0">
+                <a:solidFill>
+                  <a:srgbClr val="1E293B"/>
+                </a:solidFill>
+                <a:latin typeface="Prompt"/>
+                <a:ea typeface="Prompt"/>
+                <a:cs typeface="Prompt"/>
+              </a:rPr>
+              <a:t>ทับกฤช · ท่วมนานมัธยฐาน 72–84 วัน</a:t>
+            </a:r>
+          </a:p>
+        </p:txBody>
+      </p:sp>
+      <p:sp>
+        <p:nvSpPr>
+          <p:cNvPr id="38" name="Rounded Rectangle 37"/>
+          <p:cNvSpPr/>
+          <p:nvPr/>
+        </p:nvSpPr>
+        <p:spPr>
+          <a:xfrm>
+            <a:off x="9829800" y="4224528"/>
+            <a:ext cx="1828800" cy="1417320"/>
+          </a:xfrm>
+          <a:prstGeom prst="roundRect">
+            <a:avLst>
+              <a:gd name="adj" fmla="val 6000"/>
+            </a:avLst>
+          </a:prstGeom>
+          <a:solidFill>
+            <a:srgbClr val="EEF5F9"/>
+          </a:solidFill>
+          <a:ln>
+            <a:noFill/>
+          </a:ln>
+          <a:effectLst/>
+        </p:spPr>
+        <p:style>
+          <a:lnRef idx="1">
+            <a:schemeClr val="accent1"/>
+          </a:lnRef>
+          <a:fillRef idx="3">
+            <a:schemeClr val="accent1"/>
+          </a:fillRef>
+          <a:effectRef idx="2">
+            <a:schemeClr val="accent1"/>
+          </a:effectRef>
+          <a:fontRef idx="minor">
+            <a:schemeClr val="lt1"/>
+          </a:fontRef>
+        </p:style>
+        <p:txBody>
+          <a:bodyPr rtlCol="0" anchor="ctr"/>
+          <a:lstStyle/>
+          <a:p/>
+        </p:txBody>
+      </p:sp>
+      <p:sp>
+        <p:nvSpPr>
+          <p:cNvPr id="39" name="TextBox 38"/>
+          <p:cNvSpPr txBox="1"/>
+          <p:nvPr/>
+        </p:nvSpPr>
+        <p:spPr>
+          <a:xfrm>
+            <a:off x="10030968" y="4352544"/>
+            <a:ext cx="1463040" cy="637794"/>
+          </a:xfrm>
+          <a:prstGeom prst="rect">
+            <a:avLst/>
+          </a:prstGeom>
+          <a:noFill/>
+        </p:spPr>
+        <p:txBody>
+          <a:bodyPr wrap="square" lIns="0" rIns="0" tIns="0" bIns="0" anchor="ctr">
+            <a:spAutoFit/>
+          </a:bodyPr>
+          <a:lstStyle/>
+          <a:p>
+            <a:pPr algn="l"/>
+            <a:r>
+              <a:rPr sz="2600" b="1" i="0">
+                <a:solidFill>
+                  <a:srgbClr val="1B998B"/>
+                </a:solidFill>
+                <a:latin typeface="Prompt"/>
+                <a:ea typeface="Prompt"/>
+                <a:cs typeface="Prompt"/>
+              </a:rPr>
+              <a:t>4</a:t>
+            </a:r>
+            <a:r>
+              <a:rPr sz="1300" b="0" i="0">
+                <a:solidFill>
+                  <a:srgbClr val="64748B"/>
+                </a:solidFill>
+                <a:latin typeface="Prompt"/>
+                <a:ea typeface="Prompt"/>
+                <a:cs typeface="Prompt"/>
+              </a:rPr>
+              <a:t>  ตำบล</a:t>
+            </a:r>
+          </a:p>
+        </p:txBody>
+      </p:sp>
+      <p:sp>
+        <p:nvSpPr>
+          <p:cNvPr id="40" name="TextBox 39"/>
+          <p:cNvSpPr txBox="1"/>
+          <p:nvPr/>
+        </p:nvSpPr>
+        <p:spPr>
+          <a:xfrm>
+            <a:off x="10030968" y="5018684"/>
+            <a:ext cx="1463040" cy="637794"/>
+          </a:xfrm>
+          <a:prstGeom prst="rect">
+            <a:avLst/>
+          </a:prstGeom>
+          <a:noFill/>
+        </p:spPr>
+        <p:txBody>
+          <a:bodyPr wrap="square" lIns="0" rIns="0" tIns="0" bIns="0" anchor="t">
+            <a:spAutoFit/>
+          </a:bodyPr>
+          <a:lstStyle/>
+          <a:p>
+            <a:pPr algn="l"/>
+            <a:r>
+              <a:rPr sz="1150" b="0" i="0">
+                <a:solidFill>
+                  <a:srgbClr val="1E293B"/>
+                </a:solidFill>
+                <a:latin typeface="Prompt"/>
+                <a:ea typeface="Prompt"/>
+                <a:cs typeface="Prompt"/>
+              </a:rPr>
+              <a:t>รอบบึงบอระเพ็ดท่วมนานที่สุด</a:t>
+            </a:r>
+          </a:p>
+        </p:txBody>
+      </p:sp>
+      <p:sp>
+        <p:nvSpPr>
+          <p:cNvPr id="41" name="TextBox 40"/>
+          <p:cNvSpPr txBox="1"/>
+          <p:nvPr/>
+        </p:nvSpPr>
+        <p:spPr>
+          <a:xfrm>
+            <a:off x="5897880" y="5760720"/>
+            <a:ext cx="5760720" cy="502920"/>
+          </a:xfrm>
+          <a:prstGeom prst="rect">
+            <a:avLst/>
+          </a:prstGeom>
+          <a:noFill/>
+        </p:spPr>
+        <p:txBody>
+          <a:bodyPr wrap="square" lIns="0" rIns="0" tIns="0" bIns="0" anchor="t">
+            <a:spAutoFit/>
+          </a:bodyPr>
+          <a:lstStyle/>
+          <a:p>
+            <a:pPr algn="l"/>
+            <a:r>
+              <a:rPr sz="1100" b="0" i="0">
+                <a:solidFill>
+                  <a:srgbClr val="1E293B"/>
+                </a:solidFill>
+                <a:latin typeface="Prompt"/>
+                <a:ea typeface="Prompt"/>
+                <a:cs typeface="Prompt"/>
+              </a:rPr>
+              <a:t>ทับกฤช วังมหากร พนมเศษ พระนอน (+ ไผ่สิงห์) · ตำบลตอนในท่าตะโกแทบไม่ท่วมนาน</a:t>
+            </a:r>
+          </a:p>
+        </p:txBody>
+      </p:sp>
+      <p:sp>
+        <p:nvSpPr>
+          <p:cNvPr id="42" name="TextBox 41"/>
+          <p:cNvSpPr txBox="1"/>
+          <p:nvPr/>
+        </p:nvSpPr>
+        <p:spPr>
+          <a:xfrm>
+            <a:off x="548640" y="6400800"/>
+            <a:ext cx="10332720" cy="274320"/>
+          </a:xfrm>
+          <a:prstGeom prst="rect">
+            <a:avLst/>
+          </a:prstGeom>
+          <a:noFill/>
+        </p:spPr>
+        <p:txBody>
+          <a:bodyPr wrap="square" lIns="0" rIns="0" tIns="0" bIns="0" anchor="t">
+            <a:spAutoFit/>
+          </a:bodyPr>
+          <a:lstStyle/>
+          <a:p>
+            <a:pPr algn="l"/>
+            <a:r>
+              <a:rPr sz="900" b="0" i="0">
+                <a:solidFill>
+                  <a:srgbClr val="64748B"/>
+                </a:solidFill>
+                <a:latin typeface="Prompt"/>
+                <a:ea typeface="Prompt"/>
+                <a:cs typeface="Prompt"/>
+              </a:rPr>
+              <a:t>ที่มา: Sentinel-1 RTC VV (Microsoft Planetary Computer) วงโคจร 62 · 148 ภาพ ส.ค.–15 ธ.ค. ปี 2560–2568 · น้ำใต้ต้นข้าว/พืชสูงตรวจไม่พบ (อาจนับต่ำ) · ระยะเวลาถูกตัดที่ 15 ธ.ค.</a:t>
+            </a:r>
+          </a:p>
+        </p:txBody>
+      </p:sp>
+    </p:spTree>
+  </p:cSld>
+  <p:clrMapOvr>
+    <a:masterClrMapping/>
+  </p:clrMapOvr>
+</p:sld>
+</file>
+
+<file path=ppt/slides/slide19.xml><?xml version="1.0" encoding="utf-8"?>
+<p:sld xmlns:a="http://schemas.openxmlformats.org/drawingml/2006/main" xmlns:p="http://schemas.openxmlformats.org/presentationml/2006/main" xmlns:r="http://schemas.openxmlformats.org/officeDocument/2006/relationships">
+  <p:cSld>
+    <p:bg>
+      <p:bgPr>
+        <a:solidFill>
+          <a:srgbClr val="FFFFFF"/>
+        </a:solidFill>
+      </p:bgPr>
+    </p:bg>
+    <p:spTree>
+      <p:nvGrpSpPr>
+        <p:cNvPr id="1" name=""/>
+        <p:cNvGrpSpPr/>
+        <p:nvPr/>
+      </p:nvGrpSpPr>
+      <p:grpSpPr/>
+      <p:sp>
+        <p:nvSpPr>
+          <p:cNvPr id="25" name="Slide Number Placeholder 0"/>
+          <p:cNvSpPr>
+            <a:spLocks noGrp="1"/>
+          </p:cNvSpPr>
+          <p:nvPr>
+            <p:ph type="sldNum" sz="quarter" idx="4294967295"/>
+          </p:nvPr>
+        </p:nvSpPr>
+        <p:spPr>
+          <a:xfrm>
+            <a:off x="11277295" y="6419088"/>
+            <a:ext cx="457200" cy="274320"/>
+          </a:xfrm>
+          <a:prstGeom prst="rect">
+            <a:avLst/>
+          </a:prstGeom>
+          <a:extLst>
+            <a:ext uri="{C572A759-6A51-4108-AA02-DFA0A04FC94B}">
+              <ma14:wrappingTextBoxFlag xmlns:ma14="http://schemas.microsoft.com/office/mac/drawingml/2011/main" val="0"/>
+            </a:ext>
+          </a:extLst>
+        </p:spPr>
+        <p:txBody>
+          <a:bodyPr/>
+          <a:lstStyle>
+            <a:lvl1pPr>
+              <a:defRPr sz="900">
+                <a:solidFill>
+                  <a:srgbClr val="64748B"/>
+                </a:solidFill>
+                <a:latin typeface="Prompt"/>
+                <a:ea typeface="Prompt"/>
+                <a:cs typeface="Prompt"/>
+              </a:defRPr>
+            </a:lvl1pPr>
+          </a:lstStyle>
+          <a:p>
+            <a:pPr algn="r"/>
+            <a:fld id="{F7021451-1387-4CA6-816F-3879F97B5CBC}" type="slidenum">
+              <a:rPr b="0" lang="en-US"/>
+              <a:t>2</a:t>
+            </a:fld>
+            <a:endParaRPr lang="en-US"/>
+          </a:p>
+        </p:txBody>
+      </p:sp>
+      <p:sp>
+        <p:nvSpPr>
+          <p:cNvPr id="26" name="TextBox 25"/>
+          <p:cNvSpPr txBox="1"/>
+          <p:nvPr/>
+        </p:nvSpPr>
+        <p:spPr>
+          <a:xfrm>
+            <a:off x="548640" y="347472"/>
+            <a:ext cx="8229600" cy="274320"/>
+          </a:xfrm>
+          <a:prstGeom prst="rect">
+            <a:avLst/>
+          </a:prstGeom>
+          <a:noFill/>
+        </p:spPr>
+        <p:txBody>
+          <a:bodyPr wrap="square" lIns="0" rIns="0" tIns="0" bIns="0" anchor="t">
+            <a:spAutoFit/>
+          </a:bodyPr>
+          <a:lstStyle/>
+          <a:p>
+            <a:pPr algn="l"/>
+            <a:r>
+              <a:rPr sz="1200" b="1" i="0">
+                <a:solidFill>
+                  <a:srgbClr val="1B998B"/>
+                </a:solidFill>
+                <a:latin typeface="Prompt"/>
+                <a:ea typeface="Prompt"/>
+                <a:cs typeface="Prompt"/>
+              </a:rPr>
+              <a:t>แอ่งท่าตะโก · สาเหตุ</a:t>
+            </a:r>
+          </a:p>
+        </p:txBody>
+      </p:sp>
+      <p:sp>
+        <p:nvSpPr>
+          <p:cNvPr id="27" name="TextBox 26"/>
+          <p:cNvSpPr txBox="1"/>
+          <p:nvPr/>
+        </p:nvSpPr>
+        <p:spPr>
+          <a:xfrm>
+            <a:off x="548640" y="621792"/>
+            <a:ext cx="11091672" cy="685800"/>
+          </a:xfrm>
+          <a:prstGeom prst="rect">
+            <a:avLst/>
+          </a:prstGeom>
+          <a:noFill/>
+        </p:spPr>
+        <p:txBody>
+          <a:bodyPr wrap="square" lIns="0" rIns="0" tIns="0" bIns="0" anchor="ctr">
+            <a:spAutoFit/>
+          </a:bodyPr>
+          <a:lstStyle/>
+          <a:p>
+            <a:pPr algn="l"/>
+            <a:r>
+              <a:rPr sz="2600" b="1" i="0">
+                <a:solidFill>
+                  <a:srgbClr val="0B3C5D"/>
+                </a:solidFill>
+                <a:latin typeface="Prompt"/>
+                <a:ea typeface="Prompt"/>
+                <a:cs typeface="Prompt"/>
+              </a:rPr>
+              <a:t>สาเหตุหลักคือน้ำจากแม่น้ำ ไม่ใช่ฝนที่ตกในแอ่ง</a:t>
+            </a:r>
+          </a:p>
+        </p:txBody>
+      </p:sp>
+      <p:graphicFrame>
+        <p:nvGraphicFramePr>
+          <p:cNvPr id="28" name="Chart 27"/>
+          <p:cNvGraphicFramePr>
+            <a:graphicFrameLocks noGrp="1"/>
+          </p:cNvGraphicFramePr>
+          <p:nvPr/>
+        </p:nvGraphicFramePr>
+        <p:xfrm>
+          <a:off x="457200" y="1371600"/>
+          <a:ext cx="6035040" cy="3246120"/>
+        </p:xfrm>
+        <a:graphic>
+          <a:graphicData uri="http://schemas.openxmlformats.org/drawingml/2006/chart">
+            <c:chart xmlns:c="http://schemas.openxmlformats.org/drawingml/2006/chart" r:id="rId2"/>
+          </a:graphicData>
+        </a:graphic>
+      </p:graphicFrame>
+      <p:sp>
+        <p:nvSpPr>
+          <p:cNvPr id="29" name="Rounded Rectangle 28"/>
+          <p:cNvSpPr/>
+          <p:nvPr/>
+        </p:nvSpPr>
+        <p:spPr>
+          <a:xfrm>
+            <a:off x="548640" y="4754880"/>
+            <a:ext cx="5852160" cy="1481328"/>
+          </a:xfrm>
+          <a:prstGeom prst="roundRect">
+            <a:avLst>
+              <a:gd name="adj" fmla="val 6000"/>
+            </a:avLst>
+          </a:prstGeom>
+          <a:solidFill>
+            <a:srgbClr val="FFF4E5"/>
+          </a:solidFill>
+          <a:ln>
+            <a:noFill/>
+          </a:ln>
+          <a:effectLst/>
+        </p:spPr>
+        <p:style>
+          <a:lnRef idx="1">
+            <a:schemeClr val="accent1"/>
+          </a:lnRef>
+          <a:fillRef idx="3">
+            <a:schemeClr val="accent1"/>
+          </a:fillRef>
+          <a:effectRef idx="2">
+            <a:schemeClr val="accent1"/>
+          </a:effectRef>
+          <a:fontRef idx="minor">
+            <a:schemeClr val="lt1"/>
+          </a:fontRef>
+        </p:style>
+        <p:txBody>
+          <a:bodyPr rtlCol="0" anchor="ctr"/>
+          <a:lstStyle/>
+          <a:p/>
+        </p:txBody>
+      </p:sp>
+      <p:sp>
+        <p:nvSpPr>
+          <p:cNvPr id="30" name="TextBox 29"/>
+          <p:cNvSpPr txBox="1"/>
+          <p:nvPr/>
+        </p:nvSpPr>
+        <p:spPr>
+          <a:xfrm>
+            <a:off x="749808" y="4846320"/>
+            <a:ext cx="5486400" cy="365760"/>
+          </a:xfrm>
+          <a:prstGeom prst="rect">
+            <a:avLst/>
+          </a:prstGeom>
+          <a:noFill/>
+        </p:spPr>
+        <p:txBody>
+          <a:bodyPr wrap="square" lIns="0" rIns="0" tIns="0" bIns="0" anchor="t">
+            <a:spAutoFit/>
+          </a:bodyPr>
+          <a:lstStyle/>
+          <a:p>
+            <a:pPr algn="l"/>
+            <a:r>
+              <a:rPr sz="1300" b="1" i="0">
+                <a:solidFill>
+                  <a:srgbClr val="0B3C5D"/>
+                </a:solidFill>
+                <a:latin typeface="Prompt"/>
+                <a:ea typeface="Prompt"/>
+                <a:cs typeface="Prompt"/>
+              </a:rPr>
+              <a:t>ตรงกับที่ดาวเทียมเห็นท่วมนานแค่ไหน (สัดส่วนที่จับได้ · POD)</a:t>
+            </a:r>
+          </a:p>
+        </p:txBody>
+      </p:sp>
+      <p:sp>
+        <p:nvSpPr>
+          <p:cNvPr id="31" name="TextBox 30"/>
+          <p:cNvSpPr txBox="1"/>
+          <p:nvPr/>
+        </p:nvSpPr>
+        <p:spPr>
+          <a:xfrm>
+            <a:off x="749808" y="5257800"/>
+            <a:ext cx="1783080" cy="502920"/>
+          </a:xfrm>
+          <a:prstGeom prst="rect">
+            <a:avLst/>
+          </a:prstGeom>
+          <a:noFill/>
+        </p:spPr>
+        <p:txBody>
+          <a:bodyPr wrap="square" lIns="0" rIns="0" tIns="0" bIns="0" anchor="t">
+            <a:spAutoFit/>
+          </a:bodyPr>
+          <a:lstStyle/>
+          <a:p>
+            <a:pPr algn="l"/>
+            <a:r>
+              <a:rPr sz="2600" b="1" i="0">
+                <a:solidFill>
+                  <a:srgbClr val="A3B3C2"/>
+                </a:solidFill>
+                <a:latin typeface="Prompt"/>
+                <a:ea typeface="Prompt"/>
+                <a:cs typeface="Prompt"/>
+              </a:rPr>
+              <a:t>0.29</a:t>
+            </a:r>
+          </a:p>
+        </p:txBody>
+      </p:sp>
+      <p:sp>
+        <p:nvSpPr>
+          <p:cNvPr id="32" name="TextBox 31"/>
+          <p:cNvSpPr txBox="1"/>
+          <p:nvPr/>
+        </p:nvSpPr>
+        <p:spPr>
+          <a:xfrm>
+            <a:off x="749808" y="5760720"/>
+            <a:ext cx="1783080" cy="365760"/>
+          </a:xfrm>
+          <a:prstGeom prst="rect">
+            <a:avLst/>
+          </a:prstGeom>
+          <a:noFill/>
+        </p:spPr>
+        <p:txBody>
+          <a:bodyPr wrap="square" lIns="0" rIns="0" tIns="0" bIns="0" anchor="t">
+            <a:spAutoFit/>
+          </a:bodyPr>
+          <a:lstStyle/>
+          <a:p>
+            <a:pPr algn="l"/>
+            <a:r>
+              <a:rPr sz="1100" b="0" i="0">
+                <a:solidFill>
+                  <a:srgbClr val="1E293B"/>
+                </a:solidFill>
+                <a:latin typeface="Prompt"/>
+                <a:ea typeface="Prompt"/>
+                <a:cs typeface="Prompt"/>
+              </a:rPr>
+              <a:t>C ฝนอย่างเดียว</a:t>
+            </a:r>
+          </a:p>
+        </p:txBody>
+      </p:sp>
+      <p:sp>
+        <p:nvSpPr>
+          <p:cNvPr id="33" name="TextBox 32"/>
+          <p:cNvSpPr txBox="1"/>
+          <p:nvPr/>
+        </p:nvSpPr>
+        <p:spPr>
+          <a:xfrm>
+            <a:off x="2624327" y="5257800"/>
+            <a:ext cx="1783080" cy="502920"/>
+          </a:xfrm>
+          <a:prstGeom prst="rect">
+            <a:avLst/>
+          </a:prstGeom>
+          <a:noFill/>
+        </p:spPr>
+        <p:txBody>
+          <a:bodyPr wrap="square" lIns="0" rIns="0" tIns="0" bIns="0" anchor="t">
+            <a:spAutoFit/>
+          </a:bodyPr>
+          <a:lstStyle/>
+          <a:p>
+            <a:pPr algn="l"/>
+            <a:r>
+              <a:rPr sz="2600" b="1" i="0">
+                <a:solidFill>
+                  <a:srgbClr val="1B998B"/>
+                </a:solidFill>
+                <a:latin typeface="Prompt"/>
+                <a:ea typeface="Prompt"/>
+                <a:cs typeface="Prompt"/>
+              </a:rPr>
+              <a:t>0.42</a:t>
+            </a:r>
+          </a:p>
+        </p:txBody>
+      </p:sp>
+      <p:sp>
+        <p:nvSpPr>
+          <p:cNvPr id="34" name="TextBox 33"/>
+          <p:cNvSpPr txBox="1"/>
+          <p:nvPr/>
+        </p:nvSpPr>
+        <p:spPr>
+          <a:xfrm>
+            <a:off x="2624327" y="5760720"/>
+            <a:ext cx="1783080" cy="365760"/>
+          </a:xfrm>
+          <a:prstGeom prst="rect">
+            <a:avLst/>
+          </a:prstGeom>
+          <a:noFill/>
+        </p:spPr>
+        <p:txBody>
+          <a:bodyPr wrap="square" lIns="0" rIns="0" tIns="0" bIns="0" anchor="t">
+            <a:spAutoFit/>
+          </a:bodyPr>
+          <a:lstStyle/>
+          <a:p>
+            <a:pPr algn="l"/>
+            <a:r>
+              <a:rPr sz="1100" b="0" i="0">
+                <a:solidFill>
+                  <a:srgbClr val="1E293B"/>
+                </a:solidFill>
+                <a:latin typeface="Prompt"/>
+                <a:ea typeface="Prompt"/>
+                <a:cs typeface="Prompt"/>
+              </a:rPr>
+              <a:t>D + น้ำเต็มตลิ่ง</a:t>
+            </a:r>
+          </a:p>
+        </p:txBody>
+      </p:sp>
+      <p:sp>
+        <p:nvSpPr>
+          <p:cNvPr id="35" name="TextBox 34"/>
+          <p:cNvSpPr txBox="1"/>
+          <p:nvPr/>
+        </p:nvSpPr>
+        <p:spPr>
+          <a:xfrm>
+            <a:off x="4498848" y="5257800"/>
+            <a:ext cx="1783080" cy="502920"/>
+          </a:xfrm>
+          <a:prstGeom prst="rect">
+            <a:avLst/>
+          </a:prstGeom>
+          <a:noFill/>
+        </p:spPr>
+        <p:txBody>
+          <a:bodyPr wrap="square" lIns="0" rIns="0" tIns="0" bIns="0" anchor="t">
+            <a:spAutoFit/>
+          </a:bodyPr>
+          <a:lstStyle/>
+          <a:p>
+            <a:pPr algn="l"/>
+            <a:r>
+              <a:rPr sz="2600" b="1" i="0">
+                <a:solidFill>
+                  <a:srgbClr val="D64545"/>
+                </a:solidFill>
+                <a:latin typeface="Prompt"/>
+                <a:ea typeface="Prompt"/>
+                <a:cs typeface="Prompt"/>
+              </a:rPr>
+              <a:t>0.81</a:t>
+            </a:r>
+          </a:p>
+        </p:txBody>
+      </p:sp>
+      <p:sp>
+        <p:nvSpPr>
+          <p:cNvPr id="36" name="TextBox 35"/>
+          <p:cNvSpPr txBox="1"/>
+          <p:nvPr/>
+        </p:nvSpPr>
+        <p:spPr>
+          <a:xfrm>
+            <a:off x="4498848" y="5760720"/>
+            <a:ext cx="1783080" cy="365760"/>
+          </a:xfrm>
+          <a:prstGeom prst="rect">
+            <a:avLst/>
+          </a:prstGeom>
+          <a:noFill/>
+        </p:spPr>
+        <p:txBody>
+          <a:bodyPr wrap="square" lIns="0" rIns="0" tIns="0" bIns="0" anchor="t">
+            <a:spAutoFit/>
+          </a:bodyPr>
+          <a:lstStyle/>
+          <a:p>
+            <a:pPr algn="l"/>
+            <a:r>
+              <a:rPr sz="1100" b="0" i="0">
+                <a:solidFill>
+                  <a:srgbClr val="1E293B"/>
+                </a:solidFill>
+                <a:latin typeface="Prompt"/>
+                <a:ea typeface="Prompt"/>
+                <a:cs typeface="Prompt"/>
+              </a:rPr>
+              <a:t>E + น้ำล้นตลิ่ง</a:t>
+            </a:r>
+          </a:p>
+        </p:txBody>
+      </p:sp>
+      <p:sp>
+        <p:nvSpPr>
+          <p:cNvPr id="37" name="Rounded Rectangle 36"/>
+          <p:cNvSpPr/>
+          <p:nvPr/>
+        </p:nvSpPr>
+        <p:spPr>
+          <a:xfrm>
+            <a:off x="6757416" y="1426464"/>
+            <a:ext cx="4937760" cy="4334256"/>
+          </a:xfrm>
+          <a:prstGeom prst="roundRect">
+            <a:avLst>
+              <a:gd name="adj" fmla="val 1600"/>
+            </a:avLst>
+          </a:prstGeom>
+          <a:solidFill>
+            <a:srgbClr val="FFFFFF"/>
+          </a:solidFill>
+          <a:ln w="9525">
+            <a:solidFill>
+              <a:srgbClr val="D5DEE6"/>
+            </a:solidFill>
+          </a:ln>
+          <a:effectLst/>
+        </p:spPr>
+        <p:style>
+          <a:lnRef idx="1">
+            <a:schemeClr val="accent1"/>
+          </a:lnRef>
+          <a:fillRef idx="3">
+            <a:schemeClr val="accent1"/>
+          </a:fillRef>
+          <a:effectRef idx="2">
+            <a:schemeClr val="accent1"/>
+          </a:effectRef>
+          <a:fontRef idx="minor">
+            <a:schemeClr val="lt1"/>
+          </a:fontRef>
+        </p:style>
+        <p:txBody>
+          <a:bodyPr rtlCol="0" anchor="ctr"/>
+          <a:lstStyle/>
+          <a:p/>
+        </p:txBody>
+      </p:sp>
+      <p:pic>
+        <p:nvPicPr>
+          <p:cNvPr id="38" name="Picture 37" descr="map_scnE.png"/>
+          <p:cNvPicPr>
+            <a:picLocks noChangeAspect="1"/>
+          </p:cNvPicPr>
+          <p:nvPr/>
+        </p:nvPicPr>
+        <p:blipFill>
+          <a:blip r:embed="rId3"/>
+          <a:stretch>
+            <a:fillRect/>
+          </a:stretch>
+        </p:blipFill>
+        <p:spPr>
+          <a:xfrm>
+            <a:off x="6812280" y="1481328"/>
+            <a:ext cx="4828032" cy="4224528"/>
+          </a:xfrm>
+          <a:prstGeom prst="rect">
+            <a:avLst/>
+          </a:prstGeom>
+        </p:spPr>
+      </p:pic>
+      <p:sp>
+        <p:nvSpPr>
+          <p:cNvPr id="39" name="TextBox 38"/>
+          <p:cNvSpPr txBox="1"/>
+          <p:nvPr/>
+        </p:nvSpPr>
+        <p:spPr>
+          <a:xfrm>
+            <a:off x="6812280" y="5779008"/>
+            <a:ext cx="4828032" cy="502920"/>
+          </a:xfrm>
+          <a:prstGeom prst="rect">
+            <a:avLst/>
+          </a:prstGeom>
+          <a:noFill/>
+        </p:spPr>
+        <p:txBody>
+          <a:bodyPr wrap="square" lIns="0" rIns="0" tIns="0" bIns="0" anchor="t">
+            <a:spAutoFit/>
+          </a:bodyPr>
+          <a:lstStyle/>
+          <a:p>
+            <a:pPr algn="l"/>
+            <a:r>
+              <a:rPr sz="1050" b="0" i="0">
+                <a:solidFill>
+                  <a:srgbClr val="64748B"/>
+                </a:solidFill>
+                <a:latin typeface="Prompt"/>
+                <a:ea typeface="Prompt"/>
+                <a:cs typeface="Prompt"/>
+              </a:rPr>
+              <a:t>สถานการณ์ E: เวลาที่น้ำลดนับจากฝนเริ่มตก — น้ำขังเกิน 14 วันรวมที่ขอบบึงบอระเพ็ด (ทับกฤช พนมเศษ วังมหากร)</a:t>
+            </a:r>
+          </a:p>
+        </p:txBody>
+      </p:sp>
+      <p:sp>
+        <p:nvSpPr>
+          <p:cNvPr id="40" name="TextBox 39"/>
+          <p:cNvSpPr txBox="1"/>
+          <p:nvPr/>
+        </p:nvSpPr>
+        <p:spPr>
+          <a:xfrm>
+            <a:off x="548640" y="6400800"/>
+            <a:ext cx="10332720" cy="274320"/>
+          </a:xfrm>
+          <a:prstGeom prst="rect">
+            <a:avLst/>
+          </a:prstGeom>
+          <a:noFill/>
+        </p:spPr>
+        <p:txBody>
+          <a:bodyPr wrap="square" lIns="0" rIns="0" tIns="0" bIns="0" anchor="t">
+            <a:spAutoFit/>
+          </a:bodyPr>
+          <a:lstStyle/>
+          <a:p>
+            <a:pPr algn="l"/>
+            <a:r>
+              <a:rPr sz="900" b="0" i="0">
+                <a:solidFill>
+                  <a:srgbClr val="64748B"/>
+                </a:solidFill>
+                <a:latin typeface="Prompt"/>
+                <a:ea typeface="Prompt"/>
+                <a:cs typeface="Prompt"/>
+              </a:rPr>
+              <a:t>แบบจำลอง 2D 180 ม. แอ่งท่าตะโก (พื้นที่รับน้ำ 3,741 ตร.กม.) · เริ่มจากแห้ง คันนาเก็บน้ำ 100 มม. · เทียบกับพื้นที่ท่วมจริง 30 วันขึ้นไป อย่างน้อย 3 ปี (Sentinel-1)</a:t>
+            </a:r>
           </a:p>
         </p:txBody>
       </p:sp>
@@ -15602,6 +18766,10 @@
             <a:prstDash val="solid"/>
           </a:ln>
         </p:spPr>
+        <p:txBody>
+          <a:bodyPr/>
+          <a:p/>
+        </p:txBody>
       </p:sp>
       <p:sp>
         <p:nvSpPr>
@@ -15627,6 +18795,10 @@
             <a:prstDash val="solid"/>
           </a:ln>
         </p:spPr>
+        <p:txBody>
+          <a:bodyPr/>
+          <a:p/>
+        </p:txBody>
       </p:sp>
       <p:sp>
         <p:nvSpPr>
@@ -15745,7 +18917,7 @@
                 <a:ea typeface="Prompt" pitchFamily="34" charset="-122"/>
                 <a:cs typeface="Prompt" pitchFamily="34" charset="-120"/>
               </a:rPr>
-              <a:t>แผนที่ hex 1 ตร.กม. ครอบคลุมทั้งจังหวัด 9,721 hex และภาพ 2D ละเอียด 120 ม. ใน 3 จุดวิกฤต</a:t>
+              <a:t>แผนที่ hex 1 ตร.กม. ครอบคลุมทั้งจังหวัด 9,721 hex และภาพ 2D ละเอียดใน 3 จุดวิกฤต + แอ่งท่าตะโก</a:t>
             </a:r>
             <a:endParaRPr lang="en-US" sz="1500" dirty="0"/>
           </a:p>
@@ -16432,6 +19604,1189 @@
               <a:t>2</a:t>
             </a:fld>
             <a:endParaRPr lang="en-US"/>
+          </a:p>
+        </p:txBody>
+      </p:sp>
+    </p:spTree>
+  </p:cSld>
+  <p:clrMapOvr>
+    <a:masterClrMapping/>
+  </p:clrMapOvr>
+</p:sld>
+</file>
+
+<file path=ppt/slides/slide20.xml><?xml version="1.0" encoding="utf-8"?>
+<p:sld xmlns:a="http://schemas.openxmlformats.org/drawingml/2006/main" xmlns:p="http://schemas.openxmlformats.org/presentationml/2006/main" xmlns:r="http://schemas.openxmlformats.org/officeDocument/2006/relationships">
+  <p:cSld>
+    <p:bg>
+      <p:bgPr>
+        <a:solidFill>
+          <a:srgbClr val="FFFFFF"/>
+        </a:solidFill>
+      </p:bgPr>
+    </p:bg>
+    <p:spTree>
+      <p:nvGrpSpPr>
+        <p:cNvPr id="1" name=""/>
+        <p:cNvGrpSpPr/>
+        <p:nvPr/>
+      </p:nvGrpSpPr>
+      <p:grpSpPr/>
+      <p:sp>
+        <p:nvSpPr>
+          <p:cNvPr id="25" name="Slide Number Placeholder 0"/>
+          <p:cNvSpPr>
+            <a:spLocks noGrp="1"/>
+          </p:cNvSpPr>
+          <p:nvPr>
+            <p:ph type="sldNum" sz="quarter" idx="4294967295"/>
+          </p:nvPr>
+        </p:nvSpPr>
+        <p:spPr>
+          <a:xfrm>
+            <a:off x="11277295" y="6419088"/>
+            <a:ext cx="457200" cy="274320"/>
+          </a:xfrm>
+          <a:prstGeom prst="rect">
+            <a:avLst/>
+          </a:prstGeom>
+          <a:extLst>
+            <a:ext uri="{C572A759-6A51-4108-AA02-DFA0A04FC94B}">
+              <ma14:wrappingTextBoxFlag xmlns:ma14="http://schemas.microsoft.com/office/mac/drawingml/2011/main" val="0"/>
+            </a:ext>
+          </a:extLst>
+        </p:spPr>
+        <p:txBody>
+          <a:bodyPr/>
+          <a:lstStyle>
+            <a:lvl1pPr>
+              <a:defRPr sz="900">
+                <a:solidFill>
+                  <a:srgbClr val="64748B"/>
+                </a:solidFill>
+                <a:latin typeface="Prompt"/>
+                <a:ea typeface="Prompt"/>
+                <a:cs typeface="Prompt"/>
+              </a:defRPr>
+            </a:lvl1pPr>
+          </a:lstStyle>
+          <a:p>
+            <a:pPr algn="r"/>
+            <a:fld id="{F7021451-1387-4CA6-816F-3879F97B5CBC}" type="slidenum">
+              <a:rPr b="0" lang="en-US"/>
+              <a:t>2</a:t>
+            </a:fld>
+            <a:endParaRPr lang="en-US"/>
+          </a:p>
+        </p:txBody>
+      </p:sp>
+      <p:sp>
+        <p:nvSpPr>
+          <p:cNvPr id="26" name="TextBox 25"/>
+          <p:cNvSpPr txBox="1"/>
+          <p:nvPr/>
+        </p:nvSpPr>
+        <p:spPr>
+          <a:xfrm>
+            <a:off x="548640" y="347472"/>
+            <a:ext cx="8229600" cy="274320"/>
+          </a:xfrm>
+          <a:prstGeom prst="rect">
+            <a:avLst/>
+          </a:prstGeom>
+          <a:noFill/>
+        </p:spPr>
+        <p:txBody>
+          <a:bodyPr wrap="square" lIns="0" rIns="0" tIns="0" bIns="0" anchor="t">
+            <a:spAutoFit/>
+          </a:bodyPr>
+          <a:lstStyle/>
+          <a:p>
+            <a:pPr algn="l"/>
+            <a:r>
+              <a:rPr sz="1200" b="1" i="0">
+                <a:solidFill>
+                  <a:srgbClr val="1B998B"/>
+                </a:solidFill>
+                <a:latin typeface="Prompt"/>
+                <a:ea typeface="Prompt"/>
+                <a:cs typeface="Prompt"/>
+              </a:rPr>
+              <a:t>แอ่งท่าตะโก · ทดสอบกับเหตุการณ์จริง</a:t>
+            </a:r>
+          </a:p>
+        </p:txBody>
+      </p:sp>
+      <p:sp>
+        <p:nvSpPr>
+          <p:cNvPr id="27" name="TextBox 26"/>
+          <p:cNvSpPr txBox="1"/>
+          <p:nvPr/>
+        </p:nvSpPr>
+        <p:spPr>
+          <a:xfrm>
+            <a:off x="548640" y="621792"/>
+            <a:ext cx="11091672" cy="685800"/>
+          </a:xfrm>
+          <a:prstGeom prst="rect">
+            <a:avLst/>
+          </a:prstGeom>
+          <a:noFill/>
+        </p:spPr>
+        <p:txBody>
+          <a:bodyPr wrap="square" lIns="0" rIns="0" tIns="0" bIns="0" anchor="ctr">
+            <a:spAutoFit/>
+          </a:bodyPr>
+          <a:lstStyle/>
+          <a:p>
+            <a:pPr algn="l"/>
+            <a:r>
+              <a:rPr sz="2600" b="1" i="0">
+                <a:solidFill>
+                  <a:srgbClr val="0B3C5D"/>
+                </a:solidFill>
+                <a:latin typeface="Prompt"/>
+                <a:ea typeface="Prompt"/>
+                <a:cs typeface="Prompt"/>
+              </a:rPr>
+              <a:t>จำลองน้ำท่วมจริง 3 ปีได้ใกล้เคียงดาวเทียม (CSI 0.49–0.54)</a:t>
+            </a:r>
+          </a:p>
+        </p:txBody>
+      </p:sp>
+      <p:sp>
+        <p:nvSpPr>
+          <p:cNvPr id="28" name="Rounded Rectangle 27"/>
+          <p:cNvSpPr/>
+          <p:nvPr/>
+        </p:nvSpPr>
+        <p:spPr>
+          <a:xfrm>
+            <a:off x="493776" y="1426464"/>
+            <a:ext cx="4956048" cy="4352544"/>
+          </a:xfrm>
+          <a:prstGeom prst="roundRect">
+            <a:avLst>
+              <a:gd name="adj" fmla="val 1600"/>
+            </a:avLst>
+          </a:prstGeom>
+          <a:solidFill>
+            <a:srgbClr val="FFFFFF"/>
+          </a:solidFill>
+          <a:ln w="9525">
+            <a:solidFill>
+              <a:srgbClr val="D5DEE6"/>
+            </a:solidFill>
+          </a:ln>
+          <a:effectLst/>
+        </p:spPr>
+        <p:style>
+          <a:lnRef idx="1">
+            <a:schemeClr val="accent1"/>
+          </a:lnRef>
+          <a:fillRef idx="3">
+            <a:schemeClr val="accent1"/>
+          </a:fillRef>
+          <a:effectRef idx="2">
+            <a:schemeClr val="accent1"/>
+          </a:effectRef>
+          <a:fontRef idx="minor">
+            <a:schemeClr val="lt1"/>
+          </a:fontRef>
+        </p:style>
+        <p:txBody>
+          <a:bodyPr rtlCol="0" anchor="ctr"/>
+          <a:lstStyle/>
+          <a:p/>
+        </p:txBody>
+      </p:sp>
+      <p:pic>
+        <p:nvPicPr>
+          <p:cNvPr id="29" name="Picture 28" descr="map_ev2025.png"/>
+          <p:cNvPicPr>
+            <a:picLocks noChangeAspect="1"/>
+          </p:cNvPicPr>
+          <p:nvPr/>
+        </p:nvPicPr>
+        <p:blipFill>
+          <a:blip r:embed="rId2"/>
+          <a:stretch>
+            <a:fillRect/>
+          </a:stretch>
+        </p:blipFill>
+        <p:spPr>
+          <a:xfrm>
+            <a:off x="548640" y="1481328"/>
+            <a:ext cx="4846320" cy="4242816"/>
+          </a:xfrm>
+          <a:prstGeom prst="rect">
+            <a:avLst/>
+          </a:prstGeom>
+        </p:spPr>
+      </p:pic>
+      <p:sp>
+        <p:nvSpPr>
+          <p:cNvPr id="30" name="TextBox 29"/>
+          <p:cNvSpPr txBox="1"/>
+          <p:nvPr/>
+        </p:nvSpPr>
+        <p:spPr>
+          <a:xfrm>
+            <a:off x="548640" y="5797296"/>
+            <a:ext cx="4846320" cy="457200"/>
+          </a:xfrm>
+          <a:prstGeom prst="rect">
+            <a:avLst/>
+          </a:prstGeom>
+          <a:noFill/>
+        </p:spPr>
+        <p:txBody>
+          <a:bodyPr wrap="square" lIns="0" rIns="0" tIns="0" bIns="0" anchor="t">
+            <a:spAutoFit/>
+          </a:bodyPr>
+          <a:lstStyle/>
+          <a:p>
+            <a:pPr algn="l"/>
+            <a:r>
+              <a:rPr sz="1050" b="0" i="0">
+                <a:solidFill>
+                  <a:srgbClr val="64748B"/>
+                </a:solidFill>
+                <a:latin typeface="Prompt"/>
+                <a:ea typeface="Prompt"/>
+                <a:cs typeface="Prompt"/>
+              </a:rPr>
+              <a:t>ปี 2568: พื้นที่ท่วม 30 วันขึ้นไป — แบบจำลองเทียบภาพเรดาร์วันเดียวกัน</a:t>
+            </a:r>
+          </a:p>
+        </p:txBody>
+      </p:sp>
+      <p:graphicFrame>
+        <p:nvGraphicFramePr>
+          <p:cNvPr id="31" name="Table 30"/>
+          <p:cNvGraphicFramePr>
+            <a:graphicFrameLocks noGrp="1"/>
+          </p:cNvGraphicFramePr>
+          <p:nvPr/>
+        </p:nvGraphicFramePr>
+        <p:xfrm>
+          <a:off x="5760720" y="1481328"/>
+          <a:ext cx="5879592" cy="1389888"/>
+        </p:xfrm>
+        <a:graphic>
+          <a:graphicData uri="http://schemas.openxmlformats.org/drawingml/2006/table">
+            <a:tbl>
+              <a:tblPr firstRow="1" bandRow="0">
+                <a:tableStyleId>{5940675A-B579-460E-94D1-54222C63F5DA}</a:tableStyleId>
+              </a:tblPr>
+              <a:tblGrid>
+                <a:gridCol w="731520"/>
+                <a:gridCol w="2587752"/>
+                <a:gridCol w="1371600"/>
+                <a:gridCol w="1188720"/>
+              </a:tblGrid>
+              <a:tr h="347472">
+                <a:tc>
+                  <a:txBody>
+                    <a:bodyPr/>
+                    <a:lstStyle/>
+                    <a:p>
+                      <a:pPr algn="l"/>
+                      <a:r>
+                        <a:rPr sz="1200" b="1" i="0">
+                          <a:solidFill>
+                            <a:srgbClr val="FFFFFF"/>
+                          </a:solidFill>
+                          <a:latin typeface="Prompt"/>
+                          <a:ea typeface="Prompt"/>
+                          <a:cs typeface="Prompt"/>
+                        </a:rPr>
+                        <a:t>ปี</a:t>
+                      </a:r>
+                    </a:p>
+                  </a:txBody>
+                  <a:tcPr marL="73152" marR="73152" marT="27432" marB="27432" anchor="ctr">
+                    <a:lnL w="6350">
+                      <a:solidFill>
+                        <a:srgbClr val="D5DEE6"/>
+                      </a:solidFill>
+                    </a:lnL>
+                    <a:lnR w="6350">
+                      <a:solidFill>
+                        <a:srgbClr val="D5DEE6"/>
+                      </a:solidFill>
+                    </a:lnR>
+                    <a:lnT w="6350">
+                      <a:solidFill>
+                        <a:srgbClr val="D5DEE6"/>
+                      </a:solidFill>
+                    </a:lnT>
+                    <a:lnB w="6350">
+                      <a:solidFill>
+                        <a:srgbClr val="D5DEE6"/>
+                      </a:solidFill>
+                    </a:lnB>
+                    <a:solidFill>
+                      <a:srgbClr val="0B3C5D"/>
+                    </a:solidFill>
+                  </a:tcPr>
+                </a:tc>
+                <a:tc>
+                  <a:txBody>
+                    <a:bodyPr/>
+                    <a:lstStyle/>
+                    <a:p>
+                      <a:pPr algn="ctr"/>
+                      <a:r>
+                        <a:rPr sz="1200" b="1" i="0">
+                          <a:solidFill>
+                            <a:srgbClr val="FFFFFF"/>
+                          </a:solidFill>
+                          <a:latin typeface="Prompt"/>
+                          <a:ea typeface="Prompt"/>
+                          <a:cs typeface="Prompt"/>
+                        </a:rPr>
+                        <a:t>ท่วม 30 วันขึ้นไป จำลอง / จริง</a:t>
+                      </a:r>
+                    </a:p>
+                  </a:txBody>
+                  <a:tcPr marL="73152" marR="73152" marT="27432" marB="27432" anchor="ctr">
+                    <a:lnL w="6350">
+                      <a:solidFill>
+                        <a:srgbClr val="D5DEE6"/>
+                      </a:solidFill>
+                    </a:lnL>
+                    <a:lnR w="6350">
+                      <a:solidFill>
+                        <a:srgbClr val="D5DEE6"/>
+                      </a:solidFill>
+                    </a:lnR>
+                    <a:lnT w="6350">
+                      <a:solidFill>
+                        <a:srgbClr val="D5DEE6"/>
+                      </a:solidFill>
+                    </a:lnT>
+                    <a:lnB w="6350">
+                      <a:solidFill>
+                        <a:srgbClr val="D5DEE6"/>
+                      </a:solidFill>
+                    </a:lnB>
+                    <a:solidFill>
+                      <a:srgbClr val="0B3C5D"/>
+                    </a:solidFill>
+                  </a:tcPr>
+                </a:tc>
+                <a:tc>
+                  <a:txBody>
+                    <a:bodyPr/>
+                    <a:lstStyle/>
+                    <a:p>
+                      <a:pPr algn="ctr"/>
+                      <a:r>
+                        <a:rPr sz="1200" b="1" i="0">
+                          <a:solidFill>
+                            <a:srgbClr val="FFFFFF"/>
+                          </a:solidFill>
+                          <a:latin typeface="Prompt"/>
+                          <a:ea typeface="Prompt"/>
+                          <a:cs typeface="Prompt"/>
+                        </a:rPr>
+                        <a:t>จับได้ (POD)</a:t>
+                      </a:r>
+                    </a:p>
+                  </a:txBody>
+                  <a:tcPr marL="73152" marR="73152" marT="27432" marB="27432" anchor="ctr">
+                    <a:lnL w="6350">
+                      <a:solidFill>
+                        <a:srgbClr val="D5DEE6"/>
+                      </a:solidFill>
+                    </a:lnL>
+                    <a:lnR w="6350">
+                      <a:solidFill>
+                        <a:srgbClr val="D5DEE6"/>
+                      </a:solidFill>
+                    </a:lnR>
+                    <a:lnT w="6350">
+                      <a:solidFill>
+                        <a:srgbClr val="D5DEE6"/>
+                      </a:solidFill>
+                    </a:lnT>
+                    <a:lnB w="6350">
+                      <a:solidFill>
+                        <a:srgbClr val="D5DEE6"/>
+                      </a:solidFill>
+                    </a:lnB>
+                    <a:solidFill>
+                      <a:srgbClr val="0B3C5D"/>
+                    </a:solidFill>
+                  </a:tcPr>
+                </a:tc>
+                <a:tc>
+                  <a:txBody>
+                    <a:bodyPr/>
+                    <a:lstStyle/>
+                    <a:p>
+                      <a:pPr algn="ctr"/>
+                      <a:r>
+                        <a:rPr sz="1200" b="1" i="0">
+                          <a:solidFill>
+                            <a:srgbClr val="FFFFFF"/>
+                          </a:solidFill>
+                          <a:latin typeface="Prompt"/>
+                          <a:ea typeface="Prompt"/>
+                          <a:cs typeface="Prompt"/>
+                        </a:rPr>
+                        <a:t>CSI</a:t>
+                      </a:r>
+                    </a:p>
+                  </a:txBody>
+                  <a:tcPr marL="73152" marR="73152" marT="27432" marB="27432" anchor="ctr">
+                    <a:lnL w="6350">
+                      <a:solidFill>
+                        <a:srgbClr val="D5DEE6"/>
+                      </a:solidFill>
+                    </a:lnL>
+                    <a:lnR w="6350">
+                      <a:solidFill>
+                        <a:srgbClr val="D5DEE6"/>
+                      </a:solidFill>
+                    </a:lnR>
+                    <a:lnT w="6350">
+                      <a:solidFill>
+                        <a:srgbClr val="D5DEE6"/>
+                      </a:solidFill>
+                    </a:lnT>
+                    <a:lnB w="6350">
+                      <a:solidFill>
+                        <a:srgbClr val="D5DEE6"/>
+                      </a:solidFill>
+                    </a:lnB>
+                    <a:solidFill>
+                      <a:srgbClr val="0B3C5D"/>
+                    </a:solidFill>
+                  </a:tcPr>
+                </a:tc>
+              </a:tr>
+              <a:tr h="347472">
+                <a:tc>
+                  <a:txBody>
+                    <a:bodyPr/>
+                    <a:lstStyle/>
+                    <a:p>
+                      <a:pPr algn="l"/>
+                      <a:r>
+                        <a:rPr sz="1200" i="0">
+                          <a:solidFill>
+                            <a:srgbClr val="1E293B"/>
+                          </a:solidFill>
+                          <a:latin typeface="Prompt"/>
+                          <a:ea typeface="Prompt"/>
+                          <a:cs typeface="Prompt"/>
+                        </a:rPr>
+                        <a:t>2564</a:t>
+                      </a:r>
+                    </a:p>
+                  </a:txBody>
+                  <a:tcPr marL="73152" marR="73152" marT="27432" marB="27432" anchor="ctr">
+                    <a:lnL w="6350">
+                      <a:solidFill>
+                        <a:srgbClr val="D5DEE6"/>
+                      </a:solidFill>
+                    </a:lnL>
+                    <a:lnR w="6350">
+                      <a:solidFill>
+                        <a:srgbClr val="D5DEE6"/>
+                      </a:solidFill>
+                    </a:lnR>
+                    <a:lnT w="6350">
+                      <a:solidFill>
+                        <a:srgbClr val="D5DEE6"/>
+                      </a:solidFill>
+                    </a:lnT>
+                    <a:lnB w="6350">
+                      <a:solidFill>
+                        <a:srgbClr val="D5DEE6"/>
+                      </a:solidFill>
+                    </a:lnB>
+                    <a:solidFill>
+                      <a:srgbClr val="FFFFFF"/>
+                    </a:solidFill>
+                  </a:tcPr>
+                </a:tc>
+                <a:tc>
+                  <a:txBody>
+                    <a:bodyPr/>
+                    <a:lstStyle/>
+                    <a:p>
+                      <a:pPr algn="ctr"/>
+                      <a:r>
+                        <a:rPr sz="1200" i="0">
+                          <a:solidFill>
+                            <a:srgbClr val="1E293B"/>
+                          </a:solidFill>
+                          <a:latin typeface="Prompt"/>
+                          <a:ea typeface="Prompt"/>
+                          <a:cs typeface="Prompt"/>
+                        </a:rPr>
+                        <a:t>250 / 211 ตร.กม.</a:t>
+                      </a:r>
+                    </a:p>
+                  </a:txBody>
+                  <a:tcPr marL="73152" marR="73152" marT="27432" marB="27432" anchor="ctr">
+                    <a:lnL w="6350">
+                      <a:solidFill>
+                        <a:srgbClr val="D5DEE6"/>
+                      </a:solidFill>
+                    </a:lnL>
+                    <a:lnR w="6350">
+                      <a:solidFill>
+                        <a:srgbClr val="D5DEE6"/>
+                      </a:solidFill>
+                    </a:lnR>
+                    <a:lnT w="6350">
+                      <a:solidFill>
+                        <a:srgbClr val="D5DEE6"/>
+                      </a:solidFill>
+                    </a:lnT>
+                    <a:lnB w="6350">
+                      <a:solidFill>
+                        <a:srgbClr val="D5DEE6"/>
+                      </a:solidFill>
+                    </a:lnB>
+                    <a:solidFill>
+                      <a:srgbClr val="FFFFFF"/>
+                    </a:solidFill>
+                  </a:tcPr>
+                </a:tc>
+                <a:tc>
+                  <a:txBody>
+                    <a:bodyPr/>
+                    <a:lstStyle/>
+                    <a:p>
+                      <a:pPr algn="ctr"/>
+                      <a:r>
+                        <a:rPr sz="1200" i="0">
+                          <a:solidFill>
+                            <a:srgbClr val="1E293B"/>
+                          </a:solidFill>
+                          <a:latin typeface="Prompt"/>
+                          <a:ea typeface="Prompt"/>
+                          <a:cs typeface="Prompt"/>
+                        </a:rPr>
+                        <a:t>0.77</a:t>
+                      </a:r>
+                    </a:p>
+                  </a:txBody>
+                  <a:tcPr marL="73152" marR="73152" marT="27432" marB="27432" anchor="ctr">
+                    <a:lnL w="6350">
+                      <a:solidFill>
+                        <a:srgbClr val="D5DEE6"/>
+                      </a:solidFill>
+                    </a:lnL>
+                    <a:lnR w="6350">
+                      <a:solidFill>
+                        <a:srgbClr val="D5DEE6"/>
+                      </a:solidFill>
+                    </a:lnR>
+                    <a:lnT w="6350">
+                      <a:solidFill>
+                        <a:srgbClr val="D5DEE6"/>
+                      </a:solidFill>
+                    </a:lnT>
+                    <a:lnB w="6350">
+                      <a:solidFill>
+                        <a:srgbClr val="D5DEE6"/>
+                      </a:solidFill>
+                    </a:lnB>
+                    <a:solidFill>
+                      <a:srgbClr val="FFFFFF"/>
+                    </a:solidFill>
+                  </a:tcPr>
+                </a:tc>
+                <a:tc>
+                  <a:txBody>
+                    <a:bodyPr/>
+                    <a:lstStyle/>
+                    <a:p>
+                      <a:pPr algn="ctr"/>
+                      <a:r>
+                        <a:rPr sz="1200" i="0">
+                          <a:solidFill>
+                            <a:srgbClr val="1E293B"/>
+                          </a:solidFill>
+                          <a:latin typeface="Prompt"/>
+                          <a:ea typeface="Prompt"/>
+                          <a:cs typeface="Prompt"/>
+                        </a:rPr>
+                        <a:t>0.54</a:t>
+                      </a:r>
+                    </a:p>
+                  </a:txBody>
+                  <a:tcPr marL="73152" marR="73152" marT="27432" marB="27432" anchor="ctr">
+                    <a:lnL w="6350">
+                      <a:solidFill>
+                        <a:srgbClr val="D5DEE6"/>
+                      </a:solidFill>
+                    </a:lnL>
+                    <a:lnR w="6350">
+                      <a:solidFill>
+                        <a:srgbClr val="D5DEE6"/>
+                      </a:solidFill>
+                    </a:lnR>
+                    <a:lnT w="6350">
+                      <a:solidFill>
+                        <a:srgbClr val="D5DEE6"/>
+                      </a:solidFill>
+                    </a:lnT>
+                    <a:lnB w="6350">
+                      <a:solidFill>
+                        <a:srgbClr val="D5DEE6"/>
+                      </a:solidFill>
+                    </a:lnB>
+                    <a:solidFill>
+                      <a:srgbClr val="FFFFFF"/>
+                    </a:solidFill>
+                  </a:tcPr>
+                </a:tc>
+              </a:tr>
+              <a:tr h="347472">
+                <a:tc>
+                  <a:txBody>
+                    <a:bodyPr/>
+                    <a:lstStyle/>
+                    <a:p>
+                      <a:pPr algn="l"/>
+                      <a:r>
+                        <a:rPr sz="1200" i="0">
+                          <a:solidFill>
+                            <a:srgbClr val="1E293B"/>
+                          </a:solidFill>
+                          <a:latin typeface="Prompt"/>
+                          <a:ea typeface="Prompt"/>
+                          <a:cs typeface="Prompt"/>
+                        </a:rPr>
+                        <a:t>2565</a:t>
+                      </a:r>
+                    </a:p>
+                  </a:txBody>
+                  <a:tcPr marL="73152" marR="73152" marT="27432" marB="27432" anchor="ctr">
+                    <a:lnL w="6350">
+                      <a:solidFill>
+                        <a:srgbClr val="D5DEE6"/>
+                      </a:solidFill>
+                    </a:lnL>
+                    <a:lnR w="6350">
+                      <a:solidFill>
+                        <a:srgbClr val="D5DEE6"/>
+                      </a:solidFill>
+                    </a:lnR>
+                    <a:lnT w="6350">
+                      <a:solidFill>
+                        <a:srgbClr val="D5DEE6"/>
+                      </a:solidFill>
+                    </a:lnT>
+                    <a:lnB w="6350">
+                      <a:solidFill>
+                        <a:srgbClr val="D5DEE6"/>
+                      </a:solidFill>
+                    </a:lnB>
+                    <a:solidFill>
+                      <a:srgbClr val="F4F8FB"/>
+                    </a:solidFill>
+                  </a:tcPr>
+                </a:tc>
+                <a:tc>
+                  <a:txBody>
+                    <a:bodyPr/>
+                    <a:lstStyle/>
+                    <a:p>
+                      <a:pPr algn="ctr"/>
+                      <a:r>
+                        <a:rPr sz="1200" i="0">
+                          <a:solidFill>
+                            <a:srgbClr val="1E293B"/>
+                          </a:solidFill>
+                          <a:latin typeface="Prompt"/>
+                          <a:ea typeface="Prompt"/>
+                          <a:cs typeface="Prompt"/>
+                        </a:rPr>
+                        <a:t>202 / 210 ตร.กม.</a:t>
+                      </a:r>
+                    </a:p>
+                  </a:txBody>
+                  <a:tcPr marL="73152" marR="73152" marT="27432" marB="27432" anchor="ctr">
+                    <a:lnL w="6350">
+                      <a:solidFill>
+                        <a:srgbClr val="D5DEE6"/>
+                      </a:solidFill>
+                    </a:lnL>
+                    <a:lnR w="6350">
+                      <a:solidFill>
+                        <a:srgbClr val="D5DEE6"/>
+                      </a:solidFill>
+                    </a:lnR>
+                    <a:lnT w="6350">
+                      <a:solidFill>
+                        <a:srgbClr val="D5DEE6"/>
+                      </a:solidFill>
+                    </a:lnT>
+                    <a:lnB w="6350">
+                      <a:solidFill>
+                        <a:srgbClr val="D5DEE6"/>
+                      </a:solidFill>
+                    </a:lnB>
+                    <a:solidFill>
+                      <a:srgbClr val="F4F8FB"/>
+                    </a:solidFill>
+                  </a:tcPr>
+                </a:tc>
+                <a:tc>
+                  <a:txBody>
+                    <a:bodyPr/>
+                    <a:lstStyle/>
+                    <a:p>
+                      <a:pPr algn="ctr"/>
+                      <a:r>
+                        <a:rPr sz="1200" i="0">
+                          <a:solidFill>
+                            <a:srgbClr val="1E293B"/>
+                          </a:solidFill>
+                          <a:latin typeface="Prompt"/>
+                          <a:ea typeface="Prompt"/>
+                          <a:cs typeface="Prompt"/>
+                        </a:rPr>
+                        <a:t>0.64</a:t>
+                      </a:r>
+                    </a:p>
+                  </a:txBody>
+                  <a:tcPr marL="73152" marR="73152" marT="27432" marB="27432" anchor="ctr">
+                    <a:lnL w="6350">
+                      <a:solidFill>
+                        <a:srgbClr val="D5DEE6"/>
+                      </a:solidFill>
+                    </a:lnL>
+                    <a:lnR w="6350">
+                      <a:solidFill>
+                        <a:srgbClr val="D5DEE6"/>
+                      </a:solidFill>
+                    </a:lnR>
+                    <a:lnT w="6350">
+                      <a:solidFill>
+                        <a:srgbClr val="D5DEE6"/>
+                      </a:solidFill>
+                    </a:lnT>
+                    <a:lnB w="6350">
+                      <a:solidFill>
+                        <a:srgbClr val="D5DEE6"/>
+                      </a:solidFill>
+                    </a:lnB>
+                    <a:solidFill>
+                      <a:srgbClr val="F4F8FB"/>
+                    </a:solidFill>
+                  </a:tcPr>
+                </a:tc>
+                <a:tc>
+                  <a:txBody>
+                    <a:bodyPr/>
+                    <a:lstStyle/>
+                    <a:p>
+                      <a:pPr algn="ctr"/>
+                      <a:r>
+                        <a:rPr sz="1200" i="0">
+                          <a:solidFill>
+                            <a:srgbClr val="1E293B"/>
+                          </a:solidFill>
+                          <a:latin typeface="Prompt"/>
+                          <a:ea typeface="Prompt"/>
+                          <a:cs typeface="Prompt"/>
+                        </a:rPr>
+                        <a:t>0.49</a:t>
+                      </a:r>
+                    </a:p>
+                  </a:txBody>
+                  <a:tcPr marL="73152" marR="73152" marT="27432" marB="27432" anchor="ctr">
+                    <a:lnL w="6350">
+                      <a:solidFill>
+                        <a:srgbClr val="D5DEE6"/>
+                      </a:solidFill>
+                    </a:lnL>
+                    <a:lnR w="6350">
+                      <a:solidFill>
+                        <a:srgbClr val="D5DEE6"/>
+                      </a:solidFill>
+                    </a:lnR>
+                    <a:lnT w="6350">
+                      <a:solidFill>
+                        <a:srgbClr val="D5DEE6"/>
+                      </a:solidFill>
+                    </a:lnT>
+                    <a:lnB w="6350">
+                      <a:solidFill>
+                        <a:srgbClr val="D5DEE6"/>
+                      </a:solidFill>
+                    </a:lnB>
+                    <a:solidFill>
+                      <a:srgbClr val="F4F8FB"/>
+                    </a:solidFill>
+                  </a:tcPr>
+                </a:tc>
+              </a:tr>
+              <a:tr h="347472">
+                <a:tc>
+                  <a:txBody>
+                    <a:bodyPr/>
+                    <a:lstStyle/>
+                    <a:p>
+                      <a:pPr algn="l"/>
+                      <a:r>
+                        <a:rPr sz="1200" i="0">
+                          <a:solidFill>
+                            <a:srgbClr val="1E293B"/>
+                          </a:solidFill>
+                          <a:latin typeface="Prompt"/>
+                          <a:ea typeface="Prompt"/>
+                          <a:cs typeface="Prompt"/>
+                        </a:rPr>
+                        <a:t>2568</a:t>
+                      </a:r>
+                    </a:p>
+                  </a:txBody>
+                  <a:tcPr marL="73152" marR="73152" marT="27432" marB="27432" anchor="ctr">
+                    <a:lnL w="6350">
+                      <a:solidFill>
+                        <a:srgbClr val="D5DEE6"/>
+                      </a:solidFill>
+                    </a:lnL>
+                    <a:lnR w="6350">
+                      <a:solidFill>
+                        <a:srgbClr val="D5DEE6"/>
+                      </a:solidFill>
+                    </a:lnR>
+                    <a:lnT w="6350">
+                      <a:solidFill>
+                        <a:srgbClr val="D5DEE6"/>
+                      </a:solidFill>
+                    </a:lnT>
+                    <a:lnB w="6350">
+                      <a:solidFill>
+                        <a:srgbClr val="D5DEE6"/>
+                      </a:solidFill>
+                    </a:lnB>
+                    <a:solidFill>
+                      <a:srgbClr val="FFFFFF"/>
+                    </a:solidFill>
+                  </a:tcPr>
+                </a:tc>
+                <a:tc>
+                  <a:txBody>
+                    <a:bodyPr/>
+                    <a:lstStyle/>
+                    <a:p>
+                      <a:pPr algn="ctr"/>
+                      <a:r>
+                        <a:rPr sz="1200" i="0">
+                          <a:solidFill>
+                            <a:srgbClr val="1E293B"/>
+                          </a:solidFill>
+                          <a:latin typeface="Prompt"/>
+                          <a:ea typeface="Prompt"/>
+                          <a:cs typeface="Prompt"/>
+                        </a:rPr>
+                        <a:t>275 / 227 ตร.กม.</a:t>
+                      </a:r>
+                    </a:p>
+                  </a:txBody>
+                  <a:tcPr marL="73152" marR="73152" marT="27432" marB="27432" anchor="ctr">
+                    <a:lnL w="6350">
+                      <a:solidFill>
+                        <a:srgbClr val="D5DEE6"/>
+                      </a:solidFill>
+                    </a:lnL>
+                    <a:lnR w="6350">
+                      <a:solidFill>
+                        <a:srgbClr val="D5DEE6"/>
+                      </a:solidFill>
+                    </a:lnR>
+                    <a:lnT w="6350">
+                      <a:solidFill>
+                        <a:srgbClr val="D5DEE6"/>
+                      </a:solidFill>
+                    </a:lnT>
+                    <a:lnB w="6350">
+                      <a:solidFill>
+                        <a:srgbClr val="D5DEE6"/>
+                      </a:solidFill>
+                    </a:lnB>
+                    <a:solidFill>
+                      <a:srgbClr val="FFFFFF"/>
+                    </a:solidFill>
+                  </a:tcPr>
+                </a:tc>
+                <a:tc>
+                  <a:txBody>
+                    <a:bodyPr/>
+                    <a:lstStyle/>
+                    <a:p>
+                      <a:pPr algn="ctr"/>
+                      <a:r>
+                        <a:rPr sz="1200" i="0">
+                          <a:solidFill>
+                            <a:srgbClr val="1E293B"/>
+                          </a:solidFill>
+                          <a:latin typeface="Prompt"/>
+                          <a:ea typeface="Prompt"/>
+                          <a:cs typeface="Prompt"/>
+                        </a:rPr>
+                        <a:t>0.78</a:t>
+                      </a:r>
+                    </a:p>
+                  </a:txBody>
+                  <a:tcPr marL="73152" marR="73152" marT="27432" marB="27432" anchor="ctr">
+                    <a:lnL w="6350">
+                      <a:solidFill>
+                        <a:srgbClr val="D5DEE6"/>
+                      </a:solidFill>
+                    </a:lnL>
+                    <a:lnR w="6350">
+                      <a:solidFill>
+                        <a:srgbClr val="D5DEE6"/>
+                      </a:solidFill>
+                    </a:lnR>
+                    <a:lnT w="6350">
+                      <a:solidFill>
+                        <a:srgbClr val="D5DEE6"/>
+                      </a:solidFill>
+                    </a:lnT>
+                    <a:lnB w="6350">
+                      <a:solidFill>
+                        <a:srgbClr val="D5DEE6"/>
+                      </a:solidFill>
+                    </a:lnB>
+                    <a:solidFill>
+                      <a:srgbClr val="FFFFFF"/>
+                    </a:solidFill>
+                  </a:tcPr>
+                </a:tc>
+                <a:tc>
+                  <a:txBody>
+                    <a:bodyPr/>
+                    <a:lstStyle/>
+                    <a:p>
+                      <a:pPr algn="ctr"/>
+                      <a:r>
+                        <a:rPr sz="1200" i="0">
+                          <a:solidFill>
+                            <a:srgbClr val="1E293B"/>
+                          </a:solidFill>
+                          <a:latin typeface="Prompt"/>
+                          <a:ea typeface="Prompt"/>
+                          <a:cs typeface="Prompt"/>
+                        </a:rPr>
+                        <a:t>0.54</a:t>
+                      </a:r>
+                    </a:p>
+                  </a:txBody>
+                  <a:tcPr marL="73152" marR="73152" marT="27432" marB="27432" anchor="ctr">
+                    <a:lnL w="6350">
+                      <a:solidFill>
+                        <a:srgbClr val="D5DEE6"/>
+                      </a:solidFill>
+                    </a:lnL>
+                    <a:lnR w="6350">
+                      <a:solidFill>
+                        <a:srgbClr val="D5DEE6"/>
+                      </a:solidFill>
+                    </a:lnR>
+                    <a:lnT w="6350">
+                      <a:solidFill>
+                        <a:srgbClr val="D5DEE6"/>
+                      </a:solidFill>
+                    </a:lnT>
+                    <a:lnB w="6350">
+                      <a:solidFill>
+                        <a:srgbClr val="D5DEE6"/>
+                      </a:solidFill>
+                    </a:lnB>
+                    <a:solidFill>
+                      <a:srgbClr val="FFFFFF"/>
+                    </a:solidFill>
+                  </a:tcPr>
+                </a:tc>
+              </a:tr>
+            </a:tbl>
+          </a:graphicData>
+        </a:graphic>
+      </p:graphicFrame>
+      <p:graphicFrame>
+        <p:nvGraphicFramePr>
+          <p:cNvPr id="32" name="Chart 31"/>
+          <p:cNvGraphicFramePr>
+            <a:graphicFrameLocks noGrp="1"/>
+          </p:cNvGraphicFramePr>
+          <p:nvPr/>
+        </p:nvGraphicFramePr>
+        <p:xfrm>
+          <a:off x="5669280" y="3017520"/>
+          <a:ext cx="6035040" cy="1920240"/>
+        </p:xfrm>
+        <a:graphic>
+          <a:graphicData uri="http://schemas.openxmlformats.org/drawingml/2006/chart">
+            <c:chart xmlns:c="http://schemas.openxmlformats.org/drawingml/2006/chart" r:id="rId3"/>
+          </a:graphicData>
+        </a:graphic>
+      </p:graphicFrame>
+      <p:sp>
+        <p:nvSpPr>
+          <p:cNvPr id="33" name="Rounded Rectangle 32"/>
+          <p:cNvSpPr/>
+          <p:nvPr/>
+        </p:nvSpPr>
+        <p:spPr>
+          <a:xfrm>
+            <a:off x="5760720" y="5074920"/>
+            <a:ext cx="5879592" cy="1188720"/>
+          </a:xfrm>
+          <a:prstGeom prst="roundRect">
+            <a:avLst>
+              <a:gd name="adj" fmla="val 6000"/>
+            </a:avLst>
+          </a:prstGeom>
+          <a:solidFill>
+            <a:srgbClr val="FFF4E5"/>
+          </a:solidFill>
+          <a:ln>
+            <a:noFill/>
+          </a:ln>
+          <a:effectLst/>
+        </p:spPr>
+        <p:style>
+          <a:lnRef idx="1">
+            <a:schemeClr val="accent1"/>
+          </a:lnRef>
+          <a:fillRef idx="3">
+            <a:schemeClr val="accent1"/>
+          </a:fillRef>
+          <a:effectRef idx="2">
+            <a:schemeClr val="accent1"/>
+          </a:effectRef>
+          <a:fontRef idx="minor">
+            <a:schemeClr val="lt1"/>
+          </a:fontRef>
+        </p:style>
+        <p:txBody>
+          <a:bodyPr rtlCol="0" anchor="ctr"/>
+          <a:lstStyle/>
+          <a:p/>
+        </p:txBody>
+      </p:sp>
+      <p:sp>
+        <p:nvSpPr>
+          <p:cNvPr id="34" name="TextBox 33"/>
+          <p:cNvSpPr txBox="1"/>
+          <p:nvPr/>
+        </p:nvSpPr>
+        <p:spPr>
+          <a:xfrm>
+            <a:off x="5961888" y="5166360"/>
+            <a:ext cx="5486400" cy="365760"/>
+          </a:xfrm>
+          <a:prstGeom prst="rect">
+            <a:avLst/>
+          </a:prstGeom>
+          <a:noFill/>
+        </p:spPr>
+        <p:txBody>
+          <a:bodyPr wrap="square" lIns="0" rIns="0" tIns="0" bIns="0" anchor="t">
+            <a:spAutoFit/>
+          </a:bodyPr>
+          <a:lstStyle/>
+          <a:p>
+            <a:pPr algn="l"/>
+            <a:r>
+              <a:rPr sz="1300" b="1" i="0">
+                <a:solidFill>
+                  <a:srgbClr val="0B3C5D"/>
+                </a:solidFill>
+                <a:latin typeface="Prompt"/>
+                <a:ea typeface="Prompt"/>
+                <a:cs typeface="Prompt"/>
+              </a:rPr>
+              <a:t>ข้อค้นพบ: น้ำเข้าทุ่งก่อนระดับน้ำถึงตลิ่ง</a:t>
+            </a:r>
+          </a:p>
+        </p:txBody>
+      </p:sp>
+      <p:sp>
+        <p:nvSpPr>
+          <p:cNvPr id="35" name="TextBox 34"/>
+          <p:cNvSpPr txBox="1"/>
+          <p:nvPr/>
+        </p:nvSpPr>
+        <p:spPr>
+          <a:xfrm>
+            <a:off x="5961888" y="5532120"/>
+            <a:ext cx="5486400" cy="685800"/>
+          </a:xfrm>
+          <a:prstGeom prst="rect">
+            <a:avLst/>
+          </a:prstGeom>
+          <a:noFill/>
+        </p:spPr>
+        <p:txBody>
+          <a:bodyPr wrap="square" lIns="0" rIns="0" tIns="0" bIns="0" anchor="t">
+            <a:spAutoFit/>
+          </a:bodyPr>
+          <a:lstStyle/>
+          <a:p>
+            <a:pPr algn="l"/>
+            <a:r>
+              <a:rPr sz="1150" b="0" i="0">
+                <a:solidFill>
+                  <a:srgbClr val="1E293B"/>
+                </a:solidFill>
+                <a:latin typeface="Prompt"/>
+                <a:ea typeface="Prompt"/>
+                <a:cs typeface="Prompt"/>
+              </a:rPr>
+              <a:t>ระดับน้ำ N.67 ชุมแสงไม่ถึงตลิ่ง (28.21 ม.) เลยทั้ง 3 ปี แต่ดาวเทียมเห็นท่วม 2–3 เดือนทุกปี → น้ำเข้าผ่านคลอง ประตูน้ำ และช่องต่ำ</a:t>
+            </a:r>
+          </a:p>
+        </p:txBody>
+      </p:sp>
+      <p:sp>
+        <p:nvSpPr>
+          <p:cNvPr id="36" name="TextBox 35"/>
+          <p:cNvSpPr txBox="1"/>
+          <p:nvPr/>
+        </p:nvSpPr>
+        <p:spPr>
+          <a:xfrm>
+            <a:off x="548640" y="6400800"/>
+            <a:ext cx="10332720" cy="274320"/>
+          </a:xfrm>
+          <a:prstGeom prst="rect">
+            <a:avLst/>
+          </a:prstGeom>
+          <a:noFill/>
+        </p:spPr>
+        <p:txBody>
+          <a:bodyPr wrap="square" lIns="0" rIns="0" tIns="0" bIns="0" anchor="t">
+            <a:spAutoFit/>
+          </a:bodyPr>
+          <a:lstStyle/>
+          <a:p>
+            <a:pPr algn="l"/>
+            <a:r>
+              <a:rPr sz="900" b="0" i="0">
+                <a:solidFill>
+                  <a:srgbClr val="64748B"/>
+                </a:solidFill>
+                <a:latin typeface="Prompt"/>
+                <a:ea typeface="Prompt"/>
+                <a:cs typeface="Prompt"/>
+              </a:rPr>
+              <a:t>แบบจำลอง 2D 300 ม. ใช้ระดับน้ำจริงรายชั่วโมง Y.5 / N.67 / C.2 (ThaiWater) + ฝน ERA5 ช่วง 20 ส.ค.–15 ธ.ค. · CSI = พื้นที่ตรงกัน ÷ (ตรงกัน + ขาด + เกิน)</a:t>
+            </a:r>
           </a:p>
         </p:txBody>
       </p:sp>

--- a/docs/report/NakhonSawanFlood_ผู้บริหารและทีมเทคนิค.pptx
+++ b/docs/report/NakhonSawanFlood_ผู้บริหารและทีมเทคนิค.pptx
@@ -22,6 +22,8 @@
     <p:sldId id="273" r:id="rId24"/>
     <p:sldId id="274" r:id="rId25"/>
     <p:sldId id="275" r:id="rId26"/>
+    <p:sldId id="276" r:id="rId27"/>
+    <p:sldId id="277" r:id="rId28"/>
     <p:sldId id="270" r:id="rId16"/>
     <p:sldId id="271" r:id="rId17"/>
     <p:sldId id="272" r:id="rId18"/>
@@ -7558,6 +7560,10 @@
             </a:outerShdw>
           </a:effectLst>
         </p:spPr>
+        <p:txBody>
+          <a:bodyPr/>
+          <a:p/>
+        </p:txBody>
       </p:sp>
       <p:pic>
         <p:nvPicPr>
@@ -7718,6 +7724,10 @@
             <a:prstDash val="solid"/>
           </a:ln>
         </p:spPr>
+        <p:txBody>
+          <a:bodyPr/>
+          <a:p/>
+        </p:txBody>
       </p:sp>
       <p:sp>
         <p:nvSpPr>
@@ -7743,6 +7753,10 @@
             <a:prstDash val="solid"/>
           </a:ln>
         </p:spPr>
+        <p:txBody>
+          <a:bodyPr/>
+          <a:p/>
+        </p:txBody>
       </p:sp>
       <p:sp>
         <p:nvSpPr>
@@ -7893,6 +7907,10 @@
             <a:prstDash val="solid"/>
           </a:ln>
         </p:spPr>
+        <p:txBody>
+          <a:bodyPr/>
+          <a:p/>
+        </p:txBody>
       </p:sp>
       <p:sp>
         <p:nvSpPr>
@@ -7918,6 +7936,10 @@
             <a:prstDash val="solid"/>
           </a:ln>
         </p:spPr>
+        <p:txBody>
+          <a:bodyPr/>
+          <a:p/>
+        </p:txBody>
       </p:sp>
       <p:sp>
         <p:nvSpPr>
@@ -8068,6 +8090,10 @@
             <a:prstDash val="solid"/>
           </a:ln>
         </p:spPr>
+        <p:txBody>
+          <a:bodyPr/>
+          <a:p/>
+        </p:txBody>
       </p:sp>
       <p:sp>
         <p:nvSpPr>
@@ -8093,6 +8119,10 @@
             <a:prstDash val="solid"/>
           </a:ln>
         </p:spPr>
+        <p:txBody>
+          <a:bodyPr/>
+          <a:p/>
+        </p:txBody>
       </p:sp>
       <p:sp>
         <p:nvSpPr>
@@ -8243,6 +8273,10 @@
             <a:prstDash val="solid"/>
           </a:ln>
         </p:spPr>
+        <p:txBody>
+          <a:bodyPr/>
+          <a:p/>
+        </p:txBody>
       </p:sp>
       <p:sp>
         <p:nvSpPr>
@@ -8268,6 +8302,10 @@
             <a:prstDash val="solid"/>
           </a:ln>
         </p:spPr>
+        <p:txBody>
+          <a:bodyPr/>
+          <a:p/>
+        </p:txBody>
       </p:sp>
       <p:sp>
         <p:nvSpPr>
@@ -8418,6 +8456,10 @@
             <a:prstDash val="solid"/>
           </a:ln>
         </p:spPr>
+        <p:txBody>
+          <a:bodyPr/>
+          <a:p/>
+        </p:txBody>
       </p:sp>
       <p:sp>
         <p:nvSpPr>
@@ -8443,6 +8485,10 @@
             <a:prstDash val="solid"/>
           </a:ln>
         </p:spPr>
+        <p:txBody>
+          <a:bodyPr/>
+          <a:p/>
+        </p:txBody>
       </p:sp>
       <p:sp>
         <p:nvSpPr>
@@ -8593,6 +8639,10 @@
             <a:prstDash val="solid"/>
           </a:ln>
         </p:spPr>
+        <p:txBody>
+          <a:bodyPr/>
+          <a:p/>
+        </p:txBody>
       </p:sp>
       <p:sp>
         <p:nvSpPr>
@@ -8618,6 +8668,10 @@
             <a:prstDash val="solid"/>
           </a:ln>
         </p:spPr>
+        <p:txBody>
+          <a:bodyPr/>
+          <a:p/>
+        </p:txBody>
       </p:sp>
       <p:sp>
         <p:nvSpPr>
@@ -8988,6 +9042,10 @@
             <a:prstDash val="solid"/>
           </a:ln>
         </p:spPr>
+        <p:txBody>
+          <a:bodyPr/>
+          <a:p/>
+        </p:txBody>
       </p:sp>
       <p:sp>
         <p:nvSpPr>
@@ -9099,6 +9157,10 @@
             <a:prstDash val="solid"/>
           </a:ln>
         </p:spPr>
+        <p:txBody>
+          <a:bodyPr/>
+          <a:p/>
+        </p:txBody>
       </p:sp>
       <p:sp>
         <p:nvSpPr>
@@ -9210,6 +9272,10 @@
             <a:prstDash val="solid"/>
           </a:ln>
         </p:spPr>
+        <p:txBody>
+          <a:bodyPr/>
+          <a:p/>
+        </p:txBody>
       </p:sp>
       <p:sp>
         <p:nvSpPr>
@@ -9321,6 +9387,10 @@
             <a:prstDash val="solid"/>
           </a:ln>
         </p:spPr>
+        <p:txBody>
+          <a:bodyPr/>
+          <a:p/>
+        </p:txBody>
       </p:sp>
       <p:sp>
         <p:nvSpPr>
@@ -9587,6 +9657,10 @@
             <a:tailEnd type="triangle"/>
           </a:ln>
         </p:spPr>
+        <p:txBody>
+          <a:bodyPr/>
+          <a:p/>
+        </p:txBody>
       </p:sp>
       <p:sp>
         <p:nvSpPr>
@@ -9614,6 +9688,10 @@
             <a:prstDash val="solid"/>
           </a:ln>
         </p:spPr>
+        <p:txBody>
+          <a:bodyPr/>
+          <a:p/>
+        </p:txBody>
       </p:sp>
       <p:sp>
         <p:nvSpPr>
@@ -9680,6 +9758,10 @@
             <a:prstDash val="solid"/>
           </a:ln>
         </p:spPr>
+        <p:txBody>
+          <a:bodyPr/>
+          <a:p/>
+        </p:txBody>
       </p:sp>
       <p:sp>
         <p:nvSpPr>
@@ -9744,6 +9826,10 @@
             <a:prstDash val="solid"/>
           </a:ln>
         </p:spPr>
+        <p:txBody>
+          <a:bodyPr/>
+          <a:p/>
+        </p:txBody>
       </p:sp>
       <p:sp>
         <p:nvSpPr>
@@ -9888,6 +9974,10 @@
             <a:prstDash val="solid"/>
           </a:ln>
         </p:spPr>
+        <p:txBody>
+          <a:bodyPr/>
+          <a:p/>
+        </p:txBody>
       </p:sp>
       <p:sp>
         <p:nvSpPr>
@@ -9913,6 +10003,10 @@
             <a:prstDash val="solid"/>
           </a:ln>
         </p:spPr>
+        <p:txBody>
+          <a:bodyPr/>
+          <a:p/>
+        </p:txBody>
       </p:sp>
       <p:sp>
         <p:nvSpPr>
@@ -10063,6 +10157,10 @@
             <a:prstDash val="solid"/>
           </a:ln>
         </p:spPr>
+        <p:txBody>
+          <a:bodyPr/>
+          <a:p/>
+        </p:txBody>
       </p:sp>
       <p:sp>
         <p:nvSpPr>
@@ -10088,6 +10186,10 @@
             <a:prstDash val="solid"/>
           </a:ln>
         </p:spPr>
+        <p:txBody>
+          <a:bodyPr/>
+          <a:p/>
+        </p:txBody>
       </p:sp>
       <p:sp>
         <p:nvSpPr>
@@ -10238,6 +10340,10 @@
             <a:prstDash val="solid"/>
           </a:ln>
         </p:spPr>
+        <p:txBody>
+          <a:bodyPr/>
+          <a:p/>
+        </p:txBody>
       </p:sp>
       <p:sp>
         <p:nvSpPr>
@@ -10263,6 +10369,10 @@
             <a:prstDash val="solid"/>
           </a:ln>
         </p:spPr>
+        <p:txBody>
+          <a:bodyPr/>
+          <a:p/>
+        </p:txBody>
       </p:sp>
       <p:sp>
         <p:nvSpPr>
@@ -10578,6 +10688,10 @@
             </a:outerShdw>
           </a:effectLst>
         </p:spPr>
+        <p:txBody>
+          <a:bodyPr/>
+          <a:p/>
+        </p:txBody>
       </p:sp>
       <p:pic>
         <p:nvPicPr>
@@ -10628,6 +10742,10 @@
             <a:prstDash val="solid"/>
           </a:ln>
         </p:spPr>
+        <p:txBody>
+          <a:bodyPr/>
+          <a:p/>
+        </p:txBody>
       </p:sp>
       <p:sp>
         <p:nvSpPr>
@@ -10747,6 +10865,10 @@
             <a:prstDash val="solid"/>
           </a:ln>
         </p:spPr>
+        <p:txBody>
+          <a:bodyPr/>
+          <a:p/>
+        </p:txBody>
       </p:sp>
       <p:sp>
         <p:nvSpPr>
@@ -10866,6 +10988,10 @@
             <a:prstDash val="solid"/>
           </a:ln>
         </p:spPr>
+        <p:txBody>
+          <a:bodyPr/>
+          <a:p/>
+        </p:txBody>
       </p:sp>
       <p:sp>
         <p:nvSpPr>
@@ -10985,6 +11111,10 @@
             <a:prstDash val="solid"/>
           </a:ln>
         </p:spPr>
+        <p:txBody>
+          <a:bodyPr/>
+          <a:p/>
+        </p:txBody>
       </p:sp>
       <p:sp>
         <p:nvSpPr>
@@ -11604,6 +11734,2534 @@
 </file>
 
 <file path=ppt/slides/slide15.xml><?xml version="1.0" encoding="utf-8"?>
+<p:sld xmlns:a="http://schemas.openxmlformats.org/drawingml/2006/main" xmlns:p="http://schemas.openxmlformats.org/presentationml/2006/main" xmlns:r="http://schemas.openxmlformats.org/officeDocument/2006/relationships">
+  <p:cSld>
+    <p:bg>
+      <p:bgPr>
+        <a:solidFill>
+          <a:srgbClr val="FFFFFF"/>
+        </a:solidFill>
+      </p:bgPr>
+    </p:bg>
+    <p:spTree>
+      <p:nvGrpSpPr>
+        <p:cNvPr id="1" name=""/>
+        <p:cNvGrpSpPr/>
+        <p:nvPr/>
+      </p:nvGrpSpPr>
+      <p:grpSpPr/>
+      <p:sp>
+        <p:nvSpPr>
+          <p:cNvPr id="25" name="Slide Number Placeholder 0"/>
+          <p:cNvSpPr>
+            <a:spLocks noGrp="1"/>
+          </p:cNvSpPr>
+          <p:nvPr>
+            <p:ph type="sldNum" sz="quarter" idx="4294967295"/>
+          </p:nvPr>
+        </p:nvSpPr>
+        <p:spPr>
+          <a:xfrm>
+            <a:off x="11277295" y="6419088"/>
+            <a:ext cx="457200" cy="274320"/>
+          </a:xfrm>
+          <a:prstGeom prst="rect">
+            <a:avLst/>
+          </a:prstGeom>
+          <a:extLst>
+            <a:ext uri="{C572A759-6A51-4108-AA02-DFA0A04FC94B}">
+              <ma14:wrappingTextBoxFlag xmlns:ma14="http://schemas.microsoft.com/office/mac/drawingml/2011/main" val="0"/>
+            </a:ext>
+          </a:extLst>
+        </p:spPr>
+        <p:txBody>
+          <a:bodyPr/>
+          <a:lstStyle>
+            <a:lvl1pPr>
+              <a:defRPr sz="900">
+                <a:solidFill>
+                  <a:srgbClr val="64748B"/>
+                </a:solidFill>
+                <a:latin typeface="Prompt"/>
+                <a:ea typeface="Prompt"/>
+                <a:cs typeface="Prompt"/>
+              </a:defRPr>
+            </a:lvl1pPr>
+          </a:lstStyle>
+          <a:p>
+            <a:pPr algn="r"/>
+            <a:fld id="{F7021451-1387-4CA6-816F-3879F97B5CBC}" type="slidenum">
+              <a:rPr b="0" lang="en-US"/>
+              <a:t>2</a:t>
+            </a:fld>
+            <a:endParaRPr lang="en-US"/>
+          </a:p>
+        </p:txBody>
+      </p:sp>
+      <p:sp>
+        <p:nvSpPr>
+          <p:cNvPr id="26" name="TextBox 25"/>
+          <p:cNvSpPr txBox="1"/>
+          <p:nvPr/>
+        </p:nvSpPr>
+        <p:spPr>
+          <a:xfrm>
+            <a:off x="548640" y="347472"/>
+            <a:ext cx="8229600" cy="274320"/>
+          </a:xfrm>
+          <a:prstGeom prst="rect">
+            <a:avLst/>
+          </a:prstGeom>
+          <a:noFill/>
+        </p:spPr>
+        <p:txBody>
+          <a:bodyPr wrap="square" lIns="0" rIns="0" tIns="0" bIns="0" anchor="t">
+            <a:spAutoFit/>
+          </a:bodyPr>
+          <a:lstStyle/>
+          <a:p>
+            <a:pPr algn="l"/>
+            <a:r>
+              <a:rPr sz="1200" b="1" i="0">
+                <a:solidFill>
+                  <a:srgbClr val="1B998B"/>
+                </a:solidFill>
+                <a:latin typeface="Prompt"/>
+                <a:ea typeface="Prompt"/>
+                <a:cs typeface="Prompt"/>
+              </a:rPr>
+              <a:t>แอ่งท่าตะโก · น้ำท่วมจริง</a:t>
+            </a:r>
+          </a:p>
+        </p:txBody>
+      </p:sp>
+      <p:sp>
+        <p:nvSpPr>
+          <p:cNvPr id="27" name="TextBox 26"/>
+          <p:cNvSpPr txBox="1"/>
+          <p:nvPr/>
+        </p:nvSpPr>
+        <p:spPr>
+          <a:xfrm>
+            <a:off x="548640" y="621792"/>
+            <a:ext cx="11091672" cy="685800"/>
+          </a:xfrm>
+          <a:prstGeom prst="rect">
+            <a:avLst/>
+          </a:prstGeom>
+          <a:noFill/>
+        </p:spPr>
+        <p:txBody>
+          <a:bodyPr wrap="square" lIns="0" rIns="0" tIns="0" bIns="0" anchor="ctr">
+            <a:spAutoFit/>
+          </a:bodyPr>
+          <a:lstStyle/>
+          <a:p>
+            <a:pPr algn="l"/>
+            <a:r>
+              <a:rPr sz="2600" b="1" i="0">
+                <a:solidFill>
+                  <a:srgbClr val="0B3C5D"/>
+                </a:solidFill>
+                <a:latin typeface="Prompt"/>
+                <a:ea typeface="Prompt"/>
+                <a:cs typeface="Prompt"/>
+              </a:rPr>
+              <a:t>แอ่งท่าตะโก: ท่วมซ้ำซากนาน 2–3 เดือน — ภาพเรดาร์ 9 ปียืนยัน</a:t>
+            </a:r>
+          </a:p>
+        </p:txBody>
+      </p:sp>
+      <p:sp>
+        <p:nvSpPr>
+          <p:cNvPr id="28" name="Rounded Rectangle 27"/>
+          <p:cNvSpPr/>
+          <p:nvPr/>
+        </p:nvSpPr>
+        <p:spPr>
+          <a:xfrm>
+            <a:off x="493776" y="1426464"/>
+            <a:ext cx="5093208" cy="4471416"/>
+          </a:xfrm>
+          <a:prstGeom prst="roundRect">
+            <a:avLst>
+              <a:gd name="adj" fmla="val 1600"/>
+            </a:avLst>
+          </a:prstGeom>
+          <a:solidFill>
+            <a:srgbClr val="FFFFFF"/>
+          </a:solidFill>
+          <a:ln w="9525">
+            <a:solidFill>
+              <a:srgbClr val="D5DEE6"/>
+            </a:solidFill>
+          </a:ln>
+          <a:effectLst/>
+        </p:spPr>
+        <p:style>
+          <a:lnRef idx="1">
+            <a:schemeClr val="accent1"/>
+          </a:lnRef>
+          <a:fillRef idx="3">
+            <a:schemeClr val="accent1"/>
+          </a:fillRef>
+          <a:effectRef idx="2">
+            <a:schemeClr val="accent1"/>
+          </a:effectRef>
+          <a:fontRef idx="minor">
+            <a:schemeClr val="lt1"/>
+          </a:fontRef>
+        </p:style>
+        <p:txBody>
+          <a:bodyPr rtlCol="0" anchor="ctr"/>
+          <a:lstStyle/>
+          <a:p/>
+        </p:txBody>
+      </p:sp>
+      <p:pic>
+        <p:nvPicPr>
+          <p:cNvPr id="29" name="Picture 28" descr="map_s1freq.png"/>
+          <p:cNvPicPr>
+            <a:picLocks noChangeAspect="1"/>
+          </p:cNvPicPr>
+          <p:nvPr/>
+        </p:nvPicPr>
+        <p:blipFill>
+          <a:blip r:embed="rId2"/>
+          <a:stretch>
+            <a:fillRect/>
+          </a:stretch>
+        </p:blipFill>
+        <p:spPr>
+          <a:xfrm>
+            <a:off x="548640" y="1481328"/>
+            <a:ext cx="4983480" cy="4361688"/>
+          </a:xfrm>
+          <a:prstGeom prst="rect">
+            <a:avLst/>
+          </a:prstGeom>
+        </p:spPr>
+      </p:pic>
+      <p:sp>
+        <p:nvSpPr>
+          <p:cNvPr id="30" name="TextBox 29"/>
+          <p:cNvSpPr txBox="1"/>
+          <p:nvPr/>
+        </p:nvSpPr>
+        <p:spPr>
+          <a:xfrm>
+            <a:off x="548640" y="5916168"/>
+            <a:ext cx="4983480" cy="274320"/>
+          </a:xfrm>
+          <a:prstGeom prst="rect">
+            <a:avLst/>
+          </a:prstGeom>
+          <a:noFill/>
+        </p:spPr>
+        <p:txBody>
+          <a:bodyPr wrap="square" lIns="0" rIns="0" tIns="0" bIns="0" anchor="t">
+            <a:spAutoFit/>
+          </a:bodyPr>
+          <a:lstStyle/>
+          <a:p>
+            <a:pPr algn="l"/>
+            <a:r>
+              <a:rPr sz="1000" b="0" i="0">
+                <a:solidFill>
+                  <a:srgbClr val="64748B"/>
+                </a:solidFill>
+                <a:latin typeface="Prompt"/>
+                <a:ea typeface="Prompt"/>
+                <a:cs typeface="Prompt"/>
+              </a:rPr>
+              <a:t>จำนวนปีที่ท่วมต่อเนื่อง 30 วันขึ้นไป (Sentinel-1 ปี 2560–2568)</a:t>
+            </a:r>
+          </a:p>
+        </p:txBody>
+      </p:sp>
+      <p:graphicFrame>
+        <p:nvGraphicFramePr>
+          <p:cNvPr id="31" name="Chart 30"/>
+          <p:cNvGraphicFramePr>
+            <a:graphicFrameLocks noGrp="1"/>
+          </p:cNvGraphicFramePr>
+          <p:nvPr/>
+        </p:nvGraphicFramePr>
+        <p:xfrm>
+          <a:off x="5897880" y="1371600"/>
+          <a:ext cx="5760720" cy="2697480"/>
+        </p:xfrm>
+        <a:graphic>
+          <a:graphicData uri="http://schemas.openxmlformats.org/drawingml/2006/chart">
+            <c:chart xmlns:c="http://schemas.openxmlformats.org/drawingml/2006/chart" r:id="rId3"/>
+          </a:graphicData>
+        </a:graphic>
+      </p:graphicFrame>
+      <p:sp>
+        <p:nvSpPr>
+          <p:cNvPr id="32" name="Rounded Rectangle 31"/>
+          <p:cNvSpPr/>
+          <p:nvPr/>
+        </p:nvSpPr>
+        <p:spPr>
+          <a:xfrm>
+            <a:off x="5897880" y="4224528"/>
+            <a:ext cx="1828800" cy="1417320"/>
+          </a:xfrm>
+          <a:prstGeom prst="roundRect">
+            <a:avLst>
+              <a:gd name="adj" fmla="val 6000"/>
+            </a:avLst>
+          </a:prstGeom>
+          <a:solidFill>
+            <a:srgbClr val="EEF5F9"/>
+          </a:solidFill>
+          <a:ln>
+            <a:noFill/>
+          </a:ln>
+          <a:effectLst/>
+        </p:spPr>
+        <p:style>
+          <a:lnRef idx="1">
+            <a:schemeClr val="accent1"/>
+          </a:lnRef>
+          <a:fillRef idx="3">
+            <a:schemeClr val="accent1"/>
+          </a:fillRef>
+          <a:effectRef idx="2">
+            <a:schemeClr val="accent1"/>
+          </a:effectRef>
+          <a:fontRef idx="minor">
+            <a:schemeClr val="lt1"/>
+          </a:fontRef>
+        </p:style>
+        <p:txBody>
+          <a:bodyPr rtlCol="0" anchor="ctr"/>
+          <a:lstStyle/>
+          <a:p/>
+        </p:txBody>
+      </p:sp>
+      <p:sp>
+        <p:nvSpPr>
+          <p:cNvPr id="33" name="TextBox 32"/>
+          <p:cNvSpPr txBox="1"/>
+          <p:nvPr/>
+        </p:nvSpPr>
+        <p:spPr>
+          <a:xfrm>
+            <a:off x="6099048" y="4352544"/>
+            <a:ext cx="1463040" cy="637794"/>
+          </a:xfrm>
+          <a:prstGeom prst="rect">
+            <a:avLst/>
+          </a:prstGeom>
+          <a:noFill/>
+        </p:spPr>
+        <p:txBody>
+          <a:bodyPr wrap="square" lIns="0" rIns="0" tIns="0" bIns="0" anchor="ctr">
+            <a:spAutoFit/>
+          </a:bodyPr>
+          <a:lstStyle/>
+          <a:p>
+            <a:pPr algn="l"/>
+            <a:r>
+              <a:rPr sz="2600" b="1" i="0">
+                <a:solidFill>
+                  <a:srgbClr val="0B3C5D"/>
+                </a:solidFill>
+                <a:latin typeface="Prompt"/>
+                <a:ea typeface="Prompt"/>
+                <a:cs typeface="Prompt"/>
+              </a:rPr>
+              <a:t>173</a:t>
+            </a:r>
+            <a:r>
+              <a:rPr sz="1300" b="0" i="0">
+                <a:solidFill>
+                  <a:srgbClr val="64748B"/>
+                </a:solidFill>
+                <a:latin typeface="Prompt"/>
+                <a:ea typeface="Prompt"/>
+                <a:cs typeface="Prompt"/>
+              </a:rPr>
+              <a:t>  ตร.กม.</a:t>
+            </a:r>
+          </a:p>
+        </p:txBody>
+      </p:sp>
+      <p:sp>
+        <p:nvSpPr>
+          <p:cNvPr id="34" name="TextBox 33"/>
+          <p:cNvSpPr txBox="1"/>
+          <p:nvPr/>
+        </p:nvSpPr>
+        <p:spPr>
+          <a:xfrm>
+            <a:off x="6099048" y="5018684"/>
+            <a:ext cx="1463040" cy="637794"/>
+          </a:xfrm>
+          <a:prstGeom prst="rect">
+            <a:avLst/>
+          </a:prstGeom>
+          <a:noFill/>
+        </p:spPr>
+        <p:txBody>
+          <a:bodyPr wrap="square" lIns="0" rIns="0" tIns="0" bIns="0" anchor="t">
+            <a:spAutoFit/>
+          </a:bodyPr>
+          <a:lstStyle/>
+          <a:p>
+            <a:pPr algn="l"/>
+            <a:r>
+              <a:rPr sz="1150" b="0" i="0">
+                <a:solidFill>
+                  <a:srgbClr val="1E293B"/>
+                </a:solidFill>
+                <a:latin typeface="Prompt"/>
+                <a:ea typeface="Prompt"/>
+                <a:cs typeface="Prompt"/>
+              </a:rPr>
+              <a:t>ท่วม 30 วันขึ้นไป อย่างน้อย 3 ใน 9 ปี</a:t>
+            </a:r>
+          </a:p>
+        </p:txBody>
+      </p:sp>
+      <p:sp>
+        <p:nvSpPr>
+          <p:cNvPr id="35" name="Rounded Rectangle 34"/>
+          <p:cNvSpPr/>
+          <p:nvPr/>
+        </p:nvSpPr>
+        <p:spPr>
+          <a:xfrm>
+            <a:off x="7863840" y="4224528"/>
+            <a:ext cx="1828800" cy="1417320"/>
+          </a:xfrm>
+          <a:prstGeom prst="roundRect">
+            <a:avLst>
+              <a:gd name="adj" fmla="val 6000"/>
+            </a:avLst>
+          </a:prstGeom>
+          <a:solidFill>
+            <a:srgbClr val="EEF5F9"/>
+          </a:solidFill>
+          <a:ln>
+            <a:noFill/>
+          </a:ln>
+          <a:effectLst/>
+        </p:spPr>
+        <p:style>
+          <a:lnRef idx="1">
+            <a:schemeClr val="accent1"/>
+          </a:lnRef>
+          <a:fillRef idx="3">
+            <a:schemeClr val="accent1"/>
+          </a:fillRef>
+          <a:effectRef idx="2">
+            <a:schemeClr val="accent1"/>
+          </a:effectRef>
+          <a:fontRef idx="minor">
+            <a:schemeClr val="lt1"/>
+          </a:fontRef>
+        </p:style>
+        <p:txBody>
+          <a:bodyPr rtlCol="0" anchor="ctr"/>
+          <a:lstStyle/>
+          <a:p/>
+        </p:txBody>
+      </p:sp>
+      <p:sp>
+        <p:nvSpPr>
+          <p:cNvPr id="36" name="TextBox 35"/>
+          <p:cNvSpPr txBox="1"/>
+          <p:nvPr/>
+        </p:nvSpPr>
+        <p:spPr>
+          <a:xfrm>
+            <a:off x="8065008" y="4352544"/>
+            <a:ext cx="1463040" cy="637794"/>
+          </a:xfrm>
+          <a:prstGeom prst="rect">
+            <a:avLst/>
+          </a:prstGeom>
+          <a:noFill/>
+        </p:spPr>
+        <p:txBody>
+          <a:bodyPr wrap="square" lIns="0" rIns="0" tIns="0" bIns="0" anchor="ctr">
+            <a:spAutoFit/>
+          </a:bodyPr>
+          <a:lstStyle/>
+          <a:p>
+            <a:pPr algn="l"/>
+            <a:r>
+              <a:rPr sz="2600" b="1" i="0">
+                <a:solidFill>
+                  <a:srgbClr val="D64545"/>
+                </a:solidFill>
+                <a:latin typeface="Prompt"/>
+                <a:ea typeface="Prompt"/>
+                <a:cs typeface="Prompt"/>
+              </a:rPr>
+              <a:t>70</a:t>
+            </a:r>
+            <a:r>
+              <a:rPr sz="1300" b="0" i="0">
+                <a:solidFill>
+                  <a:srgbClr val="64748B"/>
+                </a:solidFill>
+                <a:latin typeface="Prompt"/>
+                <a:ea typeface="Prompt"/>
+                <a:cs typeface="Prompt"/>
+              </a:rPr>
+              <a:t>  ตร.กม.</a:t>
+            </a:r>
+          </a:p>
+        </p:txBody>
+      </p:sp>
+      <p:sp>
+        <p:nvSpPr>
+          <p:cNvPr id="37" name="TextBox 36"/>
+          <p:cNvSpPr txBox="1"/>
+          <p:nvPr/>
+        </p:nvSpPr>
+        <p:spPr>
+          <a:xfrm>
+            <a:off x="8065008" y="5018684"/>
+            <a:ext cx="1463040" cy="637794"/>
+          </a:xfrm>
+          <a:prstGeom prst="rect">
+            <a:avLst/>
+          </a:prstGeom>
+          <a:noFill/>
+        </p:spPr>
+        <p:txBody>
+          <a:bodyPr wrap="square" lIns="0" rIns="0" tIns="0" bIns="0" anchor="t">
+            <a:spAutoFit/>
+          </a:bodyPr>
+          <a:lstStyle/>
+          <a:p>
+            <a:pPr algn="l"/>
+            <a:r>
+              <a:rPr sz="1150" b="0" i="0">
+                <a:solidFill>
+                  <a:srgbClr val="1E293B"/>
+                </a:solidFill>
+                <a:latin typeface="Prompt"/>
+                <a:ea typeface="Prompt"/>
+                <a:cs typeface="Prompt"/>
+              </a:rPr>
+              <a:t>ทับกฤช · ท่วมนานมัธยฐาน 72–84 วัน</a:t>
+            </a:r>
+          </a:p>
+        </p:txBody>
+      </p:sp>
+      <p:sp>
+        <p:nvSpPr>
+          <p:cNvPr id="38" name="Rounded Rectangle 37"/>
+          <p:cNvSpPr/>
+          <p:nvPr/>
+        </p:nvSpPr>
+        <p:spPr>
+          <a:xfrm>
+            <a:off x="9829800" y="4224528"/>
+            <a:ext cx="1828800" cy="1417320"/>
+          </a:xfrm>
+          <a:prstGeom prst="roundRect">
+            <a:avLst>
+              <a:gd name="adj" fmla="val 6000"/>
+            </a:avLst>
+          </a:prstGeom>
+          <a:solidFill>
+            <a:srgbClr val="EEF5F9"/>
+          </a:solidFill>
+          <a:ln>
+            <a:noFill/>
+          </a:ln>
+          <a:effectLst/>
+        </p:spPr>
+        <p:style>
+          <a:lnRef idx="1">
+            <a:schemeClr val="accent1"/>
+          </a:lnRef>
+          <a:fillRef idx="3">
+            <a:schemeClr val="accent1"/>
+          </a:fillRef>
+          <a:effectRef idx="2">
+            <a:schemeClr val="accent1"/>
+          </a:effectRef>
+          <a:fontRef idx="minor">
+            <a:schemeClr val="lt1"/>
+          </a:fontRef>
+        </p:style>
+        <p:txBody>
+          <a:bodyPr rtlCol="0" anchor="ctr"/>
+          <a:lstStyle/>
+          <a:p/>
+        </p:txBody>
+      </p:sp>
+      <p:sp>
+        <p:nvSpPr>
+          <p:cNvPr id="39" name="TextBox 38"/>
+          <p:cNvSpPr txBox="1"/>
+          <p:nvPr/>
+        </p:nvSpPr>
+        <p:spPr>
+          <a:xfrm>
+            <a:off x="10030968" y="4352544"/>
+            <a:ext cx="1463040" cy="637794"/>
+          </a:xfrm>
+          <a:prstGeom prst="rect">
+            <a:avLst/>
+          </a:prstGeom>
+          <a:noFill/>
+        </p:spPr>
+        <p:txBody>
+          <a:bodyPr wrap="square" lIns="0" rIns="0" tIns="0" bIns="0" anchor="ctr">
+            <a:spAutoFit/>
+          </a:bodyPr>
+          <a:lstStyle/>
+          <a:p>
+            <a:pPr algn="l"/>
+            <a:r>
+              <a:rPr sz="2600" b="1" i="0">
+                <a:solidFill>
+                  <a:srgbClr val="1B998B"/>
+                </a:solidFill>
+                <a:latin typeface="Prompt"/>
+                <a:ea typeface="Prompt"/>
+                <a:cs typeface="Prompt"/>
+              </a:rPr>
+              <a:t>4</a:t>
+            </a:r>
+            <a:r>
+              <a:rPr sz="1300" b="0" i="0">
+                <a:solidFill>
+                  <a:srgbClr val="64748B"/>
+                </a:solidFill>
+                <a:latin typeface="Prompt"/>
+                <a:ea typeface="Prompt"/>
+                <a:cs typeface="Prompt"/>
+              </a:rPr>
+              <a:t>  ตำบล</a:t>
+            </a:r>
+          </a:p>
+        </p:txBody>
+      </p:sp>
+      <p:sp>
+        <p:nvSpPr>
+          <p:cNvPr id="40" name="TextBox 39"/>
+          <p:cNvSpPr txBox="1"/>
+          <p:nvPr/>
+        </p:nvSpPr>
+        <p:spPr>
+          <a:xfrm>
+            <a:off x="10030968" y="5018684"/>
+            <a:ext cx="1463040" cy="637794"/>
+          </a:xfrm>
+          <a:prstGeom prst="rect">
+            <a:avLst/>
+          </a:prstGeom>
+          <a:noFill/>
+        </p:spPr>
+        <p:txBody>
+          <a:bodyPr wrap="square" lIns="0" rIns="0" tIns="0" bIns="0" anchor="t">
+            <a:spAutoFit/>
+          </a:bodyPr>
+          <a:lstStyle/>
+          <a:p>
+            <a:pPr algn="l"/>
+            <a:r>
+              <a:rPr sz="1150" b="0" i="0">
+                <a:solidFill>
+                  <a:srgbClr val="1E293B"/>
+                </a:solidFill>
+                <a:latin typeface="Prompt"/>
+                <a:ea typeface="Prompt"/>
+                <a:cs typeface="Prompt"/>
+              </a:rPr>
+              <a:t>รอบบึงบอระเพ็ดท่วมนานที่สุด</a:t>
+            </a:r>
+          </a:p>
+        </p:txBody>
+      </p:sp>
+      <p:sp>
+        <p:nvSpPr>
+          <p:cNvPr id="41" name="TextBox 40"/>
+          <p:cNvSpPr txBox="1"/>
+          <p:nvPr/>
+        </p:nvSpPr>
+        <p:spPr>
+          <a:xfrm>
+            <a:off x="5897880" y="5760720"/>
+            <a:ext cx="5760720" cy="502920"/>
+          </a:xfrm>
+          <a:prstGeom prst="rect">
+            <a:avLst/>
+          </a:prstGeom>
+          <a:noFill/>
+        </p:spPr>
+        <p:txBody>
+          <a:bodyPr wrap="square" lIns="0" rIns="0" tIns="0" bIns="0" anchor="t">
+            <a:spAutoFit/>
+          </a:bodyPr>
+          <a:lstStyle/>
+          <a:p>
+            <a:pPr algn="l"/>
+            <a:r>
+              <a:rPr sz="1100" b="0" i="0">
+                <a:solidFill>
+                  <a:srgbClr val="1E293B"/>
+                </a:solidFill>
+                <a:latin typeface="Prompt"/>
+                <a:ea typeface="Prompt"/>
+                <a:cs typeface="Prompt"/>
+              </a:rPr>
+              <a:t>ทับกฤช วังมหากร พนมเศษ พระนอน (+ ไผ่สิงห์) · ตำบลตอนในท่าตะโกแทบไม่ท่วมนาน</a:t>
+            </a:r>
+          </a:p>
+        </p:txBody>
+      </p:sp>
+      <p:sp>
+        <p:nvSpPr>
+          <p:cNvPr id="42" name="TextBox 41"/>
+          <p:cNvSpPr txBox="1"/>
+          <p:nvPr/>
+        </p:nvSpPr>
+        <p:spPr>
+          <a:xfrm>
+            <a:off x="548640" y="6400800"/>
+            <a:ext cx="10332720" cy="274320"/>
+          </a:xfrm>
+          <a:prstGeom prst="rect">
+            <a:avLst/>
+          </a:prstGeom>
+          <a:noFill/>
+        </p:spPr>
+        <p:txBody>
+          <a:bodyPr wrap="square" lIns="0" rIns="0" tIns="0" bIns="0" anchor="t">
+            <a:spAutoFit/>
+          </a:bodyPr>
+          <a:lstStyle/>
+          <a:p>
+            <a:pPr algn="l"/>
+            <a:r>
+              <a:rPr sz="900" b="0" i="0">
+                <a:solidFill>
+                  <a:srgbClr val="64748B"/>
+                </a:solidFill>
+                <a:latin typeface="Prompt"/>
+                <a:ea typeface="Prompt"/>
+                <a:cs typeface="Prompt"/>
+              </a:rPr>
+              <a:t>ที่มา: Sentinel-1 RTC VV (Microsoft Planetary Computer) วงโคจร 62 · 148 ภาพ ส.ค.–15 ธ.ค. ปี 2560–2568 · น้ำใต้ต้นข้าว/พืชสูงตรวจไม่พบ (อาจนับต่ำ) · ระยะเวลาถูกตัดที่ 15 ธ.ค.</a:t>
+            </a:r>
+          </a:p>
+        </p:txBody>
+      </p:sp>
+    </p:spTree>
+  </p:cSld>
+  <p:clrMapOvr>
+    <a:masterClrMapping/>
+  </p:clrMapOvr>
+</p:sld>
+</file>
+
+<file path=ppt/slides/slide16.xml><?xml version="1.0" encoding="utf-8"?>
+<p:sld xmlns:a="http://schemas.openxmlformats.org/drawingml/2006/main" xmlns:p="http://schemas.openxmlformats.org/presentationml/2006/main" xmlns:r="http://schemas.openxmlformats.org/officeDocument/2006/relationships">
+  <p:cSld>
+    <p:bg>
+      <p:bgPr>
+        <a:solidFill>
+          <a:srgbClr val="FFFFFF"/>
+        </a:solidFill>
+      </p:bgPr>
+    </p:bg>
+    <p:spTree>
+      <p:nvGrpSpPr>
+        <p:cNvPr id="1" name=""/>
+        <p:cNvGrpSpPr/>
+        <p:nvPr/>
+      </p:nvGrpSpPr>
+      <p:grpSpPr/>
+      <p:sp>
+        <p:nvSpPr>
+          <p:cNvPr id="25" name="Slide Number Placeholder 0"/>
+          <p:cNvSpPr>
+            <a:spLocks noGrp="1"/>
+          </p:cNvSpPr>
+          <p:nvPr>
+            <p:ph type="sldNum" sz="quarter" idx="4294967295"/>
+          </p:nvPr>
+        </p:nvSpPr>
+        <p:spPr>
+          <a:xfrm>
+            <a:off x="11277295" y="6419088"/>
+            <a:ext cx="457200" cy="274320"/>
+          </a:xfrm>
+          <a:prstGeom prst="rect">
+            <a:avLst/>
+          </a:prstGeom>
+          <a:extLst>
+            <a:ext uri="{C572A759-6A51-4108-AA02-DFA0A04FC94B}">
+              <ma14:wrappingTextBoxFlag xmlns:ma14="http://schemas.microsoft.com/office/mac/drawingml/2011/main" val="0"/>
+            </a:ext>
+          </a:extLst>
+        </p:spPr>
+        <p:txBody>
+          <a:bodyPr/>
+          <a:lstStyle>
+            <a:lvl1pPr>
+              <a:defRPr sz="900">
+                <a:solidFill>
+                  <a:srgbClr val="64748B"/>
+                </a:solidFill>
+                <a:latin typeface="Prompt"/>
+                <a:ea typeface="Prompt"/>
+                <a:cs typeface="Prompt"/>
+              </a:defRPr>
+            </a:lvl1pPr>
+          </a:lstStyle>
+          <a:p>
+            <a:pPr algn="r"/>
+            <a:fld id="{F7021451-1387-4CA6-816F-3879F97B5CBC}" type="slidenum">
+              <a:rPr b="0" lang="en-US"/>
+              <a:t>2</a:t>
+            </a:fld>
+            <a:endParaRPr lang="en-US"/>
+          </a:p>
+        </p:txBody>
+      </p:sp>
+      <p:sp>
+        <p:nvSpPr>
+          <p:cNvPr id="26" name="TextBox 25"/>
+          <p:cNvSpPr txBox="1"/>
+          <p:nvPr/>
+        </p:nvSpPr>
+        <p:spPr>
+          <a:xfrm>
+            <a:off x="548640" y="347472"/>
+            <a:ext cx="8229600" cy="274320"/>
+          </a:xfrm>
+          <a:prstGeom prst="rect">
+            <a:avLst/>
+          </a:prstGeom>
+          <a:noFill/>
+        </p:spPr>
+        <p:txBody>
+          <a:bodyPr wrap="square" lIns="0" rIns="0" tIns="0" bIns="0" anchor="t">
+            <a:spAutoFit/>
+          </a:bodyPr>
+          <a:lstStyle/>
+          <a:p>
+            <a:pPr algn="l"/>
+            <a:r>
+              <a:rPr sz="1200" b="1" i="0">
+                <a:solidFill>
+                  <a:srgbClr val="1B998B"/>
+                </a:solidFill>
+                <a:latin typeface="Prompt"/>
+                <a:ea typeface="Prompt"/>
+                <a:cs typeface="Prompt"/>
+              </a:rPr>
+              <a:t>แอ่งท่าตะโก · สาเหตุ</a:t>
+            </a:r>
+          </a:p>
+        </p:txBody>
+      </p:sp>
+      <p:sp>
+        <p:nvSpPr>
+          <p:cNvPr id="27" name="TextBox 26"/>
+          <p:cNvSpPr txBox="1"/>
+          <p:nvPr/>
+        </p:nvSpPr>
+        <p:spPr>
+          <a:xfrm>
+            <a:off x="548640" y="621792"/>
+            <a:ext cx="11091672" cy="685800"/>
+          </a:xfrm>
+          <a:prstGeom prst="rect">
+            <a:avLst/>
+          </a:prstGeom>
+          <a:noFill/>
+        </p:spPr>
+        <p:txBody>
+          <a:bodyPr wrap="square" lIns="0" rIns="0" tIns="0" bIns="0" anchor="ctr">
+            <a:spAutoFit/>
+          </a:bodyPr>
+          <a:lstStyle/>
+          <a:p>
+            <a:pPr algn="l"/>
+            <a:r>
+              <a:rPr sz="2600" b="1" i="0">
+                <a:solidFill>
+                  <a:srgbClr val="0B3C5D"/>
+                </a:solidFill>
+                <a:latin typeface="Prompt"/>
+                <a:ea typeface="Prompt"/>
+                <a:cs typeface="Prompt"/>
+              </a:rPr>
+              <a:t>สาเหตุหลักคือน้ำจากแม่น้ำ ไม่ใช่ฝนที่ตกในแอ่ง</a:t>
+            </a:r>
+          </a:p>
+        </p:txBody>
+      </p:sp>
+      <p:graphicFrame>
+        <p:nvGraphicFramePr>
+          <p:cNvPr id="28" name="Chart 27"/>
+          <p:cNvGraphicFramePr>
+            <a:graphicFrameLocks noGrp="1"/>
+          </p:cNvGraphicFramePr>
+          <p:nvPr/>
+        </p:nvGraphicFramePr>
+        <p:xfrm>
+          <a:off x="457200" y="1371600"/>
+          <a:ext cx="6035040" cy="3246120"/>
+        </p:xfrm>
+        <a:graphic>
+          <a:graphicData uri="http://schemas.openxmlformats.org/drawingml/2006/chart">
+            <c:chart xmlns:c="http://schemas.openxmlformats.org/drawingml/2006/chart" r:id="rId2"/>
+          </a:graphicData>
+        </a:graphic>
+      </p:graphicFrame>
+      <p:sp>
+        <p:nvSpPr>
+          <p:cNvPr id="29" name="Rounded Rectangle 28"/>
+          <p:cNvSpPr/>
+          <p:nvPr/>
+        </p:nvSpPr>
+        <p:spPr>
+          <a:xfrm>
+            <a:off x="548640" y="4754880"/>
+            <a:ext cx="5852160" cy="1481328"/>
+          </a:xfrm>
+          <a:prstGeom prst="roundRect">
+            <a:avLst>
+              <a:gd name="adj" fmla="val 6000"/>
+            </a:avLst>
+          </a:prstGeom>
+          <a:solidFill>
+            <a:srgbClr val="FFF4E5"/>
+          </a:solidFill>
+          <a:ln>
+            <a:noFill/>
+          </a:ln>
+          <a:effectLst/>
+        </p:spPr>
+        <p:style>
+          <a:lnRef idx="1">
+            <a:schemeClr val="accent1"/>
+          </a:lnRef>
+          <a:fillRef idx="3">
+            <a:schemeClr val="accent1"/>
+          </a:fillRef>
+          <a:effectRef idx="2">
+            <a:schemeClr val="accent1"/>
+          </a:effectRef>
+          <a:fontRef idx="minor">
+            <a:schemeClr val="lt1"/>
+          </a:fontRef>
+        </p:style>
+        <p:txBody>
+          <a:bodyPr rtlCol="0" anchor="ctr"/>
+          <a:lstStyle/>
+          <a:p/>
+        </p:txBody>
+      </p:sp>
+      <p:sp>
+        <p:nvSpPr>
+          <p:cNvPr id="30" name="TextBox 29"/>
+          <p:cNvSpPr txBox="1"/>
+          <p:nvPr/>
+        </p:nvSpPr>
+        <p:spPr>
+          <a:xfrm>
+            <a:off x="749808" y="4846320"/>
+            <a:ext cx="5486400" cy="365760"/>
+          </a:xfrm>
+          <a:prstGeom prst="rect">
+            <a:avLst/>
+          </a:prstGeom>
+          <a:noFill/>
+        </p:spPr>
+        <p:txBody>
+          <a:bodyPr wrap="square" lIns="0" rIns="0" tIns="0" bIns="0" anchor="t">
+            <a:spAutoFit/>
+          </a:bodyPr>
+          <a:lstStyle/>
+          <a:p>
+            <a:pPr algn="l"/>
+            <a:r>
+              <a:rPr sz="1300" b="1" i="0">
+                <a:solidFill>
+                  <a:srgbClr val="0B3C5D"/>
+                </a:solidFill>
+                <a:latin typeface="Prompt"/>
+                <a:ea typeface="Prompt"/>
+                <a:cs typeface="Prompt"/>
+              </a:rPr>
+              <a:t>ตรงกับที่ดาวเทียมเห็นท่วมนานแค่ไหน (สัดส่วนที่จับได้ · POD)</a:t>
+            </a:r>
+          </a:p>
+        </p:txBody>
+      </p:sp>
+      <p:sp>
+        <p:nvSpPr>
+          <p:cNvPr id="31" name="TextBox 30"/>
+          <p:cNvSpPr txBox="1"/>
+          <p:nvPr/>
+        </p:nvSpPr>
+        <p:spPr>
+          <a:xfrm>
+            <a:off x="749808" y="5257800"/>
+            <a:ext cx="1783080" cy="502920"/>
+          </a:xfrm>
+          <a:prstGeom prst="rect">
+            <a:avLst/>
+          </a:prstGeom>
+          <a:noFill/>
+        </p:spPr>
+        <p:txBody>
+          <a:bodyPr wrap="square" lIns="0" rIns="0" tIns="0" bIns="0" anchor="t">
+            <a:spAutoFit/>
+          </a:bodyPr>
+          <a:lstStyle/>
+          <a:p>
+            <a:pPr algn="l"/>
+            <a:r>
+              <a:rPr sz="2600" b="1" i="0">
+                <a:solidFill>
+                  <a:srgbClr val="A3B3C2"/>
+                </a:solidFill>
+                <a:latin typeface="Prompt"/>
+                <a:ea typeface="Prompt"/>
+                <a:cs typeface="Prompt"/>
+              </a:rPr>
+              <a:t>0.29</a:t>
+            </a:r>
+          </a:p>
+        </p:txBody>
+      </p:sp>
+      <p:sp>
+        <p:nvSpPr>
+          <p:cNvPr id="32" name="TextBox 31"/>
+          <p:cNvSpPr txBox="1"/>
+          <p:nvPr/>
+        </p:nvSpPr>
+        <p:spPr>
+          <a:xfrm>
+            <a:off x="749808" y="5760720"/>
+            <a:ext cx="1783080" cy="365760"/>
+          </a:xfrm>
+          <a:prstGeom prst="rect">
+            <a:avLst/>
+          </a:prstGeom>
+          <a:noFill/>
+        </p:spPr>
+        <p:txBody>
+          <a:bodyPr wrap="square" lIns="0" rIns="0" tIns="0" bIns="0" anchor="t">
+            <a:spAutoFit/>
+          </a:bodyPr>
+          <a:lstStyle/>
+          <a:p>
+            <a:pPr algn="l"/>
+            <a:r>
+              <a:rPr sz="1100" b="0" i="0">
+                <a:solidFill>
+                  <a:srgbClr val="1E293B"/>
+                </a:solidFill>
+                <a:latin typeface="Prompt"/>
+                <a:ea typeface="Prompt"/>
+                <a:cs typeface="Prompt"/>
+              </a:rPr>
+              <a:t>C ฝนอย่างเดียว</a:t>
+            </a:r>
+          </a:p>
+        </p:txBody>
+      </p:sp>
+      <p:sp>
+        <p:nvSpPr>
+          <p:cNvPr id="33" name="TextBox 32"/>
+          <p:cNvSpPr txBox="1"/>
+          <p:nvPr/>
+        </p:nvSpPr>
+        <p:spPr>
+          <a:xfrm>
+            <a:off x="2624327" y="5257800"/>
+            <a:ext cx="1783080" cy="502920"/>
+          </a:xfrm>
+          <a:prstGeom prst="rect">
+            <a:avLst/>
+          </a:prstGeom>
+          <a:noFill/>
+        </p:spPr>
+        <p:txBody>
+          <a:bodyPr wrap="square" lIns="0" rIns="0" tIns="0" bIns="0" anchor="t">
+            <a:spAutoFit/>
+          </a:bodyPr>
+          <a:lstStyle/>
+          <a:p>
+            <a:pPr algn="l"/>
+            <a:r>
+              <a:rPr sz="2600" b="1" i="0">
+                <a:solidFill>
+                  <a:srgbClr val="1B998B"/>
+                </a:solidFill>
+                <a:latin typeface="Prompt"/>
+                <a:ea typeface="Prompt"/>
+                <a:cs typeface="Prompt"/>
+              </a:rPr>
+              <a:t>0.42</a:t>
+            </a:r>
+          </a:p>
+        </p:txBody>
+      </p:sp>
+      <p:sp>
+        <p:nvSpPr>
+          <p:cNvPr id="34" name="TextBox 33"/>
+          <p:cNvSpPr txBox="1"/>
+          <p:nvPr/>
+        </p:nvSpPr>
+        <p:spPr>
+          <a:xfrm>
+            <a:off x="2624327" y="5760720"/>
+            <a:ext cx="1783080" cy="365760"/>
+          </a:xfrm>
+          <a:prstGeom prst="rect">
+            <a:avLst/>
+          </a:prstGeom>
+          <a:noFill/>
+        </p:spPr>
+        <p:txBody>
+          <a:bodyPr wrap="square" lIns="0" rIns="0" tIns="0" bIns="0" anchor="t">
+            <a:spAutoFit/>
+          </a:bodyPr>
+          <a:lstStyle/>
+          <a:p>
+            <a:pPr algn="l"/>
+            <a:r>
+              <a:rPr sz="1100" b="0" i="0">
+                <a:solidFill>
+                  <a:srgbClr val="1E293B"/>
+                </a:solidFill>
+                <a:latin typeface="Prompt"/>
+                <a:ea typeface="Prompt"/>
+                <a:cs typeface="Prompt"/>
+              </a:rPr>
+              <a:t>D + น้ำเต็มตลิ่ง</a:t>
+            </a:r>
+          </a:p>
+        </p:txBody>
+      </p:sp>
+      <p:sp>
+        <p:nvSpPr>
+          <p:cNvPr id="35" name="TextBox 34"/>
+          <p:cNvSpPr txBox="1"/>
+          <p:nvPr/>
+        </p:nvSpPr>
+        <p:spPr>
+          <a:xfrm>
+            <a:off x="4498848" y="5257800"/>
+            <a:ext cx="1783080" cy="502920"/>
+          </a:xfrm>
+          <a:prstGeom prst="rect">
+            <a:avLst/>
+          </a:prstGeom>
+          <a:noFill/>
+        </p:spPr>
+        <p:txBody>
+          <a:bodyPr wrap="square" lIns="0" rIns="0" tIns="0" bIns="0" anchor="t">
+            <a:spAutoFit/>
+          </a:bodyPr>
+          <a:lstStyle/>
+          <a:p>
+            <a:pPr algn="l"/>
+            <a:r>
+              <a:rPr sz="2600" b="1" i="0">
+                <a:solidFill>
+                  <a:srgbClr val="D64545"/>
+                </a:solidFill>
+                <a:latin typeface="Prompt"/>
+                <a:ea typeface="Prompt"/>
+                <a:cs typeface="Prompt"/>
+              </a:rPr>
+              <a:t>0.81</a:t>
+            </a:r>
+          </a:p>
+        </p:txBody>
+      </p:sp>
+      <p:sp>
+        <p:nvSpPr>
+          <p:cNvPr id="36" name="TextBox 35"/>
+          <p:cNvSpPr txBox="1"/>
+          <p:nvPr/>
+        </p:nvSpPr>
+        <p:spPr>
+          <a:xfrm>
+            <a:off x="4498848" y="5760720"/>
+            <a:ext cx="1783080" cy="365760"/>
+          </a:xfrm>
+          <a:prstGeom prst="rect">
+            <a:avLst/>
+          </a:prstGeom>
+          <a:noFill/>
+        </p:spPr>
+        <p:txBody>
+          <a:bodyPr wrap="square" lIns="0" rIns="0" tIns="0" bIns="0" anchor="t">
+            <a:spAutoFit/>
+          </a:bodyPr>
+          <a:lstStyle/>
+          <a:p>
+            <a:pPr algn="l"/>
+            <a:r>
+              <a:rPr sz="1100" b="0" i="0">
+                <a:solidFill>
+                  <a:srgbClr val="1E293B"/>
+                </a:solidFill>
+                <a:latin typeface="Prompt"/>
+                <a:ea typeface="Prompt"/>
+                <a:cs typeface="Prompt"/>
+              </a:rPr>
+              <a:t>E + น้ำล้นตลิ่ง</a:t>
+            </a:r>
+          </a:p>
+        </p:txBody>
+      </p:sp>
+      <p:sp>
+        <p:nvSpPr>
+          <p:cNvPr id="37" name="Rounded Rectangle 36"/>
+          <p:cNvSpPr/>
+          <p:nvPr/>
+        </p:nvSpPr>
+        <p:spPr>
+          <a:xfrm>
+            <a:off x="6757416" y="1426464"/>
+            <a:ext cx="4937760" cy="4334256"/>
+          </a:xfrm>
+          <a:prstGeom prst="roundRect">
+            <a:avLst>
+              <a:gd name="adj" fmla="val 1600"/>
+            </a:avLst>
+          </a:prstGeom>
+          <a:solidFill>
+            <a:srgbClr val="FFFFFF"/>
+          </a:solidFill>
+          <a:ln w="9525">
+            <a:solidFill>
+              <a:srgbClr val="D5DEE6"/>
+            </a:solidFill>
+          </a:ln>
+          <a:effectLst/>
+        </p:spPr>
+        <p:style>
+          <a:lnRef idx="1">
+            <a:schemeClr val="accent1"/>
+          </a:lnRef>
+          <a:fillRef idx="3">
+            <a:schemeClr val="accent1"/>
+          </a:fillRef>
+          <a:effectRef idx="2">
+            <a:schemeClr val="accent1"/>
+          </a:effectRef>
+          <a:fontRef idx="minor">
+            <a:schemeClr val="lt1"/>
+          </a:fontRef>
+        </p:style>
+        <p:txBody>
+          <a:bodyPr rtlCol="0" anchor="ctr"/>
+          <a:lstStyle/>
+          <a:p/>
+        </p:txBody>
+      </p:sp>
+      <p:pic>
+        <p:nvPicPr>
+          <p:cNvPr id="38" name="Picture 37" descr="map_scnE.png"/>
+          <p:cNvPicPr>
+            <a:picLocks noChangeAspect="1"/>
+          </p:cNvPicPr>
+          <p:nvPr/>
+        </p:nvPicPr>
+        <p:blipFill>
+          <a:blip r:embed="rId3"/>
+          <a:stretch>
+            <a:fillRect/>
+          </a:stretch>
+        </p:blipFill>
+        <p:spPr>
+          <a:xfrm>
+            <a:off x="6812280" y="1481328"/>
+            <a:ext cx="4828032" cy="4224528"/>
+          </a:xfrm>
+          <a:prstGeom prst="rect">
+            <a:avLst/>
+          </a:prstGeom>
+        </p:spPr>
+      </p:pic>
+      <p:sp>
+        <p:nvSpPr>
+          <p:cNvPr id="39" name="TextBox 38"/>
+          <p:cNvSpPr txBox="1"/>
+          <p:nvPr/>
+        </p:nvSpPr>
+        <p:spPr>
+          <a:xfrm>
+            <a:off x="6812280" y="5779008"/>
+            <a:ext cx="4828032" cy="502920"/>
+          </a:xfrm>
+          <a:prstGeom prst="rect">
+            <a:avLst/>
+          </a:prstGeom>
+          <a:noFill/>
+        </p:spPr>
+        <p:txBody>
+          <a:bodyPr wrap="square" lIns="0" rIns="0" tIns="0" bIns="0" anchor="t">
+            <a:spAutoFit/>
+          </a:bodyPr>
+          <a:lstStyle/>
+          <a:p>
+            <a:pPr algn="l"/>
+            <a:r>
+              <a:rPr sz="1050" b="0" i="0">
+                <a:solidFill>
+                  <a:srgbClr val="64748B"/>
+                </a:solidFill>
+                <a:latin typeface="Prompt"/>
+                <a:ea typeface="Prompt"/>
+                <a:cs typeface="Prompt"/>
+              </a:rPr>
+              <a:t>สถานการณ์ E: เวลาที่น้ำลดนับจากฝนเริ่มตก — น้ำขังเกิน 14 วันรวมที่ขอบบึงบอระเพ็ด (ทับกฤช พนมเศษ วังมหากร)</a:t>
+            </a:r>
+          </a:p>
+        </p:txBody>
+      </p:sp>
+      <p:sp>
+        <p:nvSpPr>
+          <p:cNvPr id="40" name="TextBox 39"/>
+          <p:cNvSpPr txBox="1"/>
+          <p:nvPr/>
+        </p:nvSpPr>
+        <p:spPr>
+          <a:xfrm>
+            <a:off x="548640" y="6400800"/>
+            <a:ext cx="10332720" cy="274320"/>
+          </a:xfrm>
+          <a:prstGeom prst="rect">
+            <a:avLst/>
+          </a:prstGeom>
+          <a:noFill/>
+        </p:spPr>
+        <p:txBody>
+          <a:bodyPr wrap="square" lIns="0" rIns="0" tIns="0" bIns="0" anchor="t">
+            <a:spAutoFit/>
+          </a:bodyPr>
+          <a:lstStyle/>
+          <a:p>
+            <a:pPr algn="l"/>
+            <a:r>
+              <a:rPr sz="900" b="0" i="0">
+                <a:solidFill>
+                  <a:srgbClr val="64748B"/>
+                </a:solidFill>
+                <a:latin typeface="Prompt"/>
+                <a:ea typeface="Prompt"/>
+                <a:cs typeface="Prompt"/>
+              </a:rPr>
+              <a:t>แบบจำลอง 2D 180 ม. แอ่งท่าตะโก (พื้นที่รับน้ำ 3,741 ตร.กม.) · เริ่มจากแห้ง คันนาเก็บน้ำ 100 มม. · เทียบกับพื้นที่ท่วมจริง 30 วันขึ้นไป อย่างน้อย 3 ปี (Sentinel-1)</a:t>
+            </a:r>
+          </a:p>
+        </p:txBody>
+      </p:sp>
+    </p:spTree>
+  </p:cSld>
+  <p:clrMapOvr>
+    <a:masterClrMapping/>
+  </p:clrMapOvr>
+</p:sld>
+</file>
+
+<file path=ppt/slides/slide17.xml><?xml version="1.0" encoding="utf-8"?>
+<p:sld xmlns:a="http://schemas.openxmlformats.org/drawingml/2006/main" xmlns:p="http://schemas.openxmlformats.org/presentationml/2006/main" xmlns:r="http://schemas.openxmlformats.org/officeDocument/2006/relationships">
+  <p:cSld>
+    <p:bg>
+      <p:bgPr>
+        <a:solidFill>
+          <a:srgbClr val="FFFFFF"/>
+        </a:solidFill>
+      </p:bgPr>
+    </p:bg>
+    <p:spTree>
+      <p:nvGrpSpPr>
+        <p:cNvPr id="1" name=""/>
+        <p:cNvGrpSpPr/>
+        <p:nvPr/>
+      </p:nvGrpSpPr>
+      <p:grpSpPr/>
+      <p:sp>
+        <p:nvSpPr>
+          <p:cNvPr id="25" name="Slide Number Placeholder 0"/>
+          <p:cNvSpPr>
+            <a:spLocks noGrp="1"/>
+          </p:cNvSpPr>
+          <p:nvPr>
+            <p:ph type="sldNum" sz="quarter" idx="4294967295"/>
+          </p:nvPr>
+        </p:nvSpPr>
+        <p:spPr>
+          <a:xfrm>
+            <a:off x="11277295" y="6419088"/>
+            <a:ext cx="457200" cy="274320"/>
+          </a:xfrm>
+          <a:prstGeom prst="rect">
+            <a:avLst/>
+          </a:prstGeom>
+          <a:extLst>
+            <a:ext uri="{C572A759-6A51-4108-AA02-DFA0A04FC94B}">
+              <ma14:wrappingTextBoxFlag xmlns:ma14="http://schemas.microsoft.com/office/mac/drawingml/2011/main" val="0"/>
+            </a:ext>
+          </a:extLst>
+        </p:spPr>
+        <p:txBody>
+          <a:bodyPr/>
+          <a:lstStyle>
+            <a:lvl1pPr>
+              <a:defRPr sz="900">
+                <a:solidFill>
+                  <a:srgbClr val="64748B"/>
+                </a:solidFill>
+                <a:latin typeface="Prompt"/>
+                <a:ea typeface="Prompt"/>
+                <a:cs typeface="Prompt"/>
+              </a:defRPr>
+            </a:lvl1pPr>
+          </a:lstStyle>
+          <a:p>
+            <a:pPr algn="r"/>
+            <a:fld id="{F7021451-1387-4CA6-816F-3879F97B5CBC}" type="slidenum">
+              <a:rPr b="0" lang="en-US"/>
+              <a:t>2</a:t>
+            </a:fld>
+            <a:endParaRPr lang="en-US"/>
+          </a:p>
+        </p:txBody>
+      </p:sp>
+      <p:sp>
+        <p:nvSpPr>
+          <p:cNvPr id="26" name="TextBox 25"/>
+          <p:cNvSpPr txBox="1"/>
+          <p:nvPr/>
+        </p:nvSpPr>
+        <p:spPr>
+          <a:xfrm>
+            <a:off x="548640" y="347472"/>
+            <a:ext cx="8229600" cy="274320"/>
+          </a:xfrm>
+          <a:prstGeom prst="rect">
+            <a:avLst/>
+          </a:prstGeom>
+          <a:noFill/>
+        </p:spPr>
+        <p:txBody>
+          <a:bodyPr wrap="square" lIns="0" rIns="0" tIns="0" bIns="0" anchor="t">
+            <a:spAutoFit/>
+          </a:bodyPr>
+          <a:lstStyle/>
+          <a:p>
+            <a:pPr algn="l"/>
+            <a:r>
+              <a:rPr sz="1200" b="1" i="0">
+                <a:solidFill>
+                  <a:srgbClr val="1B998B"/>
+                </a:solidFill>
+                <a:latin typeface="Prompt"/>
+                <a:ea typeface="Prompt"/>
+                <a:cs typeface="Prompt"/>
+              </a:rPr>
+              <a:t>แอ่งท่าตะโก · ทดสอบกับเหตุการณ์จริง</a:t>
+            </a:r>
+          </a:p>
+        </p:txBody>
+      </p:sp>
+      <p:sp>
+        <p:nvSpPr>
+          <p:cNvPr id="27" name="TextBox 26"/>
+          <p:cNvSpPr txBox="1"/>
+          <p:nvPr/>
+        </p:nvSpPr>
+        <p:spPr>
+          <a:xfrm>
+            <a:off x="548640" y="621792"/>
+            <a:ext cx="11091672" cy="685800"/>
+          </a:xfrm>
+          <a:prstGeom prst="rect">
+            <a:avLst/>
+          </a:prstGeom>
+          <a:noFill/>
+        </p:spPr>
+        <p:txBody>
+          <a:bodyPr wrap="square" lIns="0" rIns="0" tIns="0" bIns="0" anchor="ctr">
+            <a:spAutoFit/>
+          </a:bodyPr>
+          <a:lstStyle/>
+          <a:p>
+            <a:pPr algn="l"/>
+            <a:r>
+              <a:rPr sz="2600" b="1" i="0">
+                <a:solidFill>
+                  <a:srgbClr val="0B3C5D"/>
+                </a:solidFill>
+                <a:latin typeface="Prompt"/>
+                <a:ea typeface="Prompt"/>
+                <a:cs typeface="Prompt"/>
+              </a:rPr>
+              <a:t>จำลองน้ำท่วมจริง 3 ปีได้ใกล้เคียงดาวเทียม (CSI 0.49–0.54)</a:t>
+            </a:r>
+          </a:p>
+        </p:txBody>
+      </p:sp>
+      <p:sp>
+        <p:nvSpPr>
+          <p:cNvPr id="28" name="Rounded Rectangle 27"/>
+          <p:cNvSpPr/>
+          <p:nvPr/>
+        </p:nvSpPr>
+        <p:spPr>
+          <a:xfrm>
+            <a:off x="493776" y="1426464"/>
+            <a:ext cx="4956048" cy="4352544"/>
+          </a:xfrm>
+          <a:prstGeom prst="roundRect">
+            <a:avLst>
+              <a:gd name="adj" fmla="val 1600"/>
+            </a:avLst>
+          </a:prstGeom>
+          <a:solidFill>
+            <a:srgbClr val="FFFFFF"/>
+          </a:solidFill>
+          <a:ln w="9525">
+            <a:solidFill>
+              <a:srgbClr val="D5DEE6"/>
+            </a:solidFill>
+          </a:ln>
+          <a:effectLst/>
+        </p:spPr>
+        <p:style>
+          <a:lnRef idx="1">
+            <a:schemeClr val="accent1"/>
+          </a:lnRef>
+          <a:fillRef idx="3">
+            <a:schemeClr val="accent1"/>
+          </a:fillRef>
+          <a:effectRef idx="2">
+            <a:schemeClr val="accent1"/>
+          </a:effectRef>
+          <a:fontRef idx="minor">
+            <a:schemeClr val="lt1"/>
+          </a:fontRef>
+        </p:style>
+        <p:txBody>
+          <a:bodyPr rtlCol="0" anchor="ctr"/>
+          <a:lstStyle/>
+          <a:p/>
+        </p:txBody>
+      </p:sp>
+      <p:pic>
+        <p:nvPicPr>
+          <p:cNvPr id="29" name="Picture 28" descr="map_ev2025.png"/>
+          <p:cNvPicPr>
+            <a:picLocks noChangeAspect="1"/>
+          </p:cNvPicPr>
+          <p:nvPr/>
+        </p:nvPicPr>
+        <p:blipFill>
+          <a:blip r:embed="rId2"/>
+          <a:stretch>
+            <a:fillRect/>
+          </a:stretch>
+        </p:blipFill>
+        <p:spPr>
+          <a:xfrm>
+            <a:off x="548640" y="1481328"/>
+            <a:ext cx="4846320" cy="4242816"/>
+          </a:xfrm>
+          <a:prstGeom prst="rect">
+            <a:avLst/>
+          </a:prstGeom>
+        </p:spPr>
+      </p:pic>
+      <p:sp>
+        <p:nvSpPr>
+          <p:cNvPr id="30" name="TextBox 29"/>
+          <p:cNvSpPr txBox="1"/>
+          <p:nvPr/>
+        </p:nvSpPr>
+        <p:spPr>
+          <a:xfrm>
+            <a:off x="548640" y="5797296"/>
+            <a:ext cx="4846320" cy="457200"/>
+          </a:xfrm>
+          <a:prstGeom prst="rect">
+            <a:avLst/>
+          </a:prstGeom>
+          <a:noFill/>
+        </p:spPr>
+        <p:txBody>
+          <a:bodyPr wrap="square" lIns="0" rIns="0" tIns="0" bIns="0" anchor="t">
+            <a:spAutoFit/>
+          </a:bodyPr>
+          <a:lstStyle/>
+          <a:p>
+            <a:pPr algn="l"/>
+            <a:r>
+              <a:rPr sz="1050" b="0" i="0">
+                <a:solidFill>
+                  <a:srgbClr val="64748B"/>
+                </a:solidFill>
+                <a:latin typeface="Prompt"/>
+                <a:ea typeface="Prompt"/>
+                <a:cs typeface="Prompt"/>
+              </a:rPr>
+              <a:t>ปี 2568: พื้นที่ท่วม 30 วันขึ้นไป — แบบจำลองเทียบภาพเรดาร์วันเดียวกัน</a:t>
+            </a:r>
+          </a:p>
+        </p:txBody>
+      </p:sp>
+      <p:graphicFrame>
+        <p:nvGraphicFramePr>
+          <p:cNvPr id="31" name="Table 30"/>
+          <p:cNvGraphicFramePr>
+            <a:graphicFrameLocks noGrp="1"/>
+          </p:cNvGraphicFramePr>
+          <p:nvPr/>
+        </p:nvGraphicFramePr>
+        <p:xfrm>
+          <a:off x="5760720" y="1481328"/>
+          <a:ext cx="5879592" cy="1389888"/>
+        </p:xfrm>
+        <a:graphic>
+          <a:graphicData uri="http://schemas.openxmlformats.org/drawingml/2006/table">
+            <a:tbl>
+              <a:tblPr firstRow="1" bandRow="0">
+                <a:tableStyleId>{5940675A-B579-460E-94D1-54222C63F5DA}</a:tableStyleId>
+              </a:tblPr>
+              <a:tblGrid>
+                <a:gridCol w="731520"/>
+                <a:gridCol w="2587752"/>
+                <a:gridCol w="1371600"/>
+                <a:gridCol w="1188720"/>
+              </a:tblGrid>
+              <a:tr h="347472">
+                <a:tc>
+                  <a:txBody>
+                    <a:bodyPr/>
+                    <a:lstStyle/>
+                    <a:p>
+                      <a:pPr algn="l"/>
+                      <a:r>
+                        <a:rPr sz="1200" b="1" i="0">
+                          <a:solidFill>
+                            <a:srgbClr val="FFFFFF"/>
+                          </a:solidFill>
+                          <a:latin typeface="Prompt"/>
+                          <a:ea typeface="Prompt"/>
+                          <a:cs typeface="Prompt"/>
+                        </a:rPr>
+                        <a:t>ปี</a:t>
+                      </a:r>
+                    </a:p>
+                  </a:txBody>
+                  <a:tcPr marL="73152" marR="73152" marT="27432" marB="27432" anchor="ctr">
+                    <a:lnL w="6350">
+                      <a:solidFill>
+                        <a:srgbClr val="D5DEE6"/>
+                      </a:solidFill>
+                    </a:lnL>
+                    <a:lnR w="6350">
+                      <a:solidFill>
+                        <a:srgbClr val="D5DEE6"/>
+                      </a:solidFill>
+                    </a:lnR>
+                    <a:lnT w="6350">
+                      <a:solidFill>
+                        <a:srgbClr val="D5DEE6"/>
+                      </a:solidFill>
+                    </a:lnT>
+                    <a:lnB w="6350">
+                      <a:solidFill>
+                        <a:srgbClr val="D5DEE6"/>
+                      </a:solidFill>
+                    </a:lnB>
+                    <a:solidFill>
+                      <a:srgbClr val="0B3C5D"/>
+                    </a:solidFill>
+                  </a:tcPr>
+                </a:tc>
+                <a:tc>
+                  <a:txBody>
+                    <a:bodyPr/>
+                    <a:lstStyle/>
+                    <a:p>
+                      <a:pPr algn="ctr"/>
+                      <a:r>
+                        <a:rPr sz="1200" b="1" i="0">
+                          <a:solidFill>
+                            <a:srgbClr val="FFFFFF"/>
+                          </a:solidFill>
+                          <a:latin typeface="Prompt"/>
+                          <a:ea typeface="Prompt"/>
+                          <a:cs typeface="Prompt"/>
+                        </a:rPr>
+                        <a:t>ท่วม 30 วันขึ้นไป จำลอง / จริง</a:t>
+                      </a:r>
+                    </a:p>
+                  </a:txBody>
+                  <a:tcPr marL="73152" marR="73152" marT="27432" marB="27432" anchor="ctr">
+                    <a:lnL w="6350">
+                      <a:solidFill>
+                        <a:srgbClr val="D5DEE6"/>
+                      </a:solidFill>
+                    </a:lnL>
+                    <a:lnR w="6350">
+                      <a:solidFill>
+                        <a:srgbClr val="D5DEE6"/>
+                      </a:solidFill>
+                    </a:lnR>
+                    <a:lnT w="6350">
+                      <a:solidFill>
+                        <a:srgbClr val="D5DEE6"/>
+                      </a:solidFill>
+                    </a:lnT>
+                    <a:lnB w="6350">
+                      <a:solidFill>
+                        <a:srgbClr val="D5DEE6"/>
+                      </a:solidFill>
+                    </a:lnB>
+                    <a:solidFill>
+                      <a:srgbClr val="0B3C5D"/>
+                    </a:solidFill>
+                  </a:tcPr>
+                </a:tc>
+                <a:tc>
+                  <a:txBody>
+                    <a:bodyPr/>
+                    <a:lstStyle/>
+                    <a:p>
+                      <a:pPr algn="ctr"/>
+                      <a:r>
+                        <a:rPr sz="1200" b="1" i="0">
+                          <a:solidFill>
+                            <a:srgbClr val="FFFFFF"/>
+                          </a:solidFill>
+                          <a:latin typeface="Prompt"/>
+                          <a:ea typeface="Prompt"/>
+                          <a:cs typeface="Prompt"/>
+                        </a:rPr>
+                        <a:t>จับได้ (POD)</a:t>
+                      </a:r>
+                    </a:p>
+                  </a:txBody>
+                  <a:tcPr marL="73152" marR="73152" marT="27432" marB="27432" anchor="ctr">
+                    <a:lnL w="6350">
+                      <a:solidFill>
+                        <a:srgbClr val="D5DEE6"/>
+                      </a:solidFill>
+                    </a:lnL>
+                    <a:lnR w="6350">
+                      <a:solidFill>
+                        <a:srgbClr val="D5DEE6"/>
+                      </a:solidFill>
+                    </a:lnR>
+                    <a:lnT w="6350">
+                      <a:solidFill>
+                        <a:srgbClr val="D5DEE6"/>
+                      </a:solidFill>
+                    </a:lnT>
+                    <a:lnB w="6350">
+                      <a:solidFill>
+                        <a:srgbClr val="D5DEE6"/>
+                      </a:solidFill>
+                    </a:lnB>
+                    <a:solidFill>
+                      <a:srgbClr val="0B3C5D"/>
+                    </a:solidFill>
+                  </a:tcPr>
+                </a:tc>
+                <a:tc>
+                  <a:txBody>
+                    <a:bodyPr/>
+                    <a:lstStyle/>
+                    <a:p>
+                      <a:pPr algn="ctr"/>
+                      <a:r>
+                        <a:rPr sz="1200" b="1" i="0">
+                          <a:solidFill>
+                            <a:srgbClr val="FFFFFF"/>
+                          </a:solidFill>
+                          <a:latin typeface="Prompt"/>
+                          <a:ea typeface="Prompt"/>
+                          <a:cs typeface="Prompt"/>
+                        </a:rPr>
+                        <a:t>CSI</a:t>
+                      </a:r>
+                    </a:p>
+                  </a:txBody>
+                  <a:tcPr marL="73152" marR="73152" marT="27432" marB="27432" anchor="ctr">
+                    <a:lnL w="6350">
+                      <a:solidFill>
+                        <a:srgbClr val="D5DEE6"/>
+                      </a:solidFill>
+                    </a:lnL>
+                    <a:lnR w="6350">
+                      <a:solidFill>
+                        <a:srgbClr val="D5DEE6"/>
+                      </a:solidFill>
+                    </a:lnR>
+                    <a:lnT w="6350">
+                      <a:solidFill>
+                        <a:srgbClr val="D5DEE6"/>
+                      </a:solidFill>
+                    </a:lnT>
+                    <a:lnB w="6350">
+                      <a:solidFill>
+                        <a:srgbClr val="D5DEE6"/>
+                      </a:solidFill>
+                    </a:lnB>
+                    <a:solidFill>
+                      <a:srgbClr val="0B3C5D"/>
+                    </a:solidFill>
+                  </a:tcPr>
+                </a:tc>
+              </a:tr>
+              <a:tr h="347472">
+                <a:tc>
+                  <a:txBody>
+                    <a:bodyPr/>
+                    <a:lstStyle/>
+                    <a:p>
+                      <a:pPr algn="l"/>
+                      <a:r>
+                        <a:rPr sz="1200" i="0">
+                          <a:solidFill>
+                            <a:srgbClr val="1E293B"/>
+                          </a:solidFill>
+                          <a:latin typeface="Prompt"/>
+                          <a:ea typeface="Prompt"/>
+                          <a:cs typeface="Prompt"/>
+                        </a:rPr>
+                        <a:t>2564</a:t>
+                      </a:r>
+                    </a:p>
+                  </a:txBody>
+                  <a:tcPr marL="73152" marR="73152" marT="27432" marB="27432" anchor="ctr">
+                    <a:lnL w="6350">
+                      <a:solidFill>
+                        <a:srgbClr val="D5DEE6"/>
+                      </a:solidFill>
+                    </a:lnL>
+                    <a:lnR w="6350">
+                      <a:solidFill>
+                        <a:srgbClr val="D5DEE6"/>
+                      </a:solidFill>
+                    </a:lnR>
+                    <a:lnT w="6350">
+                      <a:solidFill>
+                        <a:srgbClr val="D5DEE6"/>
+                      </a:solidFill>
+                    </a:lnT>
+                    <a:lnB w="6350">
+                      <a:solidFill>
+                        <a:srgbClr val="D5DEE6"/>
+                      </a:solidFill>
+                    </a:lnB>
+                    <a:solidFill>
+                      <a:srgbClr val="FFFFFF"/>
+                    </a:solidFill>
+                  </a:tcPr>
+                </a:tc>
+                <a:tc>
+                  <a:txBody>
+                    <a:bodyPr/>
+                    <a:lstStyle/>
+                    <a:p>
+                      <a:pPr algn="ctr"/>
+                      <a:r>
+                        <a:rPr sz="1200" i="0">
+                          <a:solidFill>
+                            <a:srgbClr val="1E293B"/>
+                          </a:solidFill>
+                          <a:latin typeface="Prompt"/>
+                          <a:ea typeface="Prompt"/>
+                          <a:cs typeface="Prompt"/>
+                        </a:rPr>
+                        <a:t>250 / 211 ตร.กม.</a:t>
+                      </a:r>
+                    </a:p>
+                  </a:txBody>
+                  <a:tcPr marL="73152" marR="73152" marT="27432" marB="27432" anchor="ctr">
+                    <a:lnL w="6350">
+                      <a:solidFill>
+                        <a:srgbClr val="D5DEE6"/>
+                      </a:solidFill>
+                    </a:lnL>
+                    <a:lnR w="6350">
+                      <a:solidFill>
+                        <a:srgbClr val="D5DEE6"/>
+                      </a:solidFill>
+                    </a:lnR>
+                    <a:lnT w="6350">
+                      <a:solidFill>
+                        <a:srgbClr val="D5DEE6"/>
+                      </a:solidFill>
+                    </a:lnT>
+                    <a:lnB w="6350">
+                      <a:solidFill>
+                        <a:srgbClr val="D5DEE6"/>
+                      </a:solidFill>
+                    </a:lnB>
+                    <a:solidFill>
+                      <a:srgbClr val="FFFFFF"/>
+                    </a:solidFill>
+                  </a:tcPr>
+                </a:tc>
+                <a:tc>
+                  <a:txBody>
+                    <a:bodyPr/>
+                    <a:lstStyle/>
+                    <a:p>
+                      <a:pPr algn="ctr"/>
+                      <a:r>
+                        <a:rPr sz="1200" i="0">
+                          <a:solidFill>
+                            <a:srgbClr val="1E293B"/>
+                          </a:solidFill>
+                          <a:latin typeface="Prompt"/>
+                          <a:ea typeface="Prompt"/>
+                          <a:cs typeface="Prompt"/>
+                        </a:rPr>
+                        <a:t>0.77</a:t>
+                      </a:r>
+                    </a:p>
+                  </a:txBody>
+                  <a:tcPr marL="73152" marR="73152" marT="27432" marB="27432" anchor="ctr">
+                    <a:lnL w="6350">
+                      <a:solidFill>
+                        <a:srgbClr val="D5DEE6"/>
+                      </a:solidFill>
+                    </a:lnL>
+                    <a:lnR w="6350">
+                      <a:solidFill>
+                        <a:srgbClr val="D5DEE6"/>
+                      </a:solidFill>
+                    </a:lnR>
+                    <a:lnT w="6350">
+                      <a:solidFill>
+                        <a:srgbClr val="D5DEE6"/>
+                      </a:solidFill>
+                    </a:lnT>
+                    <a:lnB w="6350">
+                      <a:solidFill>
+                        <a:srgbClr val="D5DEE6"/>
+                      </a:solidFill>
+                    </a:lnB>
+                    <a:solidFill>
+                      <a:srgbClr val="FFFFFF"/>
+                    </a:solidFill>
+                  </a:tcPr>
+                </a:tc>
+                <a:tc>
+                  <a:txBody>
+                    <a:bodyPr/>
+                    <a:lstStyle/>
+                    <a:p>
+                      <a:pPr algn="ctr"/>
+                      <a:r>
+                        <a:rPr sz="1200" i="0">
+                          <a:solidFill>
+                            <a:srgbClr val="1E293B"/>
+                          </a:solidFill>
+                          <a:latin typeface="Prompt"/>
+                          <a:ea typeface="Prompt"/>
+                          <a:cs typeface="Prompt"/>
+                        </a:rPr>
+                        <a:t>0.54</a:t>
+                      </a:r>
+                    </a:p>
+                  </a:txBody>
+                  <a:tcPr marL="73152" marR="73152" marT="27432" marB="27432" anchor="ctr">
+                    <a:lnL w="6350">
+                      <a:solidFill>
+                        <a:srgbClr val="D5DEE6"/>
+                      </a:solidFill>
+                    </a:lnL>
+                    <a:lnR w="6350">
+                      <a:solidFill>
+                        <a:srgbClr val="D5DEE6"/>
+                      </a:solidFill>
+                    </a:lnR>
+                    <a:lnT w="6350">
+                      <a:solidFill>
+                        <a:srgbClr val="D5DEE6"/>
+                      </a:solidFill>
+                    </a:lnT>
+                    <a:lnB w="6350">
+                      <a:solidFill>
+                        <a:srgbClr val="D5DEE6"/>
+                      </a:solidFill>
+                    </a:lnB>
+                    <a:solidFill>
+                      <a:srgbClr val="FFFFFF"/>
+                    </a:solidFill>
+                  </a:tcPr>
+                </a:tc>
+              </a:tr>
+              <a:tr h="347472">
+                <a:tc>
+                  <a:txBody>
+                    <a:bodyPr/>
+                    <a:lstStyle/>
+                    <a:p>
+                      <a:pPr algn="l"/>
+                      <a:r>
+                        <a:rPr sz="1200" i="0">
+                          <a:solidFill>
+                            <a:srgbClr val="1E293B"/>
+                          </a:solidFill>
+                          <a:latin typeface="Prompt"/>
+                          <a:ea typeface="Prompt"/>
+                          <a:cs typeface="Prompt"/>
+                        </a:rPr>
+                        <a:t>2565</a:t>
+                      </a:r>
+                    </a:p>
+                  </a:txBody>
+                  <a:tcPr marL="73152" marR="73152" marT="27432" marB="27432" anchor="ctr">
+                    <a:lnL w="6350">
+                      <a:solidFill>
+                        <a:srgbClr val="D5DEE6"/>
+                      </a:solidFill>
+                    </a:lnL>
+                    <a:lnR w="6350">
+                      <a:solidFill>
+                        <a:srgbClr val="D5DEE6"/>
+                      </a:solidFill>
+                    </a:lnR>
+                    <a:lnT w="6350">
+                      <a:solidFill>
+                        <a:srgbClr val="D5DEE6"/>
+                      </a:solidFill>
+                    </a:lnT>
+                    <a:lnB w="6350">
+                      <a:solidFill>
+                        <a:srgbClr val="D5DEE6"/>
+                      </a:solidFill>
+                    </a:lnB>
+                    <a:solidFill>
+                      <a:srgbClr val="F4F8FB"/>
+                    </a:solidFill>
+                  </a:tcPr>
+                </a:tc>
+                <a:tc>
+                  <a:txBody>
+                    <a:bodyPr/>
+                    <a:lstStyle/>
+                    <a:p>
+                      <a:pPr algn="ctr"/>
+                      <a:r>
+                        <a:rPr sz="1200" i="0">
+                          <a:solidFill>
+                            <a:srgbClr val="1E293B"/>
+                          </a:solidFill>
+                          <a:latin typeface="Prompt"/>
+                          <a:ea typeface="Prompt"/>
+                          <a:cs typeface="Prompt"/>
+                        </a:rPr>
+                        <a:t>202 / 210 ตร.กม.</a:t>
+                      </a:r>
+                    </a:p>
+                  </a:txBody>
+                  <a:tcPr marL="73152" marR="73152" marT="27432" marB="27432" anchor="ctr">
+                    <a:lnL w="6350">
+                      <a:solidFill>
+                        <a:srgbClr val="D5DEE6"/>
+                      </a:solidFill>
+                    </a:lnL>
+                    <a:lnR w="6350">
+                      <a:solidFill>
+                        <a:srgbClr val="D5DEE6"/>
+                      </a:solidFill>
+                    </a:lnR>
+                    <a:lnT w="6350">
+                      <a:solidFill>
+                        <a:srgbClr val="D5DEE6"/>
+                      </a:solidFill>
+                    </a:lnT>
+                    <a:lnB w="6350">
+                      <a:solidFill>
+                        <a:srgbClr val="D5DEE6"/>
+                      </a:solidFill>
+                    </a:lnB>
+                    <a:solidFill>
+                      <a:srgbClr val="F4F8FB"/>
+                    </a:solidFill>
+                  </a:tcPr>
+                </a:tc>
+                <a:tc>
+                  <a:txBody>
+                    <a:bodyPr/>
+                    <a:lstStyle/>
+                    <a:p>
+                      <a:pPr algn="ctr"/>
+                      <a:r>
+                        <a:rPr sz="1200" i="0">
+                          <a:solidFill>
+                            <a:srgbClr val="1E293B"/>
+                          </a:solidFill>
+                          <a:latin typeface="Prompt"/>
+                          <a:ea typeface="Prompt"/>
+                          <a:cs typeface="Prompt"/>
+                        </a:rPr>
+                        <a:t>0.64</a:t>
+                      </a:r>
+                    </a:p>
+                  </a:txBody>
+                  <a:tcPr marL="73152" marR="73152" marT="27432" marB="27432" anchor="ctr">
+                    <a:lnL w="6350">
+                      <a:solidFill>
+                        <a:srgbClr val="D5DEE6"/>
+                      </a:solidFill>
+                    </a:lnL>
+                    <a:lnR w="6350">
+                      <a:solidFill>
+                        <a:srgbClr val="D5DEE6"/>
+                      </a:solidFill>
+                    </a:lnR>
+                    <a:lnT w="6350">
+                      <a:solidFill>
+                        <a:srgbClr val="D5DEE6"/>
+                      </a:solidFill>
+                    </a:lnT>
+                    <a:lnB w="6350">
+                      <a:solidFill>
+                        <a:srgbClr val="D5DEE6"/>
+                      </a:solidFill>
+                    </a:lnB>
+                    <a:solidFill>
+                      <a:srgbClr val="F4F8FB"/>
+                    </a:solidFill>
+                  </a:tcPr>
+                </a:tc>
+                <a:tc>
+                  <a:txBody>
+                    <a:bodyPr/>
+                    <a:lstStyle/>
+                    <a:p>
+                      <a:pPr algn="ctr"/>
+                      <a:r>
+                        <a:rPr sz="1200" i="0">
+                          <a:solidFill>
+                            <a:srgbClr val="1E293B"/>
+                          </a:solidFill>
+                          <a:latin typeface="Prompt"/>
+                          <a:ea typeface="Prompt"/>
+                          <a:cs typeface="Prompt"/>
+                        </a:rPr>
+                        <a:t>0.49</a:t>
+                      </a:r>
+                    </a:p>
+                  </a:txBody>
+                  <a:tcPr marL="73152" marR="73152" marT="27432" marB="27432" anchor="ctr">
+                    <a:lnL w="6350">
+                      <a:solidFill>
+                        <a:srgbClr val="D5DEE6"/>
+                      </a:solidFill>
+                    </a:lnL>
+                    <a:lnR w="6350">
+                      <a:solidFill>
+                        <a:srgbClr val="D5DEE6"/>
+                      </a:solidFill>
+                    </a:lnR>
+                    <a:lnT w="6350">
+                      <a:solidFill>
+                        <a:srgbClr val="D5DEE6"/>
+                      </a:solidFill>
+                    </a:lnT>
+                    <a:lnB w="6350">
+                      <a:solidFill>
+                        <a:srgbClr val="D5DEE6"/>
+                      </a:solidFill>
+                    </a:lnB>
+                    <a:solidFill>
+                      <a:srgbClr val="F4F8FB"/>
+                    </a:solidFill>
+                  </a:tcPr>
+                </a:tc>
+              </a:tr>
+              <a:tr h="347472">
+                <a:tc>
+                  <a:txBody>
+                    <a:bodyPr/>
+                    <a:lstStyle/>
+                    <a:p>
+                      <a:pPr algn="l"/>
+                      <a:r>
+                        <a:rPr sz="1200" i="0">
+                          <a:solidFill>
+                            <a:srgbClr val="1E293B"/>
+                          </a:solidFill>
+                          <a:latin typeface="Prompt"/>
+                          <a:ea typeface="Prompt"/>
+                          <a:cs typeface="Prompt"/>
+                        </a:rPr>
+                        <a:t>2568</a:t>
+                      </a:r>
+                    </a:p>
+                  </a:txBody>
+                  <a:tcPr marL="73152" marR="73152" marT="27432" marB="27432" anchor="ctr">
+                    <a:lnL w="6350">
+                      <a:solidFill>
+                        <a:srgbClr val="D5DEE6"/>
+                      </a:solidFill>
+                    </a:lnL>
+                    <a:lnR w="6350">
+                      <a:solidFill>
+                        <a:srgbClr val="D5DEE6"/>
+                      </a:solidFill>
+                    </a:lnR>
+                    <a:lnT w="6350">
+                      <a:solidFill>
+                        <a:srgbClr val="D5DEE6"/>
+                      </a:solidFill>
+                    </a:lnT>
+                    <a:lnB w="6350">
+                      <a:solidFill>
+                        <a:srgbClr val="D5DEE6"/>
+                      </a:solidFill>
+                    </a:lnB>
+                    <a:solidFill>
+                      <a:srgbClr val="FFFFFF"/>
+                    </a:solidFill>
+                  </a:tcPr>
+                </a:tc>
+                <a:tc>
+                  <a:txBody>
+                    <a:bodyPr/>
+                    <a:lstStyle/>
+                    <a:p>
+                      <a:pPr algn="ctr"/>
+                      <a:r>
+                        <a:rPr sz="1200" i="0">
+                          <a:solidFill>
+                            <a:srgbClr val="1E293B"/>
+                          </a:solidFill>
+                          <a:latin typeface="Prompt"/>
+                          <a:ea typeface="Prompt"/>
+                          <a:cs typeface="Prompt"/>
+                        </a:rPr>
+                        <a:t>275 / 227 ตร.กม.</a:t>
+                      </a:r>
+                    </a:p>
+                  </a:txBody>
+                  <a:tcPr marL="73152" marR="73152" marT="27432" marB="27432" anchor="ctr">
+                    <a:lnL w="6350">
+                      <a:solidFill>
+                        <a:srgbClr val="D5DEE6"/>
+                      </a:solidFill>
+                    </a:lnL>
+                    <a:lnR w="6350">
+                      <a:solidFill>
+                        <a:srgbClr val="D5DEE6"/>
+                      </a:solidFill>
+                    </a:lnR>
+                    <a:lnT w="6350">
+                      <a:solidFill>
+                        <a:srgbClr val="D5DEE6"/>
+                      </a:solidFill>
+                    </a:lnT>
+                    <a:lnB w="6350">
+                      <a:solidFill>
+                        <a:srgbClr val="D5DEE6"/>
+                      </a:solidFill>
+                    </a:lnB>
+                    <a:solidFill>
+                      <a:srgbClr val="FFFFFF"/>
+                    </a:solidFill>
+                  </a:tcPr>
+                </a:tc>
+                <a:tc>
+                  <a:txBody>
+                    <a:bodyPr/>
+                    <a:lstStyle/>
+                    <a:p>
+                      <a:pPr algn="ctr"/>
+                      <a:r>
+                        <a:rPr sz="1200" i="0">
+                          <a:solidFill>
+                            <a:srgbClr val="1E293B"/>
+                          </a:solidFill>
+                          <a:latin typeface="Prompt"/>
+                          <a:ea typeface="Prompt"/>
+                          <a:cs typeface="Prompt"/>
+                        </a:rPr>
+                        <a:t>0.78</a:t>
+                      </a:r>
+                    </a:p>
+                  </a:txBody>
+                  <a:tcPr marL="73152" marR="73152" marT="27432" marB="27432" anchor="ctr">
+                    <a:lnL w="6350">
+                      <a:solidFill>
+                        <a:srgbClr val="D5DEE6"/>
+                      </a:solidFill>
+                    </a:lnL>
+                    <a:lnR w="6350">
+                      <a:solidFill>
+                        <a:srgbClr val="D5DEE6"/>
+                      </a:solidFill>
+                    </a:lnR>
+                    <a:lnT w="6350">
+                      <a:solidFill>
+                        <a:srgbClr val="D5DEE6"/>
+                      </a:solidFill>
+                    </a:lnT>
+                    <a:lnB w="6350">
+                      <a:solidFill>
+                        <a:srgbClr val="D5DEE6"/>
+                      </a:solidFill>
+                    </a:lnB>
+                    <a:solidFill>
+                      <a:srgbClr val="FFFFFF"/>
+                    </a:solidFill>
+                  </a:tcPr>
+                </a:tc>
+                <a:tc>
+                  <a:txBody>
+                    <a:bodyPr/>
+                    <a:lstStyle/>
+                    <a:p>
+                      <a:pPr algn="ctr"/>
+                      <a:r>
+                        <a:rPr sz="1200" i="0">
+                          <a:solidFill>
+                            <a:srgbClr val="1E293B"/>
+                          </a:solidFill>
+                          <a:latin typeface="Prompt"/>
+                          <a:ea typeface="Prompt"/>
+                          <a:cs typeface="Prompt"/>
+                        </a:rPr>
+                        <a:t>0.54</a:t>
+                      </a:r>
+                    </a:p>
+                  </a:txBody>
+                  <a:tcPr marL="73152" marR="73152" marT="27432" marB="27432" anchor="ctr">
+                    <a:lnL w="6350">
+                      <a:solidFill>
+                        <a:srgbClr val="D5DEE6"/>
+                      </a:solidFill>
+                    </a:lnL>
+                    <a:lnR w="6350">
+                      <a:solidFill>
+                        <a:srgbClr val="D5DEE6"/>
+                      </a:solidFill>
+                    </a:lnR>
+                    <a:lnT w="6350">
+                      <a:solidFill>
+                        <a:srgbClr val="D5DEE6"/>
+                      </a:solidFill>
+                    </a:lnT>
+                    <a:lnB w="6350">
+                      <a:solidFill>
+                        <a:srgbClr val="D5DEE6"/>
+                      </a:solidFill>
+                    </a:lnB>
+                    <a:solidFill>
+                      <a:srgbClr val="FFFFFF"/>
+                    </a:solidFill>
+                  </a:tcPr>
+                </a:tc>
+              </a:tr>
+            </a:tbl>
+          </a:graphicData>
+        </a:graphic>
+      </p:graphicFrame>
+      <p:graphicFrame>
+        <p:nvGraphicFramePr>
+          <p:cNvPr id="32" name="Chart 31"/>
+          <p:cNvGraphicFramePr>
+            <a:graphicFrameLocks noGrp="1"/>
+          </p:cNvGraphicFramePr>
+          <p:nvPr/>
+        </p:nvGraphicFramePr>
+        <p:xfrm>
+          <a:off x="5669280" y="3017520"/>
+          <a:ext cx="6035040" cy="1920240"/>
+        </p:xfrm>
+        <a:graphic>
+          <a:graphicData uri="http://schemas.openxmlformats.org/drawingml/2006/chart">
+            <c:chart xmlns:c="http://schemas.openxmlformats.org/drawingml/2006/chart" r:id="rId3"/>
+          </a:graphicData>
+        </a:graphic>
+      </p:graphicFrame>
+      <p:sp>
+        <p:nvSpPr>
+          <p:cNvPr id="33" name="Rounded Rectangle 32"/>
+          <p:cNvSpPr/>
+          <p:nvPr/>
+        </p:nvSpPr>
+        <p:spPr>
+          <a:xfrm>
+            <a:off x="5760720" y="5074920"/>
+            <a:ext cx="5879592" cy="1188720"/>
+          </a:xfrm>
+          <a:prstGeom prst="roundRect">
+            <a:avLst>
+              <a:gd name="adj" fmla="val 6000"/>
+            </a:avLst>
+          </a:prstGeom>
+          <a:solidFill>
+            <a:srgbClr val="FFF4E5"/>
+          </a:solidFill>
+          <a:ln>
+            <a:noFill/>
+          </a:ln>
+          <a:effectLst/>
+        </p:spPr>
+        <p:style>
+          <a:lnRef idx="1">
+            <a:schemeClr val="accent1"/>
+          </a:lnRef>
+          <a:fillRef idx="3">
+            <a:schemeClr val="accent1"/>
+          </a:fillRef>
+          <a:effectRef idx="2">
+            <a:schemeClr val="accent1"/>
+          </a:effectRef>
+          <a:fontRef idx="minor">
+            <a:schemeClr val="lt1"/>
+          </a:fontRef>
+        </p:style>
+        <p:txBody>
+          <a:bodyPr rtlCol="0" anchor="ctr"/>
+          <a:lstStyle/>
+          <a:p/>
+        </p:txBody>
+      </p:sp>
+      <p:sp>
+        <p:nvSpPr>
+          <p:cNvPr id="34" name="TextBox 33"/>
+          <p:cNvSpPr txBox="1"/>
+          <p:nvPr/>
+        </p:nvSpPr>
+        <p:spPr>
+          <a:xfrm>
+            <a:off x="5961888" y="5166360"/>
+            <a:ext cx="5486400" cy="365760"/>
+          </a:xfrm>
+          <a:prstGeom prst="rect">
+            <a:avLst/>
+          </a:prstGeom>
+          <a:noFill/>
+        </p:spPr>
+        <p:txBody>
+          <a:bodyPr wrap="square" lIns="0" rIns="0" tIns="0" bIns="0" anchor="t">
+            <a:spAutoFit/>
+          </a:bodyPr>
+          <a:lstStyle/>
+          <a:p>
+            <a:pPr algn="l"/>
+            <a:r>
+              <a:rPr sz="1300" b="1" i="0">
+                <a:solidFill>
+                  <a:srgbClr val="0B3C5D"/>
+                </a:solidFill>
+                <a:latin typeface="Prompt"/>
+                <a:ea typeface="Prompt"/>
+                <a:cs typeface="Prompt"/>
+              </a:rPr>
+              <a:t>ข้อค้นพบ: น้ำเข้าทุ่งก่อนระดับน้ำถึงตลิ่ง</a:t>
+            </a:r>
+          </a:p>
+        </p:txBody>
+      </p:sp>
+      <p:sp>
+        <p:nvSpPr>
+          <p:cNvPr id="35" name="TextBox 34"/>
+          <p:cNvSpPr txBox="1"/>
+          <p:nvPr/>
+        </p:nvSpPr>
+        <p:spPr>
+          <a:xfrm>
+            <a:off x="5961888" y="5532120"/>
+            <a:ext cx="5486400" cy="685800"/>
+          </a:xfrm>
+          <a:prstGeom prst="rect">
+            <a:avLst/>
+          </a:prstGeom>
+          <a:noFill/>
+        </p:spPr>
+        <p:txBody>
+          <a:bodyPr wrap="square" lIns="0" rIns="0" tIns="0" bIns="0" anchor="t">
+            <a:spAutoFit/>
+          </a:bodyPr>
+          <a:lstStyle/>
+          <a:p>
+            <a:pPr algn="l"/>
+            <a:r>
+              <a:rPr sz="1150" b="0" i="0">
+                <a:solidFill>
+                  <a:srgbClr val="1E293B"/>
+                </a:solidFill>
+                <a:latin typeface="Prompt"/>
+                <a:ea typeface="Prompt"/>
+                <a:cs typeface="Prompt"/>
+              </a:rPr>
+              <a:t>ระดับน้ำ N.67 ชุมแสงไม่ถึงตลิ่ง (28.21 ม.) เลยทั้ง 3 ปี แต่ดาวเทียมเห็นท่วม 2–3 เดือนทุกปี → น้ำเข้าผ่านคลอง ประตูน้ำ และช่องต่ำ</a:t>
+            </a:r>
+          </a:p>
+        </p:txBody>
+      </p:sp>
+      <p:sp>
+        <p:nvSpPr>
+          <p:cNvPr id="36" name="TextBox 35"/>
+          <p:cNvSpPr txBox="1"/>
+          <p:nvPr/>
+        </p:nvSpPr>
+        <p:spPr>
+          <a:xfrm>
+            <a:off x="548640" y="6400800"/>
+            <a:ext cx="10332720" cy="274320"/>
+          </a:xfrm>
+          <a:prstGeom prst="rect">
+            <a:avLst/>
+          </a:prstGeom>
+          <a:noFill/>
+        </p:spPr>
+        <p:txBody>
+          <a:bodyPr wrap="square" lIns="0" rIns="0" tIns="0" bIns="0" anchor="t">
+            <a:spAutoFit/>
+          </a:bodyPr>
+          <a:lstStyle/>
+          <a:p>
+            <a:pPr algn="l"/>
+            <a:r>
+              <a:rPr sz="900" b="0" i="0">
+                <a:solidFill>
+                  <a:srgbClr val="64748B"/>
+                </a:solidFill>
+                <a:latin typeface="Prompt"/>
+                <a:ea typeface="Prompt"/>
+                <a:cs typeface="Prompt"/>
+              </a:rPr>
+              <a:t>แบบจำลอง 2D 300 ม. ใช้ระดับน้ำจริงรายชั่วโมง Y.5 / N.67 / C.2 (ThaiWater) + ฝน ERA5 ช่วง 20 ส.ค.–15 ธ.ค. · CSI = พื้นที่ตรงกัน ÷ (ตรงกัน + ขาด + เกิน)</a:t>
+            </a:r>
+          </a:p>
+        </p:txBody>
+      </p:sp>
+    </p:spTree>
+  </p:cSld>
+  <p:clrMapOvr>
+    <a:masterClrMapping/>
+  </p:clrMapOvr>
+</p:sld>
+</file>
+
+<file path=ppt/slides/slide18.xml><?xml version="1.0" encoding="utf-8"?>
 <p:sld xmlns:a="http://schemas.openxmlformats.org/drawingml/2006/main" xmlns:r="http://schemas.openxmlformats.org/officeDocument/2006/relationships" xmlns:p="http://schemas.openxmlformats.org/presentationml/2006/main">
   <p:cSld name="Slide 15">
     <p:bg>
@@ -15394,7 +18052,7 @@
 </p:sld>
 </file>
 
-<file path=ppt/slides/slide16.xml><?xml version="1.0" encoding="utf-8"?>
+<file path=ppt/slides/slide19.xml><?xml version="1.0" encoding="utf-8"?>
 <p:sld xmlns:a="http://schemas.openxmlformats.org/drawingml/2006/main" xmlns:r="http://schemas.openxmlformats.org/officeDocument/2006/relationships" xmlns:p="http://schemas.openxmlformats.org/presentationml/2006/main">
   <p:cSld name="Slide 16">
     <p:bg>
@@ -15888,6 +18546,10 @@
             <a:prstDash val="solid"/>
           </a:ln>
         </p:spPr>
+        <p:txBody>
+          <a:bodyPr/>
+          <a:p/>
+        </p:txBody>
       </p:sp>
       <p:sp>
         <p:nvSpPr>
@@ -15913,6 +18575,10 @@
             <a:prstDash val="solid"/>
           </a:ln>
         </p:spPr>
+        <p:txBody>
+          <a:bodyPr/>
+          <a:p/>
+        </p:txBody>
       </p:sp>
       <p:sp>
         <p:nvSpPr>
@@ -16063,6 +18729,10 @@
             <a:prstDash val="solid"/>
           </a:ln>
         </p:spPr>
+        <p:txBody>
+          <a:bodyPr/>
+          <a:p/>
+        </p:txBody>
       </p:sp>
       <p:sp>
         <p:nvSpPr>
@@ -16088,6 +18758,10 @@
             <a:prstDash val="solid"/>
           </a:ln>
         </p:spPr>
+        <p:txBody>
+          <a:bodyPr/>
+          <a:p/>
+        </p:txBody>
       </p:sp>
       <p:sp>
         <p:nvSpPr>
@@ -16238,6 +18912,10 @@
             <a:prstDash val="solid"/>
           </a:ln>
         </p:spPr>
+        <p:txBody>
+          <a:bodyPr/>
+          <a:p/>
+        </p:txBody>
       </p:sp>
       <p:sp>
         <p:nvSpPr>
@@ -16263,6 +18941,10 @@
             <a:prstDash val="solid"/>
           </a:ln>
         </p:spPr>
+        <p:txBody>
+          <a:bodyPr/>
+          <a:p/>
+        </p:txBody>
       </p:sp>
       <p:sp>
         <p:nvSpPr>
@@ -16413,6 +19095,10 @@
             <a:prstDash val="solid"/>
           </a:ln>
         </p:spPr>
+        <p:txBody>
+          <a:bodyPr/>
+          <a:p/>
+        </p:txBody>
       </p:sp>
       <p:sp>
         <p:nvSpPr>
@@ -16438,6 +19124,10 @@
             <a:prstDash val="solid"/>
           </a:ln>
         </p:spPr>
+        <p:txBody>
+          <a:bodyPr/>
+          <a:p/>
+        </p:txBody>
       </p:sp>
       <p:sp>
         <p:nvSpPr>
@@ -16607,2026 +19297,6 @@
               <a:t>16</a:t>
             </a:fld>
             <a:endParaRPr lang="en-US"/>
-          </a:p>
-        </p:txBody>
-      </p:sp>
-    </p:spTree>
-  </p:cSld>
-  <p:clrMapOvr>
-    <a:masterClrMapping/>
-  </p:clrMapOvr>
-</p:sld>
-</file>
-
-<file path=ppt/slides/slide17.xml><?xml version="1.0" encoding="utf-8"?>
-<p:sld xmlns:a="http://schemas.openxmlformats.org/drawingml/2006/main" xmlns:r="http://schemas.openxmlformats.org/officeDocument/2006/relationships" xmlns:p="http://schemas.openxmlformats.org/presentationml/2006/main">
-  <p:cSld name="Slide 17">
-    <p:bg>
-      <p:bgPr>
-        <a:solidFill>
-          <a:srgbClr val="082A42"/>
-        </a:solidFill>
-      </p:bgPr>
-    </p:bg>
-    <p:spTree>
-      <p:nvGrpSpPr>
-        <p:cNvPr id="1" name=""/>
-        <p:cNvGrpSpPr/>
-        <p:nvPr/>
-      </p:nvGrpSpPr>
-      <p:grpSpPr>
-        <a:xfrm>
-          <a:off x="0" y="0"/>
-          <a:ext cx="0" cy="0"/>
-          <a:chOff x="0" y="0"/>
-          <a:chExt cx="0" cy="0"/>
-        </a:xfrm>
-      </p:grpSpPr>
-      <p:sp>
-        <p:nvSpPr>
-          <p:cNvPr id="2" name="Text 0"/>
-          <p:cNvSpPr txBox="1"/>
-          <p:nvPr/>
-        </p:nvSpPr>
-        <p:spPr>
-          <a:xfrm>
-            <a:off x="548640" y="548640"/>
-            <a:ext cx="9144000" cy="731520"/>
-          </a:xfrm>
-          <a:prstGeom prst="rect">
-            <a:avLst/>
-          </a:prstGeom>
-          <a:noFill/>
-          <a:ln/>
-        </p:spPr>
-        <p:txBody>
-          <a:bodyPr wrap="square" lIns="0" tIns="0" rIns="0" bIns="0" rtlCol="0" anchor="t"/>
-          <a:lstStyle/>
-          <a:p>
-            <a:pPr indent="0" marL="0">
-              <a:buNone/>
-            </a:pPr>
-            <a:r>
-              <a:rPr lang="en-US" sz="3000" b="1" dirty="0">
-                <a:solidFill>
-                  <a:srgbClr val="FFFFFF"/>
-                </a:solidFill>
-                <a:latin typeface="Prompt" pitchFamily="34" charset="0"/>
-                <a:ea typeface="Prompt" pitchFamily="34" charset="-122"/>
-                <a:cs typeface="Prompt" pitchFamily="34" charset="-120"/>
-              </a:rPr>
-              <a:t>ข้อเสนอขั้นต่อไป</a:t>
-            </a:r>
-            <a:endParaRPr lang="en-US" sz="3000" dirty="0"/>
-          </a:p>
-        </p:txBody>
-      </p:sp>
-      <p:sp>
-        <p:nvSpPr>
-          <p:cNvPr id="3" name="Shape 1"/>
-          <p:cNvSpPr/>
-          <p:nvPr/>
-        </p:nvSpPr>
-        <p:spPr>
-          <a:xfrm>
-            <a:off x="548640" y="1554480"/>
-            <a:ext cx="457200" cy="457200"/>
-          </a:xfrm>
-          <a:prstGeom prst="ellipse">
-            <a:avLst/>
-          </a:prstGeom>
-          <a:solidFill>
-            <a:srgbClr val="1B998B"/>
-          </a:solidFill>
-          <a:ln w="12700">
-            <a:solidFill>
-              <a:srgbClr val="1B998B"/>
-            </a:solidFill>
-            <a:prstDash val="solid"/>
-          </a:ln>
-        </p:spPr>
-        <p:txBody>
-          <a:bodyPr/>
-          <a:p/>
-        </p:txBody>
-      </p:sp>
-      <p:sp>
-        <p:nvSpPr>
-          <p:cNvPr id="4" name="Text 2"/>
-          <p:cNvSpPr txBox="1"/>
-          <p:nvPr/>
-        </p:nvSpPr>
-        <p:spPr>
-          <a:xfrm>
-            <a:off x="548640" y="1554480"/>
-            <a:ext cx="457200" cy="457200"/>
-          </a:xfrm>
-          <a:prstGeom prst="rect">
-            <a:avLst/>
-          </a:prstGeom>
-          <a:noFill/>
-          <a:ln/>
-        </p:spPr>
-        <p:txBody>
-          <a:bodyPr wrap="square" lIns="0" tIns="0" rIns="0" bIns="0" rtlCol="0" anchor="ctr"/>
-          <a:lstStyle/>
-          <a:p>
-            <a:pPr algn="ctr" indent="0" marL="0">
-              <a:buNone/>
-            </a:pPr>
-            <a:r>
-              <a:rPr lang="en-US" sz="1600" b="1" dirty="0">
-                <a:solidFill>
-                  <a:srgbClr val="FFFFFF"/>
-                </a:solidFill>
-                <a:latin typeface="Prompt" pitchFamily="34" charset="0"/>
-                <a:ea typeface="Prompt" pitchFamily="34" charset="-122"/>
-                <a:cs typeface="Prompt" pitchFamily="34" charset="-120"/>
-              </a:rPr>
-              <a:t>1</a:t>
-            </a:r>
-            <a:endParaRPr lang="en-US" sz="1600" dirty="0"/>
-          </a:p>
-        </p:txBody>
-      </p:sp>
-      <p:sp>
-        <p:nvSpPr>
-          <p:cNvPr id="5" name="Text 3"/>
-          <p:cNvSpPr txBox="1"/>
-          <p:nvPr/>
-        </p:nvSpPr>
-        <p:spPr>
-          <a:xfrm>
-            <a:off x="1234440" y="1508760"/>
-            <a:ext cx="10332720" cy="868680"/>
-          </a:xfrm>
-          <a:prstGeom prst="rect">
-            <a:avLst/>
-          </a:prstGeom>
-          <a:noFill/>
-          <a:ln/>
-        </p:spPr>
-        <p:txBody>
-          <a:bodyPr wrap="square" lIns="0" tIns="0" rIns="0" bIns="0" rtlCol="0" anchor="t"/>
-          <a:lstStyle/>
-          <a:p>
-            <a:pPr indent="0" marL="0">
-              <a:buNone/>
-            </a:pPr>
-            <a:r>
-              <a:rPr lang="en-US" sz="1700" b="1" dirty="0">
-                <a:solidFill>
-                  <a:srgbClr val="FFFFFF"/>
-                </a:solidFill>
-                <a:latin typeface="Prompt" pitchFamily="34" charset="0"/>
-                <a:ea typeface="Prompt" pitchFamily="34" charset="-122"/>
-                <a:cs typeface="Prompt" pitchFamily="34" charset="-120"/>
-              </a:rPr>
-              <a:t>ขยายการเทียบน้ำท่วมจริง</a:t>
-            </a:r>
-            <a:endParaRPr lang="en-US" sz="1700" dirty="0"/>
-          </a:p>
-          <a:p>
-            <a:pPr indent="0" marL="0">
-              <a:buNone/>
-            </a:pPr>
-            <a:r>
-              <a:rPr lang="en-US" sz="1300" dirty="0">
-                <a:solidFill>
-                  <a:srgbClr val="CFE3EE"/>
-                </a:solidFill>
-                <a:latin typeface="Prompt" pitchFamily="34" charset="0"/>
-                <a:ea typeface="Prompt" pitchFamily="34" charset="-122"/>
-                <a:cs typeface="Prompt" pitchFamily="34" charset="-120"/>
-              </a:rPr>
-              <a:t>ใส่น้ำไหลเข้าจากเหนือ (Y.17/N.7A) + ระดับบึงบอระเพ็ด/ประตูน้ำ ชป. · สะสม Sentinel-1 ทั้งจังหวัด</a:t>
-            </a:r>
-            <a:endParaRPr lang="en-US" sz="1700" dirty="0"/>
-          </a:p>
-        </p:txBody>
-      </p:sp>
-      <p:sp>
-        <p:nvSpPr>
-          <p:cNvPr id="6" name="Shape 4"/>
-          <p:cNvSpPr/>
-          <p:nvPr/>
-        </p:nvSpPr>
-        <p:spPr>
-          <a:xfrm>
-            <a:off x="548640" y="2487168"/>
-            <a:ext cx="457200" cy="457200"/>
-          </a:xfrm>
-          <a:prstGeom prst="ellipse">
-            <a:avLst/>
-          </a:prstGeom>
-          <a:solidFill>
-            <a:srgbClr val="1B998B"/>
-          </a:solidFill>
-          <a:ln w="12700">
-            <a:solidFill>
-              <a:srgbClr val="1B998B"/>
-            </a:solidFill>
-            <a:prstDash val="solid"/>
-          </a:ln>
-        </p:spPr>
-      </p:sp>
-      <p:sp>
-        <p:nvSpPr>
-          <p:cNvPr id="7" name="Text 5"/>
-          <p:cNvSpPr txBox="1"/>
-          <p:nvPr/>
-        </p:nvSpPr>
-        <p:spPr>
-          <a:xfrm>
-            <a:off x="548640" y="2487168"/>
-            <a:ext cx="457200" cy="457200"/>
-          </a:xfrm>
-          <a:prstGeom prst="rect">
-            <a:avLst/>
-          </a:prstGeom>
-          <a:noFill/>
-          <a:ln/>
-        </p:spPr>
-        <p:txBody>
-          <a:bodyPr wrap="square" lIns="0" tIns="0" rIns="0" bIns="0" rtlCol="0" anchor="ctr"/>
-          <a:lstStyle/>
-          <a:p>
-            <a:pPr algn="ctr" indent="0" marL="0">
-              <a:buNone/>
-            </a:pPr>
-            <a:r>
-              <a:rPr lang="en-US" sz="1600" b="1" dirty="0">
-                <a:solidFill>
-                  <a:srgbClr val="FFFFFF"/>
-                </a:solidFill>
-                <a:latin typeface="Prompt" pitchFamily="34" charset="0"/>
-                <a:ea typeface="Prompt" pitchFamily="34" charset="-122"/>
-                <a:cs typeface="Prompt" pitchFamily="34" charset="-120"/>
-              </a:rPr>
-              <a:t>2</a:t>
-            </a:r>
-            <a:endParaRPr lang="en-US" sz="1600" dirty="0"/>
-          </a:p>
-        </p:txBody>
-      </p:sp>
-      <p:sp>
-        <p:nvSpPr>
-          <p:cNvPr id="8" name="Text 6"/>
-          <p:cNvSpPr txBox="1"/>
-          <p:nvPr/>
-        </p:nvSpPr>
-        <p:spPr>
-          <a:xfrm>
-            <a:off x="1234440" y="2441448"/>
-            <a:ext cx="10332720" cy="868680"/>
-          </a:xfrm>
-          <a:prstGeom prst="rect">
-            <a:avLst/>
-          </a:prstGeom>
-          <a:noFill/>
-          <a:ln/>
-        </p:spPr>
-        <p:txBody>
-          <a:bodyPr wrap="square" lIns="0" tIns="0" rIns="0" bIns="0" rtlCol="0" anchor="t"/>
-          <a:lstStyle/>
-          <a:p>
-            <a:pPr indent="0" marL="0">
-              <a:buNone/>
-            </a:pPr>
-            <a:r>
-              <a:rPr lang="en-US" sz="1700" b="1" dirty="0">
-                <a:solidFill>
-                  <a:srgbClr val="FFFFFF"/>
-                </a:solidFill>
-                <a:latin typeface="Prompt" pitchFamily="34" charset="0"/>
-                <a:ea typeface="Prompt" pitchFamily="34" charset="-122"/>
-                <a:cs typeface="Prompt" pitchFamily="34" charset="-120"/>
-              </a:rPr>
-              <a:t>ข้อมูลระบายน้ำจริง</a:t>
-            </a:r>
-            <a:endParaRPr lang="en-US" sz="1700" dirty="0"/>
-          </a:p>
-          <a:p>
-            <a:pPr indent="0" marL="0">
-              <a:buNone/>
-            </a:pPr>
-            <a:r>
-              <a:rPr lang="en-US" sz="1300" dirty="0">
-                <a:solidFill>
-                  <a:srgbClr val="CFE3EE"/>
-                </a:solidFill>
-                <a:latin typeface="Prompt" pitchFamily="34" charset="0"/>
-                <a:ea typeface="Prompt" pitchFamily="34" charset="-122"/>
-                <a:cs typeface="Prompt" pitchFamily="34" charset="-120"/>
-              </a:rPr>
-              <a:t>ความจุสถานีสูบ ประตูระบายน้ำ จาก ชป./อปท. ใส่ใน drainage_assets_user.csv</a:t>
-            </a:r>
-            <a:endParaRPr lang="en-US" sz="1700" dirty="0"/>
-          </a:p>
-        </p:txBody>
-      </p:sp>
-      <p:sp>
-        <p:nvSpPr>
-          <p:cNvPr id="9" name="Shape 7"/>
-          <p:cNvSpPr/>
-          <p:nvPr/>
-        </p:nvSpPr>
-        <p:spPr>
-          <a:xfrm>
-            <a:off x="548640" y="3419856"/>
-            <a:ext cx="457200" cy="457200"/>
-          </a:xfrm>
-          <a:prstGeom prst="ellipse">
-            <a:avLst/>
-          </a:prstGeom>
-          <a:solidFill>
-            <a:srgbClr val="1B998B"/>
-          </a:solidFill>
-          <a:ln w="12700">
-            <a:solidFill>
-              <a:srgbClr val="1B998B"/>
-            </a:solidFill>
-            <a:prstDash val="solid"/>
-          </a:ln>
-        </p:spPr>
-      </p:sp>
-      <p:sp>
-        <p:nvSpPr>
-          <p:cNvPr id="10" name="Text 8"/>
-          <p:cNvSpPr txBox="1"/>
-          <p:nvPr/>
-        </p:nvSpPr>
-        <p:spPr>
-          <a:xfrm>
-            <a:off x="548640" y="3419856"/>
-            <a:ext cx="457200" cy="457200"/>
-          </a:xfrm>
-          <a:prstGeom prst="rect">
-            <a:avLst/>
-          </a:prstGeom>
-          <a:noFill/>
-          <a:ln/>
-        </p:spPr>
-        <p:txBody>
-          <a:bodyPr wrap="square" lIns="0" tIns="0" rIns="0" bIns="0" rtlCol="0" anchor="ctr"/>
-          <a:lstStyle/>
-          <a:p>
-            <a:pPr algn="ctr" indent="0" marL="0">
-              <a:buNone/>
-            </a:pPr>
-            <a:r>
-              <a:rPr lang="en-US" sz="1600" b="1" dirty="0">
-                <a:solidFill>
-                  <a:srgbClr val="FFFFFF"/>
-                </a:solidFill>
-                <a:latin typeface="Prompt" pitchFamily="34" charset="0"/>
-                <a:ea typeface="Prompt" pitchFamily="34" charset="-122"/>
-                <a:cs typeface="Prompt" pitchFamily="34" charset="-120"/>
-              </a:rPr>
-              <a:t>3</a:t>
-            </a:r>
-            <a:endParaRPr lang="en-US" sz="1600" dirty="0"/>
-          </a:p>
-        </p:txBody>
-      </p:sp>
-      <p:sp>
-        <p:nvSpPr>
-          <p:cNvPr id="11" name="Text 9"/>
-          <p:cNvSpPr txBox="1"/>
-          <p:nvPr/>
-        </p:nvSpPr>
-        <p:spPr>
-          <a:xfrm>
-            <a:off x="1234440" y="3374136"/>
-            <a:ext cx="10332720" cy="868680"/>
-          </a:xfrm>
-          <a:prstGeom prst="rect">
-            <a:avLst/>
-          </a:prstGeom>
-          <a:noFill/>
-          <a:ln/>
-        </p:spPr>
-        <p:txBody>
-          <a:bodyPr wrap="square" lIns="0" tIns="0" rIns="0" bIns="0" rtlCol="0" anchor="t"/>
-          <a:lstStyle/>
-          <a:p>
-            <a:pPr indent="0" marL="0">
-              <a:buNone/>
-            </a:pPr>
-            <a:r>
-              <a:rPr lang="en-US" sz="1700" b="1" dirty="0">
-                <a:solidFill>
-                  <a:srgbClr val="FFFFFF"/>
-                </a:solidFill>
-                <a:latin typeface="Prompt" pitchFamily="34" charset="0"/>
-                <a:ea typeface="Prompt" pitchFamily="34" charset="-122"/>
-                <a:cs typeface="Prompt" pitchFamily="34" charset="-120"/>
-              </a:rPr>
-              <a:t>เปิดใช้งานสาธารณะ</a:t>
-            </a:r>
-            <a:endParaRPr lang="en-US" sz="1700" dirty="0"/>
-          </a:p>
-          <a:p>
-            <a:pPr indent="0" marL="0">
-              <a:buNone/>
-            </a:pPr>
-            <a:r>
-              <a:rPr lang="en-US" sz="1300" dirty="0">
-                <a:solidFill>
-                  <a:srgbClr val="CFE3EE"/>
-                </a:solidFill>
-                <a:latin typeface="Prompt" pitchFamily="34" charset="0"/>
-                <a:ea typeface="Prompt" pitchFamily="34" charset="-122"/>
-                <a:cs typeface="Prompt" pitchFamily="34" charset="-120"/>
-              </a:rPr>
-              <a:t>push ขึ้น GitHub · เปิด Pages · ตรวจว่า runner ต่างประเทศดึง ThaiWater ได้</a:t>
-            </a:r>
-            <a:endParaRPr lang="en-US" sz="1700" dirty="0"/>
-          </a:p>
-        </p:txBody>
-      </p:sp>
-      <p:sp>
-        <p:nvSpPr>
-          <p:cNvPr id="12" name="Shape 10"/>
-          <p:cNvSpPr/>
-          <p:nvPr/>
-        </p:nvSpPr>
-        <p:spPr>
-          <a:xfrm>
-            <a:off x="548640" y="4352544"/>
-            <a:ext cx="457200" cy="457200"/>
-          </a:xfrm>
-          <a:prstGeom prst="ellipse">
-            <a:avLst/>
-          </a:prstGeom>
-          <a:solidFill>
-            <a:srgbClr val="1B998B"/>
-          </a:solidFill>
-          <a:ln w="12700">
-            <a:solidFill>
-              <a:srgbClr val="1B998B"/>
-            </a:solidFill>
-            <a:prstDash val="solid"/>
-          </a:ln>
-        </p:spPr>
-      </p:sp>
-      <p:sp>
-        <p:nvSpPr>
-          <p:cNvPr id="13" name="Text 11"/>
-          <p:cNvSpPr txBox="1"/>
-          <p:nvPr/>
-        </p:nvSpPr>
-        <p:spPr>
-          <a:xfrm>
-            <a:off x="548640" y="4352544"/>
-            <a:ext cx="457200" cy="457200"/>
-          </a:xfrm>
-          <a:prstGeom prst="rect">
-            <a:avLst/>
-          </a:prstGeom>
-          <a:noFill/>
-          <a:ln/>
-        </p:spPr>
-        <p:txBody>
-          <a:bodyPr wrap="square" lIns="0" tIns="0" rIns="0" bIns="0" rtlCol="0" anchor="ctr"/>
-          <a:lstStyle/>
-          <a:p>
-            <a:pPr algn="ctr" indent="0" marL="0">
-              <a:buNone/>
-            </a:pPr>
-            <a:r>
-              <a:rPr lang="en-US" sz="1600" b="1" dirty="0">
-                <a:solidFill>
-                  <a:srgbClr val="FFFFFF"/>
-                </a:solidFill>
-                <a:latin typeface="Prompt" pitchFamily="34" charset="0"/>
-                <a:ea typeface="Prompt" pitchFamily="34" charset="-122"/>
-                <a:cs typeface="Prompt" pitchFamily="34" charset="-120"/>
-              </a:rPr>
-              <a:t>4</a:t>
-            </a:r>
-            <a:endParaRPr lang="en-US" sz="1600" dirty="0"/>
-          </a:p>
-        </p:txBody>
-      </p:sp>
-      <p:sp>
-        <p:nvSpPr>
-          <p:cNvPr id="14" name="Text 12"/>
-          <p:cNvSpPr txBox="1"/>
-          <p:nvPr/>
-        </p:nvSpPr>
-        <p:spPr>
-          <a:xfrm>
-            <a:off x="1234440" y="4306824"/>
-            <a:ext cx="10332720" cy="868680"/>
-          </a:xfrm>
-          <a:prstGeom prst="rect">
-            <a:avLst/>
-          </a:prstGeom>
-          <a:noFill/>
-          <a:ln/>
-        </p:spPr>
-        <p:txBody>
-          <a:bodyPr wrap="square" lIns="0" tIns="0" rIns="0" bIns="0" rtlCol="0" anchor="t"/>
-          <a:lstStyle/>
-          <a:p>
-            <a:pPr indent="0" marL="0">
-              <a:buNone/>
-            </a:pPr>
-            <a:r>
-              <a:rPr lang="en-US" sz="1700" b="1" dirty="0">
-                <a:solidFill>
-                  <a:srgbClr val="FFFFFF"/>
-                </a:solidFill>
-                <a:latin typeface="Prompt" pitchFamily="34" charset="0"/>
-                <a:ea typeface="Prompt" pitchFamily="34" charset="-122"/>
-                <a:cs typeface="Prompt" pitchFamily="34" charset="-120"/>
-              </a:rPr>
-              <a:t>ผลกระทบ</a:t>
-            </a:r>
-            <a:endParaRPr lang="en-US" sz="1700" dirty="0"/>
-          </a:p>
-          <a:p>
-            <a:pPr indent="0" marL="0">
-              <a:buNone/>
-            </a:pPr>
-            <a:r>
-              <a:rPr lang="en-US" sz="1300" dirty="0">
-                <a:solidFill>
-                  <a:srgbClr val="CFE3EE"/>
-                </a:solidFill>
-                <a:latin typeface="Prompt" pitchFamily="34" charset="0"/>
-                <a:ea typeface="Prompt" pitchFamily="34" charset="-122"/>
-                <a:cs typeface="Prompt" pitchFamily="34" charset="-120"/>
-              </a:rPr>
-              <a:t>ซ้อนประชากร ถนน โรงเรียน โรงพยาบาล → รายงานรายตำบล</a:t>
-            </a:r>
-            <a:endParaRPr lang="en-US" sz="1700" dirty="0"/>
-          </a:p>
-        </p:txBody>
-      </p:sp>
-      <p:sp>
-        <p:nvSpPr>
-          <p:cNvPr id="15" name="Shape 13"/>
-          <p:cNvSpPr/>
-          <p:nvPr/>
-        </p:nvSpPr>
-        <p:spPr>
-          <a:xfrm>
-            <a:off x="548640" y="5285232"/>
-            <a:ext cx="457200" cy="457200"/>
-          </a:xfrm>
-          <a:prstGeom prst="ellipse">
-            <a:avLst/>
-          </a:prstGeom>
-          <a:solidFill>
-            <a:srgbClr val="1B998B"/>
-          </a:solidFill>
-          <a:ln w="12700">
-            <a:solidFill>
-              <a:srgbClr val="1B998B"/>
-            </a:solidFill>
-            <a:prstDash val="solid"/>
-          </a:ln>
-        </p:spPr>
-      </p:sp>
-      <p:sp>
-        <p:nvSpPr>
-          <p:cNvPr id="16" name="Text 14"/>
-          <p:cNvSpPr txBox="1"/>
-          <p:nvPr/>
-        </p:nvSpPr>
-        <p:spPr>
-          <a:xfrm>
-            <a:off x="548640" y="5285232"/>
-            <a:ext cx="457200" cy="457200"/>
-          </a:xfrm>
-          <a:prstGeom prst="rect">
-            <a:avLst/>
-          </a:prstGeom>
-          <a:noFill/>
-          <a:ln/>
-        </p:spPr>
-        <p:txBody>
-          <a:bodyPr wrap="square" lIns="0" tIns="0" rIns="0" bIns="0" rtlCol="0" anchor="ctr"/>
-          <a:lstStyle/>
-          <a:p>
-            <a:pPr algn="ctr" indent="0" marL="0">
-              <a:buNone/>
-            </a:pPr>
-            <a:r>
-              <a:rPr lang="en-US" sz="1600" b="1" dirty="0">
-                <a:solidFill>
-                  <a:srgbClr val="FFFFFF"/>
-                </a:solidFill>
-                <a:latin typeface="Prompt" pitchFamily="34" charset="0"/>
-                <a:ea typeface="Prompt" pitchFamily="34" charset="-122"/>
-                <a:cs typeface="Prompt" pitchFamily="34" charset="-120"/>
-              </a:rPr>
-              <a:t>5</a:t>
-            </a:r>
-            <a:endParaRPr lang="en-US" sz="1600" dirty="0"/>
-          </a:p>
-        </p:txBody>
-      </p:sp>
-      <p:sp>
-        <p:nvSpPr>
-          <p:cNvPr id="17" name="Text 15"/>
-          <p:cNvSpPr txBox="1"/>
-          <p:nvPr/>
-        </p:nvSpPr>
-        <p:spPr>
-          <a:xfrm>
-            <a:off x="1234440" y="5239512"/>
-            <a:ext cx="10332720" cy="868680"/>
-          </a:xfrm>
-          <a:prstGeom prst="rect">
-            <a:avLst/>
-          </a:prstGeom>
-          <a:noFill/>
-          <a:ln/>
-        </p:spPr>
-        <p:txBody>
-          <a:bodyPr wrap="square" lIns="0" tIns="0" rIns="0" bIns="0" rtlCol="0" anchor="t"/>
-          <a:lstStyle/>
-          <a:p>
-            <a:pPr indent="0" marL="0">
-              <a:buNone/>
-            </a:pPr>
-            <a:r>
-              <a:rPr lang="en-US" sz="1700" b="1" dirty="0">
-                <a:solidFill>
-                  <a:srgbClr val="FFFFFF"/>
-                </a:solidFill>
-                <a:latin typeface="Prompt" pitchFamily="34" charset="0"/>
-                <a:ea typeface="Prompt" pitchFamily="34" charset="-122"/>
-                <a:cs typeface="Prompt" pitchFamily="34" charset="-120"/>
-              </a:rPr>
-              <a:t>ฝนเรดาร์/ดาวเทียม</a:t>
-            </a:r>
-            <a:endParaRPr lang="en-US" sz="1700" dirty="0"/>
-          </a:p>
-          <a:p>
-            <a:pPr indent="0" marL="0">
-              <a:buNone/>
-            </a:pPr>
-            <a:r>
-              <a:rPr lang="en-US" sz="1300" dirty="0">
-                <a:solidFill>
-                  <a:srgbClr val="CFE3EE"/>
-                </a:solidFill>
-                <a:latin typeface="Prompt" pitchFamily="34" charset="0"/>
-                <a:ea typeface="Prompt" pitchFamily="34" charset="-122"/>
-                <a:cs typeface="Prompt" pitchFamily="34" charset="-120"/>
-              </a:rPr>
-              <a:t>GSMaP/IMERG หรือเรดาร์กรมอุตุฯ แทนฝนแบบจำลองช่วงย้อนหลัง</a:t>
-            </a:r>
-            <a:endParaRPr lang="en-US" sz="1700" dirty="0"/>
-          </a:p>
-        </p:txBody>
-      </p:sp>
-    </p:spTree>
-  </p:cSld>
-  <p:clrMapOvr>
-    <a:masterClrMapping/>
-  </p:clrMapOvr>
-</p:sld>
-</file>
-
-<file path=ppt/slides/slide18.xml><?xml version="1.0" encoding="utf-8"?>
-<p:sld xmlns:a="http://schemas.openxmlformats.org/drawingml/2006/main" xmlns:p="http://schemas.openxmlformats.org/presentationml/2006/main" xmlns:r="http://schemas.openxmlformats.org/officeDocument/2006/relationships">
-  <p:cSld>
-    <p:bg>
-      <p:bgPr>
-        <a:solidFill>
-          <a:srgbClr val="FFFFFF"/>
-        </a:solidFill>
-      </p:bgPr>
-    </p:bg>
-    <p:spTree>
-      <p:nvGrpSpPr>
-        <p:cNvPr id="1" name=""/>
-        <p:cNvGrpSpPr/>
-        <p:nvPr/>
-      </p:nvGrpSpPr>
-      <p:grpSpPr/>
-      <p:sp>
-        <p:nvSpPr>
-          <p:cNvPr id="25" name="Slide Number Placeholder 0"/>
-          <p:cNvSpPr>
-            <a:spLocks noGrp="1"/>
-          </p:cNvSpPr>
-          <p:nvPr>
-            <p:ph type="sldNum" sz="quarter" idx="4294967295"/>
-          </p:nvPr>
-        </p:nvSpPr>
-        <p:spPr>
-          <a:xfrm>
-            <a:off x="11277295" y="6419088"/>
-            <a:ext cx="457200" cy="274320"/>
-          </a:xfrm>
-          <a:prstGeom prst="rect">
-            <a:avLst/>
-          </a:prstGeom>
-          <a:extLst>
-            <a:ext uri="{C572A759-6A51-4108-AA02-DFA0A04FC94B}">
-              <ma14:wrappingTextBoxFlag xmlns:ma14="http://schemas.microsoft.com/office/mac/drawingml/2011/main" val="0"/>
-            </a:ext>
-          </a:extLst>
-        </p:spPr>
-        <p:txBody>
-          <a:bodyPr/>
-          <a:lstStyle>
-            <a:lvl1pPr>
-              <a:defRPr sz="900">
-                <a:solidFill>
-                  <a:srgbClr val="64748B"/>
-                </a:solidFill>
-                <a:latin typeface="Prompt"/>
-                <a:ea typeface="Prompt"/>
-                <a:cs typeface="Prompt"/>
-              </a:defRPr>
-            </a:lvl1pPr>
-          </a:lstStyle>
-          <a:p>
-            <a:pPr algn="r"/>
-            <a:fld id="{F7021451-1387-4CA6-816F-3879F97B5CBC}" type="slidenum">
-              <a:rPr b="0" lang="en-US"/>
-              <a:t>2</a:t>
-            </a:fld>
-            <a:endParaRPr lang="en-US"/>
-          </a:p>
-        </p:txBody>
-      </p:sp>
-      <p:sp>
-        <p:nvSpPr>
-          <p:cNvPr id="26" name="TextBox 25"/>
-          <p:cNvSpPr txBox="1"/>
-          <p:nvPr/>
-        </p:nvSpPr>
-        <p:spPr>
-          <a:xfrm>
-            <a:off x="548640" y="347472"/>
-            <a:ext cx="8229600" cy="274320"/>
-          </a:xfrm>
-          <a:prstGeom prst="rect">
-            <a:avLst/>
-          </a:prstGeom>
-          <a:noFill/>
-        </p:spPr>
-        <p:txBody>
-          <a:bodyPr wrap="square" lIns="0" rIns="0" tIns="0" bIns="0" anchor="t">
-            <a:spAutoFit/>
-          </a:bodyPr>
-          <a:lstStyle/>
-          <a:p>
-            <a:pPr algn="l"/>
-            <a:r>
-              <a:rPr sz="1200" b="1" i="0">
-                <a:solidFill>
-                  <a:srgbClr val="1B998B"/>
-                </a:solidFill>
-                <a:latin typeface="Prompt"/>
-                <a:ea typeface="Prompt"/>
-                <a:cs typeface="Prompt"/>
-              </a:rPr>
-              <a:t>แอ่งท่าตะโก · น้ำท่วมจริง</a:t>
-            </a:r>
-          </a:p>
-        </p:txBody>
-      </p:sp>
-      <p:sp>
-        <p:nvSpPr>
-          <p:cNvPr id="27" name="TextBox 26"/>
-          <p:cNvSpPr txBox="1"/>
-          <p:nvPr/>
-        </p:nvSpPr>
-        <p:spPr>
-          <a:xfrm>
-            <a:off x="548640" y="621792"/>
-            <a:ext cx="11091672" cy="685800"/>
-          </a:xfrm>
-          <a:prstGeom prst="rect">
-            <a:avLst/>
-          </a:prstGeom>
-          <a:noFill/>
-        </p:spPr>
-        <p:txBody>
-          <a:bodyPr wrap="square" lIns="0" rIns="0" tIns="0" bIns="0" anchor="ctr">
-            <a:spAutoFit/>
-          </a:bodyPr>
-          <a:lstStyle/>
-          <a:p>
-            <a:pPr algn="l"/>
-            <a:r>
-              <a:rPr sz="2600" b="1" i="0">
-                <a:solidFill>
-                  <a:srgbClr val="0B3C5D"/>
-                </a:solidFill>
-                <a:latin typeface="Prompt"/>
-                <a:ea typeface="Prompt"/>
-                <a:cs typeface="Prompt"/>
-              </a:rPr>
-              <a:t>แอ่งท่าตะโก: ท่วมซ้ำซากนาน 2–3 เดือน — ภาพเรดาร์ 9 ปียืนยัน</a:t>
-            </a:r>
-          </a:p>
-        </p:txBody>
-      </p:sp>
-      <p:sp>
-        <p:nvSpPr>
-          <p:cNvPr id="28" name="Rounded Rectangle 27"/>
-          <p:cNvSpPr/>
-          <p:nvPr/>
-        </p:nvSpPr>
-        <p:spPr>
-          <a:xfrm>
-            <a:off x="493776" y="1426464"/>
-            <a:ext cx="5093208" cy="4471416"/>
-          </a:xfrm>
-          <a:prstGeom prst="roundRect">
-            <a:avLst>
-              <a:gd name="adj" fmla="val 1600"/>
-            </a:avLst>
-          </a:prstGeom>
-          <a:solidFill>
-            <a:srgbClr val="FFFFFF"/>
-          </a:solidFill>
-          <a:ln w="9525">
-            <a:solidFill>
-              <a:srgbClr val="D5DEE6"/>
-            </a:solidFill>
-          </a:ln>
-          <a:effectLst/>
-        </p:spPr>
-        <p:style>
-          <a:lnRef idx="1">
-            <a:schemeClr val="accent1"/>
-          </a:lnRef>
-          <a:fillRef idx="3">
-            <a:schemeClr val="accent1"/>
-          </a:fillRef>
-          <a:effectRef idx="2">
-            <a:schemeClr val="accent1"/>
-          </a:effectRef>
-          <a:fontRef idx="minor">
-            <a:schemeClr val="lt1"/>
-          </a:fontRef>
-        </p:style>
-        <p:txBody>
-          <a:bodyPr rtlCol="0" anchor="ctr"/>
-          <a:lstStyle/>
-          <a:p/>
-        </p:txBody>
-      </p:sp>
-      <p:pic>
-        <p:nvPicPr>
-          <p:cNvPr id="29" name="Picture 28" descr="map_s1freq.png"/>
-          <p:cNvPicPr>
-            <a:picLocks noChangeAspect="1"/>
-          </p:cNvPicPr>
-          <p:nvPr/>
-        </p:nvPicPr>
-        <p:blipFill>
-          <a:blip r:embed="rId2"/>
-          <a:stretch>
-            <a:fillRect/>
-          </a:stretch>
-        </p:blipFill>
-        <p:spPr>
-          <a:xfrm>
-            <a:off x="548640" y="1481328"/>
-            <a:ext cx="4983480" cy="4361688"/>
-          </a:xfrm>
-          <a:prstGeom prst="rect">
-            <a:avLst/>
-          </a:prstGeom>
-        </p:spPr>
-      </p:pic>
-      <p:sp>
-        <p:nvSpPr>
-          <p:cNvPr id="30" name="TextBox 29"/>
-          <p:cNvSpPr txBox="1"/>
-          <p:nvPr/>
-        </p:nvSpPr>
-        <p:spPr>
-          <a:xfrm>
-            <a:off x="548640" y="5916168"/>
-            <a:ext cx="4983480" cy="274320"/>
-          </a:xfrm>
-          <a:prstGeom prst="rect">
-            <a:avLst/>
-          </a:prstGeom>
-          <a:noFill/>
-        </p:spPr>
-        <p:txBody>
-          <a:bodyPr wrap="square" lIns="0" rIns="0" tIns="0" bIns="0" anchor="t">
-            <a:spAutoFit/>
-          </a:bodyPr>
-          <a:lstStyle/>
-          <a:p>
-            <a:pPr algn="l"/>
-            <a:r>
-              <a:rPr sz="1000" b="0" i="0">
-                <a:solidFill>
-                  <a:srgbClr val="64748B"/>
-                </a:solidFill>
-                <a:latin typeface="Prompt"/>
-                <a:ea typeface="Prompt"/>
-                <a:cs typeface="Prompt"/>
-              </a:rPr>
-              <a:t>จำนวนปีที่ท่วมต่อเนื่อง 30 วันขึ้นไป (Sentinel-1 ปี 2560–2568)</a:t>
-            </a:r>
-          </a:p>
-        </p:txBody>
-      </p:sp>
-      <p:graphicFrame>
-        <p:nvGraphicFramePr>
-          <p:cNvPr id="31" name="Chart 30"/>
-          <p:cNvGraphicFramePr>
-            <a:graphicFrameLocks noGrp="1"/>
-          </p:cNvGraphicFramePr>
-          <p:nvPr/>
-        </p:nvGraphicFramePr>
-        <p:xfrm>
-          <a:off x="5897880" y="1371600"/>
-          <a:ext cx="5760720" cy="2697480"/>
-        </p:xfrm>
-        <a:graphic>
-          <a:graphicData uri="http://schemas.openxmlformats.org/drawingml/2006/chart">
-            <c:chart xmlns:c="http://schemas.openxmlformats.org/drawingml/2006/chart" r:id="rId3"/>
-          </a:graphicData>
-        </a:graphic>
-      </p:graphicFrame>
-      <p:sp>
-        <p:nvSpPr>
-          <p:cNvPr id="32" name="Rounded Rectangle 31"/>
-          <p:cNvSpPr/>
-          <p:nvPr/>
-        </p:nvSpPr>
-        <p:spPr>
-          <a:xfrm>
-            <a:off x="5897880" y="4224528"/>
-            <a:ext cx="1828800" cy="1417320"/>
-          </a:xfrm>
-          <a:prstGeom prst="roundRect">
-            <a:avLst>
-              <a:gd name="adj" fmla="val 6000"/>
-            </a:avLst>
-          </a:prstGeom>
-          <a:solidFill>
-            <a:srgbClr val="EEF5F9"/>
-          </a:solidFill>
-          <a:ln>
-            <a:noFill/>
-          </a:ln>
-          <a:effectLst/>
-        </p:spPr>
-        <p:style>
-          <a:lnRef idx="1">
-            <a:schemeClr val="accent1"/>
-          </a:lnRef>
-          <a:fillRef idx="3">
-            <a:schemeClr val="accent1"/>
-          </a:fillRef>
-          <a:effectRef idx="2">
-            <a:schemeClr val="accent1"/>
-          </a:effectRef>
-          <a:fontRef idx="minor">
-            <a:schemeClr val="lt1"/>
-          </a:fontRef>
-        </p:style>
-        <p:txBody>
-          <a:bodyPr rtlCol="0" anchor="ctr"/>
-          <a:lstStyle/>
-          <a:p/>
-        </p:txBody>
-      </p:sp>
-      <p:sp>
-        <p:nvSpPr>
-          <p:cNvPr id="33" name="TextBox 32"/>
-          <p:cNvSpPr txBox="1"/>
-          <p:nvPr/>
-        </p:nvSpPr>
-        <p:spPr>
-          <a:xfrm>
-            <a:off x="6099048" y="4352544"/>
-            <a:ext cx="1463040" cy="637794"/>
-          </a:xfrm>
-          <a:prstGeom prst="rect">
-            <a:avLst/>
-          </a:prstGeom>
-          <a:noFill/>
-        </p:spPr>
-        <p:txBody>
-          <a:bodyPr wrap="square" lIns="0" rIns="0" tIns="0" bIns="0" anchor="ctr">
-            <a:spAutoFit/>
-          </a:bodyPr>
-          <a:lstStyle/>
-          <a:p>
-            <a:pPr algn="l"/>
-            <a:r>
-              <a:rPr sz="2600" b="1" i="0">
-                <a:solidFill>
-                  <a:srgbClr val="0B3C5D"/>
-                </a:solidFill>
-                <a:latin typeface="Prompt"/>
-                <a:ea typeface="Prompt"/>
-                <a:cs typeface="Prompt"/>
-              </a:rPr>
-              <a:t>173</a:t>
-            </a:r>
-            <a:r>
-              <a:rPr sz="1300" b="0" i="0">
-                <a:solidFill>
-                  <a:srgbClr val="64748B"/>
-                </a:solidFill>
-                <a:latin typeface="Prompt"/>
-                <a:ea typeface="Prompt"/>
-                <a:cs typeface="Prompt"/>
-              </a:rPr>
-              <a:t>  ตร.กม.</a:t>
-            </a:r>
-          </a:p>
-        </p:txBody>
-      </p:sp>
-      <p:sp>
-        <p:nvSpPr>
-          <p:cNvPr id="34" name="TextBox 33"/>
-          <p:cNvSpPr txBox="1"/>
-          <p:nvPr/>
-        </p:nvSpPr>
-        <p:spPr>
-          <a:xfrm>
-            <a:off x="6099048" y="5018684"/>
-            <a:ext cx="1463040" cy="637794"/>
-          </a:xfrm>
-          <a:prstGeom prst="rect">
-            <a:avLst/>
-          </a:prstGeom>
-          <a:noFill/>
-        </p:spPr>
-        <p:txBody>
-          <a:bodyPr wrap="square" lIns="0" rIns="0" tIns="0" bIns="0" anchor="t">
-            <a:spAutoFit/>
-          </a:bodyPr>
-          <a:lstStyle/>
-          <a:p>
-            <a:pPr algn="l"/>
-            <a:r>
-              <a:rPr sz="1150" b="0" i="0">
-                <a:solidFill>
-                  <a:srgbClr val="1E293B"/>
-                </a:solidFill>
-                <a:latin typeface="Prompt"/>
-                <a:ea typeface="Prompt"/>
-                <a:cs typeface="Prompt"/>
-              </a:rPr>
-              <a:t>ท่วม 30 วันขึ้นไป อย่างน้อย 3 ใน 9 ปี</a:t>
-            </a:r>
-          </a:p>
-        </p:txBody>
-      </p:sp>
-      <p:sp>
-        <p:nvSpPr>
-          <p:cNvPr id="35" name="Rounded Rectangle 34"/>
-          <p:cNvSpPr/>
-          <p:nvPr/>
-        </p:nvSpPr>
-        <p:spPr>
-          <a:xfrm>
-            <a:off x="7863840" y="4224528"/>
-            <a:ext cx="1828800" cy="1417320"/>
-          </a:xfrm>
-          <a:prstGeom prst="roundRect">
-            <a:avLst>
-              <a:gd name="adj" fmla="val 6000"/>
-            </a:avLst>
-          </a:prstGeom>
-          <a:solidFill>
-            <a:srgbClr val="EEF5F9"/>
-          </a:solidFill>
-          <a:ln>
-            <a:noFill/>
-          </a:ln>
-          <a:effectLst/>
-        </p:spPr>
-        <p:style>
-          <a:lnRef idx="1">
-            <a:schemeClr val="accent1"/>
-          </a:lnRef>
-          <a:fillRef idx="3">
-            <a:schemeClr val="accent1"/>
-          </a:fillRef>
-          <a:effectRef idx="2">
-            <a:schemeClr val="accent1"/>
-          </a:effectRef>
-          <a:fontRef idx="minor">
-            <a:schemeClr val="lt1"/>
-          </a:fontRef>
-        </p:style>
-        <p:txBody>
-          <a:bodyPr rtlCol="0" anchor="ctr"/>
-          <a:lstStyle/>
-          <a:p/>
-        </p:txBody>
-      </p:sp>
-      <p:sp>
-        <p:nvSpPr>
-          <p:cNvPr id="36" name="TextBox 35"/>
-          <p:cNvSpPr txBox="1"/>
-          <p:nvPr/>
-        </p:nvSpPr>
-        <p:spPr>
-          <a:xfrm>
-            <a:off x="8065008" y="4352544"/>
-            <a:ext cx="1463040" cy="637794"/>
-          </a:xfrm>
-          <a:prstGeom prst="rect">
-            <a:avLst/>
-          </a:prstGeom>
-          <a:noFill/>
-        </p:spPr>
-        <p:txBody>
-          <a:bodyPr wrap="square" lIns="0" rIns="0" tIns="0" bIns="0" anchor="ctr">
-            <a:spAutoFit/>
-          </a:bodyPr>
-          <a:lstStyle/>
-          <a:p>
-            <a:pPr algn="l"/>
-            <a:r>
-              <a:rPr sz="2600" b="1" i="0">
-                <a:solidFill>
-                  <a:srgbClr val="D64545"/>
-                </a:solidFill>
-                <a:latin typeface="Prompt"/>
-                <a:ea typeface="Prompt"/>
-                <a:cs typeface="Prompt"/>
-              </a:rPr>
-              <a:t>70</a:t>
-            </a:r>
-            <a:r>
-              <a:rPr sz="1300" b="0" i="0">
-                <a:solidFill>
-                  <a:srgbClr val="64748B"/>
-                </a:solidFill>
-                <a:latin typeface="Prompt"/>
-                <a:ea typeface="Prompt"/>
-                <a:cs typeface="Prompt"/>
-              </a:rPr>
-              <a:t>  ตร.กม.</a:t>
-            </a:r>
-          </a:p>
-        </p:txBody>
-      </p:sp>
-      <p:sp>
-        <p:nvSpPr>
-          <p:cNvPr id="37" name="TextBox 36"/>
-          <p:cNvSpPr txBox="1"/>
-          <p:nvPr/>
-        </p:nvSpPr>
-        <p:spPr>
-          <a:xfrm>
-            <a:off x="8065008" y="5018684"/>
-            <a:ext cx="1463040" cy="637794"/>
-          </a:xfrm>
-          <a:prstGeom prst="rect">
-            <a:avLst/>
-          </a:prstGeom>
-          <a:noFill/>
-        </p:spPr>
-        <p:txBody>
-          <a:bodyPr wrap="square" lIns="0" rIns="0" tIns="0" bIns="0" anchor="t">
-            <a:spAutoFit/>
-          </a:bodyPr>
-          <a:lstStyle/>
-          <a:p>
-            <a:pPr algn="l"/>
-            <a:r>
-              <a:rPr sz="1150" b="0" i="0">
-                <a:solidFill>
-                  <a:srgbClr val="1E293B"/>
-                </a:solidFill>
-                <a:latin typeface="Prompt"/>
-                <a:ea typeface="Prompt"/>
-                <a:cs typeface="Prompt"/>
-              </a:rPr>
-              <a:t>ทับกฤช · ท่วมนานมัธยฐาน 72–84 วัน</a:t>
-            </a:r>
-          </a:p>
-        </p:txBody>
-      </p:sp>
-      <p:sp>
-        <p:nvSpPr>
-          <p:cNvPr id="38" name="Rounded Rectangle 37"/>
-          <p:cNvSpPr/>
-          <p:nvPr/>
-        </p:nvSpPr>
-        <p:spPr>
-          <a:xfrm>
-            <a:off x="9829800" y="4224528"/>
-            <a:ext cx="1828800" cy="1417320"/>
-          </a:xfrm>
-          <a:prstGeom prst="roundRect">
-            <a:avLst>
-              <a:gd name="adj" fmla="val 6000"/>
-            </a:avLst>
-          </a:prstGeom>
-          <a:solidFill>
-            <a:srgbClr val="EEF5F9"/>
-          </a:solidFill>
-          <a:ln>
-            <a:noFill/>
-          </a:ln>
-          <a:effectLst/>
-        </p:spPr>
-        <p:style>
-          <a:lnRef idx="1">
-            <a:schemeClr val="accent1"/>
-          </a:lnRef>
-          <a:fillRef idx="3">
-            <a:schemeClr val="accent1"/>
-          </a:fillRef>
-          <a:effectRef idx="2">
-            <a:schemeClr val="accent1"/>
-          </a:effectRef>
-          <a:fontRef idx="minor">
-            <a:schemeClr val="lt1"/>
-          </a:fontRef>
-        </p:style>
-        <p:txBody>
-          <a:bodyPr rtlCol="0" anchor="ctr"/>
-          <a:lstStyle/>
-          <a:p/>
-        </p:txBody>
-      </p:sp>
-      <p:sp>
-        <p:nvSpPr>
-          <p:cNvPr id="39" name="TextBox 38"/>
-          <p:cNvSpPr txBox="1"/>
-          <p:nvPr/>
-        </p:nvSpPr>
-        <p:spPr>
-          <a:xfrm>
-            <a:off x="10030968" y="4352544"/>
-            <a:ext cx="1463040" cy="637794"/>
-          </a:xfrm>
-          <a:prstGeom prst="rect">
-            <a:avLst/>
-          </a:prstGeom>
-          <a:noFill/>
-        </p:spPr>
-        <p:txBody>
-          <a:bodyPr wrap="square" lIns="0" rIns="0" tIns="0" bIns="0" anchor="ctr">
-            <a:spAutoFit/>
-          </a:bodyPr>
-          <a:lstStyle/>
-          <a:p>
-            <a:pPr algn="l"/>
-            <a:r>
-              <a:rPr sz="2600" b="1" i="0">
-                <a:solidFill>
-                  <a:srgbClr val="1B998B"/>
-                </a:solidFill>
-                <a:latin typeface="Prompt"/>
-                <a:ea typeface="Prompt"/>
-                <a:cs typeface="Prompt"/>
-              </a:rPr>
-              <a:t>4</a:t>
-            </a:r>
-            <a:r>
-              <a:rPr sz="1300" b="0" i="0">
-                <a:solidFill>
-                  <a:srgbClr val="64748B"/>
-                </a:solidFill>
-                <a:latin typeface="Prompt"/>
-                <a:ea typeface="Prompt"/>
-                <a:cs typeface="Prompt"/>
-              </a:rPr>
-              <a:t>  ตำบล</a:t>
-            </a:r>
-          </a:p>
-        </p:txBody>
-      </p:sp>
-      <p:sp>
-        <p:nvSpPr>
-          <p:cNvPr id="40" name="TextBox 39"/>
-          <p:cNvSpPr txBox="1"/>
-          <p:nvPr/>
-        </p:nvSpPr>
-        <p:spPr>
-          <a:xfrm>
-            <a:off x="10030968" y="5018684"/>
-            <a:ext cx="1463040" cy="637794"/>
-          </a:xfrm>
-          <a:prstGeom prst="rect">
-            <a:avLst/>
-          </a:prstGeom>
-          <a:noFill/>
-        </p:spPr>
-        <p:txBody>
-          <a:bodyPr wrap="square" lIns="0" rIns="0" tIns="0" bIns="0" anchor="t">
-            <a:spAutoFit/>
-          </a:bodyPr>
-          <a:lstStyle/>
-          <a:p>
-            <a:pPr algn="l"/>
-            <a:r>
-              <a:rPr sz="1150" b="0" i="0">
-                <a:solidFill>
-                  <a:srgbClr val="1E293B"/>
-                </a:solidFill>
-                <a:latin typeface="Prompt"/>
-                <a:ea typeface="Prompt"/>
-                <a:cs typeface="Prompt"/>
-              </a:rPr>
-              <a:t>รอบบึงบอระเพ็ดท่วมนานที่สุด</a:t>
-            </a:r>
-          </a:p>
-        </p:txBody>
-      </p:sp>
-      <p:sp>
-        <p:nvSpPr>
-          <p:cNvPr id="41" name="TextBox 40"/>
-          <p:cNvSpPr txBox="1"/>
-          <p:nvPr/>
-        </p:nvSpPr>
-        <p:spPr>
-          <a:xfrm>
-            <a:off x="5897880" y="5760720"/>
-            <a:ext cx="5760720" cy="502920"/>
-          </a:xfrm>
-          <a:prstGeom prst="rect">
-            <a:avLst/>
-          </a:prstGeom>
-          <a:noFill/>
-        </p:spPr>
-        <p:txBody>
-          <a:bodyPr wrap="square" lIns="0" rIns="0" tIns="0" bIns="0" anchor="t">
-            <a:spAutoFit/>
-          </a:bodyPr>
-          <a:lstStyle/>
-          <a:p>
-            <a:pPr algn="l"/>
-            <a:r>
-              <a:rPr sz="1100" b="0" i="0">
-                <a:solidFill>
-                  <a:srgbClr val="1E293B"/>
-                </a:solidFill>
-                <a:latin typeface="Prompt"/>
-                <a:ea typeface="Prompt"/>
-                <a:cs typeface="Prompt"/>
-              </a:rPr>
-              <a:t>ทับกฤช วังมหากร พนมเศษ พระนอน (+ ไผ่สิงห์) · ตำบลตอนในท่าตะโกแทบไม่ท่วมนาน</a:t>
-            </a:r>
-          </a:p>
-        </p:txBody>
-      </p:sp>
-      <p:sp>
-        <p:nvSpPr>
-          <p:cNvPr id="42" name="TextBox 41"/>
-          <p:cNvSpPr txBox="1"/>
-          <p:nvPr/>
-        </p:nvSpPr>
-        <p:spPr>
-          <a:xfrm>
-            <a:off x="548640" y="6400800"/>
-            <a:ext cx="10332720" cy="274320"/>
-          </a:xfrm>
-          <a:prstGeom prst="rect">
-            <a:avLst/>
-          </a:prstGeom>
-          <a:noFill/>
-        </p:spPr>
-        <p:txBody>
-          <a:bodyPr wrap="square" lIns="0" rIns="0" tIns="0" bIns="0" anchor="t">
-            <a:spAutoFit/>
-          </a:bodyPr>
-          <a:lstStyle/>
-          <a:p>
-            <a:pPr algn="l"/>
-            <a:r>
-              <a:rPr sz="900" b="0" i="0">
-                <a:solidFill>
-                  <a:srgbClr val="64748B"/>
-                </a:solidFill>
-                <a:latin typeface="Prompt"/>
-                <a:ea typeface="Prompt"/>
-                <a:cs typeface="Prompt"/>
-              </a:rPr>
-              <a:t>ที่มา: Sentinel-1 RTC VV (Microsoft Planetary Computer) วงโคจร 62 · 148 ภาพ ส.ค.–15 ธ.ค. ปี 2560–2568 · น้ำใต้ต้นข้าว/พืชสูงตรวจไม่พบ (อาจนับต่ำ) · ระยะเวลาถูกตัดที่ 15 ธ.ค.</a:t>
-            </a:r>
-          </a:p>
-        </p:txBody>
-      </p:sp>
-    </p:spTree>
-  </p:cSld>
-  <p:clrMapOvr>
-    <a:masterClrMapping/>
-  </p:clrMapOvr>
-</p:sld>
-</file>
-
-<file path=ppt/slides/slide19.xml><?xml version="1.0" encoding="utf-8"?>
-<p:sld xmlns:a="http://schemas.openxmlformats.org/drawingml/2006/main" xmlns:p="http://schemas.openxmlformats.org/presentationml/2006/main" xmlns:r="http://schemas.openxmlformats.org/officeDocument/2006/relationships">
-  <p:cSld>
-    <p:bg>
-      <p:bgPr>
-        <a:solidFill>
-          <a:srgbClr val="FFFFFF"/>
-        </a:solidFill>
-      </p:bgPr>
-    </p:bg>
-    <p:spTree>
-      <p:nvGrpSpPr>
-        <p:cNvPr id="1" name=""/>
-        <p:cNvGrpSpPr/>
-        <p:nvPr/>
-      </p:nvGrpSpPr>
-      <p:grpSpPr/>
-      <p:sp>
-        <p:nvSpPr>
-          <p:cNvPr id="25" name="Slide Number Placeholder 0"/>
-          <p:cNvSpPr>
-            <a:spLocks noGrp="1"/>
-          </p:cNvSpPr>
-          <p:nvPr>
-            <p:ph type="sldNum" sz="quarter" idx="4294967295"/>
-          </p:nvPr>
-        </p:nvSpPr>
-        <p:spPr>
-          <a:xfrm>
-            <a:off x="11277295" y="6419088"/>
-            <a:ext cx="457200" cy="274320"/>
-          </a:xfrm>
-          <a:prstGeom prst="rect">
-            <a:avLst/>
-          </a:prstGeom>
-          <a:extLst>
-            <a:ext uri="{C572A759-6A51-4108-AA02-DFA0A04FC94B}">
-              <ma14:wrappingTextBoxFlag xmlns:ma14="http://schemas.microsoft.com/office/mac/drawingml/2011/main" val="0"/>
-            </a:ext>
-          </a:extLst>
-        </p:spPr>
-        <p:txBody>
-          <a:bodyPr/>
-          <a:lstStyle>
-            <a:lvl1pPr>
-              <a:defRPr sz="900">
-                <a:solidFill>
-                  <a:srgbClr val="64748B"/>
-                </a:solidFill>
-                <a:latin typeface="Prompt"/>
-                <a:ea typeface="Prompt"/>
-                <a:cs typeface="Prompt"/>
-              </a:defRPr>
-            </a:lvl1pPr>
-          </a:lstStyle>
-          <a:p>
-            <a:pPr algn="r"/>
-            <a:fld id="{F7021451-1387-4CA6-816F-3879F97B5CBC}" type="slidenum">
-              <a:rPr b="0" lang="en-US"/>
-              <a:t>2</a:t>
-            </a:fld>
-            <a:endParaRPr lang="en-US"/>
-          </a:p>
-        </p:txBody>
-      </p:sp>
-      <p:sp>
-        <p:nvSpPr>
-          <p:cNvPr id="26" name="TextBox 25"/>
-          <p:cNvSpPr txBox="1"/>
-          <p:nvPr/>
-        </p:nvSpPr>
-        <p:spPr>
-          <a:xfrm>
-            <a:off x="548640" y="347472"/>
-            <a:ext cx="8229600" cy="274320"/>
-          </a:xfrm>
-          <a:prstGeom prst="rect">
-            <a:avLst/>
-          </a:prstGeom>
-          <a:noFill/>
-        </p:spPr>
-        <p:txBody>
-          <a:bodyPr wrap="square" lIns="0" rIns="0" tIns="0" bIns="0" anchor="t">
-            <a:spAutoFit/>
-          </a:bodyPr>
-          <a:lstStyle/>
-          <a:p>
-            <a:pPr algn="l"/>
-            <a:r>
-              <a:rPr sz="1200" b="1" i="0">
-                <a:solidFill>
-                  <a:srgbClr val="1B998B"/>
-                </a:solidFill>
-                <a:latin typeface="Prompt"/>
-                <a:ea typeface="Prompt"/>
-                <a:cs typeface="Prompt"/>
-              </a:rPr>
-              <a:t>แอ่งท่าตะโก · สาเหตุ</a:t>
-            </a:r>
-          </a:p>
-        </p:txBody>
-      </p:sp>
-      <p:sp>
-        <p:nvSpPr>
-          <p:cNvPr id="27" name="TextBox 26"/>
-          <p:cNvSpPr txBox="1"/>
-          <p:nvPr/>
-        </p:nvSpPr>
-        <p:spPr>
-          <a:xfrm>
-            <a:off x="548640" y="621792"/>
-            <a:ext cx="11091672" cy="685800"/>
-          </a:xfrm>
-          <a:prstGeom prst="rect">
-            <a:avLst/>
-          </a:prstGeom>
-          <a:noFill/>
-        </p:spPr>
-        <p:txBody>
-          <a:bodyPr wrap="square" lIns="0" rIns="0" tIns="0" bIns="0" anchor="ctr">
-            <a:spAutoFit/>
-          </a:bodyPr>
-          <a:lstStyle/>
-          <a:p>
-            <a:pPr algn="l"/>
-            <a:r>
-              <a:rPr sz="2600" b="1" i="0">
-                <a:solidFill>
-                  <a:srgbClr val="0B3C5D"/>
-                </a:solidFill>
-                <a:latin typeface="Prompt"/>
-                <a:ea typeface="Prompt"/>
-                <a:cs typeface="Prompt"/>
-              </a:rPr>
-              <a:t>สาเหตุหลักคือน้ำจากแม่น้ำ ไม่ใช่ฝนที่ตกในแอ่ง</a:t>
-            </a:r>
-          </a:p>
-        </p:txBody>
-      </p:sp>
-      <p:graphicFrame>
-        <p:nvGraphicFramePr>
-          <p:cNvPr id="28" name="Chart 27"/>
-          <p:cNvGraphicFramePr>
-            <a:graphicFrameLocks noGrp="1"/>
-          </p:cNvGraphicFramePr>
-          <p:nvPr/>
-        </p:nvGraphicFramePr>
-        <p:xfrm>
-          <a:off x="457200" y="1371600"/>
-          <a:ext cx="6035040" cy="3246120"/>
-        </p:xfrm>
-        <a:graphic>
-          <a:graphicData uri="http://schemas.openxmlformats.org/drawingml/2006/chart">
-            <c:chart xmlns:c="http://schemas.openxmlformats.org/drawingml/2006/chart" r:id="rId2"/>
-          </a:graphicData>
-        </a:graphic>
-      </p:graphicFrame>
-      <p:sp>
-        <p:nvSpPr>
-          <p:cNvPr id="29" name="Rounded Rectangle 28"/>
-          <p:cNvSpPr/>
-          <p:nvPr/>
-        </p:nvSpPr>
-        <p:spPr>
-          <a:xfrm>
-            <a:off x="548640" y="4754880"/>
-            <a:ext cx="5852160" cy="1481328"/>
-          </a:xfrm>
-          <a:prstGeom prst="roundRect">
-            <a:avLst>
-              <a:gd name="adj" fmla="val 6000"/>
-            </a:avLst>
-          </a:prstGeom>
-          <a:solidFill>
-            <a:srgbClr val="FFF4E5"/>
-          </a:solidFill>
-          <a:ln>
-            <a:noFill/>
-          </a:ln>
-          <a:effectLst/>
-        </p:spPr>
-        <p:style>
-          <a:lnRef idx="1">
-            <a:schemeClr val="accent1"/>
-          </a:lnRef>
-          <a:fillRef idx="3">
-            <a:schemeClr val="accent1"/>
-          </a:fillRef>
-          <a:effectRef idx="2">
-            <a:schemeClr val="accent1"/>
-          </a:effectRef>
-          <a:fontRef idx="minor">
-            <a:schemeClr val="lt1"/>
-          </a:fontRef>
-        </p:style>
-        <p:txBody>
-          <a:bodyPr rtlCol="0" anchor="ctr"/>
-          <a:lstStyle/>
-          <a:p/>
-        </p:txBody>
-      </p:sp>
-      <p:sp>
-        <p:nvSpPr>
-          <p:cNvPr id="30" name="TextBox 29"/>
-          <p:cNvSpPr txBox="1"/>
-          <p:nvPr/>
-        </p:nvSpPr>
-        <p:spPr>
-          <a:xfrm>
-            <a:off x="749808" y="4846320"/>
-            <a:ext cx="5486400" cy="365760"/>
-          </a:xfrm>
-          <a:prstGeom prst="rect">
-            <a:avLst/>
-          </a:prstGeom>
-          <a:noFill/>
-        </p:spPr>
-        <p:txBody>
-          <a:bodyPr wrap="square" lIns="0" rIns="0" tIns="0" bIns="0" anchor="t">
-            <a:spAutoFit/>
-          </a:bodyPr>
-          <a:lstStyle/>
-          <a:p>
-            <a:pPr algn="l"/>
-            <a:r>
-              <a:rPr sz="1300" b="1" i="0">
-                <a:solidFill>
-                  <a:srgbClr val="0B3C5D"/>
-                </a:solidFill>
-                <a:latin typeface="Prompt"/>
-                <a:ea typeface="Prompt"/>
-                <a:cs typeface="Prompt"/>
-              </a:rPr>
-              <a:t>ตรงกับที่ดาวเทียมเห็นท่วมนานแค่ไหน (สัดส่วนที่จับได้ · POD)</a:t>
-            </a:r>
-          </a:p>
-        </p:txBody>
-      </p:sp>
-      <p:sp>
-        <p:nvSpPr>
-          <p:cNvPr id="31" name="TextBox 30"/>
-          <p:cNvSpPr txBox="1"/>
-          <p:nvPr/>
-        </p:nvSpPr>
-        <p:spPr>
-          <a:xfrm>
-            <a:off x="749808" y="5257800"/>
-            <a:ext cx="1783080" cy="502920"/>
-          </a:xfrm>
-          <a:prstGeom prst="rect">
-            <a:avLst/>
-          </a:prstGeom>
-          <a:noFill/>
-        </p:spPr>
-        <p:txBody>
-          <a:bodyPr wrap="square" lIns="0" rIns="0" tIns="0" bIns="0" anchor="t">
-            <a:spAutoFit/>
-          </a:bodyPr>
-          <a:lstStyle/>
-          <a:p>
-            <a:pPr algn="l"/>
-            <a:r>
-              <a:rPr sz="2600" b="1" i="0">
-                <a:solidFill>
-                  <a:srgbClr val="A3B3C2"/>
-                </a:solidFill>
-                <a:latin typeface="Prompt"/>
-                <a:ea typeface="Prompt"/>
-                <a:cs typeface="Prompt"/>
-              </a:rPr>
-              <a:t>0.29</a:t>
-            </a:r>
-          </a:p>
-        </p:txBody>
-      </p:sp>
-      <p:sp>
-        <p:nvSpPr>
-          <p:cNvPr id="32" name="TextBox 31"/>
-          <p:cNvSpPr txBox="1"/>
-          <p:nvPr/>
-        </p:nvSpPr>
-        <p:spPr>
-          <a:xfrm>
-            <a:off x="749808" y="5760720"/>
-            <a:ext cx="1783080" cy="365760"/>
-          </a:xfrm>
-          <a:prstGeom prst="rect">
-            <a:avLst/>
-          </a:prstGeom>
-          <a:noFill/>
-        </p:spPr>
-        <p:txBody>
-          <a:bodyPr wrap="square" lIns="0" rIns="0" tIns="0" bIns="0" anchor="t">
-            <a:spAutoFit/>
-          </a:bodyPr>
-          <a:lstStyle/>
-          <a:p>
-            <a:pPr algn="l"/>
-            <a:r>
-              <a:rPr sz="1100" b="0" i="0">
-                <a:solidFill>
-                  <a:srgbClr val="1E293B"/>
-                </a:solidFill>
-                <a:latin typeface="Prompt"/>
-                <a:ea typeface="Prompt"/>
-                <a:cs typeface="Prompt"/>
-              </a:rPr>
-              <a:t>C ฝนอย่างเดียว</a:t>
-            </a:r>
-          </a:p>
-        </p:txBody>
-      </p:sp>
-      <p:sp>
-        <p:nvSpPr>
-          <p:cNvPr id="33" name="TextBox 32"/>
-          <p:cNvSpPr txBox="1"/>
-          <p:nvPr/>
-        </p:nvSpPr>
-        <p:spPr>
-          <a:xfrm>
-            <a:off x="2624327" y="5257800"/>
-            <a:ext cx="1783080" cy="502920"/>
-          </a:xfrm>
-          <a:prstGeom prst="rect">
-            <a:avLst/>
-          </a:prstGeom>
-          <a:noFill/>
-        </p:spPr>
-        <p:txBody>
-          <a:bodyPr wrap="square" lIns="0" rIns="0" tIns="0" bIns="0" anchor="t">
-            <a:spAutoFit/>
-          </a:bodyPr>
-          <a:lstStyle/>
-          <a:p>
-            <a:pPr algn="l"/>
-            <a:r>
-              <a:rPr sz="2600" b="1" i="0">
-                <a:solidFill>
-                  <a:srgbClr val="1B998B"/>
-                </a:solidFill>
-                <a:latin typeface="Prompt"/>
-                <a:ea typeface="Prompt"/>
-                <a:cs typeface="Prompt"/>
-              </a:rPr>
-              <a:t>0.42</a:t>
-            </a:r>
-          </a:p>
-        </p:txBody>
-      </p:sp>
-      <p:sp>
-        <p:nvSpPr>
-          <p:cNvPr id="34" name="TextBox 33"/>
-          <p:cNvSpPr txBox="1"/>
-          <p:nvPr/>
-        </p:nvSpPr>
-        <p:spPr>
-          <a:xfrm>
-            <a:off x="2624327" y="5760720"/>
-            <a:ext cx="1783080" cy="365760"/>
-          </a:xfrm>
-          <a:prstGeom prst="rect">
-            <a:avLst/>
-          </a:prstGeom>
-          <a:noFill/>
-        </p:spPr>
-        <p:txBody>
-          <a:bodyPr wrap="square" lIns="0" rIns="0" tIns="0" bIns="0" anchor="t">
-            <a:spAutoFit/>
-          </a:bodyPr>
-          <a:lstStyle/>
-          <a:p>
-            <a:pPr algn="l"/>
-            <a:r>
-              <a:rPr sz="1100" b="0" i="0">
-                <a:solidFill>
-                  <a:srgbClr val="1E293B"/>
-                </a:solidFill>
-                <a:latin typeface="Prompt"/>
-                <a:ea typeface="Prompt"/>
-                <a:cs typeface="Prompt"/>
-              </a:rPr>
-              <a:t>D + น้ำเต็มตลิ่ง</a:t>
-            </a:r>
-          </a:p>
-        </p:txBody>
-      </p:sp>
-      <p:sp>
-        <p:nvSpPr>
-          <p:cNvPr id="35" name="TextBox 34"/>
-          <p:cNvSpPr txBox="1"/>
-          <p:nvPr/>
-        </p:nvSpPr>
-        <p:spPr>
-          <a:xfrm>
-            <a:off x="4498848" y="5257800"/>
-            <a:ext cx="1783080" cy="502920"/>
-          </a:xfrm>
-          <a:prstGeom prst="rect">
-            <a:avLst/>
-          </a:prstGeom>
-          <a:noFill/>
-        </p:spPr>
-        <p:txBody>
-          <a:bodyPr wrap="square" lIns="0" rIns="0" tIns="0" bIns="0" anchor="t">
-            <a:spAutoFit/>
-          </a:bodyPr>
-          <a:lstStyle/>
-          <a:p>
-            <a:pPr algn="l"/>
-            <a:r>
-              <a:rPr sz="2600" b="1" i="0">
-                <a:solidFill>
-                  <a:srgbClr val="D64545"/>
-                </a:solidFill>
-                <a:latin typeface="Prompt"/>
-                <a:ea typeface="Prompt"/>
-                <a:cs typeface="Prompt"/>
-              </a:rPr>
-              <a:t>0.81</a:t>
-            </a:r>
-          </a:p>
-        </p:txBody>
-      </p:sp>
-      <p:sp>
-        <p:nvSpPr>
-          <p:cNvPr id="36" name="TextBox 35"/>
-          <p:cNvSpPr txBox="1"/>
-          <p:nvPr/>
-        </p:nvSpPr>
-        <p:spPr>
-          <a:xfrm>
-            <a:off x="4498848" y="5760720"/>
-            <a:ext cx="1783080" cy="365760"/>
-          </a:xfrm>
-          <a:prstGeom prst="rect">
-            <a:avLst/>
-          </a:prstGeom>
-          <a:noFill/>
-        </p:spPr>
-        <p:txBody>
-          <a:bodyPr wrap="square" lIns="0" rIns="0" tIns="0" bIns="0" anchor="t">
-            <a:spAutoFit/>
-          </a:bodyPr>
-          <a:lstStyle/>
-          <a:p>
-            <a:pPr algn="l"/>
-            <a:r>
-              <a:rPr sz="1100" b="0" i="0">
-                <a:solidFill>
-                  <a:srgbClr val="1E293B"/>
-                </a:solidFill>
-                <a:latin typeface="Prompt"/>
-                <a:ea typeface="Prompt"/>
-                <a:cs typeface="Prompt"/>
-              </a:rPr>
-              <a:t>E + น้ำล้นตลิ่ง</a:t>
-            </a:r>
-          </a:p>
-        </p:txBody>
-      </p:sp>
-      <p:sp>
-        <p:nvSpPr>
-          <p:cNvPr id="37" name="Rounded Rectangle 36"/>
-          <p:cNvSpPr/>
-          <p:nvPr/>
-        </p:nvSpPr>
-        <p:spPr>
-          <a:xfrm>
-            <a:off x="6757416" y="1426464"/>
-            <a:ext cx="4937760" cy="4334256"/>
-          </a:xfrm>
-          <a:prstGeom prst="roundRect">
-            <a:avLst>
-              <a:gd name="adj" fmla="val 1600"/>
-            </a:avLst>
-          </a:prstGeom>
-          <a:solidFill>
-            <a:srgbClr val="FFFFFF"/>
-          </a:solidFill>
-          <a:ln w="9525">
-            <a:solidFill>
-              <a:srgbClr val="D5DEE6"/>
-            </a:solidFill>
-          </a:ln>
-          <a:effectLst/>
-        </p:spPr>
-        <p:style>
-          <a:lnRef idx="1">
-            <a:schemeClr val="accent1"/>
-          </a:lnRef>
-          <a:fillRef idx="3">
-            <a:schemeClr val="accent1"/>
-          </a:fillRef>
-          <a:effectRef idx="2">
-            <a:schemeClr val="accent1"/>
-          </a:effectRef>
-          <a:fontRef idx="minor">
-            <a:schemeClr val="lt1"/>
-          </a:fontRef>
-        </p:style>
-        <p:txBody>
-          <a:bodyPr rtlCol="0" anchor="ctr"/>
-          <a:lstStyle/>
-          <a:p/>
-        </p:txBody>
-      </p:sp>
-      <p:pic>
-        <p:nvPicPr>
-          <p:cNvPr id="38" name="Picture 37" descr="map_scnE.png"/>
-          <p:cNvPicPr>
-            <a:picLocks noChangeAspect="1"/>
-          </p:cNvPicPr>
-          <p:nvPr/>
-        </p:nvPicPr>
-        <p:blipFill>
-          <a:blip r:embed="rId3"/>
-          <a:stretch>
-            <a:fillRect/>
-          </a:stretch>
-        </p:blipFill>
-        <p:spPr>
-          <a:xfrm>
-            <a:off x="6812280" y="1481328"/>
-            <a:ext cx="4828032" cy="4224528"/>
-          </a:xfrm>
-          <a:prstGeom prst="rect">
-            <a:avLst/>
-          </a:prstGeom>
-        </p:spPr>
-      </p:pic>
-      <p:sp>
-        <p:nvSpPr>
-          <p:cNvPr id="39" name="TextBox 38"/>
-          <p:cNvSpPr txBox="1"/>
-          <p:nvPr/>
-        </p:nvSpPr>
-        <p:spPr>
-          <a:xfrm>
-            <a:off x="6812280" y="5779008"/>
-            <a:ext cx="4828032" cy="502920"/>
-          </a:xfrm>
-          <a:prstGeom prst="rect">
-            <a:avLst/>
-          </a:prstGeom>
-          <a:noFill/>
-        </p:spPr>
-        <p:txBody>
-          <a:bodyPr wrap="square" lIns="0" rIns="0" tIns="0" bIns="0" anchor="t">
-            <a:spAutoFit/>
-          </a:bodyPr>
-          <a:lstStyle/>
-          <a:p>
-            <a:pPr algn="l"/>
-            <a:r>
-              <a:rPr sz="1050" b="0" i="0">
-                <a:solidFill>
-                  <a:srgbClr val="64748B"/>
-                </a:solidFill>
-                <a:latin typeface="Prompt"/>
-                <a:ea typeface="Prompt"/>
-                <a:cs typeface="Prompt"/>
-              </a:rPr>
-              <a:t>สถานการณ์ E: เวลาที่น้ำลดนับจากฝนเริ่มตก — น้ำขังเกิน 14 วันรวมที่ขอบบึงบอระเพ็ด (ทับกฤช พนมเศษ วังมหากร)</a:t>
-            </a:r>
-          </a:p>
-        </p:txBody>
-      </p:sp>
-      <p:sp>
-        <p:nvSpPr>
-          <p:cNvPr id="40" name="TextBox 39"/>
-          <p:cNvSpPr txBox="1"/>
-          <p:nvPr/>
-        </p:nvSpPr>
-        <p:spPr>
-          <a:xfrm>
-            <a:off x="548640" y="6400800"/>
-            <a:ext cx="10332720" cy="274320"/>
-          </a:xfrm>
-          <a:prstGeom prst="rect">
-            <a:avLst/>
-          </a:prstGeom>
-          <a:noFill/>
-        </p:spPr>
-        <p:txBody>
-          <a:bodyPr wrap="square" lIns="0" rIns="0" tIns="0" bIns="0" anchor="t">
-            <a:spAutoFit/>
-          </a:bodyPr>
-          <a:lstStyle/>
-          <a:p>
-            <a:pPr algn="l"/>
-            <a:r>
-              <a:rPr sz="900" b="0" i="0">
-                <a:solidFill>
-                  <a:srgbClr val="64748B"/>
-                </a:solidFill>
-                <a:latin typeface="Prompt"/>
-                <a:ea typeface="Prompt"/>
-                <a:cs typeface="Prompt"/>
-              </a:rPr>
-              <a:t>แบบจำลอง 2D 180 ม. แอ่งท่าตะโก (พื้นที่รับน้ำ 3,741 ตร.กม.) · เริ่มจากแห้ง คันนาเก็บน้ำ 100 มม. · เทียบกับพื้นที่ท่วมจริง 30 วันขึ้นไป อย่างน้อย 3 ปี (Sentinel-1)</a:t>
-            </a:r>
           </a:p>
         </p:txBody>
       </p:sp>
@@ -18949,6 +19619,10 @@
             <a:prstDash val="solid"/>
           </a:ln>
         </p:spPr>
+        <p:txBody>
+          <a:bodyPr/>
+          <a:p/>
+        </p:txBody>
       </p:sp>
       <p:sp>
         <p:nvSpPr>
@@ -18974,6 +19648,10 @@
             <a:prstDash val="solid"/>
           </a:ln>
         </p:spPr>
+        <p:txBody>
+          <a:bodyPr/>
+          <a:p/>
+        </p:txBody>
       </p:sp>
       <p:sp>
         <p:nvSpPr>
@@ -19124,6 +19802,10 @@
             <a:prstDash val="solid"/>
           </a:ln>
         </p:spPr>
+        <p:txBody>
+          <a:bodyPr/>
+          <a:p/>
+        </p:txBody>
       </p:sp>
       <p:sp>
         <p:nvSpPr>
@@ -19149,6 +19831,10 @@
             <a:prstDash val="solid"/>
           </a:ln>
         </p:spPr>
+        <p:txBody>
+          <a:bodyPr/>
+          <a:p/>
+        </p:txBody>
       </p:sp>
       <p:sp>
         <p:nvSpPr>
@@ -19299,6 +19985,10 @@
             <a:prstDash val="solid"/>
           </a:ln>
         </p:spPr>
+        <p:txBody>
+          <a:bodyPr/>
+          <a:p/>
+        </p:txBody>
       </p:sp>
       <p:sp>
         <p:nvSpPr>
@@ -19324,6 +20014,10 @@
             <a:prstDash val="solid"/>
           </a:ln>
         </p:spPr>
+        <p:txBody>
+          <a:bodyPr/>
+          <a:p/>
+        </p:txBody>
       </p:sp>
       <p:sp>
         <p:nvSpPr>
@@ -19474,6 +20168,10 @@
             <a:prstDash val="solid"/>
           </a:ln>
         </p:spPr>
+        <p:txBody>
+          <a:bodyPr/>
+          <a:p/>
+        </p:txBody>
       </p:sp>
       <p:sp>
         <p:nvSpPr>
@@ -19616,12 +20314,12 @@
 </file>
 
 <file path=ppt/slides/slide20.xml><?xml version="1.0" encoding="utf-8"?>
-<p:sld xmlns:a="http://schemas.openxmlformats.org/drawingml/2006/main" xmlns:p="http://schemas.openxmlformats.org/presentationml/2006/main" xmlns:r="http://schemas.openxmlformats.org/officeDocument/2006/relationships">
-  <p:cSld>
+<p:sld xmlns:a="http://schemas.openxmlformats.org/drawingml/2006/main" xmlns:r="http://schemas.openxmlformats.org/officeDocument/2006/relationships" xmlns:p="http://schemas.openxmlformats.org/presentationml/2006/main">
+  <p:cSld name="Slide 17">
     <p:bg>
       <p:bgPr>
         <a:solidFill>
-          <a:srgbClr val="FFFFFF"/>
+          <a:srgbClr val="082A42"/>
         </a:solidFill>
       </p:bgPr>
     </p:bg>
@@ -19631,6 +20329,690 @@
         <p:cNvGrpSpPr/>
         <p:nvPr/>
       </p:nvGrpSpPr>
+      <p:grpSpPr>
+        <a:xfrm>
+          <a:off x="0" y="0"/>
+          <a:ext cx="0" cy="0"/>
+          <a:chOff x="0" y="0"/>
+          <a:chExt cx="0" cy="0"/>
+        </a:xfrm>
+      </p:grpSpPr>
+      <p:sp>
+        <p:nvSpPr>
+          <p:cNvPr id="2" name="Text 0"/>
+          <p:cNvSpPr txBox="1"/>
+          <p:nvPr/>
+        </p:nvSpPr>
+        <p:spPr>
+          <a:xfrm>
+            <a:off x="548640" y="548640"/>
+            <a:ext cx="9144000" cy="731520"/>
+          </a:xfrm>
+          <a:prstGeom prst="rect">
+            <a:avLst/>
+          </a:prstGeom>
+          <a:noFill/>
+          <a:ln/>
+        </p:spPr>
+        <p:txBody>
+          <a:bodyPr wrap="square" lIns="0" tIns="0" rIns="0" bIns="0" rtlCol="0" anchor="t"/>
+          <a:lstStyle/>
+          <a:p>
+            <a:pPr indent="0" marL="0">
+              <a:buNone/>
+            </a:pPr>
+            <a:r>
+              <a:rPr lang="en-US" sz="3000" b="1" dirty="0">
+                <a:solidFill>
+                  <a:srgbClr val="FFFFFF"/>
+                </a:solidFill>
+                <a:latin typeface="Prompt" pitchFamily="34" charset="0"/>
+                <a:ea typeface="Prompt" pitchFamily="34" charset="-122"/>
+                <a:cs typeface="Prompt" pitchFamily="34" charset="-120"/>
+              </a:rPr>
+              <a:t>ข้อเสนอขั้นต่อไป</a:t>
+            </a:r>
+            <a:endParaRPr lang="en-US" sz="3000" dirty="0"/>
+          </a:p>
+        </p:txBody>
+      </p:sp>
+      <p:sp>
+        <p:nvSpPr>
+          <p:cNvPr id="3" name="Shape 1"/>
+          <p:cNvSpPr/>
+          <p:nvPr/>
+        </p:nvSpPr>
+        <p:spPr>
+          <a:xfrm>
+            <a:off x="548640" y="1554480"/>
+            <a:ext cx="457200" cy="457200"/>
+          </a:xfrm>
+          <a:prstGeom prst="ellipse">
+            <a:avLst/>
+          </a:prstGeom>
+          <a:solidFill>
+            <a:srgbClr val="1B998B"/>
+          </a:solidFill>
+          <a:ln w="12700">
+            <a:solidFill>
+              <a:srgbClr val="1B998B"/>
+            </a:solidFill>
+            <a:prstDash val="solid"/>
+          </a:ln>
+        </p:spPr>
+        <p:txBody>
+          <a:bodyPr/>
+          <a:p/>
+        </p:txBody>
+      </p:sp>
+      <p:sp>
+        <p:nvSpPr>
+          <p:cNvPr id="4" name="Text 2"/>
+          <p:cNvSpPr txBox="1"/>
+          <p:nvPr/>
+        </p:nvSpPr>
+        <p:spPr>
+          <a:xfrm>
+            <a:off x="548640" y="1554480"/>
+            <a:ext cx="457200" cy="457200"/>
+          </a:xfrm>
+          <a:prstGeom prst="rect">
+            <a:avLst/>
+          </a:prstGeom>
+          <a:noFill/>
+          <a:ln/>
+        </p:spPr>
+        <p:txBody>
+          <a:bodyPr wrap="square" lIns="0" tIns="0" rIns="0" bIns="0" rtlCol="0" anchor="ctr"/>
+          <a:lstStyle/>
+          <a:p>
+            <a:pPr algn="ctr" indent="0" marL="0">
+              <a:buNone/>
+            </a:pPr>
+            <a:r>
+              <a:rPr lang="en-US" sz="1600" b="1" dirty="0">
+                <a:solidFill>
+                  <a:srgbClr val="FFFFFF"/>
+                </a:solidFill>
+                <a:latin typeface="Prompt" pitchFamily="34" charset="0"/>
+                <a:ea typeface="Prompt" pitchFamily="34" charset="-122"/>
+                <a:cs typeface="Prompt" pitchFamily="34" charset="-120"/>
+              </a:rPr>
+              <a:t>1</a:t>
+            </a:r>
+            <a:endParaRPr lang="en-US" sz="1600" dirty="0"/>
+          </a:p>
+        </p:txBody>
+      </p:sp>
+      <p:sp>
+        <p:nvSpPr>
+          <p:cNvPr id="5" name="Text 3"/>
+          <p:cNvSpPr txBox="1"/>
+          <p:nvPr/>
+        </p:nvSpPr>
+        <p:spPr>
+          <a:xfrm>
+            <a:off x="1234440" y="1508760"/>
+            <a:ext cx="10332720" cy="868680"/>
+          </a:xfrm>
+          <a:prstGeom prst="rect">
+            <a:avLst/>
+          </a:prstGeom>
+          <a:noFill/>
+          <a:ln/>
+        </p:spPr>
+        <p:txBody>
+          <a:bodyPr wrap="square" lIns="0" tIns="0" rIns="0" bIns="0" rtlCol="0" anchor="t"/>
+          <a:lstStyle/>
+          <a:p>
+            <a:pPr indent="0" marL="0">
+              <a:buNone/>
+            </a:pPr>
+            <a:r>
+              <a:rPr lang="en-US" sz="1700" b="1" dirty="0">
+                <a:solidFill>
+                  <a:srgbClr val="FFFFFF"/>
+                </a:solidFill>
+                <a:latin typeface="Prompt" pitchFamily="34" charset="0"/>
+                <a:ea typeface="Prompt" pitchFamily="34" charset="-122"/>
+                <a:cs typeface="Prompt" pitchFamily="34" charset="-120"/>
+              </a:rPr>
+              <a:t>ขยายการเทียบน้ำท่วมจริง</a:t>
+            </a:r>
+            <a:endParaRPr lang="en-US" sz="1700" dirty="0"/>
+          </a:p>
+          <a:p>
+            <a:pPr indent="0" marL="0">
+              <a:buNone/>
+            </a:pPr>
+            <a:r>
+              <a:rPr lang="en-US" sz="1300" dirty="0">
+                <a:solidFill>
+                  <a:srgbClr val="CFE3EE"/>
+                </a:solidFill>
+                <a:latin typeface="Prompt" pitchFamily="34" charset="0"/>
+                <a:ea typeface="Prompt" pitchFamily="34" charset="-122"/>
+                <a:cs typeface="Prompt" pitchFamily="34" charset="-120"/>
+              </a:rPr>
+              <a:t>ใส่น้ำไหลเข้าจากเหนือ (Y.17/N.7A) + ระดับบึงบอระเพ็ด/ประตูน้ำ ชป. · สะสม Sentinel-1 ทั้งจังหวัด</a:t>
+            </a:r>
+            <a:endParaRPr lang="en-US" sz="1700" dirty="0"/>
+          </a:p>
+        </p:txBody>
+      </p:sp>
+      <p:sp>
+        <p:nvSpPr>
+          <p:cNvPr id="6" name="Shape 4"/>
+          <p:cNvSpPr/>
+          <p:nvPr/>
+        </p:nvSpPr>
+        <p:spPr>
+          <a:xfrm>
+            <a:off x="548640" y="2487168"/>
+            <a:ext cx="457200" cy="457200"/>
+          </a:xfrm>
+          <a:prstGeom prst="ellipse">
+            <a:avLst/>
+          </a:prstGeom>
+          <a:solidFill>
+            <a:srgbClr val="1B998B"/>
+          </a:solidFill>
+          <a:ln w="12700">
+            <a:solidFill>
+              <a:srgbClr val="1B998B"/>
+            </a:solidFill>
+            <a:prstDash val="solid"/>
+          </a:ln>
+        </p:spPr>
+        <p:txBody>
+          <a:bodyPr/>
+          <a:p/>
+        </p:txBody>
+      </p:sp>
+      <p:sp>
+        <p:nvSpPr>
+          <p:cNvPr id="7" name="Text 5"/>
+          <p:cNvSpPr txBox="1"/>
+          <p:nvPr/>
+        </p:nvSpPr>
+        <p:spPr>
+          <a:xfrm>
+            <a:off x="548640" y="2487168"/>
+            <a:ext cx="457200" cy="457200"/>
+          </a:xfrm>
+          <a:prstGeom prst="rect">
+            <a:avLst/>
+          </a:prstGeom>
+          <a:noFill/>
+          <a:ln/>
+        </p:spPr>
+        <p:txBody>
+          <a:bodyPr wrap="square" lIns="0" tIns="0" rIns="0" bIns="0" rtlCol="0" anchor="ctr"/>
+          <a:lstStyle/>
+          <a:p>
+            <a:pPr algn="ctr" indent="0" marL="0">
+              <a:buNone/>
+            </a:pPr>
+            <a:r>
+              <a:rPr lang="en-US" sz="1600" b="1" dirty="0">
+                <a:solidFill>
+                  <a:srgbClr val="FFFFFF"/>
+                </a:solidFill>
+                <a:latin typeface="Prompt" pitchFamily="34" charset="0"/>
+                <a:ea typeface="Prompt" pitchFamily="34" charset="-122"/>
+                <a:cs typeface="Prompt" pitchFamily="34" charset="-120"/>
+              </a:rPr>
+              <a:t>2</a:t>
+            </a:r>
+            <a:endParaRPr lang="en-US" sz="1600" dirty="0"/>
+          </a:p>
+        </p:txBody>
+      </p:sp>
+      <p:sp>
+        <p:nvSpPr>
+          <p:cNvPr id="8" name="Text 6"/>
+          <p:cNvSpPr txBox="1"/>
+          <p:nvPr/>
+        </p:nvSpPr>
+        <p:spPr>
+          <a:xfrm>
+            <a:off x="1234440" y="2441448"/>
+            <a:ext cx="10332720" cy="868680"/>
+          </a:xfrm>
+          <a:prstGeom prst="rect">
+            <a:avLst/>
+          </a:prstGeom>
+          <a:noFill/>
+          <a:ln/>
+        </p:spPr>
+        <p:txBody>
+          <a:bodyPr wrap="square" lIns="0" tIns="0" rIns="0" bIns="0" rtlCol="0" anchor="t"/>
+          <a:lstStyle/>
+          <a:p>
+            <a:pPr indent="0" marL="0">
+              <a:buNone/>
+            </a:pPr>
+            <a:r>
+              <a:rPr lang="en-US" sz="1700" b="1" dirty="0">
+                <a:solidFill>
+                  <a:srgbClr val="FFFFFF"/>
+                </a:solidFill>
+                <a:latin typeface="Prompt" pitchFamily="34" charset="0"/>
+                <a:ea typeface="Prompt" pitchFamily="34" charset="-122"/>
+                <a:cs typeface="Prompt" pitchFamily="34" charset="-120"/>
+              </a:rPr>
+              <a:t>ข้อมูลระบายน้ำจริง</a:t>
+            </a:r>
+            <a:endParaRPr lang="en-US" sz="1700" dirty="0"/>
+          </a:p>
+          <a:p>
+            <a:pPr indent="0" marL="0">
+              <a:buNone/>
+            </a:pPr>
+            <a:r>
+              <a:rPr lang="en-US" sz="1300" dirty="0">
+                <a:solidFill>
+                  <a:srgbClr val="CFE3EE"/>
+                </a:solidFill>
+                <a:latin typeface="Prompt" pitchFamily="34" charset="0"/>
+                <a:ea typeface="Prompt" pitchFamily="34" charset="-122"/>
+                <a:cs typeface="Prompt" pitchFamily="34" charset="-120"/>
+              </a:rPr>
+              <a:t>ความจุสถานีสูบ ประตูระบายน้ำ จาก ชป./อปท. ใส่ใน drainage_assets_user.csv</a:t>
+            </a:r>
+            <a:endParaRPr lang="en-US" sz="1700" dirty="0"/>
+          </a:p>
+        </p:txBody>
+      </p:sp>
+      <p:sp>
+        <p:nvSpPr>
+          <p:cNvPr id="9" name="Shape 7"/>
+          <p:cNvSpPr/>
+          <p:nvPr/>
+        </p:nvSpPr>
+        <p:spPr>
+          <a:xfrm>
+            <a:off x="548640" y="3419856"/>
+            <a:ext cx="457200" cy="457200"/>
+          </a:xfrm>
+          <a:prstGeom prst="ellipse">
+            <a:avLst/>
+          </a:prstGeom>
+          <a:solidFill>
+            <a:srgbClr val="1B998B"/>
+          </a:solidFill>
+          <a:ln w="12700">
+            <a:solidFill>
+              <a:srgbClr val="1B998B"/>
+            </a:solidFill>
+            <a:prstDash val="solid"/>
+          </a:ln>
+        </p:spPr>
+        <p:txBody>
+          <a:bodyPr/>
+          <a:p/>
+        </p:txBody>
+      </p:sp>
+      <p:sp>
+        <p:nvSpPr>
+          <p:cNvPr id="10" name="Text 8"/>
+          <p:cNvSpPr txBox="1"/>
+          <p:nvPr/>
+        </p:nvSpPr>
+        <p:spPr>
+          <a:xfrm>
+            <a:off x="548640" y="3419856"/>
+            <a:ext cx="457200" cy="457200"/>
+          </a:xfrm>
+          <a:prstGeom prst="rect">
+            <a:avLst/>
+          </a:prstGeom>
+          <a:noFill/>
+          <a:ln/>
+        </p:spPr>
+        <p:txBody>
+          <a:bodyPr wrap="square" lIns="0" tIns="0" rIns="0" bIns="0" rtlCol="0" anchor="ctr"/>
+          <a:lstStyle/>
+          <a:p>
+            <a:pPr algn="ctr" indent="0" marL="0">
+              <a:buNone/>
+            </a:pPr>
+            <a:r>
+              <a:rPr lang="en-US" sz="1600" b="1" dirty="0">
+                <a:solidFill>
+                  <a:srgbClr val="FFFFFF"/>
+                </a:solidFill>
+                <a:latin typeface="Prompt" pitchFamily="34" charset="0"/>
+                <a:ea typeface="Prompt" pitchFamily="34" charset="-122"/>
+                <a:cs typeface="Prompt" pitchFamily="34" charset="-120"/>
+              </a:rPr>
+              <a:t>3</a:t>
+            </a:r>
+            <a:endParaRPr lang="en-US" sz="1600" dirty="0"/>
+          </a:p>
+        </p:txBody>
+      </p:sp>
+      <p:sp>
+        <p:nvSpPr>
+          <p:cNvPr id="11" name="Text 9"/>
+          <p:cNvSpPr txBox="1"/>
+          <p:nvPr/>
+        </p:nvSpPr>
+        <p:spPr>
+          <a:xfrm>
+            <a:off x="1234440" y="3374136"/>
+            <a:ext cx="10332720" cy="868680"/>
+          </a:xfrm>
+          <a:prstGeom prst="rect">
+            <a:avLst/>
+          </a:prstGeom>
+          <a:noFill/>
+          <a:ln/>
+        </p:spPr>
+        <p:txBody>
+          <a:bodyPr wrap="square" lIns="0" tIns="0" rIns="0" bIns="0" rtlCol="0" anchor="t"/>
+          <a:lstStyle/>
+          <a:p>
+            <a:pPr indent="0" marL="0">
+              <a:buNone/>
+            </a:pPr>
+            <a:r>
+              <a:rPr lang="en-US" sz="1700" b="1" dirty="0">
+                <a:solidFill>
+                  <a:srgbClr val="FFFFFF"/>
+                </a:solidFill>
+                <a:latin typeface="Prompt" pitchFamily="34" charset="0"/>
+                <a:ea typeface="Prompt" pitchFamily="34" charset="-122"/>
+                <a:cs typeface="Prompt" pitchFamily="34" charset="-120"/>
+              </a:rPr>
+              <a:t>เปิดใช้งานสาธารณะ</a:t>
+            </a:r>
+            <a:endParaRPr lang="en-US" sz="1700" dirty="0"/>
+          </a:p>
+          <a:p>
+            <a:pPr indent="0" marL="0">
+              <a:buNone/>
+            </a:pPr>
+            <a:r>
+              <a:rPr lang="en-US" sz="1300" dirty="0">
+                <a:solidFill>
+                  <a:srgbClr val="CFE3EE"/>
+                </a:solidFill>
+                <a:latin typeface="Prompt" pitchFamily="34" charset="0"/>
+                <a:ea typeface="Prompt" pitchFamily="34" charset="-122"/>
+                <a:cs typeface="Prompt" pitchFamily="34" charset="-120"/>
+              </a:rPr>
+              <a:t>push ขึ้น GitHub · เปิด Pages · ตรวจว่า runner ต่างประเทศดึง ThaiWater ได้</a:t>
+            </a:r>
+            <a:endParaRPr lang="en-US" sz="1700" dirty="0"/>
+          </a:p>
+        </p:txBody>
+      </p:sp>
+      <p:sp>
+        <p:nvSpPr>
+          <p:cNvPr id="12" name="Shape 10"/>
+          <p:cNvSpPr/>
+          <p:nvPr/>
+        </p:nvSpPr>
+        <p:spPr>
+          <a:xfrm>
+            <a:off x="548640" y="4352544"/>
+            <a:ext cx="457200" cy="457200"/>
+          </a:xfrm>
+          <a:prstGeom prst="ellipse">
+            <a:avLst/>
+          </a:prstGeom>
+          <a:solidFill>
+            <a:srgbClr val="1B998B"/>
+          </a:solidFill>
+          <a:ln w="12700">
+            <a:solidFill>
+              <a:srgbClr val="1B998B"/>
+            </a:solidFill>
+            <a:prstDash val="solid"/>
+          </a:ln>
+        </p:spPr>
+        <p:txBody>
+          <a:bodyPr/>
+          <a:p/>
+        </p:txBody>
+      </p:sp>
+      <p:sp>
+        <p:nvSpPr>
+          <p:cNvPr id="13" name="Text 11"/>
+          <p:cNvSpPr txBox="1"/>
+          <p:nvPr/>
+        </p:nvSpPr>
+        <p:spPr>
+          <a:xfrm>
+            <a:off x="548640" y="4352544"/>
+            <a:ext cx="457200" cy="457200"/>
+          </a:xfrm>
+          <a:prstGeom prst="rect">
+            <a:avLst/>
+          </a:prstGeom>
+          <a:noFill/>
+          <a:ln/>
+        </p:spPr>
+        <p:txBody>
+          <a:bodyPr wrap="square" lIns="0" tIns="0" rIns="0" bIns="0" rtlCol="0" anchor="ctr"/>
+          <a:lstStyle/>
+          <a:p>
+            <a:pPr algn="ctr" indent="0" marL="0">
+              <a:buNone/>
+            </a:pPr>
+            <a:r>
+              <a:rPr lang="en-US" sz="1600" b="1" dirty="0">
+                <a:solidFill>
+                  <a:srgbClr val="FFFFFF"/>
+                </a:solidFill>
+                <a:latin typeface="Prompt" pitchFamily="34" charset="0"/>
+                <a:ea typeface="Prompt" pitchFamily="34" charset="-122"/>
+                <a:cs typeface="Prompt" pitchFamily="34" charset="-120"/>
+              </a:rPr>
+              <a:t>4</a:t>
+            </a:r>
+            <a:endParaRPr lang="en-US" sz="1600" dirty="0"/>
+          </a:p>
+        </p:txBody>
+      </p:sp>
+      <p:sp>
+        <p:nvSpPr>
+          <p:cNvPr id="14" name="Text 12"/>
+          <p:cNvSpPr txBox="1"/>
+          <p:nvPr/>
+        </p:nvSpPr>
+        <p:spPr>
+          <a:xfrm>
+            <a:off x="1234440" y="4306824"/>
+            <a:ext cx="10332720" cy="868680"/>
+          </a:xfrm>
+          <a:prstGeom prst="rect">
+            <a:avLst/>
+          </a:prstGeom>
+          <a:noFill/>
+          <a:ln/>
+        </p:spPr>
+        <p:txBody>
+          <a:bodyPr wrap="square" lIns="0" tIns="0" rIns="0" bIns="0" rtlCol="0" anchor="t"/>
+          <a:lstStyle/>
+          <a:p>
+            <a:pPr indent="0" marL="0">
+              <a:buNone/>
+            </a:pPr>
+            <a:r>
+              <a:rPr lang="en-US" sz="1700" b="1" dirty="0">
+                <a:solidFill>
+                  <a:srgbClr val="FFFFFF"/>
+                </a:solidFill>
+                <a:latin typeface="Prompt" pitchFamily="34" charset="0"/>
+                <a:ea typeface="Prompt" pitchFamily="34" charset="-122"/>
+                <a:cs typeface="Prompt" pitchFamily="34" charset="-120"/>
+              </a:rPr>
+              <a:t>ผลกระทบ</a:t>
+            </a:r>
+            <a:endParaRPr lang="en-US" sz="1700" dirty="0"/>
+          </a:p>
+          <a:p>
+            <a:pPr indent="0" marL="0">
+              <a:buNone/>
+            </a:pPr>
+            <a:r>
+              <a:rPr lang="en-US" sz="1300" dirty="0">
+                <a:solidFill>
+                  <a:srgbClr val="CFE3EE"/>
+                </a:solidFill>
+                <a:latin typeface="Prompt" pitchFamily="34" charset="0"/>
+                <a:ea typeface="Prompt" pitchFamily="34" charset="-122"/>
+                <a:cs typeface="Prompt" pitchFamily="34" charset="-120"/>
+              </a:rPr>
+              <a:t>ซ้อนประชากร ถนน โรงเรียน โรงพยาบาล → รายงานรายตำบล</a:t>
+            </a:r>
+            <a:endParaRPr lang="en-US" sz="1700" dirty="0"/>
+          </a:p>
+        </p:txBody>
+      </p:sp>
+      <p:sp>
+        <p:nvSpPr>
+          <p:cNvPr id="15" name="Shape 13"/>
+          <p:cNvSpPr/>
+          <p:nvPr/>
+        </p:nvSpPr>
+        <p:spPr>
+          <a:xfrm>
+            <a:off x="548640" y="5285232"/>
+            <a:ext cx="457200" cy="457200"/>
+          </a:xfrm>
+          <a:prstGeom prst="ellipse">
+            <a:avLst/>
+          </a:prstGeom>
+          <a:solidFill>
+            <a:srgbClr val="1B998B"/>
+          </a:solidFill>
+          <a:ln w="12700">
+            <a:solidFill>
+              <a:srgbClr val="1B998B"/>
+            </a:solidFill>
+            <a:prstDash val="solid"/>
+          </a:ln>
+        </p:spPr>
+        <p:txBody>
+          <a:bodyPr/>
+          <a:p/>
+        </p:txBody>
+      </p:sp>
+      <p:sp>
+        <p:nvSpPr>
+          <p:cNvPr id="16" name="Text 14"/>
+          <p:cNvSpPr txBox="1"/>
+          <p:nvPr/>
+        </p:nvSpPr>
+        <p:spPr>
+          <a:xfrm>
+            <a:off x="548640" y="5285232"/>
+            <a:ext cx="457200" cy="457200"/>
+          </a:xfrm>
+          <a:prstGeom prst="rect">
+            <a:avLst/>
+          </a:prstGeom>
+          <a:noFill/>
+          <a:ln/>
+        </p:spPr>
+        <p:txBody>
+          <a:bodyPr wrap="square" lIns="0" tIns="0" rIns="0" bIns="0" rtlCol="0" anchor="ctr"/>
+          <a:lstStyle/>
+          <a:p>
+            <a:pPr algn="ctr" indent="0" marL="0">
+              <a:buNone/>
+            </a:pPr>
+            <a:r>
+              <a:rPr lang="en-US" sz="1600" b="1" dirty="0">
+                <a:solidFill>
+                  <a:srgbClr val="FFFFFF"/>
+                </a:solidFill>
+                <a:latin typeface="Prompt" pitchFamily="34" charset="0"/>
+                <a:ea typeface="Prompt" pitchFamily="34" charset="-122"/>
+                <a:cs typeface="Prompt" pitchFamily="34" charset="-120"/>
+              </a:rPr>
+              <a:t>5</a:t>
+            </a:r>
+            <a:endParaRPr lang="en-US" sz="1600" dirty="0"/>
+          </a:p>
+        </p:txBody>
+      </p:sp>
+      <p:sp>
+        <p:nvSpPr>
+          <p:cNvPr id="17" name="Text 15"/>
+          <p:cNvSpPr txBox="1"/>
+          <p:nvPr/>
+        </p:nvSpPr>
+        <p:spPr>
+          <a:xfrm>
+            <a:off x="1234440" y="5239512"/>
+            <a:ext cx="10332720" cy="868680"/>
+          </a:xfrm>
+          <a:prstGeom prst="rect">
+            <a:avLst/>
+          </a:prstGeom>
+          <a:noFill/>
+          <a:ln/>
+        </p:spPr>
+        <p:txBody>
+          <a:bodyPr wrap="square" lIns="0" tIns="0" rIns="0" bIns="0" rtlCol="0" anchor="t"/>
+          <a:lstStyle/>
+          <a:p>
+            <a:pPr indent="0" marL="0">
+              <a:buNone/>
+            </a:pPr>
+            <a:r>
+              <a:rPr lang="en-US" sz="1700" b="1" dirty="0">
+                <a:solidFill>
+                  <a:srgbClr val="FFFFFF"/>
+                </a:solidFill>
+                <a:latin typeface="Prompt" pitchFamily="34" charset="0"/>
+                <a:ea typeface="Prompt" pitchFamily="34" charset="-122"/>
+                <a:cs typeface="Prompt" pitchFamily="34" charset="-120"/>
+              </a:rPr>
+              <a:t>ฝนเรดาร์/ดาวเทียม</a:t>
+            </a:r>
+            <a:endParaRPr lang="en-US" sz="1700" dirty="0"/>
+          </a:p>
+          <a:p>
+            <a:pPr indent="0" marL="0">
+              <a:buNone/>
+            </a:pPr>
+            <a:r>
+              <a:rPr lang="en-US" sz="1300" dirty="0">
+                <a:solidFill>
+                  <a:srgbClr val="CFE3EE"/>
+                </a:solidFill>
+                <a:latin typeface="Prompt" pitchFamily="34" charset="0"/>
+                <a:ea typeface="Prompt" pitchFamily="34" charset="-122"/>
+                <a:cs typeface="Prompt" pitchFamily="34" charset="-120"/>
+              </a:rPr>
+              <a:t>GSMaP/IMERG หรือเรดาร์กรมอุตุฯ แทนฝนแบบจำลองช่วงย้อนหลัง</a:t>
+            </a:r>
+            <a:endParaRPr lang="en-US" sz="1700" dirty="0"/>
+          </a:p>
+        </p:txBody>
+      </p:sp>
+    </p:spTree>
+  </p:cSld>
+  <p:clrMapOvr>
+    <a:masterClrMapping/>
+  </p:clrMapOvr>
+</p:sld>
+</file>
+
+<file path=ppt/slides/slide21.xml><?xml version="1.0" encoding="utf-8"?>
+<p:sld xmlns:a="http://schemas.openxmlformats.org/drawingml/2006/main" xmlns:p="http://schemas.openxmlformats.org/presentationml/2006/main" xmlns:r="http://schemas.openxmlformats.org/officeDocument/2006/relationships">
+  <p:cSld>
+    <p:spTree>
+      <p:nvGrpSpPr>
+        <p:cNvPr id="1" name=""/>
+        <p:cNvGrpSpPr/>
+        <p:nvPr/>
+      </p:nvGrpSpPr>
       <p:grpSpPr/>
       <p:sp>
         <p:nvSpPr>
@@ -19697,22 +21079,20 @@
           <a:noFill/>
         </p:spPr>
         <p:txBody>
-          <a:bodyPr wrap="square" lIns="0" rIns="0" tIns="0" bIns="0" anchor="t">
+          <a:bodyPr wrap="square" anchor="t">
             <a:spAutoFit/>
           </a:bodyPr>
           <a:lstStyle/>
           <a:p>
             <a:pPr algn="l"/>
             <a:r>
-              <a:rPr sz="1200" b="1" i="0">
+              <a:rPr sz="1200" b="1">
                 <a:solidFill>
                   <a:srgbClr val="1B998B"/>
                 </a:solidFill>
                 <a:latin typeface="Prompt"/>
-                <a:ea typeface="Prompt"/>
-                <a:cs typeface="Prompt"/>
-              </a:rPr>
-              <a:t>แอ่งท่าตะโก · ทดสอบกับเหตุการณ์จริง</a:t>
+              </a:rPr>
+              <a:t>ทั้งจังหวัด · น้ำท่วมจริงและแบบจำลอง</a:t>
             </a:r>
           </a:p>
         </p:txBody>
@@ -19734,48 +21114,44 @@
           <a:noFill/>
         </p:spPr>
         <p:txBody>
-          <a:bodyPr wrap="square" lIns="0" rIns="0" tIns="0" bIns="0" anchor="ctr">
+          <a:bodyPr wrap="square" anchor="t">
             <a:spAutoFit/>
           </a:bodyPr>
           <a:lstStyle/>
           <a:p>
             <a:pPr algn="l"/>
             <a:r>
-              <a:rPr sz="2600" b="1" i="0">
+              <a:rPr sz="2400" b="1">
                 <a:solidFill>
                   <a:srgbClr val="0B3C5D"/>
                 </a:solidFill>
                 <a:latin typeface="Prompt"/>
-                <a:ea typeface="Prompt"/>
-                <a:cs typeface="Prompt"/>
-              </a:rPr>
-              <a:t>จำลองน้ำท่วมจริง 3 ปีได้ใกล้เคียงดาวเทียม (CSI 0.49–0.54)</a:t>
-            </a:r>
-          </a:p>
-        </p:txBody>
-      </p:sp>
-      <p:sp>
-        <p:nvSpPr>
-          <p:cNvPr id="28" name="Rounded Rectangle 27"/>
+              </a:rPr>
+              <a:t>ทั้งจังหวัด: ท่วมนานซ้ำซาก 502 ตร.กม. — แบบจำลอง 2D จับได้ CSI 0.38–0.41</a:t>
+            </a:r>
+          </a:p>
+        </p:txBody>
+      </p:sp>
+      <p:sp>
+        <p:nvSpPr>
+          <p:cNvPr id="28" name="Rectangle 27"/>
           <p:cNvSpPr/>
           <p:nvPr/>
         </p:nvSpPr>
         <p:spPr>
           <a:xfrm>
-            <a:off x="493776" y="1426464"/>
-            <a:ext cx="4956048" cy="4352544"/>
-          </a:xfrm>
-          <a:prstGeom prst="roundRect">
-            <a:avLst>
-              <a:gd name="adj" fmla="val 1600"/>
-            </a:avLst>
+            <a:off x="493776" y="1512189"/>
+            <a:ext cx="6784848" cy="4281678"/>
+          </a:xfrm>
+          <a:prstGeom prst="rect">
+            <a:avLst/>
           </a:prstGeom>
           <a:solidFill>
             <a:srgbClr val="FFFFFF"/>
           </a:solidFill>
           <a:ln w="9525">
             <a:solidFill>
-              <a:srgbClr val="D5DEE6"/>
+              <a:srgbClr val="D7E0E8"/>
             </a:solidFill>
           </a:ln>
           <a:effectLst/>
@@ -19797,12 +21173,14 @@
         <p:txBody>
           <a:bodyPr rtlCol="0" anchor="ctr"/>
           <a:lstStyle/>
-          <a:p/>
+          <a:p>
+            <a:pPr algn="ctr"/>
+          </a:p>
         </p:txBody>
       </p:sp>
       <p:pic>
         <p:nvPicPr>
-          <p:cNvPr id="29" name="Picture 28" descr="map_ev2025.png"/>
+          <p:cNvPr id="29" name="Picture 28" descr="s1_province_map.png"/>
           <p:cNvPicPr>
             <a:picLocks noChangeAspect="1"/>
           </p:cNvPicPr>
@@ -19816,8 +21194,8 @@
         </p:blipFill>
         <p:spPr>
           <a:xfrm>
-            <a:off x="548640" y="1481328"/>
-            <a:ext cx="4846320" cy="4242816"/>
+            <a:off x="548640" y="1567053"/>
+            <a:ext cx="6675120" cy="4171950"/>
           </a:xfrm>
           <a:prstGeom prst="rect">
             <a:avLst/>
@@ -19832,8 +21210,8 @@
         </p:nvSpPr>
         <p:spPr>
           <a:xfrm>
-            <a:off x="548640" y="5797296"/>
-            <a:ext cx="4846320" cy="457200"/>
+            <a:off x="548640" y="5897880"/>
+            <a:ext cx="6675120" cy="274320"/>
           </a:xfrm>
           <a:prstGeom prst="rect">
             <a:avLst/>
@@ -19841,818 +21219,40 @@
           <a:noFill/>
         </p:spPr>
         <p:txBody>
-          <a:bodyPr wrap="square" lIns="0" rIns="0" tIns="0" bIns="0" anchor="t">
+          <a:bodyPr wrap="square" anchor="t">
             <a:spAutoFit/>
           </a:bodyPr>
           <a:lstStyle/>
           <a:p>
             <a:pPr algn="l"/>
             <a:r>
-              <a:rPr sz="1050" b="0" i="0">
+              <a:rPr sz="1000" b="0">
                 <a:solidFill>
                   <a:srgbClr val="64748B"/>
                 </a:solidFill>
                 <a:latin typeface="Prompt"/>
-                <a:ea typeface="Prompt"/>
-                <a:cs typeface="Prompt"/>
-              </a:rPr>
-              <a:t>ปี 2568: พื้นที่ท่วม 30 วันขึ้นไป — แบบจำลองเทียบภาพเรดาร์วันเดียวกัน</a:t>
-            </a:r>
-          </a:p>
-        </p:txBody>
-      </p:sp>
-      <p:graphicFrame>
-        <p:nvGraphicFramePr>
-          <p:cNvPr id="31" name="Table 30"/>
-          <p:cNvGraphicFramePr>
-            <a:graphicFrameLocks noGrp="1"/>
-          </p:cNvGraphicFramePr>
-          <p:nvPr/>
-        </p:nvGraphicFramePr>
-        <p:xfrm>
-          <a:off x="5760720" y="1481328"/>
-          <a:ext cx="5879592" cy="1389888"/>
-        </p:xfrm>
-        <a:graphic>
-          <a:graphicData uri="http://schemas.openxmlformats.org/drawingml/2006/table">
-            <a:tbl>
-              <a:tblPr firstRow="1" bandRow="0">
-                <a:tableStyleId>{5940675A-B579-460E-94D1-54222C63F5DA}</a:tableStyleId>
-              </a:tblPr>
-              <a:tblGrid>
-                <a:gridCol w="731520"/>
-                <a:gridCol w="2587752"/>
-                <a:gridCol w="1371600"/>
-                <a:gridCol w="1188720"/>
-              </a:tblGrid>
-              <a:tr h="347472">
-                <a:tc>
-                  <a:txBody>
-                    <a:bodyPr/>
-                    <a:lstStyle/>
-                    <a:p>
-                      <a:pPr algn="l"/>
-                      <a:r>
-                        <a:rPr sz="1200" b="1" i="0">
-                          <a:solidFill>
-                            <a:srgbClr val="FFFFFF"/>
-                          </a:solidFill>
-                          <a:latin typeface="Prompt"/>
-                          <a:ea typeface="Prompt"/>
-                          <a:cs typeface="Prompt"/>
-                        </a:rPr>
-                        <a:t>ปี</a:t>
-                      </a:r>
-                    </a:p>
-                  </a:txBody>
-                  <a:tcPr marL="73152" marR="73152" marT="27432" marB="27432" anchor="ctr">
-                    <a:lnL w="6350">
-                      <a:solidFill>
-                        <a:srgbClr val="D5DEE6"/>
-                      </a:solidFill>
-                    </a:lnL>
-                    <a:lnR w="6350">
-                      <a:solidFill>
-                        <a:srgbClr val="D5DEE6"/>
-                      </a:solidFill>
-                    </a:lnR>
-                    <a:lnT w="6350">
-                      <a:solidFill>
-                        <a:srgbClr val="D5DEE6"/>
-                      </a:solidFill>
-                    </a:lnT>
-                    <a:lnB w="6350">
-                      <a:solidFill>
-                        <a:srgbClr val="D5DEE6"/>
-                      </a:solidFill>
-                    </a:lnB>
-                    <a:solidFill>
-                      <a:srgbClr val="0B3C5D"/>
-                    </a:solidFill>
-                  </a:tcPr>
-                </a:tc>
-                <a:tc>
-                  <a:txBody>
-                    <a:bodyPr/>
-                    <a:lstStyle/>
-                    <a:p>
-                      <a:pPr algn="ctr"/>
-                      <a:r>
-                        <a:rPr sz="1200" b="1" i="0">
-                          <a:solidFill>
-                            <a:srgbClr val="FFFFFF"/>
-                          </a:solidFill>
-                          <a:latin typeface="Prompt"/>
-                          <a:ea typeface="Prompt"/>
-                          <a:cs typeface="Prompt"/>
-                        </a:rPr>
-                        <a:t>ท่วม 30 วันขึ้นไป จำลอง / จริง</a:t>
-                      </a:r>
-                    </a:p>
-                  </a:txBody>
-                  <a:tcPr marL="73152" marR="73152" marT="27432" marB="27432" anchor="ctr">
-                    <a:lnL w="6350">
-                      <a:solidFill>
-                        <a:srgbClr val="D5DEE6"/>
-                      </a:solidFill>
-                    </a:lnL>
-                    <a:lnR w="6350">
-                      <a:solidFill>
-                        <a:srgbClr val="D5DEE6"/>
-                      </a:solidFill>
-                    </a:lnR>
-                    <a:lnT w="6350">
-                      <a:solidFill>
-                        <a:srgbClr val="D5DEE6"/>
-                      </a:solidFill>
-                    </a:lnT>
-                    <a:lnB w="6350">
-                      <a:solidFill>
-                        <a:srgbClr val="D5DEE6"/>
-                      </a:solidFill>
-                    </a:lnB>
-                    <a:solidFill>
-                      <a:srgbClr val="0B3C5D"/>
-                    </a:solidFill>
-                  </a:tcPr>
-                </a:tc>
-                <a:tc>
-                  <a:txBody>
-                    <a:bodyPr/>
-                    <a:lstStyle/>
-                    <a:p>
-                      <a:pPr algn="ctr"/>
-                      <a:r>
-                        <a:rPr sz="1200" b="1" i="0">
-                          <a:solidFill>
-                            <a:srgbClr val="FFFFFF"/>
-                          </a:solidFill>
-                          <a:latin typeface="Prompt"/>
-                          <a:ea typeface="Prompt"/>
-                          <a:cs typeface="Prompt"/>
-                        </a:rPr>
-                        <a:t>จับได้ (POD)</a:t>
-                      </a:r>
-                    </a:p>
-                  </a:txBody>
-                  <a:tcPr marL="73152" marR="73152" marT="27432" marB="27432" anchor="ctr">
-                    <a:lnL w="6350">
-                      <a:solidFill>
-                        <a:srgbClr val="D5DEE6"/>
-                      </a:solidFill>
-                    </a:lnL>
-                    <a:lnR w="6350">
-                      <a:solidFill>
-                        <a:srgbClr val="D5DEE6"/>
-                      </a:solidFill>
-                    </a:lnR>
-                    <a:lnT w="6350">
-                      <a:solidFill>
-                        <a:srgbClr val="D5DEE6"/>
-                      </a:solidFill>
-                    </a:lnT>
-                    <a:lnB w="6350">
-                      <a:solidFill>
-                        <a:srgbClr val="D5DEE6"/>
-                      </a:solidFill>
-                    </a:lnB>
-                    <a:solidFill>
-                      <a:srgbClr val="0B3C5D"/>
-                    </a:solidFill>
-                  </a:tcPr>
-                </a:tc>
-                <a:tc>
-                  <a:txBody>
-                    <a:bodyPr/>
-                    <a:lstStyle/>
-                    <a:p>
-                      <a:pPr algn="ctr"/>
-                      <a:r>
-                        <a:rPr sz="1200" b="1" i="0">
-                          <a:solidFill>
-                            <a:srgbClr val="FFFFFF"/>
-                          </a:solidFill>
-                          <a:latin typeface="Prompt"/>
-                          <a:ea typeface="Prompt"/>
-                          <a:cs typeface="Prompt"/>
-                        </a:rPr>
-                        <a:t>CSI</a:t>
-                      </a:r>
-                    </a:p>
-                  </a:txBody>
-                  <a:tcPr marL="73152" marR="73152" marT="27432" marB="27432" anchor="ctr">
-                    <a:lnL w="6350">
-                      <a:solidFill>
-                        <a:srgbClr val="D5DEE6"/>
-                      </a:solidFill>
-                    </a:lnL>
-                    <a:lnR w="6350">
-                      <a:solidFill>
-                        <a:srgbClr val="D5DEE6"/>
-                      </a:solidFill>
-                    </a:lnR>
-                    <a:lnT w="6350">
-                      <a:solidFill>
-                        <a:srgbClr val="D5DEE6"/>
-                      </a:solidFill>
-                    </a:lnT>
-                    <a:lnB w="6350">
-                      <a:solidFill>
-                        <a:srgbClr val="D5DEE6"/>
-                      </a:solidFill>
-                    </a:lnB>
-                    <a:solidFill>
-                      <a:srgbClr val="0B3C5D"/>
-                    </a:solidFill>
-                  </a:tcPr>
-                </a:tc>
-              </a:tr>
-              <a:tr h="347472">
-                <a:tc>
-                  <a:txBody>
-                    <a:bodyPr/>
-                    <a:lstStyle/>
-                    <a:p>
-                      <a:pPr algn="l"/>
-                      <a:r>
-                        <a:rPr sz="1200" i="0">
-                          <a:solidFill>
-                            <a:srgbClr val="1E293B"/>
-                          </a:solidFill>
-                          <a:latin typeface="Prompt"/>
-                          <a:ea typeface="Prompt"/>
-                          <a:cs typeface="Prompt"/>
-                        </a:rPr>
-                        <a:t>2564</a:t>
-                      </a:r>
-                    </a:p>
-                  </a:txBody>
-                  <a:tcPr marL="73152" marR="73152" marT="27432" marB="27432" anchor="ctr">
-                    <a:lnL w="6350">
-                      <a:solidFill>
-                        <a:srgbClr val="D5DEE6"/>
-                      </a:solidFill>
-                    </a:lnL>
-                    <a:lnR w="6350">
-                      <a:solidFill>
-                        <a:srgbClr val="D5DEE6"/>
-                      </a:solidFill>
-                    </a:lnR>
-                    <a:lnT w="6350">
-                      <a:solidFill>
-                        <a:srgbClr val="D5DEE6"/>
-                      </a:solidFill>
-                    </a:lnT>
-                    <a:lnB w="6350">
-                      <a:solidFill>
-                        <a:srgbClr val="D5DEE6"/>
-                      </a:solidFill>
-                    </a:lnB>
-                    <a:solidFill>
-                      <a:srgbClr val="FFFFFF"/>
-                    </a:solidFill>
-                  </a:tcPr>
-                </a:tc>
-                <a:tc>
-                  <a:txBody>
-                    <a:bodyPr/>
-                    <a:lstStyle/>
-                    <a:p>
-                      <a:pPr algn="ctr"/>
-                      <a:r>
-                        <a:rPr sz="1200" i="0">
-                          <a:solidFill>
-                            <a:srgbClr val="1E293B"/>
-                          </a:solidFill>
-                          <a:latin typeface="Prompt"/>
-                          <a:ea typeface="Prompt"/>
-                          <a:cs typeface="Prompt"/>
-                        </a:rPr>
-                        <a:t>250 / 211 ตร.กม.</a:t>
-                      </a:r>
-                    </a:p>
-                  </a:txBody>
-                  <a:tcPr marL="73152" marR="73152" marT="27432" marB="27432" anchor="ctr">
-                    <a:lnL w="6350">
-                      <a:solidFill>
-                        <a:srgbClr val="D5DEE6"/>
-                      </a:solidFill>
-                    </a:lnL>
-                    <a:lnR w="6350">
-                      <a:solidFill>
-                        <a:srgbClr val="D5DEE6"/>
-                      </a:solidFill>
-                    </a:lnR>
-                    <a:lnT w="6350">
-                      <a:solidFill>
-                        <a:srgbClr val="D5DEE6"/>
-                      </a:solidFill>
-                    </a:lnT>
-                    <a:lnB w="6350">
-                      <a:solidFill>
-                        <a:srgbClr val="D5DEE6"/>
-                      </a:solidFill>
-                    </a:lnB>
-                    <a:solidFill>
-                      <a:srgbClr val="FFFFFF"/>
-                    </a:solidFill>
-                  </a:tcPr>
-                </a:tc>
-                <a:tc>
-                  <a:txBody>
-                    <a:bodyPr/>
-                    <a:lstStyle/>
-                    <a:p>
-                      <a:pPr algn="ctr"/>
-                      <a:r>
-                        <a:rPr sz="1200" i="0">
-                          <a:solidFill>
-                            <a:srgbClr val="1E293B"/>
-                          </a:solidFill>
-                          <a:latin typeface="Prompt"/>
-                          <a:ea typeface="Prompt"/>
-                          <a:cs typeface="Prompt"/>
-                        </a:rPr>
-                        <a:t>0.77</a:t>
-                      </a:r>
-                    </a:p>
-                  </a:txBody>
-                  <a:tcPr marL="73152" marR="73152" marT="27432" marB="27432" anchor="ctr">
-                    <a:lnL w="6350">
-                      <a:solidFill>
-                        <a:srgbClr val="D5DEE6"/>
-                      </a:solidFill>
-                    </a:lnL>
-                    <a:lnR w="6350">
-                      <a:solidFill>
-                        <a:srgbClr val="D5DEE6"/>
-                      </a:solidFill>
-                    </a:lnR>
-                    <a:lnT w="6350">
-                      <a:solidFill>
-                        <a:srgbClr val="D5DEE6"/>
-                      </a:solidFill>
-                    </a:lnT>
-                    <a:lnB w="6350">
-                      <a:solidFill>
-                        <a:srgbClr val="D5DEE6"/>
-                      </a:solidFill>
-                    </a:lnB>
-                    <a:solidFill>
-                      <a:srgbClr val="FFFFFF"/>
-                    </a:solidFill>
-                  </a:tcPr>
-                </a:tc>
-                <a:tc>
-                  <a:txBody>
-                    <a:bodyPr/>
-                    <a:lstStyle/>
-                    <a:p>
-                      <a:pPr algn="ctr"/>
-                      <a:r>
-                        <a:rPr sz="1200" i="0">
-                          <a:solidFill>
-                            <a:srgbClr val="1E293B"/>
-                          </a:solidFill>
-                          <a:latin typeface="Prompt"/>
-                          <a:ea typeface="Prompt"/>
-                          <a:cs typeface="Prompt"/>
-                        </a:rPr>
-                        <a:t>0.54</a:t>
-                      </a:r>
-                    </a:p>
-                  </a:txBody>
-                  <a:tcPr marL="73152" marR="73152" marT="27432" marB="27432" anchor="ctr">
-                    <a:lnL w="6350">
-                      <a:solidFill>
-                        <a:srgbClr val="D5DEE6"/>
-                      </a:solidFill>
-                    </a:lnL>
-                    <a:lnR w="6350">
-                      <a:solidFill>
-                        <a:srgbClr val="D5DEE6"/>
-                      </a:solidFill>
-                    </a:lnR>
-                    <a:lnT w="6350">
-                      <a:solidFill>
-                        <a:srgbClr val="D5DEE6"/>
-                      </a:solidFill>
-                    </a:lnT>
-                    <a:lnB w="6350">
-                      <a:solidFill>
-                        <a:srgbClr val="D5DEE6"/>
-                      </a:solidFill>
-                    </a:lnB>
-                    <a:solidFill>
-                      <a:srgbClr val="FFFFFF"/>
-                    </a:solidFill>
-                  </a:tcPr>
-                </a:tc>
-              </a:tr>
-              <a:tr h="347472">
-                <a:tc>
-                  <a:txBody>
-                    <a:bodyPr/>
-                    <a:lstStyle/>
-                    <a:p>
-                      <a:pPr algn="l"/>
-                      <a:r>
-                        <a:rPr sz="1200" i="0">
-                          <a:solidFill>
-                            <a:srgbClr val="1E293B"/>
-                          </a:solidFill>
-                          <a:latin typeface="Prompt"/>
-                          <a:ea typeface="Prompt"/>
-                          <a:cs typeface="Prompt"/>
-                        </a:rPr>
-                        <a:t>2565</a:t>
-                      </a:r>
-                    </a:p>
-                  </a:txBody>
-                  <a:tcPr marL="73152" marR="73152" marT="27432" marB="27432" anchor="ctr">
-                    <a:lnL w="6350">
-                      <a:solidFill>
-                        <a:srgbClr val="D5DEE6"/>
-                      </a:solidFill>
-                    </a:lnL>
-                    <a:lnR w="6350">
-                      <a:solidFill>
-                        <a:srgbClr val="D5DEE6"/>
-                      </a:solidFill>
-                    </a:lnR>
-                    <a:lnT w="6350">
-                      <a:solidFill>
-                        <a:srgbClr val="D5DEE6"/>
-                      </a:solidFill>
-                    </a:lnT>
-                    <a:lnB w="6350">
-                      <a:solidFill>
-                        <a:srgbClr val="D5DEE6"/>
-                      </a:solidFill>
-                    </a:lnB>
-                    <a:solidFill>
-                      <a:srgbClr val="F4F8FB"/>
-                    </a:solidFill>
-                  </a:tcPr>
-                </a:tc>
-                <a:tc>
-                  <a:txBody>
-                    <a:bodyPr/>
-                    <a:lstStyle/>
-                    <a:p>
-                      <a:pPr algn="ctr"/>
-                      <a:r>
-                        <a:rPr sz="1200" i="0">
-                          <a:solidFill>
-                            <a:srgbClr val="1E293B"/>
-                          </a:solidFill>
-                          <a:latin typeface="Prompt"/>
-                          <a:ea typeface="Prompt"/>
-                          <a:cs typeface="Prompt"/>
-                        </a:rPr>
-                        <a:t>202 / 210 ตร.กม.</a:t>
-                      </a:r>
-                    </a:p>
-                  </a:txBody>
-                  <a:tcPr marL="73152" marR="73152" marT="27432" marB="27432" anchor="ctr">
-                    <a:lnL w="6350">
-                      <a:solidFill>
-                        <a:srgbClr val="D5DEE6"/>
-                      </a:solidFill>
-                    </a:lnL>
-                    <a:lnR w="6350">
-                      <a:solidFill>
-                        <a:srgbClr val="D5DEE6"/>
-                      </a:solidFill>
-                    </a:lnR>
-                    <a:lnT w="6350">
-                      <a:solidFill>
-                        <a:srgbClr val="D5DEE6"/>
-                      </a:solidFill>
-                    </a:lnT>
-                    <a:lnB w="6350">
-                      <a:solidFill>
-                        <a:srgbClr val="D5DEE6"/>
-                      </a:solidFill>
-                    </a:lnB>
-                    <a:solidFill>
-                      <a:srgbClr val="F4F8FB"/>
-                    </a:solidFill>
-                  </a:tcPr>
-                </a:tc>
-                <a:tc>
-                  <a:txBody>
-                    <a:bodyPr/>
-                    <a:lstStyle/>
-                    <a:p>
-                      <a:pPr algn="ctr"/>
-                      <a:r>
-                        <a:rPr sz="1200" i="0">
-                          <a:solidFill>
-                            <a:srgbClr val="1E293B"/>
-                          </a:solidFill>
-                          <a:latin typeface="Prompt"/>
-                          <a:ea typeface="Prompt"/>
-                          <a:cs typeface="Prompt"/>
-                        </a:rPr>
-                        <a:t>0.64</a:t>
-                      </a:r>
-                    </a:p>
-                  </a:txBody>
-                  <a:tcPr marL="73152" marR="73152" marT="27432" marB="27432" anchor="ctr">
-                    <a:lnL w="6350">
-                      <a:solidFill>
-                        <a:srgbClr val="D5DEE6"/>
-                      </a:solidFill>
-                    </a:lnL>
-                    <a:lnR w="6350">
-                      <a:solidFill>
-                        <a:srgbClr val="D5DEE6"/>
-                      </a:solidFill>
-                    </a:lnR>
-                    <a:lnT w="6350">
-                      <a:solidFill>
-                        <a:srgbClr val="D5DEE6"/>
-                      </a:solidFill>
-                    </a:lnT>
-                    <a:lnB w="6350">
-                      <a:solidFill>
-                        <a:srgbClr val="D5DEE6"/>
-                      </a:solidFill>
-                    </a:lnB>
-                    <a:solidFill>
-                      <a:srgbClr val="F4F8FB"/>
-                    </a:solidFill>
-                  </a:tcPr>
-                </a:tc>
-                <a:tc>
-                  <a:txBody>
-                    <a:bodyPr/>
-                    <a:lstStyle/>
-                    <a:p>
-                      <a:pPr algn="ctr"/>
-                      <a:r>
-                        <a:rPr sz="1200" i="0">
-                          <a:solidFill>
-                            <a:srgbClr val="1E293B"/>
-                          </a:solidFill>
-                          <a:latin typeface="Prompt"/>
-                          <a:ea typeface="Prompt"/>
-                          <a:cs typeface="Prompt"/>
-                        </a:rPr>
-                        <a:t>0.49</a:t>
-                      </a:r>
-                    </a:p>
-                  </a:txBody>
-                  <a:tcPr marL="73152" marR="73152" marT="27432" marB="27432" anchor="ctr">
-                    <a:lnL w="6350">
-                      <a:solidFill>
-                        <a:srgbClr val="D5DEE6"/>
-                      </a:solidFill>
-                    </a:lnL>
-                    <a:lnR w="6350">
-                      <a:solidFill>
-                        <a:srgbClr val="D5DEE6"/>
-                      </a:solidFill>
-                    </a:lnR>
-                    <a:lnT w="6350">
-                      <a:solidFill>
-                        <a:srgbClr val="D5DEE6"/>
-                      </a:solidFill>
-                    </a:lnT>
-                    <a:lnB w="6350">
-                      <a:solidFill>
-                        <a:srgbClr val="D5DEE6"/>
-                      </a:solidFill>
-                    </a:lnB>
-                    <a:solidFill>
-                      <a:srgbClr val="F4F8FB"/>
-                    </a:solidFill>
-                  </a:tcPr>
-                </a:tc>
-              </a:tr>
-              <a:tr h="347472">
-                <a:tc>
-                  <a:txBody>
-                    <a:bodyPr/>
-                    <a:lstStyle/>
-                    <a:p>
-                      <a:pPr algn="l"/>
-                      <a:r>
-                        <a:rPr sz="1200" i="0">
-                          <a:solidFill>
-                            <a:srgbClr val="1E293B"/>
-                          </a:solidFill>
-                          <a:latin typeface="Prompt"/>
-                          <a:ea typeface="Prompt"/>
-                          <a:cs typeface="Prompt"/>
-                        </a:rPr>
-                        <a:t>2568</a:t>
-                      </a:r>
-                    </a:p>
-                  </a:txBody>
-                  <a:tcPr marL="73152" marR="73152" marT="27432" marB="27432" anchor="ctr">
-                    <a:lnL w="6350">
-                      <a:solidFill>
-                        <a:srgbClr val="D5DEE6"/>
-                      </a:solidFill>
-                    </a:lnL>
-                    <a:lnR w="6350">
-                      <a:solidFill>
-                        <a:srgbClr val="D5DEE6"/>
-                      </a:solidFill>
-                    </a:lnR>
-                    <a:lnT w="6350">
-                      <a:solidFill>
-                        <a:srgbClr val="D5DEE6"/>
-                      </a:solidFill>
-                    </a:lnT>
-                    <a:lnB w="6350">
-                      <a:solidFill>
-                        <a:srgbClr val="D5DEE6"/>
-                      </a:solidFill>
-                    </a:lnB>
-                    <a:solidFill>
-                      <a:srgbClr val="FFFFFF"/>
-                    </a:solidFill>
-                  </a:tcPr>
-                </a:tc>
-                <a:tc>
-                  <a:txBody>
-                    <a:bodyPr/>
-                    <a:lstStyle/>
-                    <a:p>
-                      <a:pPr algn="ctr"/>
-                      <a:r>
-                        <a:rPr sz="1200" i="0">
-                          <a:solidFill>
-                            <a:srgbClr val="1E293B"/>
-                          </a:solidFill>
-                          <a:latin typeface="Prompt"/>
-                          <a:ea typeface="Prompt"/>
-                          <a:cs typeface="Prompt"/>
-                        </a:rPr>
-                        <a:t>275 / 227 ตร.กม.</a:t>
-                      </a:r>
-                    </a:p>
-                  </a:txBody>
-                  <a:tcPr marL="73152" marR="73152" marT="27432" marB="27432" anchor="ctr">
-                    <a:lnL w="6350">
-                      <a:solidFill>
-                        <a:srgbClr val="D5DEE6"/>
-                      </a:solidFill>
-                    </a:lnL>
-                    <a:lnR w="6350">
-                      <a:solidFill>
-                        <a:srgbClr val="D5DEE6"/>
-                      </a:solidFill>
-                    </a:lnR>
-                    <a:lnT w="6350">
-                      <a:solidFill>
-                        <a:srgbClr val="D5DEE6"/>
-                      </a:solidFill>
-                    </a:lnT>
-                    <a:lnB w="6350">
-                      <a:solidFill>
-                        <a:srgbClr val="D5DEE6"/>
-                      </a:solidFill>
-                    </a:lnB>
-                    <a:solidFill>
-                      <a:srgbClr val="FFFFFF"/>
-                    </a:solidFill>
-                  </a:tcPr>
-                </a:tc>
-                <a:tc>
-                  <a:txBody>
-                    <a:bodyPr/>
-                    <a:lstStyle/>
-                    <a:p>
-                      <a:pPr algn="ctr"/>
-                      <a:r>
-                        <a:rPr sz="1200" i="0">
-                          <a:solidFill>
-                            <a:srgbClr val="1E293B"/>
-                          </a:solidFill>
-                          <a:latin typeface="Prompt"/>
-                          <a:ea typeface="Prompt"/>
-                          <a:cs typeface="Prompt"/>
-                        </a:rPr>
-                        <a:t>0.78</a:t>
-                      </a:r>
-                    </a:p>
-                  </a:txBody>
-                  <a:tcPr marL="73152" marR="73152" marT="27432" marB="27432" anchor="ctr">
-                    <a:lnL w="6350">
-                      <a:solidFill>
-                        <a:srgbClr val="D5DEE6"/>
-                      </a:solidFill>
-                    </a:lnL>
-                    <a:lnR w="6350">
-                      <a:solidFill>
-                        <a:srgbClr val="D5DEE6"/>
-                      </a:solidFill>
-                    </a:lnR>
-                    <a:lnT w="6350">
-                      <a:solidFill>
-                        <a:srgbClr val="D5DEE6"/>
-                      </a:solidFill>
-                    </a:lnT>
-                    <a:lnB w="6350">
-                      <a:solidFill>
-                        <a:srgbClr val="D5DEE6"/>
-                      </a:solidFill>
-                    </a:lnB>
-                    <a:solidFill>
-                      <a:srgbClr val="FFFFFF"/>
-                    </a:solidFill>
-                  </a:tcPr>
-                </a:tc>
-                <a:tc>
-                  <a:txBody>
-                    <a:bodyPr/>
-                    <a:lstStyle/>
-                    <a:p>
-                      <a:pPr algn="ctr"/>
-                      <a:r>
-                        <a:rPr sz="1200" i="0">
-                          <a:solidFill>
-                            <a:srgbClr val="1E293B"/>
-                          </a:solidFill>
-                          <a:latin typeface="Prompt"/>
-                          <a:ea typeface="Prompt"/>
-                          <a:cs typeface="Prompt"/>
-                        </a:rPr>
-                        <a:t>0.54</a:t>
-                      </a:r>
-                    </a:p>
-                  </a:txBody>
-                  <a:tcPr marL="73152" marR="73152" marT="27432" marB="27432" anchor="ctr">
-                    <a:lnL w="6350">
-                      <a:solidFill>
-                        <a:srgbClr val="D5DEE6"/>
-                      </a:solidFill>
-                    </a:lnL>
-                    <a:lnR w="6350">
-                      <a:solidFill>
-                        <a:srgbClr val="D5DEE6"/>
-                      </a:solidFill>
-                    </a:lnR>
-                    <a:lnT w="6350">
-                      <a:solidFill>
-                        <a:srgbClr val="D5DEE6"/>
-                      </a:solidFill>
-                    </a:lnT>
-                    <a:lnB w="6350">
-                      <a:solidFill>
-                        <a:srgbClr val="D5DEE6"/>
-                      </a:solidFill>
-                    </a:lnB>
-                    <a:solidFill>
-                      <a:srgbClr val="FFFFFF"/>
-                    </a:solidFill>
-                  </a:tcPr>
-                </a:tc>
-              </a:tr>
-            </a:tbl>
-          </a:graphicData>
-        </a:graphic>
-      </p:graphicFrame>
-      <p:graphicFrame>
-        <p:nvGraphicFramePr>
-          <p:cNvPr id="32" name="Chart 31"/>
-          <p:cNvGraphicFramePr>
-            <a:graphicFrameLocks noGrp="1"/>
-          </p:cNvGraphicFramePr>
-          <p:nvPr/>
-        </p:nvGraphicFramePr>
-        <p:xfrm>
-          <a:off x="5669280" y="3017520"/>
-          <a:ext cx="6035040" cy="1920240"/>
-        </p:xfrm>
-        <a:graphic>
-          <a:graphicData uri="http://schemas.openxmlformats.org/drawingml/2006/chart">
-            <c:chart xmlns:c="http://schemas.openxmlformats.org/drawingml/2006/chart" r:id="rId3"/>
-          </a:graphicData>
-        </a:graphic>
-      </p:graphicFrame>
-      <p:sp>
-        <p:nvSpPr>
-          <p:cNvPr id="33" name="Rounded Rectangle 32"/>
+              </a:rPr>
+              <a:t>จำนวนปีที่ท่วมต่อเนื่อง 30 วันขึ้นไป (Sentinel-1 ปี 2560–2568)</a:t>
+            </a:r>
+          </a:p>
+        </p:txBody>
+      </p:sp>
+      <p:sp>
+        <p:nvSpPr>
+          <p:cNvPr id="31" name="Rectangle 30"/>
           <p:cNvSpPr/>
           <p:nvPr/>
         </p:nvSpPr>
         <p:spPr>
           <a:xfrm>
-            <a:off x="5760720" y="5074920"/>
-            <a:ext cx="5879592" cy="1188720"/>
-          </a:xfrm>
-          <a:prstGeom prst="roundRect">
-            <a:avLst>
-              <a:gd name="adj" fmla="val 6000"/>
-            </a:avLst>
+            <a:off x="7498079" y="1426464"/>
+            <a:ext cx="1298448" cy="1417320"/>
+          </a:xfrm>
+          <a:prstGeom prst="rect">
+            <a:avLst/>
           </a:prstGeom>
           <a:solidFill>
-            <a:srgbClr val="FFF4E5"/>
+            <a:srgbClr val="EEF5F9"/>
           </a:solidFill>
           <a:ln>
             <a:noFill/>
@@ -20676,19 +21276,21 @@
         <p:txBody>
           <a:bodyPr rtlCol="0" anchor="ctr"/>
           <a:lstStyle/>
-          <a:p/>
-        </p:txBody>
-      </p:sp>
-      <p:sp>
-        <p:nvSpPr>
-          <p:cNvPr id="34" name="TextBox 33"/>
+          <a:p>
+            <a:pPr algn="ctr"/>
+          </a:p>
+        </p:txBody>
+      </p:sp>
+      <p:sp>
+        <p:nvSpPr>
+          <p:cNvPr id="32" name="TextBox 31"/>
           <p:cNvSpPr txBox="1"/>
           <p:nvPr/>
         </p:nvSpPr>
         <p:spPr>
           <a:xfrm>
-            <a:off x="5961888" y="5166360"/>
-            <a:ext cx="5486400" cy="365760"/>
+            <a:off x="7662671" y="1517904"/>
+            <a:ext cx="1024127" cy="640080"/>
           </a:xfrm>
           <a:prstGeom prst="rect">
             <a:avLst/>
@@ -20696,23 +21298,1002 @@
           <a:noFill/>
         </p:spPr>
         <p:txBody>
-          <a:bodyPr wrap="square" lIns="0" rIns="0" tIns="0" bIns="0" anchor="t">
+          <a:bodyPr wrap="square" anchor="t">
             <a:spAutoFit/>
           </a:bodyPr>
           <a:lstStyle/>
           <a:p>
             <a:pPr algn="l"/>
             <a:r>
-              <a:rPr sz="1300" b="1" i="0">
+              <a:rPr sz="2600" b="1">
                 <a:solidFill>
                   <a:srgbClr val="0B3C5D"/>
+                </a:solidFill>
+                <a:latin typeface="Prompt"/>
+              </a:rPr>
+              <a:t>502</a:t>
+            </a:r>
+            <a:r>
+              <a:rPr sz="1100" b="0">
+                <a:solidFill>
+                  <a:srgbClr val="64748B"/>
+                </a:solidFill>
+                <a:latin typeface="Prompt"/>
+              </a:rPr>
+              <a:t>  กม²</a:t>
+            </a:r>
+          </a:p>
+        </p:txBody>
+      </p:sp>
+      <p:sp>
+        <p:nvSpPr>
+          <p:cNvPr id="33" name="TextBox 32"/>
+          <p:cNvSpPr txBox="1"/>
+          <p:nvPr/>
+        </p:nvSpPr>
+        <p:spPr>
+          <a:xfrm>
+            <a:off x="7662671" y="2139696"/>
+            <a:ext cx="1024127" cy="640080"/>
+          </a:xfrm>
+          <a:prstGeom prst="rect">
+            <a:avLst/>
+          </a:prstGeom>
+          <a:noFill/>
+        </p:spPr>
+        <p:txBody>
+          <a:bodyPr wrap="square" anchor="t">
+            <a:spAutoFit/>
+          </a:bodyPr>
+          <a:lstStyle/>
+          <a:p>
+            <a:pPr algn="l"/>
+            <a:r>
+              <a:rPr sz="1150" b="0">
+                <a:solidFill>
+                  <a:srgbClr val="1E293B"/>
+                </a:solidFill>
+                <a:latin typeface="Prompt"/>
+              </a:rPr>
+              <a:t>ท่วม ≥30 วัน 3 ใน 9 ปี</a:t>
+            </a:r>
+          </a:p>
+        </p:txBody>
+      </p:sp>
+      <p:sp>
+        <p:nvSpPr>
+          <p:cNvPr id="34" name="Rectangle 33"/>
+          <p:cNvSpPr/>
+          <p:nvPr/>
+        </p:nvSpPr>
+        <p:spPr>
+          <a:xfrm>
+            <a:off x="8915400" y="1426464"/>
+            <a:ext cx="1298448" cy="1417320"/>
+          </a:xfrm>
+          <a:prstGeom prst="rect">
+            <a:avLst/>
+          </a:prstGeom>
+          <a:solidFill>
+            <a:srgbClr val="EEF5F9"/>
+          </a:solidFill>
+          <a:ln>
+            <a:noFill/>
+          </a:ln>
+          <a:effectLst/>
+        </p:spPr>
+        <p:style>
+          <a:lnRef idx="1">
+            <a:schemeClr val="accent1"/>
+          </a:lnRef>
+          <a:fillRef idx="3">
+            <a:schemeClr val="accent1"/>
+          </a:fillRef>
+          <a:effectRef idx="2">
+            <a:schemeClr val="accent1"/>
+          </a:effectRef>
+          <a:fontRef idx="minor">
+            <a:schemeClr val="lt1"/>
+          </a:fontRef>
+        </p:style>
+        <p:txBody>
+          <a:bodyPr rtlCol="0" anchor="ctr"/>
+          <a:lstStyle/>
+          <a:p>
+            <a:pPr algn="ctr"/>
+          </a:p>
+        </p:txBody>
+      </p:sp>
+      <p:sp>
+        <p:nvSpPr>
+          <p:cNvPr id="35" name="TextBox 34"/>
+          <p:cNvSpPr txBox="1"/>
+          <p:nvPr/>
+        </p:nvSpPr>
+        <p:spPr>
+          <a:xfrm>
+            <a:off x="9079992" y="1517904"/>
+            <a:ext cx="1024127" cy="640080"/>
+          </a:xfrm>
+          <a:prstGeom prst="rect">
+            <a:avLst/>
+          </a:prstGeom>
+          <a:noFill/>
+        </p:spPr>
+        <p:txBody>
+          <a:bodyPr wrap="square" anchor="t">
+            <a:spAutoFit/>
+          </a:bodyPr>
+          <a:lstStyle/>
+          <a:p>
+            <a:pPr algn="l"/>
+            <a:r>
+              <a:rPr sz="2600" b="1">
+                <a:solidFill>
+                  <a:srgbClr val="D64545"/>
+                </a:solidFill>
+                <a:latin typeface="Prompt"/>
+              </a:rPr>
+              <a:t>249</a:t>
+            </a:r>
+            <a:r>
+              <a:rPr sz="1100" b="0">
+                <a:solidFill>
+                  <a:srgbClr val="64748B"/>
+                </a:solidFill>
+                <a:latin typeface="Prompt"/>
+              </a:rPr>
+              <a:t>  กม²</a:t>
+            </a:r>
+          </a:p>
+        </p:txBody>
+      </p:sp>
+      <p:sp>
+        <p:nvSpPr>
+          <p:cNvPr id="36" name="TextBox 35"/>
+          <p:cNvSpPr txBox="1"/>
+          <p:nvPr/>
+        </p:nvSpPr>
+        <p:spPr>
+          <a:xfrm>
+            <a:off x="9079992" y="2139696"/>
+            <a:ext cx="1024127" cy="640080"/>
+          </a:xfrm>
+          <a:prstGeom prst="rect">
+            <a:avLst/>
+          </a:prstGeom>
+          <a:noFill/>
+        </p:spPr>
+        <p:txBody>
+          <a:bodyPr wrap="square" anchor="t">
+            <a:spAutoFit/>
+          </a:bodyPr>
+          <a:lstStyle/>
+          <a:p>
+            <a:pPr algn="l"/>
+            <a:r>
+              <a:rPr sz="1150" b="0">
+                <a:solidFill>
+                  <a:srgbClr val="1E293B"/>
+                </a:solidFill>
+                <a:latin typeface="Prompt"/>
+              </a:rPr>
+              <a:t>ชุมแสง</a:t>
+            </a:r>
+          </a:p>
+        </p:txBody>
+      </p:sp>
+      <p:sp>
+        <p:nvSpPr>
+          <p:cNvPr id="37" name="Rectangle 36"/>
+          <p:cNvSpPr/>
+          <p:nvPr/>
+        </p:nvSpPr>
+        <p:spPr>
+          <a:xfrm>
+            <a:off x="10332720" y="1426464"/>
+            <a:ext cx="1307592" cy="1417320"/>
+          </a:xfrm>
+          <a:prstGeom prst="rect">
+            <a:avLst/>
+          </a:prstGeom>
+          <a:solidFill>
+            <a:srgbClr val="EEF5F9"/>
+          </a:solidFill>
+          <a:ln>
+            <a:noFill/>
+          </a:ln>
+          <a:effectLst/>
+        </p:spPr>
+        <p:style>
+          <a:lnRef idx="1">
+            <a:schemeClr val="accent1"/>
+          </a:lnRef>
+          <a:fillRef idx="3">
+            <a:schemeClr val="accent1"/>
+          </a:fillRef>
+          <a:effectRef idx="2">
+            <a:schemeClr val="accent1"/>
+          </a:effectRef>
+          <a:fontRef idx="minor">
+            <a:schemeClr val="lt1"/>
+          </a:fontRef>
+        </p:style>
+        <p:txBody>
+          <a:bodyPr rtlCol="0" anchor="ctr"/>
+          <a:lstStyle/>
+          <a:p>
+            <a:pPr algn="ctr"/>
+          </a:p>
+        </p:txBody>
+      </p:sp>
+      <p:sp>
+        <p:nvSpPr>
+          <p:cNvPr id="38" name="TextBox 37"/>
+          <p:cNvSpPr txBox="1"/>
+          <p:nvPr/>
+        </p:nvSpPr>
+        <p:spPr>
+          <a:xfrm>
+            <a:off x="10497312" y="1517904"/>
+            <a:ext cx="1033271" cy="640080"/>
+          </a:xfrm>
+          <a:prstGeom prst="rect">
+            <a:avLst/>
+          </a:prstGeom>
+          <a:noFill/>
+        </p:spPr>
+        <p:txBody>
+          <a:bodyPr wrap="square" anchor="t">
+            <a:spAutoFit/>
+          </a:bodyPr>
+          <a:lstStyle/>
+          <a:p>
+            <a:pPr algn="l"/>
+            <a:r>
+              <a:rPr sz="2600" b="1">
+                <a:solidFill>
+                  <a:srgbClr val="1B998B"/>
+                </a:solidFill>
+                <a:latin typeface="Prompt"/>
+              </a:rPr>
+              <a:t>0.41</a:t>
+            </a:r>
+            <a:r>
+              <a:rPr sz="1100" b="0">
+                <a:solidFill>
+                  <a:srgbClr val="64748B"/>
+                </a:solidFill>
+                <a:latin typeface="Prompt"/>
+              </a:rPr>
+              <a:t>  CSI</a:t>
+            </a:r>
+          </a:p>
+        </p:txBody>
+      </p:sp>
+      <p:sp>
+        <p:nvSpPr>
+          <p:cNvPr id="39" name="TextBox 38"/>
+          <p:cNvSpPr txBox="1"/>
+          <p:nvPr/>
+        </p:nvSpPr>
+        <p:spPr>
+          <a:xfrm>
+            <a:off x="10497312" y="2139696"/>
+            <a:ext cx="1033271" cy="640080"/>
+          </a:xfrm>
+          <a:prstGeom prst="rect">
+            <a:avLst/>
+          </a:prstGeom>
+          <a:noFill/>
+        </p:spPr>
+        <p:txBody>
+          <a:bodyPr wrap="square" anchor="t">
+            <a:spAutoFit/>
+          </a:bodyPr>
+          <a:lstStyle/>
+          <a:p>
+            <a:pPr algn="l"/>
+            <a:r>
+              <a:rPr sz="1150" b="0">
+                <a:solidFill>
+                  <a:srgbClr val="1E293B"/>
+                </a:solidFill>
+                <a:latin typeface="Prompt"/>
+              </a:rPr>
+              <a:t>แบบจำลอง 2D ปี 2568</a:t>
+            </a:r>
+          </a:p>
+        </p:txBody>
+      </p:sp>
+      <p:sp>
+        <p:nvSpPr>
+          <p:cNvPr id="40" name="Rectangle 39"/>
+          <p:cNvSpPr/>
+          <p:nvPr/>
+        </p:nvSpPr>
+        <p:spPr>
+          <a:xfrm>
+            <a:off x="7498079" y="3017520"/>
+            <a:ext cx="4142232" cy="1600200"/>
+          </a:xfrm>
+          <a:prstGeom prst="rect">
+            <a:avLst/>
+          </a:prstGeom>
+          <a:solidFill>
+            <a:srgbClr val="EEF5F9"/>
+          </a:solidFill>
+          <a:ln>
+            <a:noFill/>
+          </a:ln>
+          <a:effectLst/>
+        </p:spPr>
+        <p:style>
+          <a:lnRef idx="1">
+            <a:schemeClr val="accent1"/>
+          </a:lnRef>
+          <a:fillRef idx="3">
+            <a:schemeClr val="accent1"/>
+          </a:fillRef>
+          <a:effectRef idx="2">
+            <a:schemeClr val="accent1"/>
+          </a:effectRef>
+          <a:fontRef idx="minor">
+            <a:schemeClr val="lt1"/>
+          </a:fontRef>
+        </p:style>
+        <p:txBody>
+          <a:bodyPr rtlCol="0" anchor="ctr"/>
+          <a:lstStyle/>
+          <a:p>
+            <a:pPr algn="ctr"/>
+          </a:p>
+        </p:txBody>
+      </p:sp>
+      <p:sp>
+        <p:nvSpPr>
+          <p:cNvPr id="41" name="TextBox 40"/>
+          <p:cNvSpPr txBox="1"/>
+          <p:nvPr/>
+        </p:nvSpPr>
+        <p:spPr>
+          <a:xfrm>
+            <a:off x="7680959" y="3108960"/>
+            <a:ext cx="3776472" cy="365760"/>
+          </a:xfrm>
+          <a:prstGeom prst="rect">
+            <a:avLst/>
+          </a:prstGeom>
+          <a:noFill/>
+        </p:spPr>
+        <p:txBody>
+          <a:bodyPr wrap="square" anchor="t">
+            <a:spAutoFit/>
+          </a:bodyPr>
+          <a:lstStyle/>
+          <a:p>
+            <a:pPr algn="l"/>
+            <a:r>
+              <a:rPr sz="1400" b="1">
+                <a:solidFill>
+                  <a:srgbClr val="0B3C5D"/>
+                </a:solidFill>
+                <a:latin typeface="Prompt"/>
+              </a:rPr>
+              <a:t>สิ่งที่ได้</a:t>
+            </a:r>
+          </a:p>
+        </p:txBody>
+      </p:sp>
+      <p:sp>
+        <p:nvSpPr>
+          <p:cNvPr id="42" name="TextBox 41"/>
+          <p:cNvSpPr txBox="1"/>
+          <p:nvPr/>
+        </p:nvSpPr>
+        <p:spPr>
+          <a:xfrm>
+            <a:off x="7680959" y="3474720"/>
+            <a:ext cx="3776472" cy="1097280"/>
+          </a:xfrm>
+          <a:prstGeom prst="rect">
+            <a:avLst/>
+          </a:prstGeom>
+          <a:noFill/>
+        </p:spPr>
+        <p:txBody>
+          <a:bodyPr wrap="square" anchor="t">
+            <a:spAutoFit/>
+          </a:bodyPr>
+          <a:lstStyle/>
+          <a:p>
+            <a:pPr algn="l">
+              <a:spcAft>
+                <a:spcPts val="400"/>
+              </a:spcAft>
+            </a:pPr>
+            <a:r>
+              <a:rPr sz="1200" b="0">
+                <a:solidFill>
+                  <a:srgbClr val="1E293B"/>
+                </a:solidFill>
+                <a:latin typeface="Prompt"/>
+              </a:rPr>
+              <a:t>ท่วมนานกระจุกตามแนวน่าน–ชุมแสง–บึงบอระเพ็ด</a:t>
+            </a:r>
+          </a:p>
+          <a:p>
+            <a:pPr algn="l">
+              <a:spcAft>
+                <a:spcPts val="400"/>
+              </a:spcAft>
+            </a:pPr>
+            <a:r>
+              <a:rPr sz="1200" b="0">
+                <a:solidFill>
+                  <a:srgbClr val="1E293B"/>
+                </a:solidFill>
+                <a:latin typeface="Prompt"/>
+              </a:rPr>
+              <a:t>แบบจำลองชุดเดียวใช้ได้ 4 ปี รวมปีทดสอบ 2567 (CSI 0.31)</a:t>
+            </a:r>
+          </a:p>
+        </p:txBody>
+      </p:sp>
+      <p:sp>
+        <p:nvSpPr>
+          <p:cNvPr id="43" name="Rectangle 42"/>
+          <p:cNvSpPr/>
+          <p:nvPr/>
+        </p:nvSpPr>
+        <p:spPr>
+          <a:xfrm>
+            <a:off x="7498079" y="4754880"/>
+            <a:ext cx="4142232" cy="1508760"/>
+          </a:xfrm>
+          <a:prstGeom prst="rect">
+            <a:avLst/>
+          </a:prstGeom>
+          <a:solidFill>
+            <a:srgbClr val="FFF4E5"/>
+          </a:solidFill>
+          <a:ln>
+            <a:noFill/>
+          </a:ln>
+          <a:effectLst/>
+        </p:spPr>
+        <p:style>
+          <a:lnRef idx="1">
+            <a:schemeClr val="accent1"/>
+          </a:lnRef>
+          <a:fillRef idx="3">
+            <a:schemeClr val="accent1"/>
+          </a:fillRef>
+          <a:effectRef idx="2">
+            <a:schemeClr val="accent1"/>
+          </a:effectRef>
+          <a:fontRef idx="minor">
+            <a:schemeClr val="lt1"/>
+          </a:fontRef>
+        </p:style>
+        <p:txBody>
+          <a:bodyPr rtlCol="0" anchor="ctr"/>
+          <a:lstStyle/>
+          <a:p>
+            <a:pPr algn="ctr"/>
+          </a:p>
+        </p:txBody>
+      </p:sp>
+      <p:sp>
+        <p:nvSpPr>
+          <p:cNvPr id="44" name="TextBox 43"/>
+          <p:cNvSpPr txBox="1"/>
+          <p:nvPr/>
+        </p:nvSpPr>
+        <p:spPr>
+          <a:xfrm>
+            <a:off x="7680959" y="4846320"/>
+            <a:ext cx="3776472" cy="365760"/>
+          </a:xfrm>
+          <a:prstGeom prst="rect">
+            <a:avLst/>
+          </a:prstGeom>
+          <a:noFill/>
+        </p:spPr>
+        <p:txBody>
+          <a:bodyPr wrap="square" anchor="t">
+            <a:spAutoFit/>
+          </a:bodyPr>
+          <a:lstStyle/>
+          <a:p>
+            <a:pPr algn="l"/>
+            <a:r>
+              <a:rPr sz="1400" b="1">
+                <a:solidFill>
+                  <a:srgbClr val="0B3C5D"/>
+                </a:solidFill>
+                <a:latin typeface="Prompt"/>
+              </a:rPr>
+              <a:t>ยังต้องการข้อมูล</a:t>
+            </a:r>
+          </a:p>
+        </p:txBody>
+      </p:sp>
+      <p:sp>
+        <p:nvSpPr>
+          <p:cNvPr id="45" name="TextBox 44"/>
+          <p:cNvSpPr txBox="1"/>
+          <p:nvPr/>
+        </p:nvSpPr>
+        <p:spPr>
+          <a:xfrm>
+            <a:off x="7680959" y="5212080"/>
+            <a:ext cx="3776472" cy="1005839"/>
+          </a:xfrm>
+          <a:prstGeom prst="rect">
+            <a:avLst/>
+          </a:prstGeom>
+          <a:noFill/>
+        </p:spPr>
+        <p:txBody>
+          <a:bodyPr wrap="square" anchor="t">
+            <a:spAutoFit/>
+          </a:bodyPr>
+          <a:lstStyle/>
+          <a:p>
+            <a:pPr algn="l"/>
+            <a:r>
+              <a:rPr sz="1200" b="0">
+                <a:solidFill>
+                  <a:srgbClr val="1E293B"/>
+                </a:solidFill>
+                <a:latin typeface="Prompt"/>
+              </a:rPr>
+              <a:t>ฝั่งขวาแม่น้ำปิง (เก้าเลี้ยว–โกรกพระ) ต้องใช้ข้อมูลคลองและการเปิด–ปิดประตูน้ำจาก ชป.</a:t>
+            </a:r>
+          </a:p>
+        </p:txBody>
+      </p:sp>
+      <p:sp>
+        <p:nvSpPr>
+          <p:cNvPr id="46" name="TextBox 45"/>
+          <p:cNvSpPr txBox="1"/>
+          <p:nvPr/>
+        </p:nvSpPr>
+        <p:spPr>
+          <a:xfrm>
+            <a:off x="548640" y="6400800"/>
+            <a:ext cx="10332720" cy="274320"/>
+          </a:xfrm>
+          <a:prstGeom prst="rect">
+            <a:avLst/>
+          </a:prstGeom>
+          <a:noFill/>
+        </p:spPr>
+        <p:txBody>
+          <a:bodyPr wrap="square" anchor="t">
+            <a:spAutoFit/>
+          </a:bodyPr>
+          <a:lstStyle/>
+          <a:p>
+            <a:pPr algn="l"/>
+            <a:r>
+              <a:rPr sz="900" b="0">
+                <a:solidFill>
+                  <a:srgbClr val="64748B"/>
+                </a:solidFill>
+                <a:latin typeface="Prompt"/>
+              </a:rPr>
+              <a:t>ที่มา: Sentinel-1 RTC (Copernicus ผ่าน Microsoft Planetary Computer) วงโคจร 62 + 172 · แบบจำลอง 2D 300 ม. (event_2d.py / scenario_prov.py / run_province.py)</a:t>
+            </a:r>
+          </a:p>
+        </p:txBody>
+      </p:sp>
+    </p:spTree>
+  </p:cSld>
+  <p:clrMapOvr>
+    <a:masterClrMapping/>
+  </p:clrMapOvr>
+</p:sld>
+</file>
+
+<file path=ppt/slides/slide22.xml><?xml version="1.0" encoding="utf-8"?>
+<p:sld xmlns:a="http://schemas.openxmlformats.org/drawingml/2006/main" xmlns:p="http://schemas.openxmlformats.org/presentationml/2006/main" xmlns:r="http://schemas.openxmlformats.org/officeDocument/2006/relationships">
+  <p:cSld>
+    <p:spTree>
+      <p:nvGrpSpPr>
+        <p:cNvPr id="1" name=""/>
+        <p:cNvGrpSpPr/>
+        <p:nvPr/>
+      </p:nvGrpSpPr>
+      <p:grpSpPr/>
+      <p:sp>
+        <p:nvSpPr>
+          <p:cNvPr id="25" name="Slide Number Placeholder 0"/>
+          <p:cNvSpPr>
+            <a:spLocks noGrp="1"/>
+          </p:cNvSpPr>
+          <p:nvPr>
+            <p:ph type="sldNum" sz="quarter" idx="4294967295"/>
+          </p:nvPr>
+        </p:nvSpPr>
+        <p:spPr>
+          <a:xfrm>
+            <a:off x="11277295" y="6419088"/>
+            <a:ext cx="457200" cy="274320"/>
+          </a:xfrm>
+          <a:prstGeom prst="rect">
+            <a:avLst/>
+          </a:prstGeom>
+          <a:extLst>
+            <a:ext uri="{C572A759-6A51-4108-AA02-DFA0A04FC94B}">
+              <ma14:wrappingTextBoxFlag xmlns:ma14="http://schemas.microsoft.com/office/mac/drawingml/2011/main" val="0"/>
+            </a:ext>
+          </a:extLst>
+        </p:spPr>
+        <p:txBody>
+          <a:bodyPr/>
+          <a:lstStyle>
+            <a:lvl1pPr>
+              <a:defRPr sz="900">
+                <a:solidFill>
+                  <a:srgbClr val="64748B"/>
                 </a:solidFill>
                 <a:latin typeface="Prompt"/>
                 <a:ea typeface="Prompt"/>
                 <a:cs typeface="Prompt"/>
-              </a:rPr>
-              <a:t>ข้อค้นพบ: น้ำเข้าทุ่งก่อนระดับน้ำถึงตลิ่ง</a:t>
-            </a:r>
+              </a:defRPr>
+            </a:lvl1pPr>
+          </a:lstStyle>
+          <a:p>
+            <a:pPr algn="r"/>
+            <a:fld id="{F7021451-1387-4CA6-816F-3879F97B5CBC}" type="slidenum">
+              <a:rPr b="0" lang="en-US"/>
+              <a:t>2</a:t>
+            </a:fld>
+            <a:endParaRPr lang="en-US"/>
+          </a:p>
+        </p:txBody>
+      </p:sp>
+      <p:sp>
+        <p:nvSpPr>
+          <p:cNvPr id="26" name="TextBox 25"/>
+          <p:cNvSpPr txBox="1"/>
+          <p:nvPr/>
+        </p:nvSpPr>
+        <p:spPr>
+          <a:xfrm>
+            <a:off x="548640" y="347472"/>
+            <a:ext cx="8229600" cy="274320"/>
+          </a:xfrm>
+          <a:prstGeom prst="rect">
+            <a:avLst/>
+          </a:prstGeom>
+          <a:noFill/>
+        </p:spPr>
+        <p:txBody>
+          <a:bodyPr wrap="square" anchor="t">
+            <a:spAutoFit/>
+          </a:bodyPr>
+          <a:lstStyle/>
+          <a:p>
+            <a:pPr algn="l"/>
+            <a:r>
+              <a:rPr sz="1200" b="1">
+                <a:solidFill>
+                  <a:srgbClr val="1B998B"/>
+                </a:solidFill>
+                <a:latin typeface="Prompt"/>
+              </a:rPr>
+              <a:t>ทั้งจังหวัด · สถานการณ์และพยากรณ์</a:t>
+            </a:r>
+          </a:p>
+        </p:txBody>
+      </p:sp>
+      <p:sp>
+        <p:nvSpPr>
+          <p:cNvPr id="27" name="TextBox 26"/>
+          <p:cNvSpPr txBox="1"/>
+          <p:nvPr/>
+        </p:nvSpPr>
+        <p:spPr>
+          <a:xfrm>
+            <a:off x="548640" y="621792"/>
+            <a:ext cx="11091672" cy="685800"/>
+          </a:xfrm>
+          <a:prstGeom prst="rect">
+            <a:avLst/>
+          </a:prstGeom>
+          <a:noFill/>
+        </p:spPr>
+        <p:txBody>
+          <a:bodyPr wrap="square" anchor="t">
+            <a:spAutoFit/>
+          </a:bodyPr>
+          <a:lstStyle/>
+          <a:p>
+            <a:pPr algn="l"/>
+            <a:r>
+              <a:rPr sz="2400" b="1">
+                <a:solidFill>
+                  <a:srgbClr val="0B3C5D"/>
+                </a:solidFill>
+                <a:latin typeface="Prompt"/>
+              </a:rPr>
+              <a:t>พายุใหญ่ + แม่น้ำสูง: น้ำขังนานกว่าฝนอย่างเดียว 4 เท่า</a:t>
+            </a:r>
+          </a:p>
+        </p:txBody>
+      </p:sp>
+      <p:sp>
+        <p:nvSpPr>
+          <p:cNvPr id="28" name="Rectangle 27"/>
+          <p:cNvSpPr/>
+          <p:nvPr/>
+        </p:nvSpPr>
+        <p:spPr>
+          <a:xfrm>
+            <a:off x="511427" y="1426464"/>
+            <a:ext cx="6749545" cy="4636008"/>
+          </a:xfrm>
+          <a:prstGeom prst="rect">
+            <a:avLst/>
+          </a:prstGeom>
+          <a:solidFill>
+            <a:srgbClr val="FFFFFF"/>
+          </a:solidFill>
+          <a:ln w="9525">
+            <a:solidFill>
+              <a:srgbClr val="D7E0E8"/>
+            </a:solidFill>
+          </a:ln>
+          <a:effectLst/>
+        </p:spPr>
+        <p:style>
+          <a:lnRef idx="1">
+            <a:schemeClr val="accent1"/>
+          </a:lnRef>
+          <a:fillRef idx="3">
+            <a:schemeClr val="accent1"/>
+          </a:fillRef>
+          <a:effectRef idx="2">
+            <a:schemeClr val="accent1"/>
+          </a:effectRef>
+          <a:fontRef idx="minor">
+            <a:schemeClr val="lt1"/>
+          </a:fontRef>
+        </p:style>
+        <p:txBody>
+          <a:bodyPr rtlCol="0" anchor="ctr"/>
+          <a:lstStyle/>
+          <a:p>
+            <a:pPr algn="ctr"/>
+          </a:p>
+        </p:txBody>
+      </p:sp>
+      <p:pic>
+        <p:nvPicPr>
+          <p:cNvPr id="29" name="Picture 28" descr="prov_scnE.png"/>
+          <p:cNvPicPr>
+            <a:picLocks noChangeAspect="1"/>
+          </p:cNvPicPr>
+          <p:nvPr/>
+        </p:nvPicPr>
+        <p:blipFill>
+          <a:blip r:embed="rId2"/>
+          <a:stretch>
+            <a:fillRect/>
+          </a:stretch>
+        </p:blipFill>
+        <p:spPr>
+          <a:xfrm>
+            <a:off x="566291" y="1481328"/>
+            <a:ext cx="6639817" cy="4526280"/>
+          </a:xfrm>
+          <a:prstGeom prst="rect">
+            <a:avLst/>
+          </a:prstGeom>
+        </p:spPr>
+      </p:pic>
+      <p:sp>
+        <p:nvSpPr>
+          <p:cNvPr id="30" name="TextBox 29"/>
+          <p:cNvSpPr txBox="1"/>
+          <p:nvPr/>
+        </p:nvSpPr>
+        <p:spPr>
+          <a:xfrm>
+            <a:off x="548640" y="6053328"/>
+            <a:ext cx="6675120" cy="274320"/>
+          </a:xfrm>
+          <a:prstGeom prst="rect">
+            <a:avLst/>
+          </a:prstGeom>
+          <a:noFill/>
+        </p:spPr>
+        <p:txBody>
+          <a:bodyPr wrap="square" anchor="t">
+            <a:spAutoFit/>
+          </a:bodyPr>
+          <a:lstStyle/>
+          <a:p>
+            <a:pPr algn="l"/>
+            <a:r>
+              <a:rPr sz="1000" b="0">
+                <a:solidFill>
+                  <a:srgbClr val="64748B"/>
+                </a:solidFill>
+                <a:latin typeface="Prompt"/>
+              </a:rPr>
+              <a:t>สถานการณ์ E: ฝน 250 มม./5 วัน + แม่น้ำล้นตลิ่ง — เวลาที่น้ำลด</a:t>
+            </a:r>
+          </a:p>
+        </p:txBody>
+      </p:sp>
+      <p:sp>
+        <p:nvSpPr>
+          <p:cNvPr id="31" name="Rectangle 30"/>
+          <p:cNvSpPr/>
+          <p:nvPr/>
+        </p:nvSpPr>
+        <p:spPr>
+          <a:xfrm>
+            <a:off x="7498079" y="1426464"/>
+            <a:ext cx="1993392" cy="1417320"/>
+          </a:xfrm>
+          <a:prstGeom prst="rect">
+            <a:avLst/>
+          </a:prstGeom>
+          <a:solidFill>
+            <a:srgbClr val="EEF5F9"/>
+          </a:solidFill>
+          <a:ln>
+            <a:noFill/>
+          </a:ln>
+          <a:effectLst/>
+        </p:spPr>
+        <p:style>
+          <a:lnRef idx="1">
+            <a:schemeClr val="accent1"/>
+          </a:lnRef>
+          <a:fillRef idx="3">
+            <a:schemeClr val="accent1"/>
+          </a:fillRef>
+          <a:effectRef idx="2">
+            <a:schemeClr val="accent1"/>
+          </a:effectRef>
+          <a:fontRef idx="minor">
+            <a:schemeClr val="lt1"/>
+          </a:fontRef>
+        </p:style>
+        <p:txBody>
+          <a:bodyPr rtlCol="0" anchor="ctr"/>
+          <a:lstStyle/>
+          <a:p>
+            <a:pPr algn="ctr"/>
+          </a:p>
+        </p:txBody>
+      </p:sp>
+      <p:sp>
+        <p:nvSpPr>
+          <p:cNvPr id="32" name="TextBox 31"/>
+          <p:cNvSpPr txBox="1"/>
+          <p:nvPr/>
+        </p:nvSpPr>
+        <p:spPr>
+          <a:xfrm>
+            <a:off x="7662671" y="1517904"/>
+            <a:ext cx="1719072" cy="640080"/>
+          </a:xfrm>
+          <a:prstGeom prst="rect">
+            <a:avLst/>
+          </a:prstGeom>
+          <a:noFill/>
+        </p:spPr>
+        <p:txBody>
+          <a:bodyPr wrap="square" anchor="t">
+            <a:spAutoFit/>
+          </a:bodyPr>
+          <a:lstStyle/>
+          <a:p>
+            <a:pPr algn="l"/>
+            <a:r>
+              <a:rPr sz="2600" b="1">
+                <a:solidFill>
+                  <a:srgbClr val="0B3C5D"/>
+                </a:solidFill>
+                <a:latin typeface="Prompt"/>
+              </a:rPr>
+              <a:t>148</a:t>
+            </a:r>
+            <a:r>
+              <a:rPr sz="1100" b="0">
+                <a:solidFill>
+                  <a:srgbClr val="64748B"/>
+                </a:solidFill>
+                <a:latin typeface="Prompt"/>
+              </a:rPr>
+              <a:t>  ตร.กม.</a:t>
+            </a:r>
+          </a:p>
+        </p:txBody>
+      </p:sp>
+      <p:sp>
+        <p:nvSpPr>
+          <p:cNvPr id="33" name="TextBox 32"/>
+          <p:cNvSpPr txBox="1"/>
+          <p:nvPr/>
+        </p:nvSpPr>
+        <p:spPr>
+          <a:xfrm>
+            <a:off x="7662671" y="2139696"/>
+            <a:ext cx="1719072" cy="640080"/>
+          </a:xfrm>
+          <a:prstGeom prst="rect">
+            <a:avLst/>
+          </a:prstGeom>
+          <a:noFill/>
+        </p:spPr>
+        <p:txBody>
+          <a:bodyPr wrap="square" anchor="t">
+            <a:spAutoFit/>
+          </a:bodyPr>
+          <a:lstStyle/>
+          <a:p>
+            <a:pPr algn="l"/>
+            <a:r>
+              <a:rPr sz="1150" b="0">
+                <a:solidFill>
+                  <a:srgbClr val="1E293B"/>
+                </a:solidFill>
+                <a:latin typeface="Prompt"/>
+              </a:rPr>
+              <a:t>ขัง ≥7 วัน ฝน 250 มม. แม่น้ำปกติ</a:t>
+            </a:r>
+          </a:p>
+        </p:txBody>
+      </p:sp>
+      <p:sp>
+        <p:nvSpPr>
+          <p:cNvPr id="34" name="Rectangle 33"/>
+          <p:cNvSpPr/>
+          <p:nvPr/>
+        </p:nvSpPr>
+        <p:spPr>
+          <a:xfrm>
+            <a:off x="9646920" y="1426464"/>
+            <a:ext cx="1993392" cy="1417320"/>
+          </a:xfrm>
+          <a:prstGeom prst="rect">
+            <a:avLst/>
+          </a:prstGeom>
+          <a:solidFill>
+            <a:srgbClr val="EEF5F9"/>
+          </a:solidFill>
+          <a:ln>
+            <a:noFill/>
+          </a:ln>
+          <a:effectLst/>
+        </p:spPr>
+        <p:style>
+          <a:lnRef idx="1">
+            <a:schemeClr val="accent1"/>
+          </a:lnRef>
+          <a:fillRef idx="3">
+            <a:schemeClr val="accent1"/>
+          </a:fillRef>
+          <a:effectRef idx="2">
+            <a:schemeClr val="accent1"/>
+          </a:effectRef>
+          <a:fontRef idx="minor">
+            <a:schemeClr val="lt1"/>
+          </a:fontRef>
+        </p:style>
+        <p:txBody>
+          <a:bodyPr rtlCol="0" anchor="ctr"/>
+          <a:lstStyle/>
+          <a:p>
+            <a:pPr algn="ctr"/>
           </a:p>
         </p:txBody>
       </p:sp>
@@ -20724,8 +22305,8 @@
         </p:nvSpPr>
         <p:spPr>
           <a:xfrm>
-            <a:off x="5961888" y="5532120"/>
-            <a:ext cx="5486400" cy="685800"/>
+            <a:off x="9811512" y="1517904"/>
+            <a:ext cx="1719072" cy="640080"/>
           </a:xfrm>
           <a:prstGeom prst="rect">
             <a:avLst/>
@@ -20733,22 +22314,29 @@
           <a:noFill/>
         </p:spPr>
         <p:txBody>
-          <a:bodyPr wrap="square" lIns="0" rIns="0" tIns="0" bIns="0" anchor="t">
+          <a:bodyPr wrap="square" anchor="t">
             <a:spAutoFit/>
           </a:bodyPr>
           <a:lstStyle/>
           <a:p>
             <a:pPr algn="l"/>
             <a:r>
-              <a:rPr sz="1150" b="0" i="0">
-                <a:solidFill>
-                  <a:srgbClr val="1E293B"/>
+              <a:rPr sz="2600" b="1">
+                <a:solidFill>
+                  <a:srgbClr val="D64545"/>
                 </a:solidFill>
                 <a:latin typeface="Prompt"/>
-                <a:ea typeface="Prompt"/>
-                <a:cs typeface="Prompt"/>
-              </a:rPr>
-              <a:t>ระดับน้ำ N.67 ชุมแสงไม่ถึงตลิ่ง (28.21 ม.) เลยทั้ง 3 ปี แต่ดาวเทียมเห็นท่วม 2–3 เดือนทุกปี → น้ำเข้าผ่านคลอง ประตูน้ำ และช่องต่ำ</a:t>
+              </a:rPr>
+              <a:t>608</a:t>
+            </a:r>
+            <a:r>
+              <a:rPr sz="1100" b="0">
+                <a:solidFill>
+                  <a:srgbClr val="64748B"/>
+                </a:solidFill>
+                <a:latin typeface="Prompt"/>
+              </a:rPr>
+              <a:t>  ตร.กม.</a:t>
             </a:r>
           </a:p>
         </p:txBody>
@@ -20761,6 +22349,289 @@
         </p:nvSpPr>
         <p:spPr>
           <a:xfrm>
+            <a:off x="9811512" y="2139696"/>
+            <a:ext cx="1719072" cy="640080"/>
+          </a:xfrm>
+          <a:prstGeom prst="rect">
+            <a:avLst/>
+          </a:prstGeom>
+          <a:noFill/>
+        </p:spPr>
+        <p:txBody>
+          <a:bodyPr wrap="square" anchor="t">
+            <a:spAutoFit/>
+          </a:bodyPr>
+          <a:lstStyle/>
+          <a:p>
+            <a:pPr algn="l"/>
+            <a:r>
+              <a:rPr sz="1150" b="0">
+                <a:solidFill>
+                  <a:srgbClr val="1E293B"/>
+                </a:solidFill>
+                <a:latin typeface="Prompt"/>
+              </a:rPr>
+              <a:t>ขัง ≥7 วัน เมื่อแม่น้ำล้นตลิ่ง</a:t>
+            </a:r>
+          </a:p>
+        </p:txBody>
+      </p:sp>
+      <p:sp>
+        <p:nvSpPr>
+          <p:cNvPr id="37" name="Rectangle 36"/>
+          <p:cNvSpPr/>
+          <p:nvPr/>
+        </p:nvSpPr>
+        <p:spPr>
+          <a:xfrm>
+            <a:off x="7498079" y="3017520"/>
+            <a:ext cx="4142232" cy="1600200"/>
+          </a:xfrm>
+          <a:prstGeom prst="rect">
+            <a:avLst/>
+          </a:prstGeom>
+          <a:solidFill>
+            <a:srgbClr val="EEF5F9"/>
+          </a:solidFill>
+          <a:ln>
+            <a:noFill/>
+          </a:ln>
+          <a:effectLst/>
+        </p:spPr>
+        <p:style>
+          <a:lnRef idx="1">
+            <a:schemeClr val="accent1"/>
+          </a:lnRef>
+          <a:fillRef idx="3">
+            <a:schemeClr val="accent1"/>
+          </a:fillRef>
+          <a:effectRef idx="2">
+            <a:schemeClr val="accent1"/>
+          </a:effectRef>
+          <a:fontRef idx="minor">
+            <a:schemeClr val="lt1"/>
+          </a:fontRef>
+        </p:style>
+        <p:txBody>
+          <a:bodyPr rtlCol="0" anchor="ctr"/>
+          <a:lstStyle/>
+          <a:p>
+            <a:pPr algn="ctr"/>
+          </a:p>
+        </p:txBody>
+      </p:sp>
+      <p:sp>
+        <p:nvSpPr>
+          <p:cNvPr id="38" name="TextBox 37"/>
+          <p:cNvSpPr txBox="1"/>
+          <p:nvPr/>
+        </p:nvSpPr>
+        <p:spPr>
+          <a:xfrm>
+            <a:off x="7680959" y="3108960"/>
+            <a:ext cx="3776472" cy="365760"/>
+          </a:xfrm>
+          <a:prstGeom prst="rect">
+            <a:avLst/>
+          </a:prstGeom>
+          <a:noFill/>
+        </p:spPr>
+        <p:txBody>
+          <a:bodyPr wrap="square" anchor="t">
+            <a:spAutoFit/>
+          </a:bodyPr>
+          <a:lstStyle/>
+          <a:p>
+            <a:pPr algn="l"/>
+            <a:r>
+              <a:rPr sz="1400" b="1">
+                <a:solidFill>
+                  <a:srgbClr val="0B3C5D"/>
+                </a:solidFill>
+                <a:latin typeface="Prompt"/>
+              </a:rPr>
+              <a:t>พื้นที่ต้องเตรียมมากที่สุด</a:t>
+            </a:r>
+          </a:p>
+        </p:txBody>
+      </p:sp>
+      <p:sp>
+        <p:nvSpPr>
+          <p:cNvPr id="39" name="TextBox 38"/>
+          <p:cNvSpPr txBox="1"/>
+          <p:nvPr/>
+        </p:nvSpPr>
+        <p:spPr>
+          <a:xfrm>
+            <a:off x="7680959" y="3474720"/>
+            <a:ext cx="3776472" cy="1097280"/>
+          </a:xfrm>
+          <a:prstGeom prst="rect">
+            <a:avLst/>
+          </a:prstGeom>
+          <a:noFill/>
+        </p:spPr>
+        <p:txBody>
+          <a:bodyPr wrap="square" anchor="t">
+            <a:spAutoFit/>
+          </a:bodyPr>
+          <a:lstStyle/>
+          <a:p>
+            <a:pPr algn="l">
+              <a:spcAft>
+                <a:spcPts val="400"/>
+              </a:spcAft>
+            </a:pPr>
+            <a:r>
+              <a:rPr sz="1200" b="0">
+                <a:solidFill>
+                  <a:srgbClr val="1E293B"/>
+                </a:solidFill>
+                <a:latin typeface="Prompt"/>
+              </a:rPr>
+              <a:t>อ.เมืองนครสวรรค์ 167 · ท่าตะโก 110 · ชุมแสง 74 ตร.กม.</a:t>
+            </a:r>
+          </a:p>
+          <a:p>
+            <a:pPr algn="l">
+              <a:spcAft>
+                <a:spcPts val="400"/>
+              </a:spcAft>
+            </a:pPr>
+            <a:r>
+              <a:rPr sz="1200" b="0">
+                <a:solidFill>
+                  <a:srgbClr val="1E293B"/>
+                </a:solidFill>
+                <a:latin typeface="Prompt"/>
+              </a:rPr>
+              <a:t>ต.วังมหากร บางเคียน พระนอน ท่าตะโก เกรียงไกร</a:t>
+            </a:r>
+          </a:p>
+        </p:txBody>
+      </p:sp>
+      <p:sp>
+        <p:nvSpPr>
+          <p:cNvPr id="40" name="Rectangle 39"/>
+          <p:cNvSpPr/>
+          <p:nvPr/>
+        </p:nvSpPr>
+        <p:spPr>
+          <a:xfrm>
+            <a:off x="7498079" y="4754880"/>
+            <a:ext cx="4142232" cy="1508760"/>
+          </a:xfrm>
+          <a:prstGeom prst="rect">
+            <a:avLst/>
+          </a:prstGeom>
+          <a:solidFill>
+            <a:srgbClr val="E8F6F3"/>
+          </a:solidFill>
+          <a:ln>
+            <a:noFill/>
+          </a:ln>
+          <a:effectLst/>
+        </p:spPr>
+        <p:style>
+          <a:lnRef idx="1">
+            <a:schemeClr val="accent1"/>
+          </a:lnRef>
+          <a:fillRef idx="3">
+            <a:schemeClr val="accent1"/>
+          </a:fillRef>
+          <a:effectRef idx="2">
+            <a:schemeClr val="accent1"/>
+          </a:effectRef>
+          <a:fontRef idx="minor">
+            <a:schemeClr val="lt1"/>
+          </a:fontRef>
+        </p:style>
+        <p:txBody>
+          <a:bodyPr rtlCol="0" anchor="ctr"/>
+          <a:lstStyle/>
+          <a:p>
+            <a:pPr algn="ctr"/>
+          </a:p>
+        </p:txBody>
+      </p:sp>
+      <p:sp>
+        <p:nvSpPr>
+          <p:cNvPr id="41" name="TextBox 40"/>
+          <p:cNvSpPr txBox="1"/>
+          <p:nvPr/>
+        </p:nvSpPr>
+        <p:spPr>
+          <a:xfrm>
+            <a:off x="7680959" y="4846320"/>
+            <a:ext cx="3776472" cy="365760"/>
+          </a:xfrm>
+          <a:prstGeom prst="rect">
+            <a:avLst/>
+          </a:prstGeom>
+          <a:noFill/>
+        </p:spPr>
+        <p:txBody>
+          <a:bodyPr wrap="square" anchor="t">
+            <a:spAutoFit/>
+          </a:bodyPr>
+          <a:lstStyle/>
+          <a:p>
+            <a:pPr algn="l"/>
+            <a:r>
+              <a:rPr sz="1400" b="1">
+                <a:solidFill>
+                  <a:srgbClr val="0B3C5D"/>
+                </a:solidFill>
+                <a:latin typeface="Prompt"/>
+              </a:rPr>
+              <a:t>พยากรณ์ 72 ชม. ทั้งจังหวัด</a:t>
+            </a:r>
+          </a:p>
+        </p:txBody>
+      </p:sp>
+      <p:sp>
+        <p:nvSpPr>
+          <p:cNvPr id="42" name="TextBox 41"/>
+          <p:cNvSpPr txBox="1"/>
+          <p:nvPr/>
+        </p:nvSpPr>
+        <p:spPr>
+          <a:xfrm>
+            <a:off x="7680959" y="5212080"/>
+            <a:ext cx="3776472" cy="1005839"/>
+          </a:xfrm>
+          <a:prstGeom prst="rect">
+            <a:avLst/>
+          </a:prstGeom>
+          <a:noFill/>
+        </p:spPr>
+        <p:txBody>
+          <a:bodyPr wrap="square" anchor="t">
+            <a:spAutoFit/>
+          </a:bodyPr>
+          <a:lstStyle/>
+          <a:p>
+            <a:pPr algn="l"/>
+            <a:r>
+              <a:rPr sz="1200" b="0">
+                <a:solidFill>
+                  <a:srgbClr val="1E293B"/>
+                </a:solidFill>
+                <a:latin typeface="Prompt"/>
+              </a:rPr>
+              <a:t>รันอัตโนมัติวันละ 4 รอบ ใช้เวลาราว 9 นาทีต่อรอบ แสดงในเว็บแท็บ 2D “ทั้งจังหวัด”</a:t>
+            </a:r>
+          </a:p>
+        </p:txBody>
+      </p:sp>
+      <p:sp>
+        <p:nvSpPr>
+          <p:cNvPr id="43" name="TextBox 42"/>
+          <p:cNvSpPr txBox="1"/>
+          <p:nvPr/>
+        </p:nvSpPr>
+        <p:spPr>
+          <a:xfrm>
             <a:off x="548640" y="6400800"/>
             <a:ext cx="10332720" cy="274320"/>
           </a:xfrm>
@@ -20770,22 +22641,20 @@
           <a:noFill/>
         </p:spPr>
         <p:txBody>
-          <a:bodyPr wrap="square" lIns="0" rIns="0" tIns="0" bIns="0" anchor="t">
+          <a:bodyPr wrap="square" anchor="t">
             <a:spAutoFit/>
           </a:bodyPr>
           <a:lstStyle/>
           <a:p>
             <a:pPr algn="l"/>
             <a:r>
-              <a:rPr sz="900" b="0" i="0">
+              <a:rPr sz="900" b="0">
                 <a:solidFill>
                   <a:srgbClr val="64748B"/>
                 </a:solidFill>
                 <a:latin typeface="Prompt"/>
-                <a:ea typeface="Prompt"/>
-                <a:cs typeface="Prompt"/>
-              </a:rPr>
-              <a:t>แบบจำลอง 2D 300 ม. ใช้ระดับน้ำจริงรายชั่วโมง Y.5 / N.67 / C.2 (ThaiWater) + ฝน ERA5 ช่วง 20 ส.ค.–15 ธ.ค. · CSI = พื้นที่ตรงกัน ÷ (ตรงกัน + ขาด + เกิน)</a:t>
+              </a:rPr>
+              <a:t>สถานการณ์สมมติเพื่อวางแผน ไม่ใช่พยากรณ์ · scenario_prov.py ชุดพารามิเตอร์เดียวกับที่สอบเทียบกับ Sentinel-1</a:t>
             </a:r>
           </a:p>
         </p:txBody>
@@ -20926,6 +22795,10 @@
             <a:prstDash val="solid"/>
           </a:ln>
         </p:spPr>
+        <p:txBody>
+          <a:bodyPr/>
+          <a:p/>
+        </p:txBody>
       </p:sp>
       <p:sp>
         <p:nvSpPr>
@@ -21045,6 +22918,10 @@
             <a:prstDash val="solid"/>
           </a:ln>
         </p:spPr>
+        <p:txBody>
+          <a:bodyPr/>
+          <a:p/>
+        </p:txBody>
       </p:sp>
       <p:sp>
         <p:nvSpPr>
@@ -21164,6 +23041,10 @@
             <a:prstDash val="solid"/>
           </a:ln>
         </p:spPr>
+        <p:txBody>
+          <a:bodyPr/>
+          <a:p/>
+        </p:txBody>
       </p:sp>
       <p:sp>
         <p:nvSpPr>
@@ -21283,6 +23164,10 @@
             <a:prstDash val="solid"/>
           </a:ln>
         </p:spPr>
+        <p:txBody>
+          <a:bodyPr/>
+          <a:p/>
+        </p:txBody>
       </p:sp>
       <p:sp>
         <p:nvSpPr>
@@ -21391,6 +23276,10 @@
             <a:prstDash val="solid"/>
           </a:ln>
         </p:spPr>
+        <p:txBody>
+          <a:bodyPr/>
+          <a:p/>
+        </p:txBody>
       </p:sp>
       <p:sp>
         <p:nvSpPr>
@@ -21499,6 +23388,10 @@
             <a:prstDash val="solid"/>
           </a:ln>
         </p:spPr>
+        <p:txBody>
+          <a:bodyPr/>
+          <a:p/>
+        </p:txBody>
       </p:sp>
       <p:sp>
         <p:nvSpPr>
@@ -21618,6 +23511,10 @@
             <a:prstDash val="solid"/>
           </a:ln>
         </p:spPr>
+        <p:txBody>
+          <a:bodyPr/>
+          <a:p/>
+        </p:txBody>
       </p:sp>
       <p:sp>
         <p:nvSpPr>
@@ -21894,6 +23791,10 @@
             </a:outerShdw>
           </a:effectLst>
         </p:spPr>
+        <p:txBody>
+          <a:bodyPr/>
+          <a:p/>
+        </p:txBody>
       </p:sp>
       <p:pic>
         <p:nvPicPr>
@@ -21942,6 +23843,10 @@
             <a:prstDash val="solid"/>
           </a:ln>
         </p:spPr>
+        <p:txBody>
+          <a:bodyPr/>
+          <a:p/>
+        </p:txBody>
       </p:sp>
       <p:sp>
         <p:nvSpPr>
@@ -22062,6 +23967,10 @@
             <a:prstDash val="solid"/>
           </a:ln>
         </p:spPr>
+        <p:txBody>
+          <a:bodyPr/>
+          <a:p/>
+        </p:txBody>
       </p:sp>
       <p:sp>
         <p:nvSpPr>
@@ -22182,6 +24091,10 @@
             <a:prstDash val="solid"/>
           </a:ln>
         </p:spPr>
+        <p:txBody>
+          <a:bodyPr/>
+          <a:p/>
+        </p:txBody>
       </p:sp>
       <p:sp>
         <p:nvSpPr>
@@ -22302,6 +24215,10 @@
             <a:prstDash val="solid"/>
           </a:ln>
         </p:spPr>
+        <p:txBody>
+          <a:bodyPr/>
+          <a:p/>
+        </p:txBody>
       </p:sp>
       <p:sp>
         <p:nvSpPr>
@@ -22422,6 +24339,10 @@
             <a:prstDash val="solid"/>
           </a:ln>
         </p:spPr>
+        <p:txBody>
+          <a:bodyPr/>
+          <a:p/>
+        </p:txBody>
       </p:sp>
       <p:sp>
         <p:nvSpPr>
@@ -22757,6 +24678,10 @@
             <a:prstDash val="solid"/>
           </a:ln>
         </p:spPr>
+        <p:txBody>
+          <a:bodyPr/>
+          <a:p/>
+        </p:txBody>
       </p:sp>
       <p:sp>
         <p:nvSpPr>
@@ -23115,6 +25040,10 @@
             <a:prstDash val="solid"/>
           </a:ln>
         </p:spPr>
+        <p:txBody>
+          <a:bodyPr/>
+          <a:p/>
+        </p:txBody>
       </p:sp>
       <p:sp>
         <p:nvSpPr>
@@ -23223,6 +25152,10 @@
             <a:prstDash val="solid"/>
           </a:ln>
         </p:spPr>
+        <p:txBody>
+          <a:bodyPr/>
+          <a:p/>
+        </p:txBody>
       </p:sp>
       <p:sp>
         <p:nvSpPr>
@@ -23331,6 +25264,10 @@
             <a:prstDash val="solid"/>
           </a:ln>
         </p:spPr>
+        <p:txBody>
+          <a:bodyPr/>
+          <a:p/>
+        </p:txBody>
       </p:sp>
       <p:sp>
         <p:nvSpPr>
@@ -23652,6 +25589,10 @@
             <a:prstDash val="solid"/>
           </a:ln>
         </p:spPr>
+        <p:txBody>
+          <a:bodyPr/>
+          <a:p/>
+        </p:txBody>
       </p:sp>
       <p:sp>
         <p:nvSpPr>
@@ -23813,6 +25754,10 @@
             <a:prstDash val="solid"/>
           </a:ln>
         </p:spPr>
+        <p:txBody>
+          <a:bodyPr/>
+          <a:p/>
+        </p:txBody>
       </p:sp>
       <p:sp>
         <p:nvSpPr>
@@ -23974,6 +25919,10 @@
             <a:prstDash val="solid"/>
           </a:ln>
         </p:spPr>
+        <p:txBody>
+          <a:bodyPr/>
+          <a:p/>
+        </p:txBody>
       </p:sp>
       <p:sp>
         <p:nvSpPr>
@@ -24135,6 +26084,10 @@
             <a:prstDash val="solid"/>
           </a:ln>
         </p:spPr>
+        <p:txBody>
+          <a:bodyPr/>
+          <a:p/>
+        </p:txBody>
       </p:sp>
       <p:sp>
         <p:nvSpPr>
@@ -24509,6 +26462,10 @@
             <a:prstDash val="solid"/>
           </a:ln>
         </p:spPr>
+        <p:txBody>
+          <a:bodyPr/>
+          <a:p/>
+        </p:txBody>
       </p:sp>
       <p:sp>
         <p:nvSpPr>
@@ -24875,6 +26832,10 @@
             <a:prstDash val="solid"/>
           </a:ln>
         </p:spPr>
+        <p:txBody>
+          <a:bodyPr/>
+          <a:p/>
+        </p:txBody>
       </p:sp>
       <p:sp>
         <p:nvSpPr>
@@ -24900,6 +26861,10 @@
             <a:prstDash val="solid"/>
           </a:ln>
         </p:spPr>
+        <p:txBody>
+          <a:bodyPr/>
+          <a:p/>
+        </p:txBody>
       </p:sp>
       <p:sp>
         <p:nvSpPr>
@@ -25105,6 +27070,10 @@
             <a:prstDash val="solid"/>
           </a:ln>
         </p:spPr>
+        <p:txBody>
+          <a:bodyPr/>
+          <a:p/>
+        </p:txBody>
       </p:sp>
       <p:sp>
         <p:nvSpPr>
@@ -25132,6 +27101,10 @@
             <a:prstDash val="solid"/>
           </a:ln>
         </p:spPr>
+        <p:txBody>
+          <a:bodyPr/>
+          <a:p/>
+        </p:txBody>
       </p:sp>
       <p:sp>
         <p:nvSpPr>
@@ -25157,6 +27130,10 @@
             <a:prstDash val="solid"/>
           </a:ln>
         </p:spPr>
+        <p:txBody>
+          <a:bodyPr/>
+          <a:p/>
+        </p:txBody>
       </p:sp>
       <p:sp>
         <p:nvSpPr>
@@ -25342,6 +27319,10 @@
             <a:prstDash val="solid"/>
           </a:ln>
         </p:spPr>
+        <p:txBody>
+          <a:bodyPr/>
+          <a:p/>
+        </p:txBody>
       </p:sp>
       <p:sp>
         <p:nvSpPr>
@@ -25369,6 +27350,10 @@
             <a:prstDash val="solid"/>
           </a:ln>
         </p:spPr>
+        <p:txBody>
+          <a:bodyPr/>
+          <a:p/>
+        </p:txBody>
       </p:sp>
       <p:sp>
         <p:nvSpPr>
@@ -25394,6 +27379,10 @@
             <a:prstDash val="solid"/>
           </a:ln>
         </p:spPr>
+        <p:txBody>
+          <a:bodyPr/>
+          <a:p/>
+        </p:txBody>
       </p:sp>
       <p:sp>
         <p:nvSpPr>
@@ -25579,6 +27568,10 @@
             <a:prstDash val="solid"/>
           </a:ln>
         </p:spPr>
+        <p:txBody>
+          <a:bodyPr/>
+          <a:p/>
+        </p:txBody>
       </p:sp>
       <p:sp>
         <p:nvSpPr>
@@ -25606,6 +27599,10 @@
             <a:prstDash val="solid"/>
           </a:ln>
         </p:spPr>
+        <p:txBody>
+          <a:bodyPr/>
+          <a:p/>
+        </p:txBody>
       </p:sp>
       <p:sp>
         <p:nvSpPr>
@@ -25631,6 +27628,10 @@
             <a:prstDash val="solid"/>
           </a:ln>
         </p:spPr>
+        <p:txBody>
+          <a:bodyPr/>
+          <a:p/>
+        </p:txBody>
       </p:sp>
       <p:sp>
         <p:nvSpPr>
@@ -25818,6 +27819,10 @@
             <a:prstDash val="solid"/>
           </a:ln>
         </p:spPr>
+        <p:txBody>
+          <a:bodyPr/>
+          <a:p/>
+        </p:txBody>
       </p:sp>
       <p:sp>
         <p:nvSpPr>
@@ -25929,6 +27934,10 @@
             <a:prstDash val="solid"/>
           </a:ln>
         </p:spPr>
+        <p:txBody>
+          <a:bodyPr/>
+          <a:p/>
+        </p:txBody>
       </p:sp>
       <p:sp>
         <p:nvSpPr>
